--- a/slides/talk-legged/talk-legged.pptx
+++ b/slides/talk-legged/talk-legged.pptx
@@ -42,6 +42,7 @@
     <p:sldId id="290" r:id="rId42"/>
     <p:sldId id="291" r:id="rId43"/>
     <p:sldId id="292" r:id="rId44"/>
+    <p:sldId id="293" r:id="rId45"/>
   </p:sldIdLst>
   <p:sldSz cx="12192000" cy="6858000" type="screen4x3"/>
   <p:notesSz cx="6858000" cy="9144000"/>
@@ -1588,7 +1589,7 @@
           <a:lstStyle/>
           <a:p>
             <a:r>
-              <a:t>세 연구는 투영하는 곳이 다르다. PADP는 관절 행동을 동역학이 맞는 변수로, CMP는 위험한 잠재 명령을 정책이 해낼 수 있는 구 안으로, FIBER는 따로 배운 기술을 공통 잠재로 옮긴다. travplan에 대면 PADP의 자리가 가장 급하다. 다만 스워브의 실행 가능 집합은 볼록이 아니어서, 현재 조향각 둘레에서 선형화한 QP를 매 주기 풀어야 한다. 투영은 바로 다음 명령만 고치므로, 조향 한계를 rollout에 넣는 mppi_plant_steer와 함께 비교해야 한다. 실제 조향 한계(TP-0163)가 정해지기 전에는 시험할 수 없다.</a:t>
+              <a:t>프로젝트 페이지의 실물 배포다. 사람은 늘 평지에 서 있고, 로봇만 계단과 대 위에 있다. 학습 지형은 10 cm 계단과 약 16.7도 경사뿐이었는데, 실물에서는 그보다 높은 15 cm 계단과 30도 가까운 풀밭 경사를 미세 조정 없이 지났다. 넘어진 것은 60 cm 대에서 내려오거나 옆돌기를 하는 일부 시도이고, 시도 횟수는 밝히지 않았다. 주행 관점에서 중요한 점은 위 층이 사람이라는 것이다. 어디로 갈지는 사람이 정하고, 정책은 그 동작을 지형에 맞출 뿐이다. 저자는 이 추종기를 과제 수준 Planner에 잇는 것을 다음 과제로 꼽고, 지형에 맞춘 원격조종 기록을 자율 행동의 시연으로 쓸 수 있다고 적었다. travplan에서는 실물 시험에서 사람이 원격으로 몬 구간을 Planner D의 DAgger 시연에 더하는 판이 같은 자리다. 실물 시험 전이라 아직 기록은 없다.</a:t>
             </a:r>
           </a:p>
         </p:txBody>
@@ -1658,7 +1659,7 @@
           <a:lstStyle/>
           <a:p>
             <a:r>
-              <a:t>다섯 번째 장은 여러 층을 엮어 긴 작업을 끝까지 하는 시스템이다. 단계가 많아지면 단계 신뢰도가 곱해져 빠르게 떨어진다. 그래서 두 회사 모두 재시도와 재계획을 층마다 둔다.</a:t>
+              <a:t>세 연구는 투영하는 곳이 다르다. PADP는 관절 행동을 동역학이 맞는 변수로, CMP는 위험한 잠재 명령을 정책이 해낼 수 있는 구 안으로, FIBER는 따로 배운 기술을 공통 잠재로 옮긴다. travplan에 대면 PADP의 자리가 가장 급하다. 다만 스워브의 실행 가능 집합은 볼록이 아니어서, 현재 조향각 둘레에서 선형화한 QP를 매 주기 풀어야 한다. 투영은 바로 다음 명령만 고치므로, 조향 한계를 rollout에 넣는 mppi_plant_steer와 함께 비교해야 한다. 실제 조향 한계(TP-0163)가 정해지기 전에는 시험할 수 없다.</a:t>
             </a:r>
           </a:p>
         </p:txBody>
@@ -1728,7 +1729,7 @@
           <a:lstStyle/>
           <a:p>
             <a:r>
-              <a:t>Flexion은 legged_gym과 Isaac Lab을 만든 사람들이 취리히에 세운 휴머노이드 소프트웨어 회사다. Reflect v1.0의 새로운 점은 RL을 운동 기술에만 쓰지 않고 맨 위 임무 VLM까지 넓힌 것이다. 기성 VLM은 앞 도구 호출이 끝났는지 눈으로 확인하지 않고 그럴듯한 다음 호출을 내는 버릇이 있어서, 이를 RL로 고쳤다고 적었다. 실패는 두 단에서 받는다. 운동 층이 배운 복구 동작으로 먼저 다시 하고, 안 되면 VLM이 다시 계획한다.</a:t>
+              <a:t>다섯 번째 장은 여러 층을 엮어 긴 작업을 끝까지 하는 시스템이다. 단계가 많아지면 단계 신뢰도가 곱해져 빠르게 떨어진다. 그래서 두 회사 모두 재시도와 재계획을 층마다 둔다.</a:t>
             </a:r>
           </a:p>
         </p:txBody>
@@ -1798,7 +1799,7 @@
           <a:lstStyle/>
           <a:p>
             <a:r>
-              <a:t>곡선이 흥미롭다. 에피소드 성공률 하나 대신 단계마다 살아남은 비율을 그렸다. 기본 VLM은 거의 바로 실패하고, SFT는 앞 몇 단계에서 크게 떨어진다. RL을 더하면 끝까지 90 %가 남는다. 다만 회사 발표라 시도 수도, 평가 환경도 모른다. travplan에서 같은 곡선은 배달 경로의 구간별로 그릴 수 있다. 두 단 복구는 Guidance 폴백과 같은 구조다. 매 스텝 재계획이 운동 층의 재시도에, 치명 표본이 이어질 때 Guidance로 바꾸는 것이 VLM의 재계획에 해당한다.</a:t>
+              <a:t>Flexion은 legged_gym과 Isaac Lab을 만든 사람들이 취리히에 세운 휴머노이드 소프트웨어 회사다. Reflect v1.0의 새로운 점은 RL을 운동 기술에만 쓰지 않고 맨 위 임무 VLM까지 넓힌 것이다. 기성 VLM은 앞 도구 호출이 끝났는지 눈으로 확인하지 않고 그럴듯한 다음 호출을 내는 버릇이 있어서, 이를 RL로 고쳤다고 적었다. 실패는 두 단에서 받는다. 운동 층이 배운 복구 동작으로 먼저 다시 하고, 안 되면 VLM이 다시 계획한다.</a:t>
             </a:r>
           </a:p>
         </p:txBody>
@@ -1868,7 +1869,7 @@
           <a:lstStyle/>
           <a:p>
             <a:r>
-              <a:t>Dyna Robotics의 Taku는 휴머노이드는 아니지만, 조향 바퀴 네 개로 된 바닥이 travplan 로봇과 같아서 넣었다. 층 나누기는 Flexion과 비슷하다. 맨 위가 작업 흐름을 정하고, 가운데 행동 모델이 궤적을 내고, 맨 아래 전신 제어기가 따른다. 이 발표의 논지는 단계 신뢰도다. 79단계 작업에서 단계마다 95 %면 0.95의 79제곱이 약 1.7 %라, 긴 작업에는 단계 신뢰도가 거의 1이어야 한다. 배달 경로의 연석과 횡단보도도 단계로 볼 수 있다.</a:t>
+              <a:t>곡선이 흥미롭다. 에피소드 성공률 하나 대신 단계마다 살아남은 비율을 그렸다. 기본 VLM은 거의 바로 실패하고, SFT는 앞 몇 단계에서 크게 떨어진다. RL을 더하면 끝까지 90 %가 남는다. 다만 회사 발표라 시도 수도, 평가 환경도 모른다. travplan에서 같은 곡선은 배달 경로의 구간별로 그릴 수 있다. 두 단 복구는 Guidance 폴백과 같은 구조다. 매 스텝 재계획이 운동 층의 재시도에, 치명 표본이 이어질 때 Guidance로 바꾸는 것이 VLM의 재계획에 해당한다.</a:t>
             </a:r>
           </a:p>
         </p:txBody>
@@ -1938,7 +1939,7 @@
           <a:lstStyle/>
           <a:p>
             <a:r>
-              <a:t>여섯 번째 장은 비교다. 첫 표는 내비와 지형 인식 쪽, 둘째 표는 전신 제어와 장시간 자율 쪽이다.</a:t>
+              <a:t>Dyna Robotics의 Taku는 휴머노이드는 아니지만, 조향 바퀴 네 개로 된 바닥이 travplan 로봇과 같아서 넣었다. 층 나누기는 Flexion과 비슷하다. 맨 위가 작업 흐름을 정하고, 가운데 행동 모델이 궤적을 내고, 맨 아래 전신 제어기가 따른다. 이 발표의 논지는 단계 신뢰도다. 79단계 작업에서 단계마다 95 %면 0.95의 79제곱이 약 1.7 %라, 긴 작업에는 단계 신뢰도가 거의 1이어야 한다. 배달 경로의 연석과 횡단보도도 단계로 볼 수 있다.</a:t>
             </a:r>
           </a:p>
         </p:txBody>
@@ -2008,7 +2009,7 @@
           <a:lstStyle/>
           <a:p>
             <a:r>
-              <a:t>첫 표는 내비와 지형 인식이다. 넘기는 것은 대부분 속도 쪽이고, 휴머노이드에서도 내비 층과 보행 층의 경계는 속도 명령인 경우가 많다. 지형 입력은 LiDAR, 높이 지도, 깊이 영상으로 갈린다. 수치는 각 논문이 고른 조건의 것이라 서로 견줄 수 없다.</a:t>
+              <a:t>여섯 번째 장은 비교다. 첫 표는 내비와 지형 인식 쪽, 둘째 표는 전신 제어와 장시간 자율 쪽이다.</a:t>
             </a:r>
           </a:p>
         </p:txBody>
@@ -2148,7 +2149,7 @@
           <a:lstStyle/>
           <a:p>
             <a:r>
-              <a:t>둘째 표는 전신 제어와 장시간 자율이다. 대부분 사람 동작이나 영상에서 시작한다. 연구의 차이는 사람 데이터와 로봇의 실제 실행 사이의 틈을 어디서 메우느냐다. PASSAGE는 계획기에서, NEXUS는 추종기에서, CMP는 투영에서, Flexion과 Dyna는 층마다의 RL과 재계획에서 메운다. 회사 발표 수치는 독립 검증이 없다.</a:t>
+              <a:t>첫 표는 내비와 지형 인식이다. 넘기는 것은 대부분 속도 쪽이고, 휴머노이드에서도 내비 층과 보행 층의 경계는 속도 명령인 경우가 많다. 지형 입력은 LiDAR, 높이 지도, 깊이 영상으로 갈린다. 수치는 각 논문이 고른 조건의 것이라 서로 견줄 수 없다.</a:t>
             </a:r>
           </a:p>
         </p:txBody>
@@ -2218,7 +2219,7 @@
           <a:lstStyle/>
           <a:p>
             <a:r>
-              <a:t>공통점은 둘이다. 정답을 보는 교사를 배포 관측만 보는 학생으로 옮기는 증류, 그리고 층을 나눈 뒤 그 사이를 맞추는 일이다. 차이도 둘이다. 경계를 어디에 두느냐와 결과를 얼마나 깊이 검증했느냐다. 회사 발표와 반복 실물 시험은 같은 무게로 읽지 않는다.</a:t>
+              <a:t>둘째 표는 전신 제어와 장시간 자율이다. 대부분 사람 동작이나 영상에서 시작한다. 연구의 차이는 사람 데이터와 로봇의 실제 실행 사이의 틈을 어디서 메우느냐다. PASSAGE는 계획기에서, NEXUS는 추종기에서, CMP는 투영에서, Flexion과 Dyna는 층마다의 RL과 재계획에서 메운다. 회사 발표 수치는 독립 검증이 없다.</a:t>
             </a:r>
           </a:p>
         </p:txBody>
@@ -2288,7 +2289,7 @@
           <a:lstStyle/>
           <a:p>
             <a:r>
-              <a:t>마지막 장은 travplan으로 돌아온다. 앞의 두 질문에 travplan의 지금 상태를 대 보고, 가져올 순서와 다음 시험을 정한다.</a:t>
+              <a:t>공통점은 둘이다. 정답을 보는 교사를 배포 관측만 보는 학생으로 옮기는 증류, 그리고 층을 나눈 뒤 그 사이를 맞추는 일이다. 차이도 둘이다. 경계를 어디에 두느냐와 결과를 얼마나 깊이 검증했느냐다. 회사 발표와 반복 실물 시험은 같은 무게로 읽지 않는다.</a:t>
             </a:r>
           </a:p>
         </p:txBody>
@@ -2358,7 +2359,7 @@
           <a:lstStyle/>
           <a:p>
             <a:r>
-              <a:t>travplan을 세 질문에 대 본다. 넘기는 것은 4초 궤적이고, 아래 층의 지연을 MPPI rollout에 넣은 것이 이미 큰 효과를 냈다. 해낼 수 있느냐는 조향 한계가 모자란 자리다. 보는 것은 학습 Controller의 관측 모양이 논문의 가장 나쁜 기준선과 같다는 점이다. 그림은 Playground의 휴머노이드다. GR00T식 분리형 전신 제어 위에 MPPI를 앉히면, MPPI가 하체의 지연을 알아야 한다는 것을 TP-0135에서 확인했다.</a:t>
+              <a:t>마지막 장은 travplan으로 돌아온다. 앞의 두 질문에 travplan의 지금 상태를 대 보고, 가져올 순서와 다음 시험을 정한다.</a:t>
             </a:r>
           </a:p>
         </p:txBody>
@@ -2428,7 +2429,7 @@
           <a:lstStyle/>
           <a:p>
             <a:r>
-              <a:t>B.16.7은 B.16 전체에서 travplan이 가져올 것을 열 개로 놓았다. 이 발표에서 본 연구와 닿는 여섯을 뽑았다. 번호는 문서의 번호 그대로다. 1번과 4번은 이 발표의 교사–학생과 실패 구간 표집이 바로 쓰이는 자리이고, 7번은 CMU 스택에서 본 "아래 층의 응답을 재서 위 층에 넣는다"는 일이다.</a:t>
+              <a:t>travplan을 세 질문에 대 본다. 넘기는 것은 4초 궤적이고, 아래 층의 지연을 MPPI rollout에 넣은 것이 이미 큰 효과를 냈다. 해낼 수 있느냐는 조향 한계가 모자란 자리다. 보는 것은 학습 Controller의 관측 모양이 논문의 가장 나쁜 기준선과 같다는 점이다. 그림은 Playground의 휴머노이드다. GR00T식 분리형 전신 제어 위에 MPPI를 앉히면, MPPI가 하체의 지연을 알아야 한다는 것을 TP-0135에서 확인했다.</a:t>
             </a:r>
           </a:p>
         </p:txBody>
@@ -2498,7 +2499,7 @@
           <a:lstStyle/>
           <a:p>
             <a:r>
-              <a:t>다음 시험 넷이다. 1번은 학습 Controller의 관측만 바꾸므로 가장 싸다. 2번은 폴백의 반대 방향을 시험한다. 3번은 남은 정면 충돌을 겨누지만 실제 조향 한계가 정해져야 한다. 4번은 새 실험이 아니라 평가 방식이라, 지금의 벤치마크 기록으로 바로 그릴 수 있다. 무엇을 하든 판정은 travplan의 짝 비교와 치명 원칙을 따른다.</a:t>
+              <a:t>B.16.7은 B.16 전체에서 travplan이 가져올 것을 열 개로 놓았다. 이 발표에서 본 연구와 닿는 여섯을 뽑았다. 번호는 문서의 번호 그대로다. 1번과 4번은 이 발표의 교사–학생과 실패 구간 표집이 바로 쓰이는 자리이고, 7번은 CMU 스택에서 본 "아래 층의 응답을 재서 위 층에 넣는다"는 일이다.</a:t>
             </a:r>
           </a:p>
         </p:txBody>
@@ -2568,7 +2569,7 @@
           <a:lstStyle/>
           <a:p>
             <a:r>
-              <a:t>요점은 세 줄이다. 경계를 어디에 두느냐, 그 경계를 넘어온 명령을 아래 층이 해낼 수 있느냐, 정책이 어디를 보느냐다. travplan은 첫째에서 이미 성과가 있고, 둘째에서 조향 한계라는 구멍이 있고, 셋째에서 학습 Controller의 관측을 바꿀 여지가 있다. 오른쪽 순서로 문서를 읽으면 이 발표의 근거를 모두 따라갈 수 있다.</a:t>
+              <a:t>다음 시험 넷이다. 1번은 학습 Controller의 관측만 바꾸므로 가장 싸다. 2번은 폴백의 반대 방향을 시험한다. 3번은 남은 정면 충돌을 겨누지만 실제 조향 한계가 정해져야 한다. 4번은 새 실험이 아니라 평가 방식이라, 지금의 벤치마크 기록으로 바로 그릴 수 있다. 무엇을 하든 판정은 travplan의 짝 비교와 치명 원칙을 따른다.</a:t>
             </a:r>
           </a:p>
         </p:txBody>
@@ -2638,6 +2639,76 @@
           <a:lstStyle/>
           <a:p>
             <a:r>
+              <a:t>요점은 세 줄이다. 경계를 어디에 두느냐, 그 경계를 넘어온 명령을 아래 층이 해낼 수 있느냐, 정책이 어디를 보느냐다. travplan은 첫째에서 이미 성과가 있고, 둘째에서 조향 한계라는 구멍이 있고, 셋째에서 학습 Controller의 관측을 바꿀 여지가 있다. 오른쪽 순서로 문서를 읽으면 이 발표의 근거를 모두 따라갈 수 있다.</a:t>
+            </a:r>
+          </a:p>
+        </p:txBody>
+      </p:sp>
+      <p:sp>
+        <p:nvSpPr>
+          <p:cNvPr id="4" name="Slide Number Placeholder 3"/>
+          <p:cNvSpPr>
+            <a:spLocks noGrp="1"/>
+          </p:cNvSpPr>
+          <p:nvPr>
+            <p:ph type="sldNum" idx="5" sz="quarter"/>
+          </p:nvPr>
+        </p:nvSpPr>
+        <p:spPr/>
+      </p:sp>
+    </p:spTree>
+  </p:cSld>
+  <p:clrMapOvr>
+    <a:masterClrMapping/>
+  </p:clrMapOvr>
+</p:notes>
+</file>
+
+<file path=ppt/notesSlides/notesSlide38.xml><?xml version="1.0" encoding="utf-8"?>
+<p:notes xmlns:a="http://schemas.openxmlformats.org/drawingml/2006/main" xmlns:p="http://schemas.openxmlformats.org/presentationml/2006/main" xmlns:r="http://schemas.openxmlformats.org/officeDocument/2006/relationships">
+  <p:cSld>
+    <p:spTree>
+      <p:nvGrpSpPr>
+        <p:cNvPr id="1" name=""/>
+        <p:cNvGrpSpPr/>
+        <p:nvPr/>
+      </p:nvGrpSpPr>
+      <p:grpSpPr>
+        <a:xfrm>
+          <a:off x="0" y="0"/>
+          <a:ext cx="0" cy="0"/>
+          <a:chOff x="0" y="0"/>
+          <a:chExt cx="0" cy="0"/>
+        </a:xfrm>
+      </p:grpSpPr>
+      <p:sp>
+        <p:nvSpPr>
+          <p:cNvPr id="2" name="Slide Image Placeholder 1"/>
+          <p:cNvSpPr>
+            <a:spLocks noGrp="1"/>
+          </p:cNvSpPr>
+          <p:nvPr>
+            <p:ph type="sldImg" idx="2"/>
+          </p:nvPr>
+        </p:nvSpPr>
+        <p:spPr/>
+      </p:sp>
+      <p:sp>
+        <p:nvSpPr>
+          <p:cNvPr id="3" name="Notes Placeholder 2"/>
+          <p:cNvSpPr>
+            <a:spLocks noGrp="1"/>
+          </p:cNvSpPr>
+          <p:nvPr>
+            <p:ph type="body" idx="3" sz="quarter"/>
+          </p:nvPr>
+        </p:nvSpPr>
+        <p:spPr/>
+        <p:txBody>
+          <a:bodyPr/>
+          <a:lstStyle/>
+          <a:p>
+            <a:r>
               <a:t>번호는 arXiv 번호다. 회사 발표는 블로그 날짜를 적었다. 학회와 저자는 리서치 문서에 확인된 것만 적었고, 문서에 "확인하지 못했다"고 적힌 항목은 여기서도 쓰지 않았다. travplan 결과의 근거는 STATE.md와 TP 원장, Planner 문서 B.15다.</a:t>
             </a:r>
           </a:p>
@@ -2988,7 +3059,7 @@
           <a:lstStyle/>
           <a:p>
             <a:r>
-              <a:t>표는 B.16.8의 네 연구를 경계가 높은 순서로 놓았다. CMU 스택은 몸체가 달라도 차체 속도와 yaw rate만 넘긴다. LP-NavOA는 얼린 보행 정책의 진행 방향 명령 하나만 덮어쓴다. FocusNav는 waypoint를 정책 안에서 예측하고 그 둘레만 본다. GLAD와 End-to-End는 경계를 없앴다. travplan은 4초 궤적을 넘기므로 표의 맨 위다. LP-NavOA식으로 하면 Planner D의 궤적은 두고 진행 방향만 Guidance 쪽으로 돌리는 판이 가능하다. 아직 시험하지 않았다.</a:t>
+              <a:t>표는 B.16.8의 연구를 경계가 높은 순서로 놓았다. CMU 스택은 몸체가 달라도 차체 속도와 yaw rate만 넘긴다. LP-NavOA는 얼린 보행 정책의 진행 방향 명령 하나만 덮어쓴다. FocusNav는 waypoint를 정책 안에서 예측하고 그 둘레만 본다. GLAD와 End-to-End는 경계를 없앴다. 맨 아래 NEXUS는 축이 다르다. 위 층인 사람이 전신 동작을 통째로 넘기지만 지형 정보는 없고, 지형은 아래 층의 깊이 영상만 본다. travplan은 4초 궤적을 넘기므로 표의 맨 위다. LP-NavOA식으로 하면 Planner D의 궤적은 두고 진행 방향만 Guidance 쪽으로 돌리는 판이 가능하다. 아직 시험하지 않았다.</a:t>
             </a:r>
           </a:p>
         </p:txBody>
@@ -18858,6 +18929,916 @@
                 <a:ea typeface="Malgun Gothic"/>
                 <a:cs typeface="Malgun Gothic"/>
               </a:rPr>
+              <a:t>B.16.8 · NEXUS 실물 배포</a:t>
+            </a:r>
+          </a:p>
+        </p:txBody>
+      </p:sp>
+      <p:sp>
+        <p:nvSpPr>
+          <p:cNvPr id="3" name="TextBox 2"/>
+          <p:cNvSpPr txBox="1"/>
+          <p:nvPr/>
+        </p:nvSpPr>
+        <p:spPr>
+          <a:xfrm>
+            <a:off x="711200" y="781050"/>
+            <a:ext cx="11118088" cy="554335"/>
+          </a:xfrm>
+          <a:prstGeom prst="rect">
+            <a:avLst/>
+          </a:prstGeom>
+          <a:noFill/>
+        </p:spPr>
+        <p:txBody>
+          <a:bodyPr wrap="square" lIns="0" rIns="0" tIns="0" bIns="0" anchor="t">
+            <a:normAutofit/>
+          </a:bodyPr>
+          <a:lstStyle/>
+          <a:p>
+            <a:pPr>
+              <a:lnSpc>
+                <a:spcPct val="112240"/>
+              </a:lnSpc>
+            </a:pPr>
+            <a:r>
+              <a:rPr sz="2500" b="1" i="0">
+                <a:solidFill>
+                  <a:srgbClr val="16213A"/>
+                </a:solidFill>
+                <a:latin typeface="Arial"/>
+                <a:ea typeface="Malgun Gothic"/>
+                <a:cs typeface="Malgun Gothic"/>
+              </a:rPr>
+              <a:t>학습 지형보다 높은 계단과 가파른 경사를 미세 조정 없이 지났다</a:t>
+            </a:r>
+          </a:p>
+        </p:txBody>
+      </p:sp>
+      <p:sp>
+        <p:nvSpPr>
+          <p:cNvPr id="4" name="Rounded Rectangle 3"/>
+          <p:cNvSpPr/>
+          <p:nvPr/>
+        </p:nvSpPr>
+        <p:spPr>
+          <a:xfrm>
+            <a:off x="711200" y="1361678"/>
+            <a:ext cx="5257800" cy="2286000"/>
+          </a:xfrm>
+          <a:prstGeom prst="roundRect">
+            <a:avLst>
+              <a:gd name="adj" fmla="val 2222"/>
+            </a:avLst>
+          </a:prstGeom>
+          <a:solidFill>
+            <a:srgbClr val="FFFFFF"/>
+          </a:solidFill>
+          <a:ln w="6350">
+            <a:solidFill>
+              <a:srgbClr val="D9D4C7"/>
+            </a:solidFill>
+          </a:ln>
+        </p:spPr>
+        <p:txBody>
+          <a:bodyPr rtlCol="0" anchor="ctr"/>
+          <a:lstStyle/>
+          <a:p>
+            <a:pPr algn="ctr"/>
+          </a:p>
+        </p:txBody>
+      </p:sp>
+      <p:pic>
+        <p:nvPicPr>
+          <p:cNvPr id="5" name="Picture 4" descr="image.jpg"/>
+          <p:cNvPicPr>
+            <a:picLocks noChangeAspect="1"/>
+          </p:cNvPicPr>
+          <p:nvPr/>
+        </p:nvPicPr>
+        <p:blipFill>
+          <a:blip r:embed="rId2"/>
+          <a:stretch>
+            <a:fillRect/>
+          </a:stretch>
+        </p:blipFill>
+        <p:spPr>
+          <a:xfrm>
+            <a:off x="1085662" y="1361678"/>
+            <a:ext cx="4508876" cy="2286000"/>
+          </a:xfrm>
+          <a:prstGeom prst="rect">
+            <a:avLst/>
+          </a:prstGeom>
+        </p:spPr>
+      </p:pic>
+      <p:sp>
+        <p:nvSpPr>
+          <p:cNvPr id="6" name="TextBox 5"/>
+          <p:cNvSpPr txBox="1"/>
+          <p:nvPr/>
+        </p:nvSpPr>
+        <p:spPr>
+          <a:xfrm>
+            <a:off x="711200" y="3711178"/>
+            <a:ext cx="5440934" cy="495300"/>
+          </a:xfrm>
+          <a:prstGeom prst="rect">
+            <a:avLst/>
+          </a:prstGeom>
+          <a:noFill/>
+        </p:spPr>
+        <p:txBody>
+          <a:bodyPr wrap="square" lIns="0" rIns="0" tIns="0" bIns="0" anchor="t">
+            <a:normAutofit/>
+          </a:bodyPr>
+          <a:lstStyle/>
+          <a:p>
+            <a:pPr>
+              <a:lnSpc>
+                <a:spcPct val="128800"/>
+              </a:lnSpc>
+            </a:pPr>
+            <a:r>
+              <a:rPr sz="950" b="0" i="0">
+                <a:solidFill>
+                  <a:srgbClr val="5A6478"/>
+                </a:solidFill>
+                <a:latin typeface="Arial"/>
+                <a:ea typeface="Malgun Gothic"/>
+                <a:cs typeface="Malgun Gothic"/>
+              </a:rPr>
+              <a:t>NEXUS 실물 배포(논문 Fig. 1): 운영자는 평지에서 움직이고, G1은 계단·60 cm 대·풀밭 경사 위에서 같은 동작을 한다 — nexus-humanoid.github.io</a:t>
+            </a:r>
+          </a:p>
+        </p:txBody>
+      </p:sp>
+      <p:sp>
+        <p:nvSpPr>
+          <p:cNvPr id="7" name="Rounded Rectangle 6"/>
+          <p:cNvSpPr/>
+          <p:nvPr/>
+        </p:nvSpPr>
+        <p:spPr>
+          <a:xfrm>
+            <a:off x="6223000" y="1361678"/>
+            <a:ext cx="5257800" cy="1272480"/>
+          </a:xfrm>
+          <a:prstGeom prst="roundRect">
+            <a:avLst>
+              <a:gd name="adj" fmla="val 5988"/>
+            </a:avLst>
+          </a:prstGeom>
+          <a:solidFill>
+            <a:srgbClr val="FFFDF8"/>
+          </a:solidFill>
+          <a:ln>
+            <a:noFill/>
+          </a:ln>
+        </p:spPr>
+        <p:txBody>
+          <a:bodyPr rtlCol="0" anchor="ctr"/>
+          <a:lstStyle/>
+          <a:p>
+            <a:pPr algn="ctr"/>
+          </a:p>
+        </p:txBody>
+      </p:sp>
+      <p:sp>
+        <p:nvSpPr>
+          <p:cNvPr id="8" name="Rectangle 7"/>
+          <p:cNvSpPr/>
+          <p:nvPr/>
+        </p:nvSpPr>
+        <p:spPr>
+          <a:xfrm>
+            <a:off x="6223000" y="1361678"/>
+            <a:ext cx="5257800" cy="6350"/>
+          </a:xfrm>
+          <a:prstGeom prst="rect">
+            <a:avLst/>
+          </a:prstGeom>
+          <a:solidFill>
+            <a:srgbClr val="D9D4C7"/>
+          </a:solidFill>
+          <a:ln>
+            <a:noFill/>
+          </a:ln>
+        </p:spPr>
+        <p:txBody>
+          <a:bodyPr rtlCol="0" anchor="ctr"/>
+          <a:lstStyle/>
+          <a:p>
+            <a:pPr algn="ctr"/>
+          </a:p>
+        </p:txBody>
+      </p:sp>
+      <p:sp>
+        <p:nvSpPr>
+          <p:cNvPr id="9" name="Rectangle 8"/>
+          <p:cNvSpPr/>
+          <p:nvPr/>
+        </p:nvSpPr>
+        <p:spPr>
+          <a:xfrm>
+            <a:off x="11474450" y="1361678"/>
+            <a:ext cx="6350" cy="1272480"/>
+          </a:xfrm>
+          <a:prstGeom prst="rect">
+            <a:avLst/>
+          </a:prstGeom>
+          <a:solidFill>
+            <a:srgbClr val="D9D4C7"/>
+          </a:solidFill>
+          <a:ln>
+            <a:noFill/>
+          </a:ln>
+        </p:spPr>
+        <p:txBody>
+          <a:bodyPr rtlCol="0" anchor="ctr"/>
+          <a:lstStyle/>
+          <a:p>
+            <a:pPr algn="ctr"/>
+          </a:p>
+        </p:txBody>
+      </p:sp>
+      <p:sp>
+        <p:nvSpPr>
+          <p:cNvPr id="10" name="Rectangle 9"/>
+          <p:cNvSpPr/>
+          <p:nvPr/>
+        </p:nvSpPr>
+        <p:spPr>
+          <a:xfrm>
+            <a:off x="6223000" y="2627809"/>
+            <a:ext cx="5257800" cy="6350"/>
+          </a:xfrm>
+          <a:prstGeom prst="rect">
+            <a:avLst/>
+          </a:prstGeom>
+          <a:solidFill>
+            <a:srgbClr val="D9D4C7"/>
+          </a:solidFill>
+          <a:ln>
+            <a:noFill/>
+          </a:ln>
+        </p:spPr>
+        <p:txBody>
+          <a:bodyPr rtlCol="0" anchor="ctr"/>
+          <a:lstStyle/>
+          <a:p>
+            <a:pPr algn="ctr"/>
+          </a:p>
+        </p:txBody>
+      </p:sp>
+      <p:sp>
+        <p:nvSpPr>
+          <p:cNvPr id="11" name="Rounded Rectangle 10"/>
+          <p:cNvSpPr/>
+          <p:nvPr/>
+        </p:nvSpPr>
+        <p:spPr>
+          <a:xfrm>
+            <a:off x="6223000" y="1361678"/>
+            <a:ext cx="50800" cy="1272480"/>
+          </a:xfrm>
+          <a:prstGeom prst="roundRect">
+            <a:avLst>
+              <a:gd name="adj" fmla="val 50000"/>
+            </a:avLst>
+          </a:prstGeom>
+          <a:solidFill>
+            <a:srgbClr val="1D4ED8"/>
+          </a:solidFill>
+          <a:ln>
+            <a:noFill/>
+          </a:ln>
+        </p:spPr>
+        <p:txBody>
+          <a:bodyPr rtlCol="0" anchor="ctr"/>
+          <a:lstStyle/>
+          <a:p>
+            <a:pPr algn="ctr"/>
+          </a:p>
+        </p:txBody>
+      </p:sp>
+      <p:sp>
+        <p:nvSpPr>
+          <p:cNvPr id="12" name="Rounded Rectangle 11"/>
+          <p:cNvSpPr/>
+          <p:nvPr/>
+        </p:nvSpPr>
+        <p:spPr>
+          <a:xfrm>
+            <a:off x="6438900" y="1507728"/>
+            <a:ext cx="802184" cy="241300"/>
+          </a:xfrm>
+          <a:prstGeom prst="roundRect">
+            <a:avLst>
+              <a:gd name="adj" fmla="val 50000"/>
+            </a:avLst>
+          </a:prstGeom>
+          <a:solidFill>
+            <a:srgbClr val="DBE5FB"/>
+          </a:solidFill>
+          <a:ln>
+            <a:noFill/>
+          </a:ln>
+        </p:spPr>
+        <p:txBody>
+          <a:bodyPr rtlCol="0" anchor="ctr"/>
+          <a:lstStyle/>
+          <a:p>
+            <a:pPr algn="ctr"/>
+          </a:p>
+        </p:txBody>
+      </p:sp>
+      <p:sp>
+        <p:nvSpPr>
+          <p:cNvPr id="13" name="TextBox 12"/>
+          <p:cNvSpPr txBox="1"/>
+          <p:nvPr/>
+        </p:nvSpPr>
+        <p:spPr>
+          <a:xfrm>
+            <a:off x="6527800" y="1533128"/>
+            <a:ext cx="668515" cy="288925"/>
+          </a:xfrm>
+          <a:prstGeom prst="rect">
+            <a:avLst/>
+          </a:prstGeom>
+          <a:noFill/>
+        </p:spPr>
+        <p:txBody>
+          <a:bodyPr wrap="square" lIns="0" rIns="0" tIns="0" bIns="0" anchor="t">
+            <a:normAutofit/>
+          </a:bodyPr>
+          <a:lstStyle/>
+          <a:p>
+            <a:pPr>
+              <a:lnSpc>
+                <a:spcPct val="119600"/>
+              </a:lnSpc>
+            </a:pPr>
+            <a:r>
+              <a:rPr sz="950" b="1" i="0">
+                <a:solidFill>
+                  <a:srgbClr val="1E3A8A"/>
+                </a:solidFill>
+                <a:latin typeface="Arial"/>
+                <a:ea typeface="Malgun Gothic"/>
+                <a:cs typeface="Malgun Gothic"/>
+              </a:rPr>
+              <a:t>학습 → 실물</a:t>
+            </a:r>
+          </a:p>
+        </p:txBody>
+      </p:sp>
+      <p:sp>
+        <p:nvSpPr>
+          <p:cNvPr id="14" name="TextBox 13"/>
+          <p:cNvSpPr txBox="1"/>
+          <p:nvPr/>
+        </p:nvSpPr>
+        <p:spPr>
+          <a:xfrm>
+            <a:off x="6438900" y="1825228"/>
+            <a:ext cx="5041964" cy="879401"/>
+          </a:xfrm>
+          <a:prstGeom prst="rect">
+            <a:avLst/>
+          </a:prstGeom>
+          <a:noFill/>
+        </p:spPr>
+        <p:txBody>
+          <a:bodyPr wrap="square" lIns="0" rIns="0" tIns="0" bIns="0" anchor="t">
+            <a:normAutofit/>
+          </a:bodyPr>
+          <a:lstStyle/>
+          <a:p>
+            <a:pPr>
+              <a:lnSpc>
+                <a:spcPct val="133400"/>
+              </a:lnSpc>
+            </a:pPr>
+            <a:r>
+              <a:rPr sz="1150" b="0" i="0">
+                <a:solidFill>
+                  <a:srgbClr val="16213A"/>
+                </a:solidFill>
+                <a:latin typeface="Arial"/>
+                <a:ea typeface="Malgun Gothic"/>
+                <a:cs typeface="Malgun Gothic"/>
+              </a:rPr>
+              <a:t>학습 지형은 10 cm 계단과 약 16.7° 경사뿐이었다. 실물에서는 15 cm 계단을 이어 오르고, 약 30° 풀밭 경사를 지나고, 60 cm 대에서 내려왔다. 60 cm 대와 옆돌기의 일부 시도에서 넘어졌다.</a:t>
+            </a:r>
+          </a:p>
+        </p:txBody>
+      </p:sp>
+      <p:sp>
+        <p:nvSpPr>
+          <p:cNvPr id="15" name="Rounded Rectangle 14"/>
+          <p:cNvSpPr/>
+          <p:nvPr/>
+        </p:nvSpPr>
+        <p:spPr>
+          <a:xfrm>
+            <a:off x="6223000" y="2748459"/>
+            <a:ext cx="5257800" cy="1272480"/>
+          </a:xfrm>
+          <a:prstGeom prst="roundRect">
+            <a:avLst>
+              <a:gd name="adj" fmla="val 5988"/>
+            </a:avLst>
+          </a:prstGeom>
+          <a:solidFill>
+            <a:srgbClr val="FFFDF8"/>
+          </a:solidFill>
+          <a:ln>
+            <a:noFill/>
+          </a:ln>
+        </p:spPr>
+        <p:txBody>
+          <a:bodyPr rtlCol="0" anchor="ctr"/>
+          <a:lstStyle/>
+          <a:p>
+            <a:pPr algn="ctr"/>
+          </a:p>
+        </p:txBody>
+      </p:sp>
+      <p:sp>
+        <p:nvSpPr>
+          <p:cNvPr id="16" name="Rectangle 15"/>
+          <p:cNvSpPr/>
+          <p:nvPr/>
+        </p:nvSpPr>
+        <p:spPr>
+          <a:xfrm>
+            <a:off x="6223000" y="2748459"/>
+            <a:ext cx="5257800" cy="6350"/>
+          </a:xfrm>
+          <a:prstGeom prst="rect">
+            <a:avLst/>
+          </a:prstGeom>
+          <a:solidFill>
+            <a:srgbClr val="D9D4C7"/>
+          </a:solidFill>
+          <a:ln>
+            <a:noFill/>
+          </a:ln>
+        </p:spPr>
+        <p:txBody>
+          <a:bodyPr rtlCol="0" anchor="ctr"/>
+          <a:lstStyle/>
+          <a:p>
+            <a:pPr algn="ctr"/>
+          </a:p>
+        </p:txBody>
+      </p:sp>
+      <p:sp>
+        <p:nvSpPr>
+          <p:cNvPr id="17" name="Rectangle 16"/>
+          <p:cNvSpPr/>
+          <p:nvPr/>
+        </p:nvSpPr>
+        <p:spPr>
+          <a:xfrm>
+            <a:off x="11474450" y="2748459"/>
+            <a:ext cx="6350" cy="1272480"/>
+          </a:xfrm>
+          <a:prstGeom prst="rect">
+            <a:avLst/>
+          </a:prstGeom>
+          <a:solidFill>
+            <a:srgbClr val="D9D4C7"/>
+          </a:solidFill>
+          <a:ln>
+            <a:noFill/>
+          </a:ln>
+        </p:spPr>
+        <p:txBody>
+          <a:bodyPr rtlCol="0" anchor="ctr"/>
+          <a:lstStyle/>
+          <a:p>
+            <a:pPr algn="ctr"/>
+          </a:p>
+        </p:txBody>
+      </p:sp>
+      <p:sp>
+        <p:nvSpPr>
+          <p:cNvPr id="18" name="Rectangle 17"/>
+          <p:cNvSpPr/>
+          <p:nvPr/>
+        </p:nvSpPr>
+        <p:spPr>
+          <a:xfrm>
+            <a:off x="6223000" y="4014589"/>
+            <a:ext cx="5257800" cy="6350"/>
+          </a:xfrm>
+          <a:prstGeom prst="rect">
+            <a:avLst/>
+          </a:prstGeom>
+          <a:solidFill>
+            <a:srgbClr val="D9D4C7"/>
+          </a:solidFill>
+          <a:ln>
+            <a:noFill/>
+          </a:ln>
+        </p:spPr>
+        <p:txBody>
+          <a:bodyPr rtlCol="0" anchor="ctr"/>
+          <a:lstStyle/>
+          <a:p>
+            <a:pPr algn="ctr"/>
+          </a:p>
+        </p:txBody>
+      </p:sp>
+      <p:sp>
+        <p:nvSpPr>
+          <p:cNvPr id="19" name="Rounded Rectangle 18"/>
+          <p:cNvSpPr/>
+          <p:nvPr/>
+        </p:nvSpPr>
+        <p:spPr>
+          <a:xfrm>
+            <a:off x="6223000" y="2748459"/>
+            <a:ext cx="50800" cy="1272480"/>
+          </a:xfrm>
+          <a:prstGeom prst="roundRect">
+            <a:avLst>
+              <a:gd name="adj" fmla="val 50000"/>
+            </a:avLst>
+          </a:prstGeom>
+          <a:solidFill>
+            <a:srgbClr val="C2410C"/>
+          </a:solidFill>
+          <a:ln>
+            <a:noFill/>
+          </a:ln>
+        </p:spPr>
+        <p:txBody>
+          <a:bodyPr rtlCol="0" anchor="ctr"/>
+          <a:lstStyle/>
+          <a:p>
+            <a:pPr algn="ctr"/>
+          </a:p>
+        </p:txBody>
+      </p:sp>
+      <p:sp>
+        <p:nvSpPr>
+          <p:cNvPr id="20" name="Rounded Rectangle 19"/>
+          <p:cNvSpPr/>
+          <p:nvPr/>
+        </p:nvSpPr>
+        <p:spPr>
+          <a:xfrm>
+            <a:off x="6438900" y="2894509"/>
+            <a:ext cx="660995" cy="241300"/>
+          </a:xfrm>
+          <a:prstGeom prst="roundRect">
+            <a:avLst>
+              <a:gd name="adj" fmla="val 50000"/>
+            </a:avLst>
+          </a:prstGeom>
+          <a:solidFill>
+            <a:srgbClr val="FDE7C8"/>
+          </a:solidFill>
+          <a:ln>
+            <a:noFill/>
+          </a:ln>
+        </p:spPr>
+        <p:txBody>
+          <a:bodyPr rtlCol="0" anchor="ctr"/>
+          <a:lstStyle/>
+          <a:p>
+            <a:pPr algn="ctr"/>
+          </a:p>
+        </p:txBody>
+      </p:sp>
+      <p:sp>
+        <p:nvSpPr>
+          <p:cNvPr id="21" name="TextBox 20"/>
+          <p:cNvSpPr txBox="1"/>
+          <p:nvPr/>
+        </p:nvSpPr>
+        <p:spPr>
+          <a:xfrm>
+            <a:off x="6527800" y="2919909"/>
+            <a:ext cx="523091" cy="288925"/>
+          </a:xfrm>
+          <a:prstGeom prst="rect">
+            <a:avLst/>
+          </a:prstGeom>
+          <a:noFill/>
+        </p:spPr>
+        <p:txBody>
+          <a:bodyPr wrap="square" lIns="0" rIns="0" tIns="0" bIns="0" anchor="t">
+            <a:normAutofit/>
+          </a:bodyPr>
+          <a:lstStyle/>
+          <a:p>
+            <a:pPr>
+              <a:lnSpc>
+                <a:spcPct val="119600"/>
+              </a:lnSpc>
+            </a:pPr>
+            <a:r>
+              <a:rPr sz="950" b="1" i="0">
+                <a:solidFill>
+                  <a:srgbClr val="7C2D12"/>
+                </a:solidFill>
+                <a:latin typeface="Arial"/>
+                <a:ea typeface="Malgun Gothic"/>
+                <a:cs typeface="Malgun Gothic"/>
+              </a:rPr>
+              <a:t>넘기는 것</a:t>
+            </a:r>
+          </a:p>
+        </p:txBody>
+      </p:sp>
+      <p:sp>
+        <p:nvSpPr>
+          <p:cNvPr id="22" name="TextBox 21"/>
+          <p:cNvSpPr txBox="1"/>
+          <p:nvPr/>
+        </p:nvSpPr>
+        <p:spPr>
+          <a:xfrm>
+            <a:off x="6438900" y="3212009"/>
+            <a:ext cx="5041964" cy="879401"/>
+          </a:xfrm>
+          <a:prstGeom prst="rect">
+            <a:avLst/>
+          </a:prstGeom>
+          <a:noFill/>
+        </p:spPr>
+        <p:txBody>
+          <a:bodyPr wrap="square" lIns="0" rIns="0" tIns="0" bIns="0" anchor="t">
+            <a:normAutofit/>
+          </a:bodyPr>
+          <a:lstStyle/>
+          <a:p>
+            <a:pPr>
+              <a:lnSpc>
+                <a:spcPct val="133400"/>
+              </a:lnSpc>
+            </a:pPr>
+            <a:r>
+              <a:rPr sz="1150" b="0" i="0">
+                <a:solidFill>
+                  <a:srgbClr val="16213A"/>
+                </a:solidFill>
+                <a:latin typeface="Arial"/>
+                <a:ea typeface="Malgun Gothic"/>
+                <a:cs typeface="Malgun Gothic"/>
+              </a:rPr>
+              <a:t>별도 PC가 사람 자세를 GMR로 리타기팅해 ZeroMQ로 보낸다. 정책은 평지 동작 13프레임과 깊이 32 × 18을 받아 Orin NX에서 50 Hz로 돈다. 명령에 지형 정보는 없다.</a:t>
+            </a:r>
+          </a:p>
+        </p:txBody>
+      </p:sp>
+      <p:sp>
+        <p:nvSpPr>
+          <p:cNvPr id="23" name="Rounded Rectangle 22"/>
+          <p:cNvSpPr/>
+          <p:nvPr/>
+        </p:nvSpPr>
+        <p:spPr>
+          <a:xfrm>
+            <a:off x="711200" y="4244578"/>
+            <a:ext cx="10769600" cy="751086"/>
+          </a:xfrm>
+          <a:prstGeom prst="roundRect">
+            <a:avLst>
+              <a:gd name="adj" fmla="val 10145"/>
+            </a:avLst>
+          </a:prstGeom>
+          <a:solidFill>
+            <a:srgbClr val="16213A"/>
+          </a:solidFill>
+          <a:ln>
+            <a:noFill/>
+          </a:ln>
+        </p:spPr>
+        <p:txBody>
+          <a:bodyPr rtlCol="0" anchor="ctr"/>
+          <a:lstStyle/>
+          <a:p>
+            <a:pPr algn="ctr"/>
+          </a:p>
+        </p:txBody>
+      </p:sp>
+      <p:sp>
+        <p:nvSpPr>
+          <p:cNvPr id="24" name="TextBox 23"/>
+          <p:cNvSpPr txBox="1"/>
+          <p:nvPr/>
+        </p:nvSpPr>
+        <p:spPr>
+          <a:xfrm>
+            <a:off x="889000" y="4371578"/>
+            <a:ext cx="10751820" cy="672157"/>
+          </a:xfrm>
+          <a:prstGeom prst="rect">
+            <a:avLst/>
+          </a:prstGeom>
+          <a:noFill/>
+        </p:spPr>
+        <p:txBody>
+          <a:bodyPr wrap="square" lIns="0" rIns="0" tIns="0" bIns="0" anchor="t">
+            <a:normAutofit/>
+          </a:bodyPr>
+          <a:lstStyle/>
+          <a:p>
+            <a:pPr>
+              <a:lnSpc>
+                <a:spcPct val="133400"/>
+              </a:lnSpc>
+            </a:pPr>
+            <a:r>
+              <a:rPr sz="1300" b="1" i="0">
+                <a:solidFill>
+                  <a:srgbClr val="F59E5B"/>
+                </a:solidFill>
+                <a:latin typeface="Arial"/>
+                <a:ea typeface="Malgun Gothic"/>
+                <a:cs typeface="Malgun Gothic"/>
+              </a:rPr>
+              <a:t>travplan:</a:t>
+            </a:r>
+            <a:r>
+              <a:rPr sz="1300" b="0" i="0">
+                <a:solidFill>
+                  <a:srgbClr val="F4F1EA"/>
+                </a:solidFill>
+                <a:latin typeface="Arial"/>
+                <a:ea typeface="Malgun Gothic"/>
+                <a:cs typeface="Malgun Gothic"/>
+              </a:rPr>
+              <a:t> 어디로 갈지는 아직 사람이 정한다. 저자가 꼽은 다음 과제, 곧 원격조종 기록을 자율의 시연으로 쓰는 길은 배달로봇 로그로 배운 MIMIC(B.6d)과 같다.</a:t>
+            </a:r>
+          </a:p>
+        </p:txBody>
+      </p:sp>
+      <p:sp>
+        <p:nvSpPr>
+          <p:cNvPr id="25" name="Rectangle 24"/>
+          <p:cNvSpPr/>
+          <p:nvPr/>
+        </p:nvSpPr>
+        <p:spPr>
+          <a:xfrm>
+            <a:off x="711200" y="6424315"/>
+            <a:ext cx="10769600" cy="230485"/>
+          </a:xfrm>
+          <a:prstGeom prst="rect">
+            <a:avLst/>
+          </a:prstGeom>
+          <a:noFill/>
+          <a:ln>
+            <a:noFill/>
+          </a:ln>
+        </p:spPr>
+        <p:txBody>
+          <a:bodyPr rtlCol="0" anchor="ctr"/>
+          <a:lstStyle/>
+          <a:p>
+            <a:pPr algn="ctr"/>
+          </a:p>
+        </p:txBody>
+      </p:sp>
+      <p:sp>
+        <p:nvSpPr>
+          <p:cNvPr id="26" name="Rectangle 25"/>
+          <p:cNvSpPr/>
+          <p:nvPr/>
+        </p:nvSpPr>
+        <p:spPr>
+          <a:xfrm>
+            <a:off x="711200" y="6424315"/>
+            <a:ext cx="10769600" cy="12700"/>
+          </a:xfrm>
+          <a:prstGeom prst="rect">
+            <a:avLst/>
+          </a:prstGeom>
+          <a:solidFill>
+            <a:srgbClr val="D9D4C7"/>
+          </a:solidFill>
+          <a:ln>
+            <a:noFill/>
+          </a:ln>
+        </p:spPr>
+        <p:txBody>
+          <a:bodyPr rtlCol="0" anchor="ctr"/>
+          <a:lstStyle/>
+          <a:p>
+            <a:pPr algn="ctr"/>
+          </a:p>
+        </p:txBody>
+      </p:sp>
+      <p:sp>
+        <p:nvSpPr>
+          <p:cNvPr id="27" name="TextBox 26"/>
+          <p:cNvSpPr txBox="1"/>
+          <p:nvPr/>
+        </p:nvSpPr>
+        <p:spPr>
+          <a:xfrm>
+            <a:off x="711200" y="6500515"/>
+            <a:ext cx="11118088" cy="243656"/>
+          </a:xfrm>
+          <a:prstGeom prst="rect">
+            <a:avLst/>
+          </a:prstGeom>
+          <a:noFill/>
+        </p:spPr>
+        <p:txBody>
+          <a:bodyPr wrap="square" lIns="0" rIns="0" tIns="0" bIns="0" anchor="t">
+            <a:normAutofit/>
+          </a:bodyPr>
+          <a:lstStyle/>
+          <a:p>
+            <a:pPr>
+              <a:lnSpc>
+                <a:spcPct val="124200"/>
+              </a:lnSpc>
+            </a:pPr>
+            <a:r>
+              <a:rPr sz="850" b="0" i="0">
+                <a:solidFill>
+                  <a:srgbClr val="5A6478"/>
+                </a:solidFill>
+                <a:latin typeface="Arial"/>
+                <a:ea typeface="Malgun Gothic"/>
+                <a:cs typeface="Malgun Gothic"/>
+              </a:rPr>
+              <a:t>[1] NEXUS 프로젝트 nexus-humanoid.github.io · arXiv:2609.39000(2026-09-30)</a:t>
+            </a:r>
+          </a:p>
+        </p:txBody>
+      </p:sp>
+    </p:spTree>
+  </p:cSld>
+  <p:clrMapOvr>
+    <a:masterClrMapping/>
+  </p:clrMapOvr>
+</p:sld>
+</file>
+
+<file path=ppt/slides/slide24.xml><?xml version="1.0" encoding="utf-8"?>
+<p:sld xmlns:a="http://schemas.openxmlformats.org/drawingml/2006/main" xmlns:p="http://schemas.openxmlformats.org/presentationml/2006/main" xmlns:r="http://schemas.openxmlformats.org/officeDocument/2006/relationships">
+  <p:cSld>
+    <p:bg>
+      <p:bgPr>
+        <a:solidFill>
+          <a:srgbClr val="F7F5F0"/>
+        </a:solidFill>
+        <a:effectLst/>
+      </p:bgPr>
+    </p:bg>
+    <p:spTree>
+      <p:nvGrpSpPr>
+        <p:cNvPr id="1" name=""/>
+        <p:cNvGrpSpPr/>
+        <p:nvPr/>
+      </p:nvGrpSpPr>
+      <p:grpSpPr/>
+      <p:sp>
+        <p:nvSpPr>
+          <p:cNvPr id="2" name="TextBox 1"/>
+          <p:cNvSpPr txBox="1"/>
+          <p:nvPr/>
+        </p:nvSpPr>
+        <p:spPr>
+          <a:xfrm>
+            <a:off x="711200" y="508000"/>
+            <a:ext cx="11118088" cy="312738"/>
+          </a:xfrm>
+          <a:prstGeom prst="rect">
+            <a:avLst/>
+          </a:prstGeom>
+          <a:noFill/>
+        </p:spPr>
+        <p:txBody>
+          <a:bodyPr wrap="square" lIns="0" rIns="0" tIns="0" bIns="0" anchor="t">
+            <a:normAutofit/>
+          </a:bodyPr>
+          <a:lstStyle/>
+          <a:p>
+            <a:pPr>
+              <a:lnSpc>
+                <a:spcPct val="138000"/>
+              </a:lnSpc>
+            </a:pPr>
+            <a:r>
+              <a:rPr sz="1050" b="0" i="0">
+                <a:solidFill>
+                  <a:srgbClr val="C2410C"/>
+                </a:solidFill>
+                <a:latin typeface="Consolas"/>
+                <a:ea typeface="Malgun Gothic"/>
+                <a:cs typeface="Malgun Gothic"/>
+              </a:rPr>
               <a:t>B.16.8 · 셋째 갈래</a:t>
             </a:r>
           </a:p>
@@ -19639,7 +20620,7 @@
 </p:sld>
 </file>
 
-<file path=ppt/slides/slide24.xml><?xml version="1.0" encoding="utf-8"?>
+<file path=ppt/slides/slide25.xml><?xml version="1.0" encoding="utf-8"?>
 <p:sld xmlns:a="http://schemas.openxmlformats.org/drawingml/2006/main" xmlns:p="http://schemas.openxmlformats.org/presentationml/2006/main" xmlns:r="http://schemas.openxmlformats.org/officeDocument/2006/relationships">
   <p:cSld>
     <p:bg>
@@ -19794,1251 +20775,6 @@
                 <a:cs typeface="Malgun Gothic"/>
               </a:rPr>
               <a:t>79단계 작업에서 단계 신뢰도가 95 %면 끝까지 갈 확률은 1.7 %다(Dyna의 계산).</a:t>
-            </a:r>
-          </a:p>
-        </p:txBody>
-      </p:sp>
-    </p:spTree>
-  </p:cSld>
-  <p:clrMapOvr>
-    <a:masterClrMapping/>
-  </p:clrMapOvr>
-</p:sld>
-</file>
-
-<file path=ppt/slides/slide25.xml><?xml version="1.0" encoding="utf-8"?>
-<p:sld xmlns:a="http://schemas.openxmlformats.org/drawingml/2006/main" xmlns:p="http://schemas.openxmlformats.org/presentationml/2006/main" xmlns:r="http://schemas.openxmlformats.org/officeDocument/2006/relationships">
-  <p:cSld>
-    <p:bg>
-      <p:bgPr>
-        <a:solidFill>
-          <a:srgbClr val="F7F5F0"/>
-        </a:solidFill>
-        <a:effectLst/>
-      </p:bgPr>
-    </p:bg>
-    <p:spTree>
-      <p:nvGrpSpPr>
-        <p:cNvPr id="1" name=""/>
-        <p:cNvGrpSpPr/>
-        <p:nvPr/>
-      </p:nvGrpSpPr>
-      <p:grpSpPr/>
-      <p:sp>
-        <p:nvSpPr>
-          <p:cNvPr id="2" name="TextBox 1"/>
-          <p:cNvSpPr txBox="1"/>
-          <p:nvPr/>
-        </p:nvSpPr>
-        <p:spPr>
-          <a:xfrm>
-            <a:off x="711200" y="508000"/>
-            <a:ext cx="11118088" cy="312738"/>
-          </a:xfrm>
-          <a:prstGeom prst="rect">
-            <a:avLst/>
-          </a:prstGeom>
-          <a:noFill/>
-        </p:spPr>
-        <p:txBody>
-          <a:bodyPr wrap="square" lIns="0" rIns="0" tIns="0" bIns="0" anchor="t">
-            <a:normAutofit/>
-          </a:bodyPr>
-          <a:lstStyle/>
-          <a:p>
-            <a:pPr>
-              <a:lnSpc>
-                <a:spcPct val="138000"/>
-              </a:lnSpc>
-            </a:pPr>
-            <a:r>
-              <a:rPr sz="1050" b="0" i="0">
-                <a:solidFill>
-                  <a:srgbClr val="C2410C"/>
-                </a:solidFill>
-                <a:latin typeface="Consolas"/>
-                <a:ea typeface="Malgun Gothic"/>
-                <a:cs typeface="Malgun Gothic"/>
-              </a:rPr>
-              <a:t>B.16.3 · Flexion Reflect v1.0</a:t>
-            </a:r>
-          </a:p>
-        </p:txBody>
-      </p:sp>
-      <p:sp>
-        <p:nvSpPr>
-          <p:cNvPr id="3" name="TextBox 2"/>
-          <p:cNvSpPr txBox="1"/>
-          <p:nvPr/>
-        </p:nvSpPr>
-        <p:spPr>
-          <a:xfrm>
-            <a:off x="711200" y="781050"/>
-            <a:ext cx="11118088" cy="554335"/>
-          </a:xfrm>
-          <a:prstGeom prst="rect">
-            <a:avLst/>
-          </a:prstGeom>
-          <a:noFill/>
-        </p:spPr>
-        <p:txBody>
-          <a:bodyPr wrap="square" lIns="0" rIns="0" tIns="0" bIns="0" anchor="t">
-            <a:normAutofit/>
-          </a:bodyPr>
-          <a:lstStyle/>
-          <a:p>
-            <a:pPr>
-              <a:lnSpc>
-                <a:spcPct val="112240"/>
-              </a:lnSpc>
-            </a:pPr>
-            <a:r>
-              <a:rPr sz="2500" b="1" i="0">
-                <a:solidFill>
-                  <a:srgbClr val="16213A"/>
-                </a:solidFill>
-                <a:latin typeface="Arial"/>
-                <a:ea typeface="Malgun Gothic"/>
-                <a:cs typeface="Malgun Gothic"/>
-              </a:rPr>
-              <a:t>임무 VLM, 운동 층, 전신 제어기 Reflex의 세 층을 RL로 다듬는다</a:t>
-            </a:r>
-          </a:p>
-        </p:txBody>
-      </p:sp>
-      <p:sp>
-        <p:nvSpPr>
-          <p:cNvPr id="4" name="Rounded Rectangle 3"/>
-          <p:cNvSpPr/>
-          <p:nvPr/>
-        </p:nvSpPr>
-        <p:spPr>
-          <a:xfrm>
-            <a:off x="711200" y="1361678"/>
-            <a:ext cx="5257800" cy="1358801"/>
-          </a:xfrm>
-          <a:prstGeom prst="roundRect">
-            <a:avLst>
-              <a:gd name="adj" fmla="val 5607"/>
-            </a:avLst>
-          </a:prstGeom>
-          <a:solidFill>
-            <a:srgbClr val="FFFDF8"/>
-          </a:solidFill>
-          <a:ln>
-            <a:noFill/>
-          </a:ln>
-        </p:spPr>
-        <p:txBody>
-          <a:bodyPr rtlCol="0" anchor="ctr"/>
-          <a:lstStyle/>
-          <a:p>
-            <a:pPr algn="ctr"/>
-          </a:p>
-        </p:txBody>
-      </p:sp>
-      <p:sp>
-        <p:nvSpPr>
-          <p:cNvPr id="5" name="Rectangle 4"/>
-          <p:cNvSpPr/>
-          <p:nvPr/>
-        </p:nvSpPr>
-        <p:spPr>
-          <a:xfrm>
-            <a:off x="711200" y="1361678"/>
-            <a:ext cx="5257800" cy="6350"/>
-          </a:xfrm>
-          <a:prstGeom prst="rect">
-            <a:avLst/>
-          </a:prstGeom>
-          <a:solidFill>
-            <a:srgbClr val="D9D4C7"/>
-          </a:solidFill>
-          <a:ln>
-            <a:noFill/>
-          </a:ln>
-        </p:spPr>
-        <p:txBody>
-          <a:bodyPr rtlCol="0" anchor="ctr"/>
-          <a:lstStyle/>
-          <a:p>
-            <a:pPr algn="ctr"/>
-          </a:p>
-        </p:txBody>
-      </p:sp>
-      <p:sp>
-        <p:nvSpPr>
-          <p:cNvPr id="6" name="Rectangle 5"/>
-          <p:cNvSpPr/>
-          <p:nvPr/>
-        </p:nvSpPr>
-        <p:spPr>
-          <a:xfrm>
-            <a:off x="5962650" y="1361678"/>
-            <a:ext cx="6350" cy="1358801"/>
-          </a:xfrm>
-          <a:prstGeom prst="rect">
-            <a:avLst/>
-          </a:prstGeom>
-          <a:solidFill>
-            <a:srgbClr val="D9D4C7"/>
-          </a:solidFill>
-          <a:ln>
-            <a:noFill/>
-          </a:ln>
-        </p:spPr>
-        <p:txBody>
-          <a:bodyPr rtlCol="0" anchor="ctr"/>
-          <a:lstStyle/>
-          <a:p>
-            <a:pPr algn="ctr"/>
-          </a:p>
-        </p:txBody>
-      </p:sp>
-      <p:sp>
-        <p:nvSpPr>
-          <p:cNvPr id="7" name="Rectangle 6"/>
-          <p:cNvSpPr/>
-          <p:nvPr/>
-        </p:nvSpPr>
-        <p:spPr>
-          <a:xfrm>
-            <a:off x="711200" y="2714129"/>
-            <a:ext cx="5257800" cy="6350"/>
-          </a:xfrm>
-          <a:prstGeom prst="rect">
-            <a:avLst/>
-          </a:prstGeom>
-          <a:solidFill>
-            <a:srgbClr val="D9D4C7"/>
-          </a:solidFill>
-          <a:ln>
-            <a:noFill/>
-          </a:ln>
-        </p:spPr>
-        <p:txBody>
-          <a:bodyPr rtlCol="0" anchor="ctr"/>
-          <a:lstStyle/>
-          <a:p>
-            <a:pPr algn="ctr"/>
-          </a:p>
-        </p:txBody>
-      </p:sp>
-      <p:sp>
-        <p:nvSpPr>
-          <p:cNvPr id="8" name="Rounded Rectangle 7"/>
-          <p:cNvSpPr/>
-          <p:nvPr/>
-        </p:nvSpPr>
-        <p:spPr>
-          <a:xfrm>
-            <a:off x="711200" y="1361678"/>
-            <a:ext cx="50800" cy="1358801"/>
-          </a:xfrm>
-          <a:prstGeom prst="roundRect">
-            <a:avLst>
-              <a:gd name="adj" fmla="val 50000"/>
-            </a:avLst>
-          </a:prstGeom>
-          <a:solidFill>
-            <a:srgbClr val="1D4ED8"/>
-          </a:solidFill>
-          <a:ln>
-            <a:noFill/>
-          </a:ln>
-        </p:spPr>
-        <p:txBody>
-          <a:bodyPr rtlCol="0" anchor="ctr"/>
-          <a:lstStyle/>
-          <a:p>
-            <a:pPr algn="ctr"/>
-          </a:p>
-        </p:txBody>
-      </p:sp>
-      <p:sp>
-        <p:nvSpPr>
-          <p:cNvPr id="9" name="Rounded Rectangle 8"/>
-          <p:cNvSpPr/>
-          <p:nvPr/>
-        </p:nvSpPr>
-        <p:spPr>
-          <a:xfrm>
-            <a:off x="927100" y="1507728"/>
-            <a:ext cx="685205" cy="241300"/>
-          </a:xfrm>
-          <a:prstGeom prst="roundRect">
-            <a:avLst>
-              <a:gd name="adj" fmla="val 50000"/>
-            </a:avLst>
-          </a:prstGeom>
-          <a:solidFill>
-            <a:srgbClr val="DBE5FB"/>
-          </a:solidFill>
-          <a:ln>
-            <a:noFill/>
-          </a:ln>
-        </p:spPr>
-        <p:txBody>
-          <a:bodyPr rtlCol="0" anchor="ctr"/>
-          <a:lstStyle/>
-          <a:p>
-            <a:pPr algn="ctr"/>
-          </a:p>
-        </p:txBody>
-      </p:sp>
-      <p:sp>
-        <p:nvSpPr>
-          <p:cNvPr id="10" name="TextBox 9"/>
-          <p:cNvSpPr txBox="1"/>
-          <p:nvPr/>
-        </p:nvSpPr>
-        <p:spPr>
-          <a:xfrm>
-            <a:off x="1016000" y="1533128"/>
-            <a:ext cx="548027" cy="288925"/>
-          </a:xfrm>
-          <a:prstGeom prst="rect">
-            <a:avLst/>
-          </a:prstGeom>
-          <a:noFill/>
-        </p:spPr>
-        <p:txBody>
-          <a:bodyPr wrap="square" lIns="0" rIns="0" tIns="0" bIns="0" anchor="t">
-            <a:normAutofit/>
-          </a:bodyPr>
-          <a:lstStyle/>
-          <a:p>
-            <a:pPr>
-              <a:lnSpc>
-                <a:spcPct val="119600"/>
-              </a:lnSpc>
-            </a:pPr>
-            <a:r>
-              <a:rPr sz="950" b="1" i="0">
-                <a:solidFill>
-                  <a:srgbClr val="1E3A8A"/>
-                </a:solidFill>
-                <a:latin typeface="Arial"/>
-                <a:ea typeface="Malgun Gothic"/>
-                <a:cs typeface="Malgun Gothic"/>
-              </a:rPr>
-              <a:t>임무 VLM</a:t>
-            </a:r>
-          </a:p>
-        </p:txBody>
-      </p:sp>
-      <p:sp>
-        <p:nvSpPr>
-          <p:cNvPr id="11" name="TextBox 10"/>
-          <p:cNvSpPr txBox="1"/>
-          <p:nvPr/>
-        </p:nvSpPr>
-        <p:spPr>
-          <a:xfrm>
-            <a:off x="927100" y="1825228"/>
-            <a:ext cx="5041964" cy="339651"/>
-          </a:xfrm>
-          <a:prstGeom prst="rect">
-            <a:avLst/>
-          </a:prstGeom>
-          <a:noFill/>
-        </p:spPr>
-        <p:txBody>
-          <a:bodyPr wrap="square" lIns="0" rIns="0" tIns="0" bIns="0" anchor="t">
-            <a:normAutofit/>
-          </a:bodyPr>
-          <a:lstStyle/>
-          <a:p>
-            <a:pPr>
-              <a:lnSpc>
-                <a:spcPct val="119600"/>
-              </a:lnSpc>
-            </a:pPr>
-            <a:r>
-              <a:rPr sz="1350" b="1" i="0">
-                <a:solidFill>
-                  <a:srgbClr val="16213A"/>
-                </a:solidFill>
-                <a:latin typeface="Arial"/>
-                <a:ea typeface="Malgun Gothic"/>
-                <a:cs typeface="Malgun Gothic"/>
-              </a:rPr>
-              <a:t>1인칭 영상을 보며 도구를 하나씩 부른다</a:t>
-            </a:r>
-          </a:p>
-        </p:txBody>
-      </p:sp>
-      <p:sp>
-        <p:nvSpPr>
-          <p:cNvPr id="12" name="TextBox 11"/>
-          <p:cNvSpPr txBox="1"/>
-          <p:nvPr/>
-        </p:nvSpPr>
-        <p:spPr>
-          <a:xfrm>
-            <a:off x="927100" y="2132509"/>
-            <a:ext cx="5041964" cy="603200"/>
-          </a:xfrm>
-          <a:prstGeom prst="rect">
-            <a:avLst/>
-          </a:prstGeom>
-          <a:noFill/>
-        </p:spPr>
-        <p:txBody>
-          <a:bodyPr wrap="square" lIns="0" rIns="0" tIns="0" bIns="0" anchor="t">
-            <a:normAutofit/>
-          </a:bodyPr>
-          <a:lstStyle/>
-          <a:p>
-            <a:pPr>
-              <a:lnSpc>
-                <a:spcPct val="133400"/>
-              </a:lnSpc>
-            </a:pPr>
-            <a:r>
-              <a:rPr sz="1000" b="0" i="0">
-                <a:solidFill>
-                  <a:srgbClr val="7C2D12"/>
-                </a:solidFill>
-                <a:latin typeface="Consolas"/>
-                <a:ea typeface="Malgun Gothic"/>
-                <a:cs typeface="Malgun Gothic"/>
-              </a:rPr>
-              <a:t>navigate global</a:t>
-            </a:r>
-            <a:r>
-              <a:rPr sz="1150" b="0" i="0">
-                <a:solidFill>
-                  <a:srgbClr val="16213A"/>
-                </a:solidFill>
-                <a:latin typeface="Arial"/>
-                <a:ea typeface="Malgun Gothic"/>
-                <a:cs typeface="Malgun Gothic"/>
-              </a:rPr>
-              <a:t>, </a:t>
-            </a:r>
-            <a:r>
-              <a:rPr sz="1000" b="0" i="0">
-                <a:solidFill>
-                  <a:srgbClr val="7C2D12"/>
-                </a:solidFill>
-                <a:latin typeface="Consolas"/>
-                <a:ea typeface="Malgun Gothic"/>
-                <a:cs typeface="Malgun Gothic"/>
-              </a:rPr>
-              <a:t>move to object</a:t>
-            </a:r>
-            <a:r>
-              <a:rPr sz="1150" b="0" i="0">
-                <a:solidFill>
-                  <a:srgbClr val="16213A"/>
-                </a:solidFill>
-                <a:latin typeface="Arial"/>
-                <a:ea typeface="Malgun Gothic"/>
-                <a:cs typeface="Malgun Gothic"/>
-              </a:rPr>
-              <a:t> 같은 도구다. 의미 지도 도구에 문장으로 장소를 묻고 전역 경로를 받는다.</a:t>
-            </a:r>
-          </a:p>
-        </p:txBody>
-      </p:sp>
-      <p:sp>
-        <p:nvSpPr>
-          <p:cNvPr id="13" name="Rounded Rectangle 12"/>
-          <p:cNvSpPr/>
-          <p:nvPr/>
-        </p:nvSpPr>
-        <p:spPr>
-          <a:xfrm>
-            <a:off x="711200" y="2834779"/>
-            <a:ext cx="5257800" cy="1358801"/>
-          </a:xfrm>
-          <a:prstGeom prst="roundRect">
-            <a:avLst>
-              <a:gd name="adj" fmla="val 5607"/>
-            </a:avLst>
-          </a:prstGeom>
-          <a:solidFill>
-            <a:srgbClr val="FFFDF8"/>
-          </a:solidFill>
-          <a:ln>
-            <a:noFill/>
-          </a:ln>
-        </p:spPr>
-        <p:txBody>
-          <a:bodyPr rtlCol="0" anchor="ctr"/>
-          <a:lstStyle/>
-          <a:p>
-            <a:pPr algn="ctr"/>
-          </a:p>
-        </p:txBody>
-      </p:sp>
-      <p:sp>
-        <p:nvSpPr>
-          <p:cNvPr id="14" name="Rectangle 13"/>
-          <p:cNvSpPr/>
-          <p:nvPr/>
-        </p:nvSpPr>
-        <p:spPr>
-          <a:xfrm>
-            <a:off x="711200" y="2834779"/>
-            <a:ext cx="5257800" cy="6350"/>
-          </a:xfrm>
-          <a:prstGeom prst="rect">
-            <a:avLst/>
-          </a:prstGeom>
-          <a:solidFill>
-            <a:srgbClr val="D9D4C7"/>
-          </a:solidFill>
-          <a:ln>
-            <a:noFill/>
-          </a:ln>
-        </p:spPr>
-        <p:txBody>
-          <a:bodyPr rtlCol="0" anchor="ctr"/>
-          <a:lstStyle/>
-          <a:p>
-            <a:pPr algn="ctr"/>
-          </a:p>
-        </p:txBody>
-      </p:sp>
-      <p:sp>
-        <p:nvSpPr>
-          <p:cNvPr id="15" name="Rectangle 14"/>
-          <p:cNvSpPr/>
-          <p:nvPr/>
-        </p:nvSpPr>
-        <p:spPr>
-          <a:xfrm>
-            <a:off x="5962650" y="2834779"/>
-            <a:ext cx="6350" cy="1358801"/>
-          </a:xfrm>
-          <a:prstGeom prst="rect">
-            <a:avLst/>
-          </a:prstGeom>
-          <a:solidFill>
-            <a:srgbClr val="D9D4C7"/>
-          </a:solidFill>
-          <a:ln>
-            <a:noFill/>
-          </a:ln>
-        </p:spPr>
-        <p:txBody>
-          <a:bodyPr rtlCol="0" anchor="ctr"/>
-          <a:lstStyle/>
-          <a:p>
-            <a:pPr algn="ctr"/>
-          </a:p>
-        </p:txBody>
-      </p:sp>
-      <p:sp>
-        <p:nvSpPr>
-          <p:cNvPr id="16" name="Rectangle 15"/>
-          <p:cNvSpPr/>
-          <p:nvPr/>
-        </p:nvSpPr>
-        <p:spPr>
-          <a:xfrm>
-            <a:off x="711200" y="4187230"/>
-            <a:ext cx="5257800" cy="6350"/>
-          </a:xfrm>
-          <a:prstGeom prst="rect">
-            <a:avLst/>
-          </a:prstGeom>
-          <a:solidFill>
-            <a:srgbClr val="D9D4C7"/>
-          </a:solidFill>
-          <a:ln>
-            <a:noFill/>
-          </a:ln>
-        </p:spPr>
-        <p:txBody>
-          <a:bodyPr rtlCol="0" anchor="ctr"/>
-          <a:lstStyle/>
-          <a:p>
-            <a:pPr algn="ctr"/>
-          </a:p>
-        </p:txBody>
-      </p:sp>
-      <p:sp>
-        <p:nvSpPr>
-          <p:cNvPr id="17" name="Rounded Rectangle 16"/>
-          <p:cNvSpPr/>
-          <p:nvPr/>
-        </p:nvSpPr>
-        <p:spPr>
-          <a:xfrm>
-            <a:off x="711200" y="2834779"/>
-            <a:ext cx="50800" cy="1358801"/>
-          </a:xfrm>
-          <a:prstGeom prst="roundRect">
-            <a:avLst>
-              <a:gd name="adj" fmla="val 50000"/>
-            </a:avLst>
-          </a:prstGeom>
-          <a:solidFill>
-            <a:srgbClr val="C2410C"/>
-          </a:solidFill>
-          <a:ln>
-            <a:noFill/>
-          </a:ln>
-        </p:spPr>
-        <p:txBody>
-          <a:bodyPr rtlCol="0" anchor="ctr"/>
-          <a:lstStyle/>
-          <a:p>
-            <a:pPr algn="ctr"/>
-          </a:p>
-        </p:txBody>
-      </p:sp>
-      <p:sp>
-        <p:nvSpPr>
-          <p:cNvPr id="18" name="Rounded Rectangle 17"/>
-          <p:cNvSpPr/>
-          <p:nvPr/>
-        </p:nvSpPr>
-        <p:spPr>
-          <a:xfrm>
-            <a:off x="927100" y="2980829"/>
-            <a:ext cx="547688" cy="241300"/>
-          </a:xfrm>
-          <a:prstGeom prst="roundRect">
-            <a:avLst>
-              <a:gd name="adj" fmla="val 50000"/>
-            </a:avLst>
-          </a:prstGeom>
-          <a:solidFill>
-            <a:srgbClr val="FDE7C8"/>
-          </a:solidFill>
-          <a:ln>
-            <a:noFill/>
-          </a:ln>
-        </p:spPr>
-        <p:txBody>
-          <a:bodyPr rtlCol="0" anchor="ctr"/>
-          <a:lstStyle/>
-          <a:p>
-            <a:pPr algn="ctr"/>
-          </a:p>
-        </p:txBody>
-      </p:sp>
-      <p:sp>
-        <p:nvSpPr>
-          <p:cNvPr id="19" name="TextBox 18"/>
-          <p:cNvSpPr txBox="1"/>
-          <p:nvPr/>
-        </p:nvSpPr>
-        <p:spPr>
-          <a:xfrm>
-            <a:off x="1016000" y="3006229"/>
-            <a:ext cx="406384" cy="288925"/>
-          </a:xfrm>
-          <a:prstGeom prst="rect">
-            <a:avLst/>
-          </a:prstGeom>
-          <a:noFill/>
-        </p:spPr>
-        <p:txBody>
-          <a:bodyPr wrap="square" lIns="0" rIns="0" tIns="0" bIns="0" anchor="t">
-            <a:normAutofit/>
-          </a:bodyPr>
-          <a:lstStyle/>
-          <a:p>
-            <a:pPr>
-              <a:lnSpc>
-                <a:spcPct val="119600"/>
-              </a:lnSpc>
-            </a:pPr>
-            <a:r>
-              <a:rPr sz="950" b="1" i="0">
-                <a:solidFill>
-                  <a:srgbClr val="7C2D12"/>
-                </a:solidFill>
-                <a:latin typeface="Arial"/>
-                <a:ea typeface="Malgun Gothic"/>
-                <a:cs typeface="Malgun Gothic"/>
-              </a:rPr>
-              <a:t>운동 층</a:t>
-            </a:r>
-          </a:p>
-        </p:txBody>
-      </p:sp>
-      <p:sp>
-        <p:nvSpPr>
-          <p:cNvPr id="20" name="TextBox 19"/>
-          <p:cNvSpPr txBox="1"/>
-          <p:nvPr/>
-        </p:nvSpPr>
-        <p:spPr>
-          <a:xfrm>
-            <a:off x="927100" y="3298329"/>
-            <a:ext cx="5041964" cy="339651"/>
-          </a:xfrm>
-          <a:prstGeom prst="rect">
-            <a:avLst/>
-          </a:prstGeom>
-          <a:noFill/>
-        </p:spPr>
-        <p:txBody>
-          <a:bodyPr wrap="square" lIns="0" rIns="0" tIns="0" bIns="0" anchor="t">
-            <a:normAutofit/>
-          </a:bodyPr>
-          <a:lstStyle/>
-          <a:p>
-            <a:pPr>
-              <a:lnSpc>
-                <a:spcPct val="119600"/>
-              </a:lnSpc>
-            </a:pPr>
-            <a:r>
-              <a:rPr sz="1350" b="1" i="0">
-                <a:solidFill>
-                  <a:srgbClr val="16213A"/>
-                </a:solidFill>
-                <a:latin typeface="Arial"/>
-                <a:ea typeface="Malgun Gothic"/>
-                <a:cs typeface="Malgun Gothic"/>
-              </a:rPr>
-              <a:t>VLA와 RL 기술이 짧은 궤적을 낸다</a:t>
-            </a:r>
-          </a:p>
-        </p:txBody>
-      </p:sp>
-      <p:sp>
-        <p:nvSpPr>
-          <p:cNvPr id="21" name="TextBox 20"/>
-          <p:cNvSpPr txBox="1"/>
-          <p:nvPr/>
-        </p:nvSpPr>
-        <p:spPr>
-          <a:xfrm>
-            <a:off x="927100" y="3605609"/>
-            <a:ext cx="5041964" cy="603200"/>
-          </a:xfrm>
-          <a:prstGeom prst="rect">
-            <a:avLst/>
-          </a:prstGeom>
-          <a:noFill/>
-        </p:spPr>
-        <p:txBody>
-          <a:bodyPr wrap="square" lIns="0" rIns="0" tIns="0" bIns="0" anchor="t">
-            <a:normAutofit/>
-          </a:bodyPr>
-          <a:lstStyle/>
-          <a:p>
-            <a:pPr>
-              <a:lnSpc>
-                <a:spcPct val="133400"/>
-              </a:lnSpc>
-            </a:pPr>
-            <a:r>
-              <a:rPr sz="1150" b="0" i="0">
-                <a:solidFill>
-                  <a:srgbClr val="16213A"/>
-                </a:solidFill>
-                <a:latin typeface="Arial"/>
-                <a:ea typeface="Malgun Gothic"/>
-                <a:cs typeface="Malgun Gothic"/>
-              </a:rPr>
-              <a:t>RL 기술은 대부분 Isaac Lab에서 표적 도메인 무작위화로 배웠다. 상자를 도구로 여는 동작은 원격조종 데이터의 VLA다.</a:t>
-            </a:r>
-          </a:p>
-        </p:txBody>
-      </p:sp>
-      <p:sp>
-        <p:nvSpPr>
-          <p:cNvPr id="22" name="Rounded Rectangle 21"/>
-          <p:cNvSpPr/>
-          <p:nvPr/>
-        </p:nvSpPr>
-        <p:spPr>
-          <a:xfrm>
-            <a:off x="711200" y="4307880"/>
-            <a:ext cx="5257800" cy="1358801"/>
-          </a:xfrm>
-          <a:prstGeom prst="roundRect">
-            <a:avLst>
-              <a:gd name="adj" fmla="val 5607"/>
-            </a:avLst>
-          </a:prstGeom>
-          <a:solidFill>
-            <a:srgbClr val="FFFDF8"/>
-          </a:solidFill>
-          <a:ln>
-            <a:noFill/>
-          </a:ln>
-        </p:spPr>
-        <p:txBody>
-          <a:bodyPr rtlCol="0" anchor="ctr"/>
-          <a:lstStyle/>
-          <a:p>
-            <a:pPr algn="ctr"/>
-          </a:p>
-        </p:txBody>
-      </p:sp>
-      <p:sp>
-        <p:nvSpPr>
-          <p:cNvPr id="23" name="Rectangle 22"/>
-          <p:cNvSpPr/>
-          <p:nvPr/>
-        </p:nvSpPr>
-        <p:spPr>
-          <a:xfrm>
-            <a:off x="711200" y="4307880"/>
-            <a:ext cx="5257800" cy="6350"/>
-          </a:xfrm>
-          <a:prstGeom prst="rect">
-            <a:avLst/>
-          </a:prstGeom>
-          <a:solidFill>
-            <a:srgbClr val="D9D4C7"/>
-          </a:solidFill>
-          <a:ln>
-            <a:noFill/>
-          </a:ln>
-        </p:spPr>
-        <p:txBody>
-          <a:bodyPr rtlCol="0" anchor="ctr"/>
-          <a:lstStyle/>
-          <a:p>
-            <a:pPr algn="ctr"/>
-          </a:p>
-        </p:txBody>
-      </p:sp>
-      <p:sp>
-        <p:nvSpPr>
-          <p:cNvPr id="24" name="Rectangle 23"/>
-          <p:cNvSpPr/>
-          <p:nvPr/>
-        </p:nvSpPr>
-        <p:spPr>
-          <a:xfrm>
-            <a:off x="5962650" y="4307880"/>
-            <a:ext cx="6350" cy="1358801"/>
-          </a:xfrm>
-          <a:prstGeom prst="rect">
-            <a:avLst/>
-          </a:prstGeom>
-          <a:solidFill>
-            <a:srgbClr val="D9D4C7"/>
-          </a:solidFill>
-          <a:ln>
-            <a:noFill/>
-          </a:ln>
-        </p:spPr>
-        <p:txBody>
-          <a:bodyPr rtlCol="0" anchor="ctr"/>
-          <a:lstStyle/>
-          <a:p>
-            <a:pPr algn="ctr"/>
-          </a:p>
-        </p:txBody>
-      </p:sp>
-      <p:sp>
-        <p:nvSpPr>
-          <p:cNvPr id="25" name="Rectangle 24"/>
-          <p:cNvSpPr/>
-          <p:nvPr/>
-        </p:nvSpPr>
-        <p:spPr>
-          <a:xfrm>
-            <a:off x="711200" y="5660330"/>
-            <a:ext cx="5257800" cy="6350"/>
-          </a:xfrm>
-          <a:prstGeom prst="rect">
-            <a:avLst/>
-          </a:prstGeom>
-          <a:solidFill>
-            <a:srgbClr val="D9D4C7"/>
-          </a:solidFill>
-          <a:ln>
-            <a:noFill/>
-          </a:ln>
-        </p:spPr>
-        <p:txBody>
-          <a:bodyPr rtlCol="0" anchor="ctr"/>
-          <a:lstStyle/>
-          <a:p>
-            <a:pPr algn="ctr"/>
-          </a:p>
-        </p:txBody>
-      </p:sp>
-      <p:sp>
-        <p:nvSpPr>
-          <p:cNvPr id="26" name="Rounded Rectangle 25"/>
-          <p:cNvSpPr/>
-          <p:nvPr/>
-        </p:nvSpPr>
-        <p:spPr>
-          <a:xfrm>
-            <a:off x="711200" y="4307880"/>
-            <a:ext cx="50800" cy="1358801"/>
-          </a:xfrm>
-          <a:prstGeom prst="roundRect">
-            <a:avLst>
-              <a:gd name="adj" fmla="val 50000"/>
-            </a:avLst>
-          </a:prstGeom>
-          <a:solidFill>
-            <a:srgbClr val="15803D"/>
-          </a:solidFill>
-          <a:ln>
-            <a:noFill/>
-          </a:ln>
-        </p:spPr>
-        <p:txBody>
-          <a:bodyPr rtlCol="0" anchor="ctr"/>
-          <a:lstStyle/>
-          <a:p>
-            <a:pPr algn="ctr"/>
-          </a:p>
-        </p:txBody>
-      </p:sp>
-      <p:sp>
-        <p:nvSpPr>
-          <p:cNvPr id="27" name="Rounded Rectangle 26"/>
-          <p:cNvSpPr/>
-          <p:nvPr/>
-        </p:nvSpPr>
-        <p:spPr>
-          <a:xfrm>
-            <a:off x="927100" y="4453930"/>
-            <a:ext cx="550962" cy="241300"/>
-          </a:xfrm>
-          <a:prstGeom prst="roundRect">
-            <a:avLst>
-              <a:gd name="adj" fmla="val 50000"/>
-            </a:avLst>
-          </a:prstGeom>
-          <a:solidFill>
-            <a:srgbClr val="D7EFDD"/>
-          </a:solidFill>
-          <a:ln>
-            <a:noFill/>
-          </a:ln>
-        </p:spPr>
-        <p:txBody>
-          <a:bodyPr rtlCol="0" anchor="ctr"/>
-          <a:lstStyle/>
-          <a:p>
-            <a:pPr algn="ctr"/>
-          </a:p>
-        </p:txBody>
-      </p:sp>
-      <p:sp>
-        <p:nvSpPr>
-          <p:cNvPr id="28" name="TextBox 27"/>
-          <p:cNvSpPr txBox="1"/>
-          <p:nvPr/>
-        </p:nvSpPr>
-        <p:spPr>
-          <a:xfrm>
-            <a:off x="1016000" y="4479330"/>
-            <a:ext cx="409757" cy="288925"/>
-          </a:xfrm>
-          <a:prstGeom prst="rect">
-            <a:avLst/>
-          </a:prstGeom>
-          <a:noFill/>
-        </p:spPr>
-        <p:txBody>
-          <a:bodyPr wrap="square" lIns="0" rIns="0" tIns="0" bIns="0" anchor="t">
-            <a:normAutofit/>
-          </a:bodyPr>
-          <a:lstStyle/>
-          <a:p>
-            <a:pPr>
-              <a:lnSpc>
-                <a:spcPct val="119600"/>
-              </a:lnSpc>
-            </a:pPr>
-            <a:r>
-              <a:rPr sz="950" b="1" i="0">
-                <a:solidFill>
-                  <a:srgbClr val="14532D"/>
-                </a:solidFill>
-                <a:latin typeface="Arial"/>
-                <a:ea typeface="Malgun Gothic"/>
-                <a:cs typeface="Malgun Gothic"/>
-              </a:rPr>
-              <a:t>Reflex</a:t>
-            </a:r>
-          </a:p>
-        </p:txBody>
-      </p:sp>
-      <p:sp>
-        <p:nvSpPr>
-          <p:cNvPr id="29" name="TextBox 28"/>
-          <p:cNvSpPr txBox="1"/>
-          <p:nvPr/>
-        </p:nvSpPr>
-        <p:spPr>
-          <a:xfrm>
-            <a:off x="927100" y="4771430"/>
-            <a:ext cx="5041964" cy="339651"/>
-          </a:xfrm>
-          <a:prstGeom prst="rect">
-            <a:avLst/>
-          </a:prstGeom>
-          <a:noFill/>
-        </p:spPr>
-        <p:txBody>
-          <a:bodyPr wrap="square" lIns="0" rIns="0" tIns="0" bIns="0" anchor="t">
-            <a:normAutofit/>
-          </a:bodyPr>
-          <a:lstStyle/>
-          <a:p>
-            <a:pPr>
-              <a:lnSpc>
-                <a:spcPct val="119600"/>
-              </a:lnSpc>
-            </a:pPr>
-            <a:r>
-              <a:rPr sz="1350" b="1" i="0">
-                <a:solidFill>
-                  <a:srgbClr val="16213A"/>
-                </a:solidFill>
-                <a:latin typeface="Arial"/>
-                <a:ea typeface="Malgun Gothic"/>
-                <a:cs typeface="Malgun Gothic"/>
-              </a:rPr>
-              <a:t>궤적을 모터 명령으로</a:t>
-            </a:r>
-          </a:p>
-        </p:txBody>
-      </p:sp>
-      <p:sp>
-        <p:nvSpPr>
-          <p:cNvPr id="30" name="TextBox 29"/>
-          <p:cNvSpPr txBox="1"/>
-          <p:nvPr/>
-        </p:nvSpPr>
-        <p:spPr>
-          <a:xfrm>
-            <a:off x="927100" y="5078710"/>
-            <a:ext cx="5041964" cy="603200"/>
-          </a:xfrm>
-          <a:prstGeom prst="rect">
-            <a:avLst/>
-          </a:prstGeom>
-          <a:noFill/>
-        </p:spPr>
-        <p:txBody>
-          <a:bodyPr wrap="square" lIns="0" rIns="0" tIns="0" bIns="0" anchor="t">
-            <a:normAutofit/>
-          </a:bodyPr>
-          <a:lstStyle/>
-          <a:p>
-            <a:pPr>
-              <a:lnSpc>
-                <a:spcPct val="133400"/>
-              </a:lnSpc>
-            </a:pPr>
-            <a:r>
-              <a:rPr sz="1150" b="0" i="0">
-                <a:solidFill>
-                  <a:srgbClr val="16213A"/>
-                </a:solidFill>
-                <a:latin typeface="Arial"/>
-                <a:ea typeface="Malgun Gothic"/>
-                <a:cs typeface="Malgun Gothic"/>
-              </a:rPr>
-              <a:t>힘을 아는 전신 제어기다. 로봇마다 적은 수고로 학습해 배포한다고 적었고 구조는 밝히지 않았다.</a:t>
-            </a:r>
-          </a:p>
-        </p:txBody>
-      </p:sp>
-      <p:sp>
-        <p:nvSpPr>
-          <p:cNvPr id="31" name="Rounded Rectangle 30"/>
-          <p:cNvSpPr/>
-          <p:nvPr/>
-        </p:nvSpPr>
-        <p:spPr>
-          <a:xfrm>
-            <a:off x="6223000" y="1361678"/>
-            <a:ext cx="5257800" cy="2730500"/>
-          </a:xfrm>
-          <a:prstGeom prst="roundRect">
-            <a:avLst>
-              <a:gd name="adj" fmla="val 1860"/>
-            </a:avLst>
-          </a:prstGeom>
-          <a:solidFill>
-            <a:srgbClr val="FFFFFF"/>
-          </a:solidFill>
-          <a:ln w="6350">
-            <a:solidFill>
-              <a:srgbClr val="D9D4C7"/>
-            </a:solidFill>
-          </a:ln>
-        </p:spPr>
-        <p:txBody>
-          <a:bodyPr rtlCol="0" anchor="ctr"/>
-          <a:lstStyle/>
-          <a:p>
-            <a:pPr algn="ctr"/>
-          </a:p>
-        </p:txBody>
-      </p:sp>
-      <p:pic>
-        <p:nvPicPr>
-          <p:cNvPr id="32" name="Picture 31" descr="image.jpg"/>
-          <p:cNvPicPr>
-            <a:picLocks noChangeAspect="1"/>
-          </p:cNvPicPr>
-          <p:nvPr/>
-        </p:nvPicPr>
-        <p:blipFill>
-          <a:blip r:embed="rId2"/>
-          <a:stretch>
-            <a:fillRect/>
-          </a:stretch>
-        </p:blipFill>
-        <p:spPr>
-          <a:xfrm>
-            <a:off x="6223000" y="1748977"/>
-            <a:ext cx="5257800" cy="1955902"/>
-          </a:xfrm>
-          <a:prstGeom prst="rect">
-            <a:avLst/>
-          </a:prstGeom>
-        </p:spPr>
-      </p:pic>
-      <p:sp>
-        <p:nvSpPr>
-          <p:cNvPr id="33" name="TextBox 32"/>
-          <p:cNvSpPr txBox="1"/>
-          <p:nvPr/>
-        </p:nvSpPr>
-        <p:spPr>
-          <a:xfrm>
-            <a:off x="6223000" y="4155678"/>
-            <a:ext cx="5440934" cy="495300"/>
-          </a:xfrm>
-          <a:prstGeom prst="rect">
-            <a:avLst/>
-          </a:prstGeom>
-          <a:noFill/>
-        </p:spPr>
-        <p:txBody>
-          <a:bodyPr wrap="square" lIns="0" rIns="0" tIns="0" bIns="0" anchor="t">
-            <a:normAutofit/>
-          </a:bodyPr>
-          <a:lstStyle/>
-          <a:p>
-            <a:pPr>
-              <a:lnSpc>
-                <a:spcPct val="128800"/>
-              </a:lnSpc>
-            </a:pPr>
-            <a:r>
-              <a:rPr sz="950" b="0" i="0">
-                <a:solidFill>
-                  <a:srgbClr val="5A6478"/>
-                </a:solidFill>
-                <a:latin typeface="Arial"/>
-                <a:ea typeface="Malgun Gothic"/>
-                <a:cs typeface="Malgun Gothic"/>
-              </a:rPr>
-              <a:t>Reflect v1.0 구조도: Agent가 임무를 하위 과제로 바꾸고 의미 지도를 도구로 부른다. Motion Generator가 짧은 궤적을, Whole-Body Controller가 모터 명령을 낸다 — flexion.ai(회사 블로그)</a:t>
-            </a:r>
-          </a:p>
-        </p:txBody>
-      </p:sp>
-      <p:sp>
-        <p:nvSpPr>
-          <p:cNvPr id="34" name="Rectangle 33"/>
-          <p:cNvSpPr/>
-          <p:nvPr/>
-        </p:nvSpPr>
-        <p:spPr>
-          <a:xfrm>
-            <a:off x="711200" y="6424315"/>
-            <a:ext cx="10769600" cy="230485"/>
-          </a:xfrm>
-          <a:prstGeom prst="rect">
-            <a:avLst/>
-          </a:prstGeom>
-          <a:noFill/>
-          <a:ln>
-            <a:noFill/>
-          </a:ln>
-        </p:spPr>
-        <p:txBody>
-          <a:bodyPr rtlCol="0" anchor="ctr"/>
-          <a:lstStyle/>
-          <a:p>
-            <a:pPr algn="ctr"/>
-          </a:p>
-        </p:txBody>
-      </p:sp>
-      <p:sp>
-        <p:nvSpPr>
-          <p:cNvPr id="35" name="Rectangle 34"/>
-          <p:cNvSpPr/>
-          <p:nvPr/>
-        </p:nvSpPr>
-        <p:spPr>
-          <a:xfrm>
-            <a:off x="711200" y="6424315"/>
-            <a:ext cx="10769600" cy="12700"/>
-          </a:xfrm>
-          <a:prstGeom prst="rect">
-            <a:avLst/>
-          </a:prstGeom>
-          <a:solidFill>
-            <a:srgbClr val="D9D4C7"/>
-          </a:solidFill>
-          <a:ln>
-            <a:noFill/>
-          </a:ln>
-        </p:spPr>
-        <p:txBody>
-          <a:bodyPr rtlCol="0" anchor="ctr"/>
-          <a:lstStyle/>
-          <a:p>
-            <a:pPr algn="ctr"/>
-          </a:p>
-        </p:txBody>
-      </p:sp>
-      <p:sp>
-        <p:nvSpPr>
-          <p:cNvPr id="36" name="TextBox 35"/>
-          <p:cNvSpPr txBox="1"/>
-          <p:nvPr/>
-        </p:nvSpPr>
-        <p:spPr>
-          <a:xfrm>
-            <a:off x="711200" y="6500515"/>
-            <a:ext cx="11118088" cy="243656"/>
-          </a:xfrm>
-          <a:prstGeom prst="rect">
-            <a:avLst/>
-          </a:prstGeom>
-          <a:noFill/>
-        </p:spPr>
-        <p:txBody>
-          <a:bodyPr wrap="square" lIns="0" rIns="0" tIns="0" bIns="0" anchor="t">
-            <a:normAutofit/>
-          </a:bodyPr>
-          <a:lstStyle/>
-          <a:p>
-            <a:pPr>
-              <a:lnSpc>
-                <a:spcPct val="124200"/>
-              </a:lnSpc>
-            </a:pPr>
-            <a:r>
-              <a:rPr sz="850" b="0" i="0">
-                <a:solidFill>
-                  <a:srgbClr val="5A6478"/>
-                </a:solidFill>
-                <a:latin typeface="Arial"/>
-                <a:ea typeface="Malgun Gothic"/>
-                <a:cs typeface="Malgun Gothic"/>
-              </a:rPr>
-              <a:t>[1] Flexion Reflect v1.0 — flexion.ai/news/flexion-reflect-v1.0(2026-06-29, 회사 블로그). 논문·코드 없음</a:t>
             </a:r>
           </a:p>
         </p:txBody>
@@ -21105,7 +20841,7 @@
                 <a:ea typeface="Malgun Gothic"/>
                 <a:cs typeface="Malgun Gothic"/>
               </a:rPr>
-              <a:t>B.16.3 · Reflect v1.0 평가</a:t>
+              <a:t>B.16.3 · Flexion Reflect v1.0</a:t>
             </a:r>
           </a:p>
         </p:txBody>
@@ -21146,7 +20882,7 @@
                 <a:ea typeface="Malgun Gothic"/>
                 <a:cs typeface="Malgun Gothic"/>
               </a:rPr>
-              <a:t>16단계 임무를 실수 없이 끝까지 간 비율: SFT 38 %, SFT+RL 90 %</a:t>
+              <a:t>임무 VLM, 운동 층, 전신 제어기 Reflex의 세 층을 RL로 다듬는다</a:t>
             </a:r>
           </a:p>
         </p:txBody>
@@ -21160,11 +20896,953 @@
         <p:spPr>
           <a:xfrm>
             <a:off x="711200" y="1361678"/>
-            <a:ext cx="5257800" cy="2413000"/>
+            <a:ext cx="5257800" cy="1358801"/>
           </a:xfrm>
           <a:prstGeom prst="roundRect">
             <a:avLst>
-              <a:gd name="adj" fmla="val 2105"/>
+              <a:gd name="adj" fmla="val 5607"/>
+            </a:avLst>
+          </a:prstGeom>
+          <a:solidFill>
+            <a:srgbClr val="FFFDF8"/>
+          </a:solidFill>
+          <a:ln>
+            <a:noFill/>
+          </a:ln>
+        </p:spPr>
+        <p:txBody>
+          <a:bodyPr rtlCol="0" anchor="ctr"/>
+          <a:lstStyle/>
+          <a:p>
+            <a:pPr algn="ctr"/>
+          </a:p>
+        </p:txBody>
+      </p:sp>
+      <p:sp>
+        <p:nvSpPr>
+          <p:cNvPr id="5" name="Rectangle 4"/>
+          <p:cNvSpPr/>
+          <p:nvPr/>
+        </p:nvSpPr>
+        <p:spPr>
+          <a:xfrm>
+            <a:off x="711200" y="1361678"/>
+            <a:ext cx="5257800" cy="6350"/>
+          </a:xfrm>
+          <a:prstGeom prst="rect">
+            <a:avLst/>
+          </a:prstGeom>
+          <a:solidFill>
+            <a:srgbClr val="D9D4C7"/>
+          </a:solidFill>
+          <a:ln>
+            <a:noFill/>
+          </a:ln>
+        </p:spPr>
+        <p:txBody>
+          <a:bodyPr rtlCol="0" anchor="ctr"/>
+          <a:lstStyle/>
+          <a:p>
+            <a:pPr algn="ctr"/>
+          </a:p>
+        </p:txBody>
+      </p:sp>
+      <p:sp>
+        <p:nvSpPr>
+          <p:cNvPr id="6" name="Rectangle 5"/>
+          <p:cNvSpPr/>
+          <p:nvPr/>
+        </p:nvSpPr>
+        <p:spPr>
+          <a:xfrm>
+            <a:off x="5962650" y="1361678"/>
+            <a:ext cx="6350" cy="1358801"/>
+          </a:xfrm>
+          <a:prstGeom prst="rect">
+            <a:avLst/>
+          </a:prstGeom>
+          <a:solidFill>
+            <a:srgbClr val="D9D4C7"/>
+          </a:solidFill>
+          <a:ln>
+            <a:noFill/>
+          </a:ln>
+        </p:spPr>
+        <p:txBody>
+          <a:bodyPr rtlCol="0" anchor="ctr"/>
+          <a:lstStyle/>
+          <a:p>
+            <a:pPr algn="ctr"/>
+          </a:p>
+        </p:txBody>
+      </p:sp>
+      <p:sp>
+        <p:nvSpPr>
+          <p:cNvPr id="7" name="Rectangle 6"/>
+          <p:cNvSpPr/>
+          <p:nvPr/>
+        </p:nvSpPr>
+        <p:spPr>
+          <a:xfrm>
+            <a:off x="711200" y="2714129"/>
+            <a:ext cx="5257800" cy="6350"/>
+          </a:xfrm>
+          <a:prstGeom prst="rect">
+            <a:avLst/>
+          </a:prstGeom>
+          <a:solidFill>
+            <a:srgbClr val="D9D4C7"/>
+          </a:solidFill>
+          <a:ln>
+            <a:noFill/>
+          </a:ln>
+        </p:spPr>
+        <p:txBody>
+          <a:bodyPr rtlCol="0" anchor="ctr"/>
+          <a:lstStyle/>
+          <a:p>
+            <a:pPr algn="ctr"/>
+          </a:p>
+        </p:txBody>
+      </p:sp>
+      <p:sp>
+        <p:nvSpPr>
+          <p:cNvPr id="8" name="Rounded Rectangle 7"/>
+          <p:cNvSpPr/>
+          <p:nvPr/>
+        </p:nvSpPr>
+        <p:spPr>
+          <a:xfrm>
+            <a:off x="711200" y="1361678"/>
+            <a:ext cx="50800" cy="1358801"/>
+          </a:xfrm>
+          <a:prstGeom prst="roundRect">
+            <a:avLst>
+              <a:gd name="adj" fmla="val 50000"/>
+            </a:avLst>
+          </a:prstGeom>
+          <a:solidFill>
+            <a:srgbClr val="1D4ED8"/>
+          </a:solidFill>
+          <a:ln>
+            <a:noFill/>
+          </a:ln>
+        </p:spPr>
+        <p:txBody>
+          <a:bodyPr rtlCol="0" anchor="ctr"/>
+          <a:lstStyle/>
+          <a:p>
+            <a:pPr algn="ctr"/>
+          </a:p>
+        </p:txBody>
+      </p:sp>
+      <p:sp>
+        <p:nvSpPr>
+          <p:cNvPr id="9" name="Rounded Rectangle 8"/>
+          <p:cNvSpPr/>
+          <p:nvPr/>
+        </p:nvSpPr>
+        <p:spPr>
+          <a:xfrm>
+            <a:off x="927100" y="1507728"/>
+            <a:ext cx="685205" cy="241300"/>
+          </a:xfrm>
+          <a:prstGeom prst="roundRect">
+            <a:avLst>
+              <a:gd name="adj" fmla="val 50000"/>
+            </a:avLst>
+          </a:prstGeom>
+          <a:solidFill>
+            <a:srgbClr val="DBE5FB"/>
+          </a:solidFill>
+          <a:ln>
+            <a:noFill/>
+          </a:ln>
+        </p:spPr>
+        <p:txBody>
+          <a:bodyPr rtlCol="0" anchor="ctr"/>
+          <a:lstStyle/>
+          <a:p>
+            <a:pPr algn="ctr"/>
+          </a:p>
+        </p:txBody>
+      </p:sp>
+      <p:sp>
+        <p:nvSpPr>
+          <p:cNvPr id="10" name="TextBox 9"/>
+          <p:cNvSpPr txBox="1"/>
+          <p:nvPr/>
+        </p:nvSpPr>
+        <p:spPr>
+          <a:xfrm>
+            <a:off x="1016000" y="1533128"/>
+            <a:ext cx="548027" cy="288925"/>
+          </a:xfrm>
+          <a:prstGeom prst="rect">
+            <a:avLst/>
+          </a:prstGeom>
+          <a:noFill/>
+        </p:spPr>
+        <p:txBody>
+          <a:bodyPr wrap="square" lIns="0" rIns="0" tIns="0" bIns="0" anchor="t">
+            <a:normAutofit/>
+          </a:bodyPr>
+          <a:lstStyle/>
+          <a:p>
+            <a:pPr>
+              <a:lnSpc>
+                <a:spcPct val="119600"/>
+              </a:lnSpc>
+            </a:pPr>
+            <a:r>
+              <a:rPr sz="950" b="1" i="0">
+                <a:solidFill>
+                  <a:srgbClr val="1E3A8A"/>
+                </a:solidFill>
+                <a:latin typeface="Arial"/>
+                <a:ea typeface="Malgun Gothic"/>
+                <a:cs typeface="Malgun Gothic"/>
+              </a:rPr>
+              <a:t>임무 VLM</a:t>
+            </a:r>
+          </a:p>
+        </p:txBody>
+      </p:sp>
+      <p:sp>
+        <p:nvSpPr>
+          <p:cNvPr id="11" name="TextBox 10"/>
+          <p:cNvSpPr txBox="1"/>
+          <p:nvPr/>
+        </p:nvSpPr>
+        <p:spPr>
+          <a:xfrm>
+            <a:off x="927100" y="1825228"/>
+            <a:ext cx="5041964" cy="339651"/>
+          </a:xfrm>
+          <a:prstGeom prst="rect">
+            <a:avLst/>
+          </a:prstGeom>
+          <a:noFill/>
+        </p:spPr>
+        <p:txBody>
+          <a:bodyPr wrap="square" lIns="0" rIns="0" tIns="0" bIns="0" anchor="t">
+            <a:normAutofit/>
+          </a:bodyPr>
+          <a:lstStyle/>
+          <a:p>
+            <a:pPr>
+              <a:lnSpc>
+                <a:spcPct val="119600"/>
+              </a:lnSpc>
+            </a:pPr>
+            <a:r>
+              <a:rPr sz="1350" b="1" i="0">
+                <a:solidFill>
+                  <a:srgbClr val="16213A"/>
+                </a:solidFill>
+                <a:latin typeface="Arial"/>
+                <a:ea typeface="Malgun Gothic"/>
+                <a:cs typeface="Malgun Gothic"/>
+              </a:rPr>
+              <a:t>1인칭 영상을 보며 도구를 하나씩 부른다</a:t>
+            </a:r>
+          </a:p>
+        </p:txBody>
+      </p:sp>
+      <p:sp>
+        <p:nvSpPr>
+          <p:cNvPr id="12" name="TextBox 11"/>
+          <p:cNvSpPr txBox="1"/>
+          <p:nvPr/>
+        </p:nvSpPr>
+        <p:spPr>
+          <a:xfrm>
+            <a:off x="927100" y="2132509"/>
+            <a:ext cx="5041964" cy="603200"/>
+          </a:xfrm>
+          <a:prstGeom prst="rect">
+            <a:avLst/>
+          </a:prstGeom>
+          <a:noFill/>
+        </p:spPr>
+        <p:txBody>
+          <a:bodyPr wrap="square" lIns="0" rIns="0" tIns="0" bIns="0" anchor="t">
+            <a:normAutofit/>
+          </a:bodyPr>
+          <a:lstStyle/>
+          <a:p>
+            <a:pPr>
+              <a:lnSpc>
+                <a:spcPct val="133400"/>
+              </a:lnSpc>
+            </a:pPr>
+            <a:r>
+              <a:rPr sz="1000" b="0" i="0">
+                <a:solidFill>
+                  <a:srgbClr val="7C2D12"/>
+                </a:solidFill>
+                <a:latin typeface="Consolas"/>
+                <a:ea typeface="Malgun Gothic"/>
+                <a:cs typeface="Malgun Gothic"/>
+              </a:rPr>
+              <a:t>navigate global</a:t>
+            </a:r>
+            <a:r>
+              <a:rPr sz="1150" b="0" i="0">
+                <a:solidFill>
+                  <a:srgbClr val="16213A"/>
+                </a:solidFill>
+                <a:latin typeface="Arial"/>
+                <a:ea typeface="Malgun Gothic"/>
+                <a:cs typeface="Malgun Gothic"/>
+              </a:rPr>
+              <a:t>, </a:t>
+            </a:r>
+            <a:r>
+              <a:rPr sz="1000" b="0" i="0">
+                <a:solidFill>
+                  <a:srgbClr val="7C2D12"/>
+                </a:solidFill>
+                <a:latin typeface="Consolas"/>
+                <a:ea typeface="Malgun Gothic"/>
+                <a:cs typeface="Malgun Gothic"/>
+              </a:rPr>
+              <a:t>move to object</a:t>
+            </a:r>
+            <a:r>
+              <a:rPr sz="1150" b="0" i="0">
+                <a:solidFill>
+                  <a:srgbClr val="16213A"/>
+                </a:solidFill>
+                <a:latin typeface="Arial"/>
+                <a:ea typeface="Malgun Gothic"/>
+                <a:cs typeface="Malgun Gothic"/>
+              </a:rPr>
+              <a:t> 같은 도구다. 의미 지도 도구에 문장으로 장소를 묻고 전역 경로를 받는다.</a:t>
+            </a:r>
+          </a:p>
+        </p:txBody>
+      </p:sp>
+      <p:sp>
+        <p:nvSpPr>
+          <p:cNvPr id="13" name="Rounded Rectangle 12"/>
+          <p:cNvSpPr/>
+          <p:nvPr/>
+        </p:nvSpPr>
+        <p:spPr>
+          <a:xfrm>
+            <a:off x="711200" y="2834779"/>
+            <a:ext cx="5257800" cy="1358801"/>
+          </a:xfrm>
+          <a:prstGeom prst="roundRect">
+            <a:avLst>
+              <a:gd name="adj" fmla="val 5607"/>
+            </a:avLst>
+          </a:prstGeom>
+          <a:solidFill>
+            <a:srgbClr val="FFFDF8"/>
+          </a:solidFill>
+          <a:ln>
+            <a:noFill/>
+          </a:ln>
+        </p:spPr>
+        <p:txBody>
+          <a:bodyPr rtlCol="0" anchor="ctr"/>
+          <a:lstStyle/>
+          <a:p>
+            <a:pPr algn="ctr"/>
+          </a:p>
+        </p:txBody>
+      </p:sp>
+      <p:sp>
+        <p:nvSpPr>
+          <p:cNvPr id="14" name="Rectangle 13"/>
+          <p:cNvSpPr/>
+          <p:nvPr/>
+        </p:nvSpPr>
+        <p:spPr>
+          <a:xfrm>
+            <a:off x="711200" y="2834779"/>
+            <a:ext cx="5257800" cy="6350"/>
+          </a:xfrm>
+          <a:prstGeom prst="rect">
+            <a:avLst/>
+          </a:prstGeom>
+          <a:solidFill>
+            <a:srgbClr val="D9D4C7"/>
+          </a:solidFill>
+          <a:ln>
+            <a:noFill/>
+          </a:ln>
+        </p:spPr>
+        <p:txBody>
+          <a:bodyPr rtlCol="0" anchor="ctr"/>
+          <a:lstStyle/>
+          <a:p>
+            <a:pPr algn="ctr"/>
+          </a:p>
+        </p:txBody>
+      </p:sp>
+      <p:sp>
+        <p:nvSpPr>
+          <p:cNvPr id="15" name="Rectangle 14"/>
+          <p:cNvSpPr/>
+          <p:nvPr/>
+        </p:nvSpPr>
+        <p:spPr>
+          <a:xfrm>
+            <a:off x="5962650" y="2834779"/>
+            <a:ext cx="6350" cy="1358801"/>
+          </a:xfrm>
+          <a:prstGeom prst="rect">
+            <a:avLst/>
+          </a:prstGeom>
+          <a:solidFill>
+            <a:srgbClr val="D9D4C7"/>
+          </a:solidFill>
+          <a:ln>
+            <a:noFill/>
+          </a:ln>
+        </p:spPr>
+        <p:txBody>
+          <a:bodyPr rtlCol="0" anchor="ctr"/>
+          <a:lstStyle/>
+          <a:p>
+            <a:pPr algn="ctr"/>
+          </a:p>
+        </p:txBody>
+      </p:sp>
+      <p:sp>
+        <p:nvSpPr>
+          <p:cNvPr id="16" name="Rectangle 15"/>
+          <p:cNvSpPr/>
+          <p:nvPr/>
+        </p:nvSpPr>
+        <p:spPr>
+          <a:xfrm>
+            <a:off x="711200" y="4187230"/>
+            <a:ext cx="5257800" cy="6350"/>
+          </a:xfrm>
+          <a:prstGeom prst="rect">
+            <a:avLst/>
+          </a:prstGeom>
+          <a:solidFill>
+            <a:srgbClr val="D9D4C7"/>
+          </a:solidFill>
+          <a:ln>
+            <a:noFill/>
+          </a:ln>
+        </p:spPr>
+        <p:txBody>
+          <a:bodyPr rtlCol="0" anchor="ctr"/>
+          <a:lstStyle/>
+          <a:p>
+            <a:pPr algn="ctr"/>
+          </a:p>
+        </p:txBody>
+      </p:sp>
+      <p:sp>
+        <p:nvSpPr>
+          <p:cNvPr id="17" name="Rounded Rectangle 16"/>
+          <p:cNvSpPr/>
+          <p:nvPr/>
+        </p:nvSpPr>
+        <p:spPr>
+          <a:xfrm>
+            <a:off x="711200" y="2834779"/>
+            <a:ext cx="50800" cy="1358801"/>
+          </a:xfrm>
+          <a:prstGeom prst="roundRect">
+            <a:avLst>
+              <a:gd name="adj" fmla="val 50000"/>
+            </a:avLst>
+          </a:prstGeom>
+          <a:solidFill>
+            <a:srgbClr val="C2410C"/>
+          </a:solidFill>
+          <a:ln>
+            <a:noFill/>
+          </a:ln>
+        </p:spPr>
+        <p:txBody>
+          <a:bodyPr rtlCol="0" anchor="ctr"/>
+          <a:lstStyle/>
+          <a:p>
+            <a:pPr algn="ctr"/>
+          </a:p>
+        </p:txBody>
+      </p:sp>
+      <p:sp>
+        <p:nvSpPr>
+          <p:cNvPr id="18" name="Rounded Rectangle 17"/>
+          <p:cNvSpPr/>
+          <p:nvPr/>
+        </p:nvSpPr>
+        <p:spPr>
+          <a:xfrm>
+            <a:off x="927100" y="2980829"/>
+            <a:ext cx="547688" cy="241300"/>
+          </a:xfrm>
+          <a:prstGeom prst="roundRect">
+            <a:avLst>
+              <a:gd name="adj" fmla="val 50000"/>
+            </a:avLst>
+          </a:prstGeom>
+          <a:solidFill>
+            <a:srgbClr val="FDE7C8"/>
+          </a:solidFill>
+          <a:ln>
+            <a:noFill/>
+          </a:ln>
+        </p:spPr>
+        <p:txBody>
+          <a:bodyPr rtlCol="0" anchor="ctr"/>
+          <a:lstStyle/>
+          <a:p>
+            <a:pPr algn="ctr"/>
+          </a:p>
+        </p:txBody>
+      </p:sp>
+      <p:sp>
+        <p:nvSpPr>
+          <p:cNvPr id="19" name="TextBox 18"/>
+          <p:cNvSpPr txBox="1"/>
+          <p:nvPr/>
+        </p:nvSpPr>
+        <p:spPr>
+          <a:xfrm>
+            <a:off x="1016000" y="3006229"/>
+            <a:ext cx="406384" cy="288925"/>
+          </a:xfrm>
+          <a:prstGeom prst="rect">
+            <a:avLst/>
+          </a:prstGeom>
+          <a:noFill/>
+        </p:spPr>
+        <p:txBody>
+          <a:bodyPr wrap="square" lIns="0" rIns="0" tIns="0" bIns="0" anchor="t">
+            <a:normAutofit/>
+          </a:bodyPr>
+          <a:lstStyle/>
+          <a:p>
+            <a:pPr>
+              <a:lnSpc>
+                <a:spcPct val="119600"/>
+              </a:lnSpc>
+            </a:pPr>
+            <a:r>
+              <a:rPr sz="950" b="1" i="0">
+                <a:solidFill>
+                  <a:srgbClr val="7C2D12"/>
+                </a:solidFill>
+                <a:latin typeface="Arial"/>
+                <a:ea typeface="Malgun Gothic"/>
+                <a:cs typeface="Malgun Gothic"/>
+              </a:rPr>
+              <a:t>운동 층</a:t>
+            </a:r>
+          </a:p>
+        </p:txBody>
+      </p:sp>
+      <p:sp>
+        <p:nvSpPr>
+          <p:cNvPr id="20" name="TextBox 19"/>
+          <p:cNvSpPr txBox="1"/>
+          <p:nvPr/>
+        </p:nvSpPr>
+        <p:spPr>
+          <a:xfrm>
+            <a:off x="927100" y="3298329"/>
+            <a:ext cx="5041964" cy="339651"/>
+          </a:xfrm>
+          <a:prstGeom prst="rect">
+            <a:avLst/>
+          </a:prstGeom>
+          <a:noFill/>
+        </p:spPr>
+        <p:txBody>
+          <a:bodyPr wrap="square" lIns="0" rIns="0" tIns="0" bIns="0" anchor="t">
+            <a:normAutofit/>
+          </a:bodyPr>
+          <a:lstStyle/>
+          <a:p>
+            <a:pPr>
+              <a:lnSpc>
+                <a:spcPct val="119600"/>
+              </a:lnSpc>
+            </a:pPr>
+            <a:r>
+              <a:rPr sz="1350" b="1" i="0">
+                <a:solidFill>
+                  <a:srgbClr val="16213A"/>
+                </a:solidFill>
+                <a:latin typeface="Arial"/>
+                <a:ea typeface="Malgun Gothic"/>
+                <a:cs typeface="Malgun Gothic"/>
+              </a:rPr>
+              <a:t>VLA와 RL 기술이 짧은 궤적을 낸다</a:t>
+            </a:r>
+          </a:p>
+        </p:txBody>
+      </p:sp>
+      <p:sp>
+        <p:nvSpPr>
+          <p:cNvPr id="21" name="TextBox 20"/>
+          <p:cNvSpPr txBox="1"/>
+          <p:nvPr/>
+        </p:nvSpPr>
+        <p:spPr>
+          <a:xfrm>
+            <a:off x="927100" y="3605609"/>
+            <a:ext cx="5041964" cy="603200"/>
+          </a:xfrm>
+          <a:prstGeom prst="rect">
+            <a:avLst/>
+          </a:prstGeom>
+          <a:noFill/>
+        </p:spPr>
+        <p:txBody>
+          <a:bodyPr wrap="square" lIns="0" rIns="0" tIns="0" bIns="0" anchor="t">
+            <a:normAutofit/>
+          </a:bodyPr>
+          <a:lstStyle/>
+          <a:p>
+            <a:pPr>
+              <a:lnSpc>
+                <a:spcPct val="133400"/>
+              </a:lnSpc>
+            </a:pPr>
+            <a:r>
+              <a:rPr sz="1150" b="0" i="0">
+                <a:solidFill>
+                  <a:srgbClr val="16213A"/>
+                </a:solidFill>
+                <a:latin typeface="Arial"/>
+                <a:ea typeface="Malgun Gothic"/>
+                <a:cs typeface="Malgun Gothic"/>
+              </a:rPr>
+              <a:t>RL 기술은 대부분 Isaac Lab에서 표적 도메인 무작위화로 배웠다. 상자를 도구로 여는 동작은 원격조종 데이터의 VLA다.</a:t>
+            </a:r>
+          </a:p>
+        </p:txBody>
+      </p:sp>
+      <p:sp>
+        <p:nvSpPr>
+          <p:cNvPr id="22" name="Rounded Rectangle 21"/>
+          <p:cNvSpPr/>
+          <p:nvPr/>
+        </p:nvSpPr>
+        <p:spPr>
+          <a:xfrm>
+            <a:off x="711200" y="4307880"/>
+            <a:ext cx="5257800" cy="1358801"/>
+          </a:xfrm>
+          <a:prstGeom prst="roundRect">
+            <a:avLst>
+              <a:gd name="adj" fmla="val 5607"/>
+            </a:avLst>
+          </a:prstGeom>
+          <a:solidFill>
+            <a:srgbClr val="FFFDF8"/>
+          </a:solidFill>
+          <a:ln>
+            <a:noFill/>
+          </a:ln>
+        </p:spPr>
+        <p:txBody>
+          <a:bodyPr rtlCol="0" anchor="ctr"/>
+          <a:lstStyle/>
+          <a:p>
+            <a:pPr algn="ctr"/>
+          </a:p>
+        </p:txBody>
+      </p:sp>
+      <p:sp>
+        <p:nvSpPr>
+          <p:cNvPr id="23" name="Rectangle 22"/>
+          <p:cNvSpPr/>
+          <p:nvPr/>
+        </p:nvSpPr>
+        <p:spPr>
+          <a:xfrm>
+            <a:off x="711200" y="4307880"/>
+            <a:ext cx="5257800" cy="6350"/>
+          </a:xfrm>
+          <a:prstGeom prst="rect">
+            <a:avLst/>
+          </a:prstGeom>
+          <a:solidFill>
+            <a:srgbClr val="D9D4C7"/>
+          </a:solidFill>
+          <a:ln>
+            <a:noFill/>
+          </a:ln>
+        </p:spPr>
+        <p:txBody>
+          <a:bodyPr rtlCol="0" anchor="ctr"/>
+          <a:lstStyle/>
+          <a:p>
+            <a:pPr algn="ctr"/>
+          </a:p>
+        </p:txBody>
+      </p:sp>
+      <p:sp>
+        <p:nvSpPr>
+          <p:cNvPr id="24" name="Rectangle 23"/>
+          <p:cNvSpPr/>
+          <p:nvPr/>
+        </p:nvSpPr>
+        <p:spPr>
+          <a:xfrm>
+            <a:off x="5962650" y="4307880"/>
+            <a:ext cx="6350" cy="1358801"/>
+          </a:xfrm>
+          <a:prstGeom prst="rect">
+            <a:avLst/>
+          </a:prstGeom>
+          <a:solidFill>
+            <a:srgbClr val="D9D4C7"/>
+          </a:solidFill>
+          <a:ln>
+            <a:noFill/>
+          </a:ln>
+        </p:spPr>
+        <p:txBody>
+          <a:bodyPr rtlCol="0" anchor="ctr"/>
+          <a:lstStyle/>
+          <a:p>
+            <a:pPr algn="ctr"/>
+          </a:p>
+        </p:txBody>
+      </p:sp>
+      <p:sp>
+        <p:nvSpPr>
+          <p:cNvPr id="25" name="Rectangle 24"/>
+          <p:cNvSpPr/>
+          <p:nvPr/>
+        </p:nvSpPr>
+        <p:spPr>
+          <a:xfrm>
+            <a:off x="711200" y="5660330"/>
+            <a:ext cx="5257800" cy="6350"/>
+          </a:xfrm>
+          <a:prstGeom prst="rect">
+            <a:avLst/>
+          </a:prstGeom>
+          <a:solidFill>
+            <a:srgbClr val="D9D4C7"/>
+          </a:solidFill>
+          <a:ln>
+            <a:noFill/>
+          </a:ln>
+        </p:spPr>
+        <p:txBody>
+          <a:bodyPr rtlCol="0" anchor="ctr"/>
+          <a:lstStyle/>
+          <a:p>
+            <a:pPr algn="ctr"/>
+          </a:p>
+        </p:txBody>
+      </p:sp>
+      <p:sp>
+        <p:nvSpPr>
+          <p:cNvPr id="26" name="Rounded Rectangle 25"/>
+          <p:cNvSpPr/>
+          <p:nvPr/>
+        </p:nvSpPr>
+        <p:spPr>
+          <a:xfrm>
+            <a:off x="711200" y="4307880"/>
+            <a:ext cx="50800" cy="1358801"/>
+          </a:xfrm>
+          <a:prstGeom prst="roundRect">
+            <a:avLst>
+              <a:gd name="adj" fmla="val 50000"/>
+            </a:avLst>
+          </a:prstGeom>
+          <a:solidFill>
+            <a:srgbClr val="15803D"/>
+          </a:solidFill>
+          <a:ln>
+            <a:noFill/>
+          </a:ln>
+        </p:spPr>
+        <p:txBody>
+          <a:bodyPr rtlCol="0" anchor="ctr"/>
+          <a:lstStyle/>
+          <a:p>
+            <a:pPr algn="ctr"/>
+          </a:p>
+        </p:txBody>
+      </p:sp>
+      <p:sp>
+        <p:nvSpPr>
+          <p:cNvPr id="27" name="Rounded Rectangle 26"/>
+          <p:cNvSpPr/>
+          <p:nvPr/>
+        </p:nvSpPr>
+        <p:spPr>
+          <a:xfrm>
+            <a:off x="927100" y="4453930"/>
+            <a:ext cx="550962" cy="241300"/>
+          </a:xfrm>
+          <a:prstGeom prst="roundRect">
+            <a:avLst>
+              <a:gd name="adj" fmla="val 50000"/>
+            </a:avLst>
+          </a:prstGeom>
+          <a:solidFill>
+            <a:srgbClr val="D7EFDD"/>
+          </a:solidFill>
+          <a:ln>
+            <a:noFill/>
+          </a:ln>
+        </p:spPr>
+        <p:txBody>
+          <a:bodyPr rtlCol="0" anchor="ctr"/>
+          <a:lstStyle/>
+          <a:p>
+            <a:pPr algn="ctr"/>
+          </a:p>
+        </p:txBody>
+      </p:sp>
+      <p:sp>
+        <p:nvSpPr>
+          <p:cNvPr id="28" name="TextBox 27"/>
+          <p:cNvSpPr txBox="1"/>
+          <p:nvPr/>
+        </p:nvSpPr>
+        <p:spPr>
+          <a:xfrm>
+            <a:off x="1016000" y="4479330"/>
+            <a:ext cx="409757" cy="288925"/>
+          </a:xfrm>
+          <a:prstGeom prst="rect">
+            <a:avLst/>
+          </a:prstGeom>
+          <a:noFill/>
+        </p:spPr>
+        <p:txBody>
+          <a:bodyPr wrap="square" lIns="0" rIns="0" tIns="0" bIns="0" anchor="t">
+            <a:normAutofit/>
+          </a:bodyPr>
+          <a:lstStyle/>
+          <a:p>
+            <a:pPr>
+              <a:lnSpc>
+                <a:spcPct val="119600"/>
+              </a:lnSpc>
+            </a:pPr>
+            <a:r>
+              <a:rPr sz="950" b="1" i="0">
+                <a:solidFill>
+                  <a:srgbClr val="14532D"/>
+                </a:solidFill>
+                <a:latin typeface="Arial"/>
+                <a:ea typeface="Malgun Gothic"/>
+                <a:cs typeface="Malgun Gothic"/>
+              </a:rPr>
+              <a:t>Reflex</a:t>
+            </a:r>
+          </a:p>
+        </p:txBody>
+      </p:sp>
+      <p:sp>
+        <p:nvSpPr>
+          <p:cNvPr id="29" name="TextBox 28"/>
+          <p:cNvSpPr txBox="1"/>
+          <p:nvPr/>
+        </p:nvSpPr>
+        <p:spPr>
+          <a:xfrm>
+            <a:off x="927100" y="4771430"/>
+            <a:ext cx="5041964" cy="339651"/>
+          </a:xfrm>
+          <a:prstGeom prst="rect">
+            <a:avLst/>
+          </a:prstGeom>
+          <a:noFill/>
+        </p:spPr>
+        <p:txBody>
+          <a:bodyPr wrap="square" lIns="0" rIns="0" tIns="0" bIns="0" anchor="t">
+            <a:normAutofit/>
+          </a:bodyPr>
+          <a:lstStyle/>
+          <a:p>
+            <a:pPr>
+              <a:lnSpc>
+                <a:spcPct val="119600"/>
+              </a:lnSpc>
+            </a:pPr>
+            <a:r>
+              <a:rPr sz="1350" b="1" i="0">
+                <a:solidFill>
+                  <a:srgbClr val="16213A"/>
+                </a:solidFill>
+                <a:latin typeface="Arial"/>
+                <a:ea typeface="Malgun Gothic"/>
+                <a:cs typeface="Malgun Gothic"/>
+              </a:rPr>
+              <a:t>궤적을 모터 명령으로</a:t>
+            </a:r>
+          </a:p>
+        </p:txBody>
+      </p:sp>
+      <p:sp>
+        <p:nvSpPr>
+          <p:cNvPr id="30" name="TextBox 29"/>
+          <p:cNvSpPr txBox="1"/>
+          <p:nvPr/>
+        </p:nvSpPr>
+        <p:spPr>
+          <a:xfrm>
+            <a:off x="927100" y="5078710"/>
+            <a:ext cx="5041964" cy="603200"/>
+          </a:xfrm>
+          <a:prstGeom prst="rect">
+            <a:avLst/>
+          </a:prstGeom>
+          <a:noFill/>
+        </p:spPr>
+        <p:txBody>
+          <a:bodyPr wrap="square" lIns="0" rIns="0" tIns="0" bIns="0" anchor="t">
+            <a:normAutofit/>
+          </a:bodyPr>
+          <a:lstStyle/>
+          <a:p>
+            <a:pPr>
+              <a:lnSpc>
+                <a:spcPct val="133400"/>
+              </a:lnSpc>
+            </a:pPr>
+            <a:r>
+              <a:rPr sz="1150" b="0" i="0">
+                <a:solidFill>
+                  <a:srgbClr val="16213A"/>
+                </a:solidFill>
+                <a:latin typeface="Arial"/>
+                <a:ea typeface="Malgun Gothic"/>
+                <a:cs typeface="Malgun Gothic"/>
+              </a:rPr>
+              <a:t>힘을 아는 전신 제어기다. 로봇마다 적은 수고로 학습해 배포한다고 적었고 구조는 밝히지 않았다.</a:t>
+            </a:r>
+          </a:p>
+        </p:txBody>
+      </p:sp>
+      <p:sp>
+        <p:nvSpPr>
+          <p:cNvPr id="31" name="Rounded Rectangle 30"/>
+          <p:cNvSpPr/>
+          <p:nvPr/>
+        </p:nvSpPr>
+        <p:spPr>
+          <a:xfrm>
+            <a:off x="6223000" y="1361678"/>
+            <a:ext cx="5257800" cy="2730500"/>
+          </a:xfrm>
+          <a:prstGeom prst="roundRect">
+            <a:avLst>
+              <a:gd name="adj" fmla="val 1860"/>
             </a:avLst>
           </a:prstGeom>
           <a:solidFill>
@@ -21186,7 +21864,7 @@
       </p:sp>
       <p:pic>
         <p:nvPicPr>
-          <p:cNvPr id="5" name="Picture 4" descr="image.jpg"/>
+          <p:cNvPr id="32" name="Picture 31" descr="image.jpg"/>
           <p:cNvPicPr>
             <a:picLocks noChangeAspect="1"/>
           </p:cNvPicPr>
@@ -21200,8 +21878,8 @@
         </p:blipFill>
         <p:spPr>
           <a:xfrm>
-            <a:off x="711200" y="1474556"/>
-            <a:ext cx="5257800" cy="2187245"/>
+            <a:off x="6223000" y="1748977"/>
+            <a:ext cx="5257800" cy="1955902"/>
           </a:xfrm>
           <a:prstGeom prst="rect">
             <a:avLst/>
@@ -21210,13 +21888,13 @@
       </p:pic>
       <p:sp>
         <p:nvSpPr>
-          <p:cNvPr id="6" name="TextBox 5"/>
+          <p:cNvPr id="33" name="TextBox 32"/>
           <p:cNvSpPr txBox="1"/>
           <p:nvPr/>
         </p:nvSpPr>
         <p:spPr>
           <a:xfrm>
-            <a:off x="711200" y="3838178"/>
+            <a:off x="6223000" y="4155678"/>
             <a:ext cx="5440934" cy="495300"/>
           </a:xfrm>
           <a:prstGeom prst="rect">
@@ -21244,30 +21922,26 @@
                 <a:ea typeface="Malgun Gothic"/>
                 <a:cs typeface="Malgun Gothic"/>
               </a:rPr>
-              <a:t>단계마다 아직 첫 실수를 하지 않은 시도의 비율. 기본 VLM은 2단계에서 0 %, SFT는 16단계 38 %, SFT+RL은 90 % — flexion.ai(회사 블로그)</a:t>
-            </a:r>
-          </a:p>
-        </p:txBody>
-      </p:sp>
-      <p:sp>
-        <p:nvSpPr>
-          <p:cNvPr id="7" name="Rounded Rectangle 6"/>
+              <a:t>Reflect v1.0 구조도: Agent가 임무를 하위 과제로 바꾸고 의미 지도를 도구로 부른다. Motion Generator가 짧은 궤적을, Whole-Body Controller가 모터 명령을 낸다 — flexion.ai(회사 블로그)</a:t>
+            </a:r>
+          </a:p>
+        </p:txBody>
+      </p:sp>
+      <p:sp>
+        <p:nvSpPr>
+          <p:cNvPr id="34" name="Rectangle 33"/>
           <p:cNvSpPr/>
           <p:nvPr/>
         </p:nvSpPr>
         <p:spPr>
           <a:xfrm>
-            <a:off x="6223000" y="1361678"/>
-            <a:ext cx="5257800" cy="1051520"/>
-          </a:xfrm>
-          <a:prstGeom prst="roundRect">
-            <a:avLst>
-              <a:gd name="adj" fmla="val 7246"/>
-            </a:avLst>
-          </a:prstGeom>
-          <a:solidFill>
-            <a:srgbClr val="FFFDF8"/>
-          </a:solidFill>
+            <a:off x="711200" y="6424315"/>
+            <a:ext cx="10769600" cy="230485"/>
+          </a:xfrm>
+          <a:prstGeom prst="rect">
+            <a:avLst/>
+          </a:prstGeom>
+          <a:noFill/>
           <a:ln>
             <a:noFill/>
           </a:ln>
@@ -21282,14 +21956,14 @@
       </p:sp>
       <p:sp>
         <p:nvSpPr>
-          <p:cNvPr id="8" name="Rectangle 7"/>
+          <p:cNvPr id="35" name="Rectangle 34"/>
           <p:cNvSpPr/>
           <p:nvPr/>
         </p:nvSpPr>
         <p:spPr>
           <a:xfrm>
-            <a:off x="6223000" y="1361678"/>
-            <a:ext cx="5257800" cy="6350"/>
+            <a:off x="711200" y="6424315"/>
+            <a:ext cx="10769600" cy="12700"/>
           </a:xfrm>
           <a:prstGeom prst="rect">
             <a:avLst/>
@@ -21311,134 +21985,14 @@
       </p:sp>
       <p:sp>
         <p:nvSpPr>
-          <p:cNvPr id="9" name="Rectangle 8"/>
-          <p:cNvSpPr/>
-          <p:nvPr/>
-        </p:nvSpPr>
-        <p:spPr>
-          <a:xfrm>
-            <a:off x="11474450" y="1361678"/>
-            <a:ext cx="6350" cy="1051520"/>
-          </a:xfrm>
-          <a:prstGeom prst="rect">
-            <a:avLst/>
-          </a:prstGeom>
-          <a:solidFill>
-            <a:srgbClr val="D9D4C7"/>
-          </a:solidFill>
-          <a:ln>
-            <a:noFill/>
-          </a:ln>
-        </p:spPr>
-        <p:txBody>
-          <a:bodyPr rtlCol="0" anchor="ctr"/>
-          <a:lstStyle/>
-          <a:p>
-            <a:pPr algn="ctr"/>
-          </a:p>
-        </p:txBody>
-      </p:sp>
-      <p:sp>
-        <p:nvSpPr>
-          <p:cNvPr id="10" name="Rectangle 9"/>
-          <p:cNvSpPr/>
-          <p:nvPr/>
-        </p:nvSpPr>
-        <p:spPr>
-          <a:xfrm>
-            <a:off x="6223000" y="2406848"/>
-            <a:ext cx="5257800" cy="6350"/>
-          </a:xfrm>
-          <a:prstGeom prst="rect">
-            <a:avLst/>
-          </a:prstGeom>
-          <a:solidFill>
-            <a:srgbClr val="D9D4C7"/>
-          </a:solidFill>
-          <a:ln>
-            <a:noFill/>
-          </a:ln>
-        </p:spPr>
-        <p:txBody>
-          <a:bodyPr rtlCol="0" anchor="ctr"/>
-          <a:lstStyle/>
-          <a:p>
-            <a:pPr algn="ctr"/>
-          </a:p>
-        </p:txBody>
-      </p:sp>
-      <p:sp>
-        <p:nvSpPr>
-          <p:cNvPr id="11" name="Rounded Rectangle 10"/>
-          <p:cNvSpPr/>
-          <p:nvPr/>
-        </p:nvSpPr>
-        <p:spPr>
-          <a:xfrm>
-            <a:off x="6223000" y="1361678"/>
-            <a:ext cx="50800" cy="1051520"/>
-          </a:xfrm>
-          <a:prstGeom prst="roundRect">
-            <a:avLst>
-              <a:gd name="adj" fmla="val 50000"/>
-            </a:avLst>
-          </a:prstGeom>
-          <a:solidFill>
-            <a:srgbClr val="1D4ED8"/>
-          </a:solidFill>
-          <a:ln>
-            <a:noFill/>
-          </a:ln>
-        </p:spPr>
-        <p:txBody>
-          <a:bodyPr rtlCol="0" anchor="ctr"/>
-          <a:lstStyle/>
-          <a:p>
-            <a:pPr algn="ctr"/>
-          </a:p>
-        </p:txBody>
-      </p:sp>
-      <p:sp>
-        <p:nvSpPr>
-          <p:cNvPr id="12" name="Rounded Rectangle 11"/>
-          <p:cNvSpPr/>
-          <p:nvPr/>
-        </p:nvSpPr>
-        <p:spPr>
-          <a:xfrm>
-            <a:off x="6438900" y="1507728"/>
-            <a:ext cx="404416" cy="241300"/>
-          </a:xfrm>
-          <a:prstGeom prst="roundRect">
-            <a:avLst>
-              <a:gd name="adj" fmla="val 50000"/>
-            </a:avLst>
-          </a:prstGeom>
-          <a:solidFill>
-            <a:srgbClr val="DBE5FB"/>
-          </a:solidFill>
-          <a:ln>
-            <a:noFill/>
-          </a:ln>
-        </p:spPr>
-        <p:txBody>
-          <a:bodyPr rtlCol="0" anchor="ctr"/>
-          <a:lstStyle/>
-          <a:p>
-            <a:pPr algn="ctr"/>
-          </a:p>
-        </p:txBody>
-      </p:sp>
-      <p:sp>
-        <p:nvSpPr>
-          <p:cNvPr id="13" name="TextBox 12"/>
+          <p:cNvPr id="36" name="TextBox 35"/>
           <p:cNvSpPr txBox="1"/>
           <p:nvPr/>
         </p:nvSpPr>
         <p:spPr>
           <a:xfrm>
-            <a:off x="6527800" y="1533128"/>
-            <a:ext cx="258814" cy="288925"/>
+            <a:off x="711200" y="6500515"/>
+            <a:ext cx="11118088" cy="243656"/>
           </a:xfrm>
           <a:prstGeom prst="rect">
             <a:avLst/>
@@ -21453,405 +22007,19 @@
           <a:p>
             <a:pPr>
               <a:lnSpc>
-                <a:spcPct val="119600"/>
+                <a:spcPct val="124200"/>
               </a:lnSpc>
             </a:pPr>
             <a:r>
-              <a:rPr sz="950" b="1" i="0">
+              <a:rPr sz="850" b="0" i="0">
                 <a:solidFill>
-                  <a:srgbClr val="1E3A8A"/>
+                  <a:srgbClr val="5A6478"/>
                 </a:solidFill>
                 <a:latin typeface="Arial"/>
                 <a:ea typeface="Malgun Gothic"/>
                 <a:cs typeface="Malgun Gothic"/>
               </a:rPr>
-              <a:t>시연</a:t>
-            </a:r>
-          </a:p>
-        </p:txBody>
-      </p:sp>
-      <p:sp>
-        <p:nvSpPr>
-          <p:cNvPr id="14" name="TextBox 13"/>
-          <p:cNvSpPr txBox="1"/>
-          <p:nvPr/>
-        </p:nvSpPr>
-        <p:spPr>
-          <a:xfrm>
-            <a:off x="6438900" y="1825228"/>
-            <a:ext cx="5041964" cy="603200"/>
-          </a:xfrm>
-          <a:prstGeom prst="rect">
-            <a:avLst/>
-          </a:prstGeom>
-          <a:noFill/>
-        </p:spPr>
-        <p:txBody>
-          <a:bodyPr wrap="square" lIns="0" rIns="0" tIns="0" bIns="0" anchor="t">
-            <a:normAutofit/>
-          </a:bodyPr>
-          <a:lstStyle/>
-          <a:p>
-            <a:pPr>
-              <a:lnSpc>
-                <a:spcPct val="133400"/>
-              </a:lnSpc>
-            </a:pPr>
-            <a:r>
-              <a:rPr sz="1150" b="0" i="0">
-                <a:solidFill>
-                  <a:srgbClr val="16213A"/>
-                </a:solidFill>
-                <a:latin typeface="Arial"/>
-                <a:ea typeface="Malgun Gothic"/>
-                <a:cs typeface="Malgun Gothic"/>
-              </a:rPr>
-              <a:t>지시 한 문장으로 계단을 내려가 택배를 가져오고 승강기로 올라와 서랍을 채웠다. 100 g–3.5 kg 상자를 정책 하나로 집는다.</a:t>
-            </a:r>
-          </a:p>
-        </p:txBody>
-      </p:sp>
-      <p:sp>
-        <p:nvSpPr>
-          <p:cNvPr id="15" name="Rounded Rectangle 14"/>
-          <p:cNvSpPr/>
-          <p:nvPr/>
-        </p:nvSpPr>
-        <p:spPr>
-          <a:xfrm>
-            <a:off x="6223000" y="2527498"/>
-            <a:ext cx="5257800" cy="1051520"/>
-          </a:xfrm>
-          <a:prstGeom prst="roundRect">
-            <a:avLst>
-              <a:gd name="adj" fmla="val 7246"/>
-            </a:avLst>
-          </a:prstGeom>
-          <a:solidFill>
-            <a:srgbClr val="FFFDF8"/>
-          </a:solidFill>
-          <a:ln>
-            <a:noFill/>
-          </a:ln>
-        </p:spPr>
-        <p:txBody>
-          <a:bodyPr rtlCol="0" anchor="ctr"/>
-          <a:lstStyle/>
-          <a:p>
-            <a:pPr algn="ctr"/>
-          </a:p>
-        </p:txBody>
-      </p:sp>
-      <p:sp>
-        <p:nvSpPr>
-          <p:cNvPr id="16" name="Rectangle 15"/>
-          <p:cNvSpPr/>
-          <p:nvPr/>
-        </p:nvSpPr>
-        <p:spPr>
-          <a:xfrm>
-            <a:off x="6223000" y="2527498"/>
-            <a:ext cx="5257800" cy="6350"/>
-          </a:xfrm>
-          <a:prstGeom prst="rect">
-            <a:avLst/>
-          </a:prstGeom>
-          <a:solidFill>
-            <a:srgbClr val="D9D4C7"/>
-          </a:solidFill>
-          <a:ln>
-            <a:noFill/>
-          </a:ln>
-        </p:spPr>
-        <p:txBody>
-          <a:bodyPr rtlCol="0" anchor="ctr"/>
-          <a:lstStyle/>
-          <a:p>
-            <a:pPr algn="ctr"/>
-          </a:p>
-        </p:txBody>
-      </p:sp>
-      <p:sp>
-        <p:nvSpPr>
-          <p:cNvPr id="17" name="Rectangle 16"/>
-          <p:cNvSpPr/>
-          <p:nvPr/>
-        </p:nvSpPr>
-        <p:spPr>
-          <a:xfrm>
-            <a:off x="11474450" y="2527498"/>
-            <a:ext cx="6350" cy="1051520"/>
-          </a:xfrm>
-          <a:prstGeom prst="rect">
-            <a:avLst/>
-          </a:prstGeom>
-          <a:solidFill>
-            <a:srgbClr val="D9D4C7"/>
-          </a:solidFill>
-          <a:ln>
-            <a:noFill/>
-          </a:ln>
-        </p:spPr>
-        <p:txBody>
-          <a:bodyPr rtlCol="0" anchor="ctr"/>
-          <a:lstStyle/>
-          <a:p>
-            <a:pPr algn="ctr"/>
-          </a:p>
-        </p:txBody>
-      </p:sp>
-      <p:sp>
-        <p:nvSpPr>
-          <p:cNvPr id="18" name="Rectangle 17"/>
-          <p:cNvSpPr/>
-          <p:nvPr/>
-        </p:nvSpPr>
-        <p:spPr>
-          <a:xfrm>
-            <a:off x="6223000" y="3572669"/>
-            <a:ext cx="5257800" cy="6350"/>
-          </a:xfrm>
-          <a:prstGeom prst="rect">
-            <a:avLst/>
-          </a:prstGeom>
-          <a:solidFill>
-            <a:srgbClr val="D9D4C7"/>
-          </a:solidFill>
-          <a:ln>
-            <a:noFill/>
-          </a:ln>
-        </p:spPr>
-        <p:txBody>
-          <a:bodyPr rtlCol="0" anchor="ctr"/>
-          <a:lstStyle/>
-          <a:p>
-            <a:pPr algn="ctr"/>
-          </a:p>
-        </p:txBody>
-      </p:sp>
-      <p:sp>
-        <p:nvSpPr>
-          <p:cNvPr id="19" name="Rounded Rectangle 18"/>
-          <p:cNvSpPr/>
-          <p:nvPr/>
-        </p:nvSpPr>
-        <p:spPr>
-          <a:xfrm>
-            <a:off x="6223000" y="2527498"/>
-            <a:ext cx="50800" cy="1051520"/>
-          </a:xfrm>
-          <a:prstGeom prst="roundRect">
-            <a:avLst>
-              <a:gd name="adj" fmla="val 50000"/>
-            </a:avLst>
-          </a:prstGeom>
-          <a:solidFill>
-            <a:srgbClr val="C2410C"/>
-          </a:solidFill>
-          <a:ln>
-            <a:noFill/>
-          </a:ln>
-        </p:spPr>
-        <p:txBody>
-          <a:bodyPr rtlCol="0" anchor="ctr"/>
-          <a:lstStyle/>
-          <a:p>
-            <a:pPr algn="ctr"/>
-          </a:p>
-        </p:txBody>
-      </p:sp>
-      <p:sp>
-        <p:nvSpPr>
-          <p:cNvPr id="20" name="Rounded Rectangle 19"/>
-          <p:cNvSpPr/>
-          <p:nvPr/>
-        </p:nvSpPr>
-        <p:spPr>
-          <a:xfrm>
-            <a:off x="6438900" y="2673548"/>
-            <a:ext cx="404416" cy="241300"/>
-          </a:xfrm>
-          <a:prstGeom prst="roundRect">
-            <a:avLst>
-              <a:gd name="adj" fmla="val 50000"/>
-            </a:avLst>
-          </a:prstGeom>
-          <a:solidFill>
-            <a:srgbClr val="FDE7C8"/>
-          </a:solidFill>
-          <a:ln>
-            <a:noFill/>
-          </a:ln>
-        </p:spPr>
-        <p:txBody>
-          <a:bodyPr rtlCol="0" anchor="ctr"/>
-          <a:lstStyle/>
-          <a:p>
-            <a:pPr algn="ctr"/>
-          </a:p>
-        </p:txBody>
-      </p:sp>
-      <p:sp>
-        <p:nvSpPr>
-          <p:cNvPr id="21" name="TextBox 20"/>
-          <p:cNvSpPr txBox="1"/>
-          <p:nvPr/>
-        </p:nvSpPr>
-        <p:spPr>
-          <a:xfrm>
-            <a:off x="6527800" y="2698948"/>
-            <a:ext cx="258814" cy="288925"/>
-          </a:xfrm>
-          <a:prstGeom prst="rect">
-            <a:avLst/>
-          </a:prstGeom>
-          <a:noFill/>
-        </p:spPr>
-        <p:txBody>
-          <a:bodyPr wrap="square" lIns="0" rIns="0" tIns="0" bIns="0" anchor="t">
-            <a:normAutofit/>
-          </a:bodyPr>
-          <a:lstStyle/>
-          <a:p>
-            <a:pPr>
-              <a:lnSpc>
-                <a:spcPct val="119600"/>
-              </a:lnSpc>
-            </a:pPr>
-            <a:r>
-              <a:rPr sz="950" b="1" i="0">
-                <a:solidFill>
-                  <a:srgbClr val="7C2D12"/>
-                </a:solidFill>
-                <a:latin typeface="Arial"/>
-                <a:ea typeface="Malgun Gothic"/>
-                <a:cs typeface="Malgun Gothic"/>
-              </a:rPr>
-              <a:t>주의</a:t>
-            </a:r>
-          </a:p>
-        </p:txBody>
-      </p:sp>
-      <p:sp>
-        <p:nvSpPr>
-          <p:cNvPr id="22" name="TextBox 21"/>
-          <p:cNvSpPr txBox="1"/>
-          <p:nvPr/>
-        </p:nvSpPr>
-        <p:spPr>
-          <a:xfrm>
-            <a:off x="6438900" y="2991048"/>
-            <a:ext cx="5041964" cy="603200"/>
-          </a:xfrm>
-          <a:prstGeom prst="rect">
-            <a:avLst/>
-          </a:prstGeom>
-          <a:noFill/>
-        </p:spPr>
-        <p:txBody>
-          <a:bodyPr wrap="square" lIns="0" rIns="0" tIns="0" bIns="0" anchor="t">
-            <a:normAutofit/>
-          </a:bodyPr>
-          <a:lstStyle/>
-          <a:p>
-            <a:pPr>
-              <a:lnSpc>
-                <a:spcPct val="133400"/>
-              </a:lnSpc>
-            </a:pPr>
-            <a:r>
-              <a:rPr sz="1150" b="0" i="0">
-                <a:solidFill>
-                  <a:srgbClr val="16213A"/>
-                </a:solidFill>
-                <a:latin typeface="Arial"/>
-                <a:ea typeface="Malgun Gothic"/>
-                <a:cs typeface="Malgun Gothic"/>
-              </a:rPr>
-              <a:t>모두 회사 발표다. 16단계 평가의 시도 수와 환경(실물, 시뮬, 기록 재생)을 적지 않았고, 충돌·여유 거리 지표가 없다. 배포 전 시험은 3DGS 시뮬에서 한다.</a:t>
-            </a:r>
-          </a:p>
-        </p:txBody>
-      </p:sp>
-      <p:sp>
-        <p:nvSpPr>
-          <p:cNvPr id="23" name="Rounded Rectangle 22"/>
-          <p:cNvSpPr/>
-          <p:nvPr/>
-        </p:nvSpPr>
-        <p:spPr>
-          <a:xfrm>
-            <a:off x="711200" y="4371578"/>
-            <a:ext cx="10769600" cy="751086"/>
-          </a:xfrm>
-          <a:prstGeom prst="roundRect">
-            <a:avLst>
-              <a:gd name="adj" fmla="val 10145"/>
-            </a:avLst>
-          </a:prstGeom>
-          <a:solidFill>
-            <a:srgbClr val="16213A"/>
-          </a:solidFill>
-          <a:ln>
-            <a:noFill/>
-          </a:ln>
-        </p:spPr>
-        <p:txBody>
-          <a:bodyPr rtlCol="0" anchor="ctr"/>
-          <a:lstStyle/>
-          <a:p>
-            <a:pPr algn="ctr"/>
-          </a:p>
-        </p:txBody>
-      </p:sp>
-      <p:sp>
-        <p:nvSpPr>
-          <p:cNvPr id="24" name="TextBox 23"/>
-          <p:cNvSpPr txBox="1"/>
-          <p:nvPr/>
-        </p:nvSpPr>
-        <p:spPr>
-          <a:xfrm>
-            <a:off x="889000" y="4498578"/>
-            <a:ext cx="10751820" cy="672157"/>
-          </a:xfrm>
-          <a:prstGeom prst="rect">
-            <a:avLst/>
-          </a:prstGeom>
-          <a:noFill/>
-        </p:spPr>
-        <p:txBody>
-          <a:bodyPr wrap="square" lIns="0" rIns="0" tIns="0" bIns="0" anchor="t">
-            <a:normAutofit/>
-          </a:bodyPr>
-          <a:lstStyle/>
-          <a:p>
-            <a:pPr>
-              <a:lnSpc>
-                <a:spcPct val="133400"/>
-              </a:lnSpc>
-            </a:pPr>
-            <a:r>
-              <a:rPr sz="1300" b="1" i="0">
-                <a:solidFill>
-                  <a:srgbClr val="F59E5B"/>
-                </a:solidFill>
-                <a:latin typeface="Arial"/>
-                <a:ea typeface="Malgun Gothic"/>
-                <a:cs typeface="Malgun Gothic"/>
-              </a:rPr>
-              <a:t>travplan:</a:t>
-            </a:r>
-            <a:r>
-              <a:rPr sz="1300" b="0" i="0">
-                <a:solidFill>
-                  <a:srgbClr val="F4F1EA"/>
-                </a:solidFill>
-                <a:latin typeface="Arial"/>
-                <a:ea typeface="Malgun Gothic"/>
-                <a:cs typeface="Malgun Gothic"/>
-              </a:rPr>
-              <a:t> 가져올 것은 평가 방식이다. 연석·경사로·보행자 구간을 단계로 놓고 "첫 실수 전 비율"을 그리면, 에피소드 성공률이 감추는 실패 지점이 보인다.</a:t>
+              <a:t>[1] Flexion Reflect v1.0 — flexion.ai/news/flexion-reflect-v1.0(2026-06-29, 회사 블로그). 논문·코드 없음</a:t>
             </a:r>
           </a:p>
         </p:txBody>
@@ -21918,6 +22086,819 @@
                 <a:ea typeface="Malgun Gothic"/>
                 <a:cs typeface="Malgun Gothic"/>
               </a:rPr>
+              <a:t>B.16.3 · Reflect v1.0 평가</a:t>
+            </a:r>
+          </a:p>
+        </p:txBody>
+      </p:sp>
+      <p:sp>
+        <p:nvSpPr>
+          <p:cNvPr id="3" name="TextBox 2"/>
+          <p:cNvSpPr txBox="1"/>
+          <p:nvPr/>
+        </p:nvSpPr>
+        <p:spPr>
+          <a:xfrm>
+            <a:off x="711200" y="781050"/>
+            <a:ext cx="11118088" cy="554335"/>
+          </a:xfrm>
+          <a:prstGeom prst="rect">
+            <a:avLst/>
+          </a:prstGeom>
+          <a:noFill/>
+        </p:spPr>
+        <p:txBody>
+          <a:bodyPr wrap="square" lIns="0" rIns="0" tIns="0" bIns="0" anchor="t">
+            <a:normAutofit/>
+          </a:bodyPr>
+          <a:lstStyle/>
+          <a:p>
+            <a:pPr>
+              <a:lnSpc>
+                <a:spcPct val="112240"/>
+              </a:lnSpc>
+            </a:pPr>
+            <a:r>
+              <a:rPr sz="2500" b="1" i="0">
+                <a:solidFill>
+                  <a:srgbClr val="16213A"/>
+                </a:solidFill>
+                <a:latin typeface="Arial"/>
+                <a:ea typeface="Malgun Gothic"/>
+                <a:cs typeface="Malgun Gothic"/>
+              </a:rPr>
+              <a:t>16단계 임무를 실수 없이 끝까지 간 비율: SFT 38 %, SFT+RL 90 %</a:t>
+            </a:r>
+          </a:p>
+        </p:txBody>
+      </p:sp>
+      <p:sp>
+        <p:nvSpPr>
+          <p:cNvPr id="4" name="Rounded Rectangle 3"/>
+          <p:cNvSpPr/>
+          <p:nvPr/>
+        </p:nvSpPr>
+        <p:spPr>
+          <a:xfrm>
+            <a:off x="711200" y="1361678"/>
+            <a:ext cx="5257800" cy="2413000"/>
+          </a:xfrm>
+          <a:prstGeom prst="roundRect">
+            <a:avLst>
+              <a:gd name="adj" fmla="val 2105"/>
+            </a:avLst>
+          </a:prstGeom>
+          <a:solidFill>
+            <a:srgbClr val="FFFFFF"/>
+          </a:solidFill>
+          <a:ln w="6350">
+            <a:solidFill>
+              <a:srgbClr val="D9D4C7"/>
+            </a:solidFill>
+          </a:ln>
+        </p:spPr>
+        <p:txBody>
+          <a:bodyPr rtlCol="0" anchor="ctr"/>
+          <a:lstStyle/>
+          <a:p>
+            <a:pPr algn="ctr"/>
+          </a:p>
+        </p:txBody>
+      </p:sp>
+      <p:pic>
+        <p:nvPicPr>
+          <p:cNvPr id="5" name="Picture 4" descr="image.jpg"/>
+          <p:cNvPicPr>
+            <a:picLocks noChangeAspect="1"/>
+          </p:cNvPicPr>
+          <p:nvPr/>
+        </p:nvPicPr>
+        <p:blipFill>
+          <a:blip r:embed="rId2"/>
+          <a:stretch>
+            <a:fillRect/>
+          </a:stretch>
+        </p:blipFill>
+        <p:spPr>
+          <a:xfrm>
+            <a:off x="711200" y="1474556"/>
+            <a:ext cx="5257800" cy="2187245"/>
+          </a:xfrm>
+          <a:prstGeom prst="rect">
+            <a:avLst/>
+          </a:prstGeom>
+        </p:spPr>
+      </p:pic>
+      <p:sp>
+        <p:nvSpPr>
+          <p:cNvPr id="6" name="TextBox 5"/>
+          <p:cNvSpPr txBox="1"/>
+          <p:nvPr/>
+        </p:nvSpPr>
+        <p:spPr>
+          <a:xfrm>
+            <a:off x="711200" y="3838178"/>
+            <a:ext cx="5440934" cy="495300"/>
+          </a:xfrm>
+          <a:prstGeom prst="rect">
+            <a:avLst/>
+          </a:prstGeom>
+          <a:noFill/>
+        </p:spPr>
+        <p:txBody>
+          <a:bodyPr wrap="square" lIns="0" rIns="0" tIns="0" bIns="0" anchor="t">
+            <a:normAutofit/>
+          </a:bodyPr>
+          <a:lstStyle/>
+          <a:p>
+            <a:pPr>
+              <a:lnSpc>
+                <a:spcPct val="128800"/>
+              </a:lnSpc>
+            </a:pPr>
+            <a:r>
+              <a:rPr sz="950" b="0" i="0">
+                <a:solidFill>
+                  <a:srgbClr val="5A6478"/>
+                </a:solidFill>
+                <a:latin typeface="Arial"/>
+                <a:ea typeface="Malgun Gothic"/>
+                <a:cs typeface="Malgun Gothic"/>
+              </a:rPr>
+              <a:t>단계마다 아직 첫 실수를 하지 않은 시도의 비율. 기본 VLM은 2단계에서 0 %, SFT는 16단계 38 %, SFT+RL은 90 % — flexion.ai(회사 블로그)</a:t>
+            </a:r>
+          </a:p>
+        </p:txBody>
+      </p:sp>
+      <p:sp>
+        <p:nvSpPr>
+          <p:cNvPr id="7" name="Rounded Rectangle 6"/>
+          <p:cNvSpPr/>
+          <p:nvPr/>
+        </p:nvSpPr>
+        <p:spPr>
+          <a:xfrm>
+            <a:off x="6223000" y="1361678"/>
+            <a:ext cx="5257800" cy="1051520"/>
+          </a:xfrm>
+          <a:prstGeom prst="roundRect">
+            <a:avLst>
+              <a:gd name="adj" fmla="val 7246"/>
+            </a:avLst>
+          </a:prstGeom>
+          <a:solidFill>
+            <a:srgbClr val="FFFDF8"/>
+          </a:solidFill>
+          <a:ln>
+            <a:noFill/>
+          </a:ln>
+        </p:spPr>
+        <p:txBody>
+          <a:bodyPr rtlCol="0" anchor="ctr"/>
+          <a:lstStyle/>
+          <a:p>
+            <a:pPr algn="ctr"/>
+          </a:p>
+        </p:txBody>
+      </p:sp>
+      <p:sp>
+        <p:nvSpPr>
+          <p:cNvPr id="8" name="Rectangle 7"/>
+          <p:cNvSpPr/>
+          <p:nvPr/>
+        </p:nvSpPr>
+        <p:spPr>
+          <a:xfrm>
+            <a:off x="6223000" y="1361678"/>
+            <a:ext cx="5257800" cy="6350"/>
+          </a:xfrm>
+          <a:prstGeom prst="rect">
+            <a:avLst/>
+          </a:prstGeom>
+          <a:solidFill>
+            <a:srgbClr val="D9D4C7"/>
+          </a:solidFill>
+          <a:ln>
+            <a:noFill/>
+          </a:ln>
+        </p:spPr>
+        <p:txBody>
+          <a:bodyPr rtlCol="0" anchor="ctr"/>
+          <a:lstStyle/>
+          <a:p>
+            <a:pPr algn="ctr"/>
+          </a:p>
+        </p:txBody>
+      </p:sp>
+      <p:sp>
+        <p:nvSpPr>
+          <p:cNvPr id="9" name="Rectangle 8"/>
+          <p:cNvSpPr/>
+          <p:nvPr/>
+        </p:nvSpPr>
+        <p:spPr>
+          <a:xfrm>
+            <a:off x="11474450" y="1361678"/>
+            <a:ext cx="6350" cy="1051520"/>
+          </a:xfrm>
+          <a:prstGeom prst="rect">
+            <a:avLst/>
+          </a:prstGeom>
+          <a:solidFill>
+            <a:srgbClr val="D9D4C7"/>
+          </a:solidFill>
+          <a:ln>
+            <a:noFill/>
+          </a:ln>
+        </p:spPr>
+        <p:txBody>
+          <a:bodyPr rtlCol="0" anchor="ctr"/>
+          <a:lstStyle/>
+          <a:p>
+            <a:pPr algn="ctr"/>
+          </a:p>
+        </p:txBody>
+      </p:sp>
+      <p:sp>
+        <p:nvSpPr>
+          <p:cNvPr id="10" name="Rectangle 9"/>
+          <p:cNvSpPr/>
+          <p:nvPr/>
+        </p:nvSpPr>
+        <p:spPr>
+          <a:xfrm>
+            <a:off x="6223000" y="2406848"/>
+            <a:ext cx="5257800" cy="6350"/>
+          </a:xfrm>
+          <a:prstGeom prst="rect">
+            <a:avLst/>
+          </a:prstGeom>
+          <a:solidFill>
+            <a:srgbClr val="D9D4C7"/>
+          </a:solidFill>
+          <a:ln>
+            <a:noFill/>
+          </a:ln>
+        </p:spPr>
+        <p:txBody>
+          <a:bodyPr rtlCol="0" anchor="ctr"/>
+          <a:lstStyle/>
+          <a:p>
+            <a:pPr algn="ctr"/>
+          </a:p>
+        </p:txBody>
+      </p:sp>
+      <p:sp>
+        <p:nvSpPr>
+          <p:cNvPr id="11" name="Rounded Rectangle 10"/>
+          <p:cNvSpPr/>
+          <p:nvPr/>
+        </p:nvSpPr>
+        <p:spPr>
+          <a:xfrm>
+            <a:off x="6223000" y="1361678"/>
+            <a:ext cx="50800" cy="1051520"/>
+          </a:xfrm>
+          <a:prstGeom prst="roundRect">
+            <a:avLst>
+              <a:gd name="adj" fmla="val 50000"/>
+            </a:avLst>
+          </a:prstGeom>
+          <a:solidFill>
+            <a:srgbClr val="1D4ED8"/>
+          </a:solidFill>
+          <a:ln>
+            <a:noFill/>
+          </a:ln>
+        </p:spPr>
+        <p:txBody>
+          <a:bodyPr rtlCol="0" anchor="ctr"/>
+          <a:lstStyle/>
+          <a:p>
+            <a:pPr algn="ctr"/>
+          </a:p>
+        </p:txBody>
+      </p:sp>
+      <p:sp>
+        <p:nvSpPr>
+          <p:cNvPr id="12" name="Rounded Rectangle 11"/>
+          <p:cNvSpPr/>
+          <p:nvPr/>
+        </p:nvSpPr>
+        <p:spPr>
+          <a:xfrm>
+            <a:off x="6438900" y="1507728"/>
+            <a:ext cx="404416" cy="241300"/>
+          </a:xfrm>
+          <a:prstGeom prst="roundRect">
+            <a:avLst>
+              <a:gd name="adj" fmla="val 50000"/>
+            </a:avLst>
+          </a:prstGeom>
+          <a:solidFill>
+            <a:srgbClr val="DBE5FB"/>
+          </a:solidFill>
+          <a:ln>
+            <a:noFill/>
+          </a:ln>
+        </p:spPr>
+        <p:txBody>
+          <a:bodyPr rtlCol="0" anchor="ctr"/>
+          <a:lstStyle/>
+          <a:p>
+            <a:pPr algn="ctr"/>
+          </a:p>
+        </p:txBody>
+      </p:sp>
+      <p:sp>
+        <p:nvSpPr>
+          <p:cNvPr id="13" name="TextBox 12"/>
+          <p:cNvSpPr txBox="1"/>
+          <p:nvPr/>
+        </p:nvSpPr>
+        <p:spPr>
+          <a:xfrm>
+            <a:off x="6527800" y="1533128"/>
+            <a:ext cx="258814" cy="288925"/>
+          </a:xfrm>
+          <a:prstGeom prst="rect">
+            <a:avLst/>
+          </a:prstGeom>
+          <a:noFill/>
+        </p:spPr>
+        <p:txBody>
+          <a:bodyPr wrap="square" lIns="0" rIns="0" tIns="0" bIns="0" anchor="t">
+            <a:normAutofit/>
+          </a:bodyPr>
+          <a:lstStyle/>
+          <a:p>
+            <a:pPr>
+              <a:lnSpc>
+                <a:spcPct val="119600"/>
+              </a:lnSpc>
+            </a:pPr>
+            <a:r>
+              <a:rPr sz="950" b="1" i="0">
+                <a:solidFill>
+                  <a:srgbClr val="1E3A8A"/>
+                </a:solidFill>
+                <a:latin typeface="Arial"/>
+                <a:ea typeface="Malgun Gothic"/>
+                <a:cs typeface="Malgun Gothic"/>
+              </a:rPr>
+              <a:t>시연</a:t>
+            </a:r>
+          </a:p>
+        </p:txBody>
+      </p:sp>
+      <p:sp>
+        <p:nvSpPr>
+          <p:cNvPr id="14" name="TextBox 13"/>
+          <p:cNvSpPr txBox="1"/>
+          <p:nvPr/>
+        </p:nvSpPr>
+        <p:spPr>
+          <a:xfrm>
+            <a:off x="6438900" y="1825228"/>
+            <a:ext cx="5041964" cy="603200"/>
+          </a:xfrm>
+          <a:prstGeom prst="rect">
+            <a:avLst/>
+          </a:prstGeom>
+          <a:noFill/>
+        </p:spPr>
+        <p:txBody>
+          <a:bodyPr wrap="square" lIns="0" rIns="0" tIns="0" bIns="0" anchor="t">
+            <a:normAutofit/>
+          </a:bodyPr>
+          <a:lstStyle/>
+          <a:p>
+            <a:pPr>
+              <a:lnSpc>
+                <a:spcPct val="133400"/>
+              </a:lnSpc>
+            </a:pPr>
+            <a:r>
+              <a:rPr sz="1150" b="0" i="0">
+                <a:solidFill>
+                  <a:srgbClr val="16213A"/>
+                </a:solidFill>
+                <a:latin typeface="Arial"/>
+                <a:ea typeface="Malgun Gothic"/>
+                <a:cs typeface="Malgun Gothic"/>
+              </a:rPr>
+              <a:t>지시 한 문장으로 계단을 내려가 택배를 가져오고 승강기로 올라와 서랍을 채웠다. 100 g–3.5 kg 상자를 정책 하나로 집는다.</a:t>
+            </a:r>
+          </a:p>
+        </p:txBody>
+      </p:sp>
+      <p:sp>
+        <p:nvSpPr>
+          <p:cNvPr id="15" name="Rounded Rectangle 14"/>
+          <p:cNvSpPr/>
+          <p:nvPr/>
+        </p:nvSpPr>
+        <p:spPr>
+          <a:xfrm>
+            <a:off x="6223000" y="2527498"/>
+            <a:ext cx="5257800" cy="1051520"/>
+          </a:xfrm>
+          <a:prstGeom prst="roundRect">
+            <a:avLst>
+              <a:gd name="adj" fmla="val 7246"/>
+            </a:avLst>
+          </a:prstGeom>
+          <a:solidFill>
+            <a:srgbClr val="FFFDF8"/>
+          </a:solidFill>
+          <a:ln>
+            <a:noFill/>
+          </a:ln>
+        </p:spPr>
+        <p:txBody>
+          <a:bodyPr rtlCol="0" anchor="ctr"/>
+          <a:lstStyle/>
+          <a:p>
+            <a:pPr algn="ctr"/>
+          </a:p>
+        </p:txBody>
+      </p:sp>
+      <p:sp>
+        <p:nvSpPr>
+          <p:cNvPr id="16" name="Rectangle 15"/>
+          <p:cNvSpPr/>
+          <p:nvPr/>
+        </p:nvSpPr>
+        <p:spPr>
+          <a:xfrm>
+            <a:off x="6223000" y="2527498"/>
+            <a:ext cx="5257800" cy="6350"/>
+          </a:xfrm>
+          <a:prstGeom prst="rect">
+            <a:avLst/>
+          </a:prstGeom>
+          <a:solidFill>
+            <a:srgbClr val="D9D4C7"/>
+          </a:solidFill>
+          <a:ln>
+            <a:noFill/>
+          </a:ln>
+        </p:spPr>
+        <p:txBody>
+          <a:bodyPr rtlCol="0" anchor="ctr"/>
+          <a:lstStyle/>
+          <a:p>
+            <a:pPr algn="ctr"/>
+          </a:p>
+        </p:txBody>
+      </p:sp>
+      <p:sp>
+        <p:nvSpPr>
+          <p:cNvPr id="17" name="Rectangle 16"/>
+          <p:cNvSpPr/>
+          <p:nvPr/>
+        </p:nvSpPr>
+        <p:spPr>
+          <a:xfrm>
+            <a:off x="11474450" y="2527498"/>
+            <a:ext cx="6350" cy="1051520"/>
+          </a:xfrm>
+          <a:prstGeom prst="rect">
+            <a:avLst/>
+          </a:prstGeom>
+          <a:solidFill>
+            <a:srgbClr val="D9D4C7"/>
+          </a:solidFill>
+          <a:ln>
+            <a:noFill/>
+          </a:ln>
+        </p:spPr>
+        <p:txBody>
+          <a:bodyPr rtlCol="0" anchor="ctr"/>
+          <a:lstStyle/>
+          <a:p>
+            <a:pPr algn="ctr"/>
+          </a:p>
+        </p:txBody>
+      </p:sp>
+      <p:sp>
+        <p:nvSpPr>
+          <p:cNvPr id="18" name="Rectangle 17"/>
+          <p:cNvSpPr/>
+          <p:nvPr/>
+        </p:nvSpPr>
+        <p:spPr>
+          <a:xfrm>
+            <a:off x="6223000" y="3572669"/>
+            <a:ext cx="5257800" cy="6350"/>
+          </a:xfrm>
+          <a:prstGeom prst="rect">
+            <a:avLst/>
+          </a:prstGeom>
+          <a:solidFill>
+            <a:srgbClr val="D9D4C7"/>
+          </a:solidFill>
+          <a:ln>
+            <a:noFill/>
+          </a:ln>
+        </p:spPr>
+        <p:txBody>
+          <a:bodyPr rtlCol="0" anchor="ctr"/>
+          <a:lstStyle/>
+          <a:p>
+            <a:pPr algn="ctr"/>
+          </a:p>
+        </p:txBody>
+      </p:sp>
+      <p:sp>
+        <p:nvSpPr>
+          <p:cNvPr id="19" name="Rounded Rectangle 18"/>
+          <p:cNvSpPr/>
+          <p:nvPr/>
+        </p:nvSpPr>
+        <p:spPr>
+          <a:xfrm>
+            <a:off x="6223000" y="2527498"/>
+            <a:ext cx="50800" cy="1051520"/>
+          </a:xfrm>
+          <a:prstGeom prst="roundRect">
+            <a:avLst>
+              <a:gd name="adj" fmla="val 50000"/>
+            </a:avLst>
+          </a:prstGeom>
+          <a:solidFill>
+            <a:srgbClr val="C2410C"/>
+          </a:solidFill>
+          <a:ln>
+            <a:noFill/>
+          </a:ln>
+        </p:spPr>
+        <p:txBody>
+          <a:bodyPr rtlCol="0" anchor="ctr"/>
+          <a:lstStyle/>
+          <a:p>
+            <a:pPr algn="ctr"/>
+          </a:p>
+        </p:txBody>
+      </p:sp>
+      <p:sp>
+        <p:nvSpPr>
+          <p:cNvPr id="20" name="Rounded Rectangle 19"/>
+          <p:cNvSpPr/>
+          <p:nvPr/>
+        </p:nvSpPr>
+        <p:spPr>
+          <a:xfrm>
+            <a:off x="6438900" y="2673548"/>
+            <a:ext cx="404416" cy="241300"/>
+          </a:xfrm>
+          <a:prstGeom prst="roundRect">
+            <a:avLst>
+              <a:gd name="adj" fmla="val 50000"/>
+            </a:avLst>
+          </a:prstGeom>
+          <a:solidFill>
+            <a:srgbClr val="FDE7C8"/>
+          </a:solidFill>
+          <a:ln>
+            <a:noFill/>
+          </a:ln>
+        </p:spPr>
+        <p:txBody>
+          <a:bodyPr rtlCol="0" anchor="ctr"/>
+          <a:lstStyle/>
+          <a:p>
+            <a:pPr algn="ctr"/>
+          </a:p>
+        </p:txBody>
+      </p:sp>
+      <p:sp>
+        <p:nvSpPr>
+          <p:cNvPr id="21" name="TextBox 20"/>
+          <p:cNvSpPr txBox="1"/>
+          <p:nvPr/>
+        </p:nvSpPr>
+        <p:spPr>
+          <a:xfrm>
+            <a:off x="6527800" y="2698948"/>
+            <a:ext cx="258814" cy="288925"/>
+          </a:xfrm>
+          <a:prstGeom prst="rect">
+            <a:avLst/>
+          </a:prstGeom>
+          <a:noFill/>
+        </p:spPr>
+        <p:txBody>
+          <a:bodyPr wrap="square" lIns="0" rIns="0" tIns="0" bIns="0" anchor="t">
+            <a:normAutofit/>
+          </a:bodyPr>
+          <a:lstStyle/>
+          <a:p>
+            <a:pPr>
+              <a:lnSpc>
+                <a:spcPct val="119600"/>
+              </a:lnSpc>
+            </a:pPr>
+            <a:r>
+              <a:rPr sz="950" b="1" i="0">
+                <a:solidFill>
+                  <a:srgbClr val="7C2D12"/>
+                </a:solidFill>
+                <a:latin typeface="Arial"/>
+                <a:ea typeface="Malgun Gothic"/>
+                <a:cs typeface="Malgun Gothic"/>
+              </a:rPr>
+              <a:t>주의</a:t>
+            </a:r>
+          </a:p>
+        </p:txBody>
+      </p:sp>
+      <p:sp>
+        <p:nvSpPr>
+          <p:cNvPr id="22" name="TextBox 21"/>
+          <p:cNvSpPr txBox="1"/>
+          <p:nvPr/>
+        </p:nvSpPr>
+        <p:spPr>
+          <a:xfrm>
+            <a:off x="6438900" y="2991048"/>
+            <a:ext cx="5041964" cy="603200"/>
+          </a:xfrm>
+          <a:prstGeom prst="rect">
+            <a:avLst/>
+          </a:prstGeom>
+          <a:noFill/>
+        </p:spPr>
+        <p:txBody>
+          <a:bodyPr wrap="square" lIns="0" rIns="0" tIns="0" bIns="0" anchor="t">
+            <a:normAutofit/>
+          </a:bodyPr>
+          <a:lstStyle/>
+          <a:p>
+            <a:pPr>
+              <a:lnSpc>
+                <a:spcPct val="133400"/>
+              </a:lnSpc>
+            </a:pPr>
+            <a:r>
+              <a:rPr sz="1150" b="0" i="0">
+                <a:solidFill>
+                  <a:srgbClr val="16213A"/>
+                </a:solidFill>
+                <a:latin typeface="Arial"/>
+                <a:ea typeface="Malgun Gothic"/>
+                <a:cs typeface="Malgun Gothic"/>
+              </a:rPr>
+              <a:t>모두 회사 발표다. 16단계 평가의 시도 수와 환경(실물, 시뮬, 기록 재생)을 적지 않았고, 충돌·여유 거리 지표가 없다. 배포 전 시험은 3DGS 시뮬에서 한다.</a:t>
+            </a:r>
+          </a:p>
+        </p:txBody>
+      </p:sp>
+      <p:sp>
+        <p:nvSpPr>
+          <p:cNvPr id="23" name="Rounded Rectangle 22"/>
+          <p:cNvSpPr/>
+          <p:nvPr/>
+        </p:nvSpPr>
+        <p:spPr>
+          <a:xfrm>
+            <a:off x="711200" y="4371578"/>
+            <a:ext cx="10769600" cy="751086"/>
+          </a:xfrm>
+          <a:prstGeom prst="roundRect">
+            <a:avLst>
+              <a:gd name="adj" fmla="val 10145"/>
+            </a:avLst>
+          </a:prstGeom>
+          <a:solidFill>
+            <a:srgbClr val="16213A"/>
+          </a:solidFill>
+          <a:ln>
+            <a:noFill/>
+          </a:ln>
+        </p:spPr>
+        <p:txBody>
+          <a:bodyPr rtlCol="0" anchor="ctr"/>
+          <a:lstStyle/>
+          <a:p>
+            <a:pPr algn="ctr"/>
+          </a:p>
+        </p:txBody>
+      </p:sp>
+      <p:sp>
+        <p:nvSpPr>
+          <p:cNvPr id="24" name="TextBox 23"/>
+          <p:cNvSpPr txBox="1"/>
+          <p:nvPr/>
+        </p:nvSpPr>
+        <p:spPr>
+          <a:xfrm>
+            <a:off x="889000" y="4498578"/>
+            <a:ext cx="10751820" cy="672157"/>
+          </a:xfrm>
+          <a:prstGeom prst="rect">
+            <a:avLst/>
+          </a:prstGeom>
+          <a:noFill/>
+        </p:spPr>
+        <p:txBody>
+          <a:bodyPr wrap="square" lIns="0" rIns="0" tIns="0" bIns="0" anchor="t">
+            <a:normAutofit/>
+          </a:bodyPr>
+          <a:lstStyle/>
+          <a:p>
+            <a:pPr>
+              <a:lnSpc>
+                <a:spcPct val="133400"/>
+              </a:lnSpc>
+            </a:pPr>
+            <a:r>
+              <a:rPr sz="1300" b="1" i="0">
+                <a:solidFill>
+                  <a:srgbClr val="F59E5B"/>
+                </a:solidFill>
+                <a:latin typeface="Arial"/>
+                <a:ea typeface="Malgun Gothic"/>
+                <a:cs typeface="Malgun Gothic"/>
+              </a:rPr>
+              <a:t>travplan:</a:t>
+            </a:r>
+            <a:r>
+              <a:rPr sz="1300" b="0" i="0">
+                <a:solidFill>
+                  <a:srgbClr val="F4F1EA"/>
+                </a:solidFill>
+                <a:latin typeface="Arial"/>
+                <a:ea typeface="Malgun Gothic"/>
+                <a:cs typeface="Malgun Gothic"/>
+              </a:rPr>
+              <a:t> 가져올 것은 평가 방식이다. 연석·경사로·보행자 구간을 단계로 놓고 "첫 실수 전 비율"을 그리면, 에피소드 성공률이 감추는 실패 지점이 보인다.</a:t>
+            </a:r>
+          </a:p>
+        </p:txBody>
+      </p:sp>
+    </p:spTree>
+  </p:cSld>
+  <p:clrMapOvr>
+    <a:masterClrMapping/>
+  </p:clrMapOvr>
+</p:sld>
+</file>
+
+<file path=ppt/slides/slide28.xml><?xml version="1.0" encoding="utf-8"?>
+<p:sld xmlns:a="http://schemas.openxmlformats.org/drawingml/2006/main" xmlns:p="http://schemas.openxmlformats.org/presentationml/2006/main" xmlns:r="http://schemas.openxmlformats.org/officeDocument/2006/relationships">
+  <p:cSld>
+    <p:bg>
+      <p:bgPr>
+        <a:solidFill>
+          <a:srgbClr val="F7F5F0"/>
+        </a:solidFill>
+        <a:effectLst/>
+      </p:bgPr>
+    </p:bg>
+    <p:spTree>
+      <p:nvGrpSpPr>
+        <p:cNvPr id="1" name=""/>
+        <p:cNvGrpSpPr/>
+        <p:nvPr/>
+      </p:nvGrpSpPr>
+      <p:grpSpPr/>
+      <p:sp>
+        <p:nvSpPr>
+          <p:cNvPr id="2" name="TextBox 1"/>
+          <p:cNvSpPr txBox="1"/>
+          <p:nvPr/>
+        </p:nvSpPr>
+        <p:spPr>
+          <a:xfrm>
+            <a:off x="711200" y="508000"/>
+            <a:ext cx="11118088" cy="312738"/>
+          </a:xfrm>
+          <a:prstGeom prst="rect">
+            <a:avLst/>
+          </a:prstGeom>
+          <a:noFill/>
+        </p:spPr>
+        <p:txBody>
+          <a:bodyPr wrap="square" lIns="0" rIns="0" tIns="0" bIns="0" anchor="t">
+            <a:normAutofit/>
+          </a:bodyPr>
+          <a:lstStyle/>
+          <a:p>
+            <a:pPr>
+              <a:lnSpc>
+                <a:spcPct val="138000"/>
+              </a:lnSpc>
+            </a:pPr>
+            <a:r>
+              <a:rPr sz="1050" b="0" i="0">
+                <a:solidFill>
+                  <a:srgbClr val="C2410C"/>
+                </a:solidFill>
+                <a:latin typeface="Consolas"/>
+                <a:ea typeface="Malgun Gothic"/>
+                <a:cs typeface="Malgun Gothic"/>
+              </a:rPr>
               <a:t>A.8.1 · Dyna Robotics DYNA-2.1</a:t>
             </a:r>
           </a:p>
@@ -23061,7 +24042,7 @@
 </p:sld>
 </file>
 
-<file path=ppt/slides/slide28.xml><?xml version="1.0" encoding="utf-8"?>
+<file path=ppt/slides/slide29.xml><?xml version="1.0" encoding="utf-8"?>
 <p:sld xmlns:a="http://schemas.openxmlformats.org/drawingml/2006/main" xmlns:p="http://schemas.openxmlformats.org/presentationml/2006/main" xmlns:r="http://schemas.openxmlformats.org/officeDocument/2006/relationships">
   <p:cSld>
     <p:bg>
@@ -23228,7 +24209,927 @@
 </p:sld>
 </file>
 
-<file path=ppt/slides/slide29.xml><?xml version="1.0" encoding="utf-8"?>
+<file path=ppt/slides/slide3.xml><?xml version="1.0" encoding="utf-8"?>
+<p:sld xmlns:a="http://schemas.openxmlformats.org/drawingml/2006/main" xmlns:p="http://schemas.openxmlformats.org/presentationml/2006/main" xmlns:r="http://schemas.openxmlformats.org/officeDocument/2006/relationships">
+  <p:cSld>
+    <p:bg>
+      <p:bgPr>
+        <a:solidFill>
+          <a:srgbClr val="F7F5F0"/>
+        </a:solidFill>
+        <a:effectLst/>
+      </p:bgPr>
+    </p:bg>
+    <p:spTree>
+      <p:nvGrpSpPr>
+        <p:cNvPr id="1" name=""/>
+        <p:cNvGrpSpPr/>
+        <p:nvPr/>
+      </p:nvGrpSpPr>
+      <p:grpSpPr/>
+      <p:sp>
+        <p:nvSpPr>
+          <p:cNvPr id="2" name="TextBox 1"/>
+          <p:cNvSpPr txBox="1"/>
+          <p:nvPr/>
+        </p:nvSpPr>
+        <p:spPr>
+          <a:xfrm>
+            <a:off x="711200" y="508000"/>
+            <a:ext cx="11118088" cy="312738"/>
+          </a:xfrm>
+          <a:prstGeom prst="rect">
+            <a:avLst/>
+          </a:prstGeom>
+          <a:noFill/>
+        </p:spPr>
+        <p:txBody>
+          <a:bodyPr wrap="square" lIns="0" rIns="0" tIns="0" bIns="0" anchor="t">
+            <a:normAutofit/>
+          </a:bodyPr>
+          <a:lstStyle/>
+          <a:p>
+            <a:pPr>
+              <a:lnSpc>
+                <a:spcPct val="138000"/>
+              </a:lnSpc>
+            </a:pPr>
+            <a:r>
+              <a:rPr sz="1050" b="0" i="0">
+                <a:solidFill>
+                  <a:srgbClr val="C2410C"/>
+                </a:solidFill>
+                <a:latin typeface="Consolas"/>
+                <a:ea typeface="Malgun Gothic"/>
+                <a:cs typeface="Malgun Gothic"/>
+              </a:rPr>
+              <a:t>순서</a:t>
+            </a:r>
+          </a:p>
+        </p:txBody>
+      </p:sp>
+      <p:sp>
+        <p:nvSpPr>
+          <p:cNvPr id="3" name="TextBox 2"/>
+          <p:cNvSpPr txBox="1"/>
+          <p:nvPr/>
+        </p:nvSpPr>
+        <p:spPr>
+          <a:xfrm>
+            <a:off x="711200" y="781050"/>
+            <a:ext cx="11118088" cy="554335"/>
+          </a:xfrm>
+          <a:prstGeom prst="rect">
+            <a:avLst/>
+          </a:prstGeom>
+          <a:noFill/>
+        </p:spPr>
+        <p:txBody>
+          <a:bodyPr wrap="square" lIns="0" rIns="0" tIns="0" bIns="0" anchor="t">
+            <a:normAutofit/>
+          </a:bodyPr>
+          <a:lstStyle/>
+          <a:p>
+            <a:pPr>
+              <a:lnSpc>
+                <a:spcPct val="112240"/>
+              </a:lnSpc>
+            </a:pPr>
+            <a:r>
+              <a:rPr sz="2500" b="1" i="0">
+                <a:solidFill>
+                  <a:srgbClr val="16213A"/>
+                </a:solidFill>
+                <a:latin typeface="Arial"/>
+                <a:ea typeface="Malgun Gothic"/>
+                <a:cs typeface="Malgun Gothic"/>
+              </a:rPr>
+              <a:t>지형도에서 시작해 네 층을 지나 travplan으로 돌아온다</a:t>
+            </a:r>
+          </a:p>
+        </p:txBody>
+      </p:sp>
+      <p:graphicFrame>
+        <p:nvGraphicFramePr>
+          <p:cNvPr id="4" name="Table 3"/>
+          <p:cNvGraphicFramePr>
+            <a:graphicFrameLocks noGrp="1"/>
+          </p:cNvGraphicFramePr>
+          <p:nvPr/>
+        </p:nvGraphicFramePr>
+        <p:xfrm>
+          <a:off x="711200" y="1361678"/>
+          <a:ext cx="10769601" cy="2457885"/>
+        </p:xfrm>
+        <a:graphic>
+          <a:graphicData uri="http://schemas.openxmlformats.org/drawingml/2006/table">
+            <a:tbl>
+              <a:tblPr firstRow="0" bandRow="0">
+                <a:tableStyleId>{5C22544A-7EE6-4342-B048-85BDC9FD1C3A}</a:tableStyleId>
+              </a:tblPr>
+              <a:tblGrid>
+                <a:gridCol w="435670"/>
+                <a:gridCol w="2187476"/>
+                <a:gridCol w="5482828"/>
+                <a:gridCol w="2663627"/>
+              </a:tblGrid>
+              <a:tr h="314657">
+                <a:tc>
+                  <a:txBody>
+                    <a:bodyPr wrap="square"/>
+                    <a:lstStyle/>
+                    <a:p>
+                      <a:r>
+                        <a:rPr sz="1350" b="1" i="0">
+                          <a:solidFill>
+                            <a:srgbClr val="F4F1EA"/>
+                          </a:solidFill>
+                          <a:latin typeface="Arial"/>
+                          <a:ea typeface="Malgun Gothic"/>
+                          <a:cs typeface="Malgun Gothic"/>
+                        </a:rPr>
+                        <a:t>장</a:t>
+                      </a:r>
+                    </a:p>
+                  </a:txBody>
+                  <a:tcPr marL="76200" marR="76200" marT="25400" marB="25400">
+                    <a:solidFill>
+                      <a:srgbClr val="16213A"/>
+                    </a:solidFill>
+                  </a:tcPr>
+                </a:tc>
+                <a:tc>
+                  <a:txBody>
+                    <a:bodyPr wrap="square"/>
+                    <a:lstStyle/>
+                    <a:p>
+                      <a:r>
+                        <a:rPr sz="1350" b="1" i="0">
+                          <a:solidFill>
+                            <a:srgbClr val="F4F1EA"/>
+                          </a:solidFill>
+                          <a:latin typeface="Arial"/>
+                          <a:ea typeface="Malgun Gothic"/>
+                          <a:cs typeface="Malgun Gothic"/>
+                        </a:rPr>
+                        <a:t>갈래</a:t>
+                      </a:r>
+                    </a:p>
+                  </a:txBody>
+                  <a:tcPr marL="76200" marR="76200" marT="25400" marB="25400">
+                    <a:solidFill>
+                      <a:srgbClr val="16213A"/>
+                    </a:solidFill>
+                  </a:tcPr>
+                </a:tc>
+                <a:tc>
+                  <a:txBody>
+                    <a:bodyPr wrap="square"/>
+                    <a:lstStyle/>
+                    <a:p>
+                      <a:r>
+                        <a:rPr sz="1350" b="1" i="0">
+                          <a:solidFill>
+                            <a:srgbClr val="F4F1EA"/>
+                          </a:solidFill>
+                          <a:latin typeface="Arial"/>
+                          <a:ea typeface="Malgun Gothic"/>
+                          <a:cs typeface="Malgun Gothic"/>
+                        </a:rPr>
+                        <a:t>핵심</a:t>
+                      </a:r>
+                    </a:p>
+                  </a:txBody>
+                  <a:tcPr marL="76200" marR="76200" marT="25400" marB="25400">
+                    <a:solidFill>
+                      <a:srgbClr val="16213A"/>
+                    </a:solidFill>
+                  </a:tcPr>
+                </a:tc>
+                <a:tc>
+                  <a:txBody>
+                    <a:bodyPr wrap="square"/>
+                    <a:lstStyle/>
+                    <a:p>
+                      <a:r>
+                        <a:rPr sz="1350" b="1" i="0">
+                          <a:solidFill>
+                            <a:srgbClr val="F4F1EA"/>
+                          </a:solidFill>
+                          <a:latin typeface="Arial"/>
+                          <a:ea typeface="Malgun Gothic"/>
+                          <a:cs typeface="Malgun Gothic"/>
+                        </a:rPr>
+                        <a:t>문서 절</a:t>
+                      </a:r>
+                    </a:p>
+                  </a:txBody>
+                  <a:tcPr marL="76200" marR="76200" marT="25400" marB="25400">
+                    <a:solidFill>
+                      <a:srgbClr val="16213A"/>
+                    </a:solidFill>
+                  </a:tcPr>
+                </a:tc>
+              </a:tr>
+              <a:tr h="306561">
+                <a:tc>
+                  <a:txBody>
+                    <a:bodyPr wrap="square"/>
+                    <a:lstStyle/>
+                    <a:p>
+                      <a:r>
+                        <a:rPr sz="1350" b="0" i="0">
+                          <a:solidFill>
+                            <a:srgbClr val="16213A"/>
+                          </a:solidFill>
+                          <a:latin typeface="Arial"/>
+                          <a:ea typeface="Malgun Gothic"/>
+                          <a:cs typeface="Malgun Gothic"/>
+                        </a:rPr>
+                        <a:t>1</a:t>
+                      </a:r>
+                    </a:p>
+                  </a:txBody>
+                  <a:tcPr marL="76200" marR="76200" marT="25400" marB="25400">
+                    <a:solidFill>
+                      <a:srgbClr val="F1EDE4"/>
+                    </a:solidFill>
+                  </a:tcPr>
+                </a:tc>
+                <a:tc>
+                  <a:txBody>
+                    <a:bodyPr wrap="square"/>
+                    <a:lstStyle/>
+                    <a:p>
+                      <a:r>
+                        <a:rPr sz="1350" b="0" i="0">
+                          <a:solidFill>
+                            <a:srgbClr val="16213A"/>
+                          </a:solidFill>
+                          <a:latin typeface="Arial"/>
+                          <a:ea typeface="Malgun Gothic"/>
+                          <a:cs typeface="Malgun Gothic"/>
+                        </a:rPr>
+                        <a:t>지형도</a:t>
+                      </a:r>
+                    </a:p>
+                  </a:txBody>
+                  <a:tcPr marL="76200" marR="76200" marT="25400" marB="25400">
+                    <a:solidFill>
+                      <a:srgbClr val="F1EDE4"/>
+                    </a:solidFill>
+                  </a:tcPr>
+                </a:tc>
+                <a:tc>
+                  <a:txBody>
+                    <a:bodyPr wrap="square"/>
+                    <a:lstStyle/>
+                    <a:p>
+                      <a:r>
+                        <a:rPr sz="1350" b="0" i="0">
+                          <a:solidFill>
+                            <a:srgbClr val="16213A"/>
+                          </a:solidFill>
+                          <a:latin typeface="Arial"/>
+                          <a:ea typeface="Malgun Gothic"/>
+                          <a:cs typeface="Malgun Gothic"/>
+                        </a:rPr>
+                        <a:t>분야별 대세, 연구실 계보</a:t>
+                      </a:r>
+                    </a:p>
+                  </a:txBody>
+                  <a:tcPr marL="76200" marR="76200" marT="25400" marB="25400">
+                    <a:solidFill>
+                      <a:srgbClr val="F1EDE4"/>
+                    </a:solidFill>
+                  </a:tcPr>
+                </a:tc>
+                <a:tc>
+                  <a:txBody>
+                    <a:bodyPr wrap="square"/>
+                    <a:lstStyle/>
+                    <a:p>
+                      <a:r>
+                        <a:rPr sz="1350" b="0" i="0">
+                          <a:solidFill>
+                            <a:srgbClr val="16213A"/>
+                          </a:solidFill>
+                          <a:latin typeface="Arial"/>
+                          <a:ea typeface="Malgun Gothic"/>
+                          <a:cs typeface="Malgun Gothic"/>
+                        </a:rPr>
+                        <a:t>B.18, B.16</a:t>
+                      </a:r>
+                    </a:p>
+                  </a:txBody>
+                  <a:tcPr marL="76200" marR="76200" marT="25400" marB="25400">
+                    <a:solidFill>
+                      <a:srgbClr val="F1EDE4"/>
+                    </a:solidFill>
+                  </a:tcPr>
+                </a:tc>
+              </a:tr>
+              <a:tr h="306561">
+                <a:tc>
+                  <a:txBody>
+                    <a:bodyPr wrap="square"/>
+                    <a:lstStyle/>
+                    <a:p>
+                      <a:r>
+                        <a:rPr sz="1350" b="0" i="0">
+                          <a:solidFill>
+                            <a:srgbClr val="16213A"/>
+                          </a:solidFill>
+                          <a:latin typeface="Arial"/>
+                          <a:ea typeface="Malgun Gothic"/>
+                          <a:cs typeface="Malgun Gothic"/>
+                        </a:rPr>
+                        <a:t>2</a:t>
+                      </a:r>
+                    </a:p>
+                  </a:txBody>
+                  <a:tcPr marL="76200" marR="76200" marT="25400" marB="25400">
+                    <a:solidFill>
+                      <a:srgbClr val="FFFDF8"/>
+                    </a:solidFill>
+                  </a:tcPr>
+                </a:tc>
+                <a:tc>
+                  <a:txBody>
+                    <a:bodyPr wrap="square"/>
+                    <a:lstStyle/>
+                    <a:p>
+                      <a:r>
+                        <a:rPr sz="1350" b="0" i="0">
+                          <a:solidFill>
+                            <a:srgbClr val="16213A"/>
+                          </a:solidFill>
+                          <a:latin typeface="Arial"/>
+                          <a:ea typeface="Malgun Gothic"/>
+                          <a:cs typeface="Malgun Gothic"/>
+                        </a:rPr>
+                        <a:t>내비 층이 넘기는 것</a:t>
+                      </a:r>
+                    </a:p>
+                  </a:txBody>
+                  <a:tcPr marL="76200" marR="76200" marT="25400" marB="25400">
+                    <a:solidFill>
+                      <a:srgbClr val="FFFDF8"/>
+                    </a:solidFill>
+                  </a:tcPr>
+                </a:tc>
+                <a:tc>
+                  <a:txBody>
+                    <a:bodyPr wrap="square"/>
+                    <a:lstStyle/>
+                    <a:p>
+                      <a:r>
+                        <a:rPr sz="1350" b="0" i="0">
+                          <a:solidFill>
+                            <a:srgbClr val="16213A"/>
+                          </a:solidFill>
+                          <a:latin typeface="Arial"/>
+                          <a:ea typeface="Malgun Gothic"/>
+                          <a:cs typeface="Malgun Gothic"/>
+                        </a:rPr>
+                        <a:t>CMU 스택, LP-NavOA, FocusNav, TAME-Nav</a:t>
+                      </a:r>
+                    </a:p>
+                  </a:txBody>
+                  <a:tcPr marL="76200" marR="76200" marT="25400" marB="25400">
+                    <a:solidFill>
+                      <a:srgbClr val="FFFDF8"/>
+                    </a:solidFill>
+                  </a:tcPr>
+                </a:tc>
+                <a:tc>
+                  <a:txBody>
+                    <a:bodyPr wrap="square"/>
+                    <a:lstStyle/>
+                    <a:p>
+                      <a:r>
+                        <a:rPr sz="1350" b="0" i="0">
+                          <a:solidFill>
+                            <a:srgbClr val="16213A"/>
+                          </a:solidFill>
+                          <a:latin typeface="Arial"/>
+                          <a:ea typeface="Malgun Gothic"/>
+                          <a:cs typeface="Malgun Gothic"/>
+                        </a:rPr>
+                        <a:t>B.16.8, B.4</a:t>
+                      </a:r>
+                    </a:p>
+                  </a:txBody>
+                  <a:tcPr marL="76200" marR="76200" marT="25400" marB="25400">
+                    <a:solidFill>
+                      <a:srgbClr val="FFFDF8"/>
+                    </a:solidFill>
+                  </a:tcPr>
+                </a:tc>
+              </a:tr>
+              <a:tr h="306561">
+                <a:tc>
+                  <a:txBody>
+                    <a:bodyPr wrap="square"/>
+                    <a:lstStyle/>
+                    <a:p>
+                      <a:r>
+                        <a:rPr sz="1350" b="0" i="0">
+                          <a:solidFill>
+                            <a:srgbClr val="16213A"/>
+                          </a:solidFill>
+                          <a:latin typeface="Arial"/>
+                          <a:ea typeface="Malgun Gothic"/>
+                          <a:cs typeface="Malgun Gothic"/>
+                        </a:rPr>
+                        <a:t>3</a:t>
+                      </a:r>
+                    </a:p>
+                  </a:txBody>
+                  <a:tcPr marL="76200" marR="76200" marT="25400" marB="25400">
+                    <a:solidFill>
+                      <a:srgbClr val="F1EDE4"/>
+                    </a:solidFill>
+                  </a:tcPr>
+                </a:tc>
+                <a:tc>
+                  <a:txBody>
+                    <a:bodyPr wrap="square"/>
+                    <a:lstStyle/>
+                    <a:p>
+                      <a:r>
+                        <a:rPr sz="1350" b="0" i="0">
+                          <a:solidFill>
+                            <a:srgbClr val="16213A"/>
+                          </a:solidFill>
+                          <a:latin typeface="Arial"/>
+                          <a:ea typeface="Malgun Gothic"/>
+                          <a:cs typeface="Malgun Gothic"/>
+                        </a:rPr>
+                        <a:t>지형을 보는 보행</a:t>
+                      </a:r>
+                    </a:p>
+                  </a:txBody>
+                  <a:tcPr marL="76200" marR="76200" marT="25400" marB="25400">
+                    <a:solidFill>
+                      <a:srgbClr val="F1EDE4"/>
+                    </a:solidFill>
+                  </a:tcPr>
+                </a:tc>
+                <a:tc>
+                  <a:txBody>
+                    <a:bodyPr wrap="square"/>
+                    <a:lstStyle/>
+                    <a:p>
+                      <a:r>
+                        <a:rPr sz="1350" b="0" i="0">
+                          <a:solidFill>
+                            <a:srgbClr val="16213A"/>
+                          </a:solidFill>
+                          <a:latin typeface="Arial"/>
+                          <a:ea typeface="Malgun Gothic"/>
+                          <a:cs typeface="Malgun Gothic"/>
+                        </a:rPr>
+                        <a:t>Watch Your Step, 성긴 LiDAR 지도, PHP, LocoFormer</a:t>
+                      </a:r>
+                    </a:p>
+                  </a:txBody>
+                  <a:tcPr marL="76200" marR="76200" marT="25400" marB="25400">
+                    <a:solidFill>
+                      <a:srgbClr val="F1EDE4"/>
+                    </a:solidFill>
+                  </a:tcPr>
+                </a:tc>
+                <a:tc>
+                  <a:txBody>
+                    <a:bodyPr wrap="square"/>
+                    <a:lstStyle/>
+                    <a:p>
+                      <a:r>
+                        <a:rPr sz="1350" b="0" i="0">
+                          <a:solidFill>
+                            <a:srgbClr val="16213A"/>
+                          </a:solidFill>
+                          <a:latin typeface="Arial"/>
+                          <a:ea typeface="Malgun Gothic"/>
+                          <a:cs typeface="Malgun Gothic"/>
+                        </a:rPr>
+                        <a:t>B.16.3, A.8.2, B.16.5–6</a:t>
+                      </a:r>
+                    </a:p>
+                  </a:txBody>
+                  <a:tcPr marL="76200" marR="76200" marT="25400" marB="25400">
+                    <a:solidFill>
+                      <a:srgbClr val="F1EDE4"/>
+                    </a:solidFill>
+                  </a:tcPr>
+                </a:tc>
+              </a:tr>
+              <a:tr h="306561">
+                <a:tc>
+                  <a:txBody>
+                    <a:bodyPr wrap="square"/>
+                    <a:lstStyle/>
+                    <a:p>
+                      <a:r>
+                        <a:rPr sz="1350" b="0" i="0">
+                          <a:solidFill>
+                            <a:srgbClr val="16213A"/>
+                          </a:solidFill>
+                          <a:latin typeface="Arial"/>
+                          <a:ea typeface="Malgun Gothic"/>
+                          <a:cs typeface="Malgun Gothic"/>
+                        </a:rPr>
+                        <a:t>4</a:t>
+                      </a:r>
+                    </a:p>
+                  </a:txBody>
+                  <a:tcPr marL="76200" marR="76200" marT="25400" marB="25400">
+                    <a:solidFill>
+                      <a:srgbClr val="FFFDF8"/>
+                    </a:solidFill>
+                  </a:tcPr>
+                </a:tc>
+                <a:tc>
+                  <a:txBody>
+                    <a:bodyPr wrap="square"/>
+                    <a:lstStyle/>
+                    <a:p>
+                      <a:r>
+                        <a:rPr sz="1350" b="0" i="0">
+                          <a:solidFill>
+                            <a:srgbClr val="16213A"/>
+                          </a:solidFill>
+                          <a:latin typeface="Arial"/>
+                          <a:ea typeface="Malgun Gothic"/>
+                          <a:cs typeface="Malgun Gothic"/>
+                        </a:rPr>
+                        <a:t>전신 제어와 원격조종</a:t>
+                      </a:r>
+                    </a:p>
+                  </a:txBody>
+                  <a:tcPr marL="76200" marR="76200" marT="25400" marB="25400">
+                    <a:solidFill>
+                      <a:srgbClr val="FFFDF8"/>
+                    </a:solidFill>
+                  </a:tcPr>
+                </a:tc>
+                <a:tc>
+                  <a:txBody>
+                    <a:bodyPr wrap="square"/>
+                    <a:lstStyle/>
+                    <a:p>
+                      <a:r>
+                        <a:rPr sz="1350" b="0" i="0">
+                          <a:solidFill>
+                            <a:srgbClr val="16213A"/>
+                          </a:solidFill>
+                          <a:latin typeface="Arial"/>
+                          <a:ea typeface="Malgun Gothic"/>
+                          <a:cs typeface="Malgun Gothic"/>
+                        </a:rPr>
+                        <a:t>PASSAGE, NEXUS, 출력의 투영</a:t>
+                      </a:r>
+                    </a:p>
+                  </a:txBody>
+                  <a:tcPr marL="76200" marR="76200" marT="25400" marB="25400">
+                    <a:solidFill>
+                      <a:srgbClr val="FFFDF8"/>
+                    </a:solidFill>
+                  </a:tcPr>
+                </a:tc>
+                <a:tc>
+                  <a:txBody>
+                    <a:bodyPr wrap="square"/>
+                    <a:lstStyle/>
+                    <a:p>
+                      <a:r>
+                        <a:rPr sz="1350" b="0" i="0">
+                          <a:solidFill>
+                            <a:srgbClr val="16213A"/>
+                          </a:solidFill>
+                          <a:latin typeface="Arial"/>
+                          <a:ea typeface="Malgun Gothic"/>
+                          <a:cs typeface="Malgun Gothic"/>
+                        </a:rPr>
+                        <a:t>B.16.6, §I, B.16.8</a:t>
+                      </a:r>
+                    </a:p>
+                  </a:txBody>
+                  <a:tcPr marL="76200" marR="76200" marT="25400" marB="25400">
+                    <a:solidFill>
+                      <a:srgbClr val="FFFDF8"/>
+                    </a:solidFill>
+                  </a:tcPr>
+                </a:tc>
+              </a:tr>
+              <a:tr h="306561">
+                <a:tc>
+                  <a:txBody>
+                    <a:bodyPr wrap="square"/>
+                    <a:lstStyle/>
+                    <a:p>
+                      <a:r>
+                        <a:rPr sz="1350" b="0" i="0">
+                          <a:solidFill>
+                            <a:srgbClr val="16213A"/>
+                          </a:solidFill>
+                          <a:latin typeface="Arial"/>
+                          <a:ea typeface="Malgun Gothic"/>
+                          <a:cs typeface="Malgun Gothic"/>
+                        </a:rPr>
+                        <a:t>5</a:t>
+                      </a:r>
+                    </a:p>
+                  </a:txBody>
+                  <a:tcPr marL="76200" marR="76200" marT="25400" marB="25400">
+                    <a:solidFill>
+                      <a:srgbClr val="F1EDE4"/>
+                    </a:solidFill>
+                  </a:tcPr>
+                </a:tc>
+                <a:tc>
+                  <a:txBody>
+                    <a:bodyPr wrap="square"/>
+                    <a:lstStyle/>
+                    <a:p>
+                      <a:r>
+                        <a:rPr sz="1350" b="0" i="0">
+                          <a:solidFill>
+                            <a:srgbClr val="16213A"/>
+                          </a:solidFill>
+                          <a:latin typeface="Arial"/>
+                          <a:ea typeface="Malgun Gothic"/>
+                          <a:cs typeface="Malgun Gothic"/>
+                        </a:rPr>
+                        <a:t>장시간 자율 작업</a:t>
+                      </a:r>
+                    </a:p>
+                  </a:txBody>
+                  <a:tcPr marL="76200" marR="76200" marT="25400" marB="25400">
+                    <a:solidFill>
+                      <a:srgbClr val="F1EDE4"/>
+                    </a:solidFill>
+                  </a:tcPr>
+                </a:tc>
+                <a:tc>
+                  <a:txBody>
+                    <a:bodyPr wrap="square"/>
+                    <a:lstStyle/>
+                    <a:p>
+                      <a:r>
+                        <a:rPr sz="1350" b="0" i="0">
+                          <a:solidFill>
+                            <a:srgbClr val="16213A"/>
+                          </a:solidFill>
+                          <a:latin typeface="Arial"/>
+                          <a:ea typeface="Malgun Gothic"/>
+                          <a:cs typeface="Malgun Gothic"/>
+                        </a:rPr>
+                        <a:t>Flexion Reflect v1.0, Dyna</a:t>
+                      </a:r>
+                    </a:p>
+                  </a:txBody>
+                  <a:tcPr marL="76200" marR="76200" marT="25400" marB="25400">
+                    <a:solidFill>
+                      <a:srgbClr val="F1EDE4"/>
+                    </a:solidFill>
+                  </a:tcPr>
+                </a:tc>
+                <a:tc>
+                  <a:txBody>
+                    <a:bodyPr wrap="square"/>
+                    <a:lstStyle/>
+                    <a:p>
+                      <a:r>
+                        <a:rPr sz="1350" b="0" i="0">
+                          <a:solidFill>
+                            <a:srgbClr val="16213A"/>
+                          </a:solidFill>
+                          <a:latin typeface="Arial"/>
+                          <a:ea typeface="Malgun Gothic"/>
+                          <a:cs typeface="Malgun Gothic"/>
+                        </a:rPr>
+                        <a:t>B.16.3, A.8.1</a:t>
+                      </a:r>
+                    </a:p>
+                  </a:txBody>
+                  <a:tcPr marL="76200" marR="76200" marT="25400" marB="25400">
+                    <a:solidFill>
+                      <a:srgbClr val="F1EDE4"/>
+                    </a:solidFill>
+                  </a:tcPr>
+                </a:tc>
+              </a:tr>
+              <a:tr h="306561">
+                <a:tc>
+                  <a:txBody>
+                    <a:bodyPr wrap="square"/>
+                    <a:lstStyle/>
+                    <a:p>
+                      <a:r>
+                        <a:rPr sz="1350" b="0" i="0">
+                          <a:solidFill>
+                            <a:srgbClr val="16213A"/>
+                          </a:solidFill>
+                          <a:latin typeface="Arial"/>
+                          <a:ea typeface="Malgun Gothic"/>
+                          <a:cs typeface="Malgun Gothic"/>
+                        </a:rPr>
+                        <a:t>6</a:t>
+                      </a:r>
+                    </a:p>
+                  </a:txBody>
+                  <a:tcPr marL="76200" marR="76200" marT="25400" marB="25400">
+                    <a:solidFill>
+                      <a:srgbClr val="FFFDF8"/>
+                    </a:solidFill>
+                  </a:tcPr>
+                </a:tc>
+                <a:tc>
+                  <a:txBody>
+                    <a:bodyPr wrap="square"/>
+                    <a:lstStyle/>
+                    <a:p>
+                      <a:r>
+                        <a:rPr sz="1350" b="0" i="0">
+                          <a:solidFill>
+                            <a:srgbClr val="16213A"/>
+                          </a:solidFill>
+                          <a:latin typeface="Arial"/>
+                          <a:ea typeface="Malgun Gothic"/>
+                          <a:cs typeface="Malgun Gothic"/>
+                        </a:rPr>
+                        <a:t>비교</a:t>
+                      </a:r>
+                    </a:p>
+                  </a:txBody>
+                  <a:tcPr marL="76200" marR="76200" marT="25400" marB="25400">
+                    <a:solidFill>
+                      <a:srgbClr val="FFFDF8"/>
+                    </a:solidFill>
+                  </a:tcPr>
+                </a:tc>
+                <a:tc>
+                  <a:txBody>
+                    <a:bodyPr wrap="square"/>
+                    <a:lstStyle/>
+                    <a:p>
+                      <a:r>
+                        <a:rPr sz="1350" b="0" i="0">
+                          <a:solidFill>
+                            <a:srgbClr val="16213A"/>
+                          </a:solidFill>
+                          <a:latin typeface="Arial"/>
+                          <a:ea typeface="Malgun Gothic"/>
+                          <a:cs typeface="Malgun Gothic"/>
+                        </a:rPr>
+                        <a:t>두 비교표, 공통점과 차이점</a:t>
+                      </a:r>
+                    </a:p>
+                  </a:txBody>
+                  <a:tcPr marL="76200" marR="76200" marT="25400" marB="25400">
+                    <a:solidFill>
+                      <a:srgbClr val="FFFDF8"/>
+                    </a:solidFill>
+                  </a:tcPr>
+                </a:tc>
+                <a:tc>
+                  <a:txBody>
+                    <a:bodyPr wrap="square"/>
+                    <a:lstStyle/>
+                    <a:p>
+                      <a:r>
+                        <a:rPr sz="1350" b="0" i="0">
+                          <a:solidFill>
+                            <a:srgbClr val="16213A"/>
+                          </a:solidFill>
+                          <a:latin typeface="Arial"/>
+                          <a:ea typeface="Malgun Gothic"/>
+                          <a:cs typeface="Malgun Gothic"/>
+                        </a:rPr>
+                        <a:t>위 절 전부</a:t>
+                      </a:r>
+                    </a:p>
+                  </a:txBody>
+                  <a:tcPr marL="76200" marR="76200" marT="25400" marB="25400">
+                    <a:solidFill>
+                      <a:srgbClr val="FFFDF8"/>
+                    </a:solidFill>
+                  </a:tcPr>
+                </a:tc>
+              </a:tr>
+              <a:tr h="303862">
+                <a:tc>
+                  <a:txBody>
+                    <a:bodyPr wrap="square"/>
+                    <a:lstStyle/>
+                    <a:p>
+                      <a:r>
+                        <a:rPr sz="1350" b="0" i="0">
+                          <a:solidFill>
+                            <a:srgbClr val="16213A"/>
+                          </a:solidFill>
+                          <a:latin typeface="Arial"/>
+                          <a:ea typeface="Malgun Gothic"/>
+                          <a:cs typeface="Malgun Gothic"/>
+                        </a:rPr>
+                        <a:t>7</a:t>
+                      </a:r>
+                    </a:p>
+                  </a:txBody>
+                  <a:tcPr marL="76200" marR="76200" marT="25400" marB="25400">
+                    <a:solidFill>
+                      <a:srgbClr val="F1EDE4"/>
+                    </a:solidFill>
+                  </a:tcPr>
+                </a:tc>
+                <a:tc>
+                  <a:txBody>
+                    <a:bodyPr wrap="square"/>
+                    <a:lstStyle/>
+                    <a:p>
+                      <a:r>
+                        <a:rPr sz="1350" b="0" i="0">
+                          <a:solidFill>
+                            <a:srgbClr val="16213A"/>
+                          </a:solidFill>
+                          <a:latin typeface="Arial"/>
+                          <a:ea typeface="Malgun Gothic"/>
+                          <a:cs typeface="Malgun Gothic"/>
+                        </a:rPr>
+                        <a:t>travplan에서</a:t>
+                      </a:r>
+                    </a:p>
+                  </a:txBody>
+                  <a:tcPr marL="76200" marR="76200" marT="25400" marB="25400">
+                    <a:solidFill>
+                      <a:srgbClr val="F1EDE4"/>
+                    </a:solidFill>
+                  </a:tcPr>
+                </a:tc>
+                <a:tc>
+                  <a:txBody>
+                    <a:bodyPr wrap="square"/>
+                    <a:lstStyle/>
+                    <a:p>
+                      <a:r>
+                        <a:rPr sz="1350" b="0" i="0">
+                          <a:solidFill>
+                            <a:srgbClr val="16213A"/>
+                          </a:solidFill>
+                          <a:latin typeface="Arial"/>
+                          <a:ea typeface="Malgun Gothic"/>
+                          <a:cs typeface="Malgun Gothic"/>
+                        </a:rPr>
+                        <a:t>경계의 대응, 가져올 순서, 다음 시험</a:t>
+                      </a:r>
+                    </a:p>
+                  </a:txBody>
+                  <a:tcPr marL="76200" marR="76200" marT="25400" marB="25400">
+                    <a:solidFill>
+                      <a:srgbClr val="F1EDE4"/>
+                    </a:solidFill>
+                  </a:tcPr>
+                </a:tc>
+                <a:tc>
+                  <a:txBody>
+                    <a:bodyPr wrap="square"/>
+                    <a:lstStyle/>
+                    <a:p>
+                      <a:r>
+                        <a:rPr sz="1350" b="0" i="0">
+                          <a:solidFill>
+                            <a:srgbClr val="16213A"/>
+                          </a:solidFill>
+                          <a:latin typeface="Arial"/>
+                          <a:ea typeface="Malgun Gothic"/>
+                          <a:cs typeface="Malgun Gothic"/>
+                        </a:rPr>
+                        <a:t>B.16.7, B.16.8</a:t>
+                      </a:r>
+                    </a:p>
+                  </a:txBody>
+                  <a:tcPr marL="76200" marR="76200" marT="25400" marB="25400">
+                    <a:solidFill>
+                      <a:srgbClr val="F1EDE4"/>
+                    </a:solidFill>
+                  </a:tcPr>
+                </a:tc>
+              </a:tr>
+            </a:tbl>
+          </a:graphicData>
+        </a:graphic>
+      </p:graphicFrame>
+    </p:spTree>
+  </p:cSld>
+  <p:clrMapOvr>
+    <a:masterClrMapping/>
+  </p:clrMapOvr>
+</p:sld>
+</file>
+
+<file path=ppt/slides/slide30.xml><?xml version="1.0" encoding="utf-8"?>
 <p:sld xmlns:a="http://schemas.openxmlformats.org/drawingml/2006/main" xmlns:p="http://schemas.openxmlformats.org/presentationml/2006/main" xmlns:r="http://schemas.openxmlformats.org/officeDocument/2006/relationships">
   <p:cSld>
     <p:bg>
@@ -24341,927 +26242,7 @@
 </p:sld>
 </file>
 
-<file path=ppt/slides/slide3.xml><?xml version="1.0" encoding="utf-8"?>
-<p:sld xmlns:a="http://schemas.openxmlformats.org/drawingml/2006/main" xmlns:p="http://schemas.openxmlformats.org/presentationml/2006/main" xmlns:r="http://schemas.openxmlformats.org/officeDocument/2006/relationships">
-  <p:cSld>
-    <p:bg>
-      <p:bgPr>
-        <a:solidFill>
-          <a:srgbClr val="F7F5F0"/>
-        </a:solidFill>
-        <a:effectLst/>
-      </p:bgPr>
-    </p:bg>
-    <p:spTree>
-      <p:nvGrpSpPr>
-        <p:cNvPr id="1" name=""/>
-        <p:cNvGrpSpPr/>
-        <p:nvPr/>
-      </p:nvGrpSpPr>
-      <p:grpSpPr/>
-      <p:sp>
-        <p:nvSpPr>
-          <p:cNvPr id="2" name="TextBox 1"/>
-          <p:cNvSpPr txBox="1"/>
-          <p:nvPr/>
-        </p:nvSpPr>
-        <p:spPr>
-          <a:xfrm>
-            <a:off x="711200" y="508000"/>
-            <a:ext cx="11118088" cy="312738"/>
-          </a:xfrm>
-          <a:prstGeom prst="rect">
-            <a:avLst/>
-          </a:prstGeom>
-          <a:noFill/>
-        </p:spPr>
-        <p:txBody>
-          <a:bodyPr wrap="square" lIns="0" rIns="0" tIns="0" bIns="0" anchor="t">
-            <a:normAutofit/>
-          </a:bodyPr>
-          <a:lstStyle/>
-          <a:p>
-            <a:pPr>
-              <a:lnSpc>
-                <a:spcPct val="138000"/>
-              </a:lnSpc>
-            </a:pPr>
-            <a:r>
-              <a:rPr sz="1050" b="0" i="0">
-                <a:solidFill>
-                  <a:srgbClr val="C2410C"/>
-                </a:solidFill>
-                <a:latin typeface="Consolas"/>
-                <a:ea typeface="Malgun Gothic"/>
-                <a:cs typeface="Malgun Gothic"/>
-              </a:rPr>
-              <a:t>순서</a:t>
-            </a:r>
-          </a:p>
-        </p:txBody>
-      </p:sp>
-      <p:sp>
-        <p:nvSpPr>
-          <p:cNvPr id="3" name="TextBox 2"/>
-          <p:cNvSpPr txBox="1"/>
-          <p:nvPr/>
-        </p:nvSpPr>
-        <p:spPr>
-          <a:xfrm>
-            <a:off x="711200" y="781050"/>
-            <a:ext cx="11118088" cy="554335"/>
-          </a:xfrm>
-          <a:prstGeom prst="rect">
-            <a:avLst/>
-          </a:prstGeom>
-          <a:noFill/>
-        </p:spPr>
-        <p:txBody>
-          <a:bodyPr wrap="square" lIns="0" rIns="0" tIns="0" bIns="0" anchor="t">
-            <a:normAutofit/>
-          </a:bodyPr>
-          <a:lstStyle/>
-          <a:p>
-            <a:pPr>
-              <a:lnSpc>
-                <a:spcPct val="112240"/>
-              </a:lnSpc>
-            </a:pPr>
-            <a:r>
-              <a:rPr sz="2500" b="1" i="0">
-                <a:solidFill>
-                  <a:srgbClr val="16213A"/>
-                </a:solidFill>
-                <a:latin typeface="Arial"/>
-                <a:ea typeface="Malgun Gothic"/>
-                <a:cs typeface="Malgun Gothic"/>
-              </a:rPr>
-              <a:t>지형도에서 시작해 네 층을 지나 travplan으로 돌아온다</a:t>
-            </a:r>
-          </a:p>
-        </p:txBody>
-      </p:sp>
-      <p:graphicFrame>
-        <p:nvGraphicFramePr>
-          <p:cNvPr id="4" name="Table 3"/>
-          <p:cNvGraphicFramePr>
-            <a:graphicFrameLocks noGrp="1"/>
-          </p:cNvGraphicFramePr>
-          <p:nvPr/>
-        </p:nvGraphicFramePr>
-        <p:xfrm>
-          <a:off x="711200" y="1361678"/>
-          <a:ext cx="10769601" cy="2457885"/>
-        </p:xfrm>
-        <a:graphic>
-          <a:graphicData uri="http://schemas.openxmlformats.org/drawingml/2006/table">
-            <a:tbl>
-              <a:tblPr firstRow="0" bandRow="0">
-                <a:tableStyleId>{5C22544A-7EE6-4342-B048-85BDC9FD1C3A}</a:tableStyleId>
-              </a:tblPr>
-              <a:tblGrid>
-                <a:gridCol w="435670"/>
-                <a:gridCol w="2187476"/>
-                <a:gridCol w="5482828"/>
-                <a:gridCol w="2663627"/>
-              </a:tblGrid>
-              <a:tr h="314657">
-                <a:tc>
-                  <a:txBody>
-                    <a:bodyPr wrap="square"/>
-                    <a:lstStyle/>
-                    <a:p>
-                      <a:r>
-                        <a:rPr sz="1350" b="1" i="0">
-                          <a:solidFill>
-                            <a:srgbClr val="F4F1EA"/>
-                          </a:solidFill>
-                          <a:latin typeface="Arial"/>
-                          <a:ea typeface="Malgun Gothic"/>
-                          <a:cs typeface="Malgun Gothic"/>
-                        </a:rPr>
-                        <a:t>장</a:t>
-                      </a:r>
-                    </a:p>
-                  </a:txBody>
-                  <a:tcPr marL="76200" marR="76200" marT="25400" marB="25400">
-                    <a:solidFill>
-                      <a:srgbClr val="16213A"/>
-                    </a:solidFill>
-                  </a:tcPr>
-                </a:tc>
-                <a:tc>
-                  <a:txBody>
-                    <a:bodyPr wrap="square"/>
-                    <a:lstStyle/>
-                    <a:p>
-                      <a:r>
-                        <a:rPr sz="1350" b="1" i="0">
-                          <a:solidFill>
-                            <a:srgbClr val="F4F1EA"/>
-                          </a:solidFill>
-                          <a:latin typeface="Arial"/>
-                          <a:ea typeface="Malgun Gothic"/>
-                          <a:cs typeface="Malgun Gothic"/>
-                        </a:rPr>
-                        <a:t>갈래</a:t>
-                      </a:r>
-                    </a:p>
-                  </a:txBody>
-                  <a:tcPr marL="76200" marR="76200" marT="25400" marB="25400">
-                    <a:solidFill>
-                      <a:srgbClr val="16213A"/>
-                    </a:solidFill>
-                  </a:tcPr>
-                </a:tc>
-                <a:tc>
-                  <a:txBody>
-                    <a:bodyPr wrap="square"/>
-                    <a:lstStyle/>
-                    <a:p>
-                      <a:r>
-                        <a:rPr sz="1350" b="1" i="0">
-                          <a:solidFill>
-                            <a:srgbClr val="F4F1EA"/>
-                          </a:solidFill>
-                          <a:latin typeface="Arial"/>
-                          <a:ea typeface="Malgun Gothic"/>
-                          <a:cs typeface="Malgun Gothic"/>
-                        </a:rPr>
-                        <a:t>핵심</a:t>
-                      </a:r>
-                    </a:p>
-                  </a:txBody>
-                  <a:tcPr marL="76200" marR="76200" marT="25400" marB="25400">
-                    <a:solidFill>
-                      <a:srgbClr val="16213A"/>
-                    </a:solidFill>
-                  </a:tcPr>
-                </a:tc>
-                <a:tc>
-                  <a:txBody>
-                    <a:bodyPr wrap="square"/>
-                    <a:lstStyle/>
-                    <a:p>
-                      <a:r>
-                        <a:rPr sz="1350" b="1" i="0">
-                          <a:solidFill>
-                            <a:srgbClr val="F4F1EA"/>
-                          </a:solidFill>
-                          <a:latin typeface="Arial"/>
-                          <a:ea typeface="Malgun Gothic"/>
-                          <a:cs typeface="Malgun Gothic"/>
-                        </a:rPr>
-                        <a:t>문서 절</a:t>
-                      </a:r>
-                    </a:p>
-                  </a:txBody>
-                  <a:tcPr marL="76200" marR="76200" marT="25400" marB="25400">
-                    <a:solidFill>
-                      <a:srgbClr val="16213A"/>
-                    </a:solidFill>
-                  </a:tcPr>
-                </a:tc>
-              </a:tr>
-              <a:tr h="306561">
-                <a:tc>
-                  <a:txBody>
-                    <a:bodyPr wrap="square"/>
-                    <a:lstStyle/>
-                    <a:p>
-                      <a:r>
-                        <a:rPr sz="1350" b="0" i="0">
-                          <a:solidFill>
-                            <a:srgbClr val="16213A"/>
-                          </a:solidFill>
-                          <a:latin typeface="Arial"/>
-                          <a:ea typeface="Malgun Gothic"/>
-                          <a:cs typeface="Malgun Gothic"/>
-                        </a:rPr>
-                        <a:t>1</a:t>
-                      </a:r>
-                    </a:p>
-                  </a:txBody>
-                  <a:tcPr marL="76200" marR="76200" marT="25400" marB="25400">
-                    <a:solidFill>
-                      <a:srgbClr val="F1EDE4"/>
-                    </a:solidFill>
-                  </a:tcPr>
-                </a:tc>
-                <a:tc>
-                  <a:txBody>
-                    <a:bodyPr wrap="square"/>
-                    <a:lstStyle/>
-                    <a:p>
-                      <a:r>
-                        <a:rPr sz="1350" b="0" i="0">
-                          <a:solidFill>
-                            <a:srgbClr val="16213A"/>
-                          </a:solidFill>
-                          <a:latin typeface="Arial"/>
-                          <a:ea typeface="Malgun Gothic"/>
-                          <a:cs typeface="Malgun Gothic"/>
-                        </a:rPr>
-                        <a:t>지형도</a:t>
-                      </a:r>
-                    </a:p>
-                  </a:txBody>
-                  <a:tcPr marL="76200" marR="76200" marT="25400" marB="25400">
-                    <a:solidFill>
-                      <a:srgbClr val="F1EDE4"/>
-                    </a:solidFill>
-                  </a:tcPr>
-                </a:tc>
-                <a:tc>
-                  <a:txBody>
-                    <a:bodyPr wrap="square"/>
-                    <a:lstStyle/>
-                    <a:p>
-                      <a:r>
-                        <a:rPr sz="1350" b="0" i="0">
-                          <a:solidFill>
-                            <a:srgbClr val="16213A"/>
-                          </a:solidFill>
-                          <a:latin typeface="Arial"/>
-                          <a:ea typeface="Malgun Gothic"/>
-                          <a:cs typeface="Malgun Gothic"/>
-                        </a:rPr>
-                        <a:t>분야별 대세, 연구실 계보</a:t>
-                      </a:r>
-                    </a:p>
-                  </a:txBody>
-                  <a:tcPr marL="76200" marR="76200" marT="25400" marB="25400">
-                    <a:solidFill>
-                      <a:srgbClr val="F1EDE4"/>
-                    </a:solidFill>
-                  </a:tcPr>
-                </a:tc>
-                <a:tc>
-                  <a:txBody>
-                    <a:bodyPr wrap="square"/>
-                    <a:lstStyle/>
-                    <a:p>
-                      <a:r>
-                        <a:rPr sz="1350" b="0" i="0">
-                          <a:solidFill>
-                            <a:srgbClr val="16213A"/>
-                          </a:solidFill>
-                          <a:latin typeface="Arial"/>
-                          <a:ea typeface="Malgun Gothic"/>
-                          <a:cs typeface="Malgun Gothic"/>
-                        </a:rPr>
-                        <a:t>B.18, B.16</a:t>
-                      </a:r>
-                    </a:p>
-                  </a:txBody>
-                  <a:tcPr marL="76200" marR="76200" marT="25400" marB="25400">
-                    <a:solidFill>
-                      <a:srgbClr val="F1EDE4"/>
-                    </a:solidFill>
-                  </a:tcPr>
-                </a:tc>
-              </a:tr>
-              <a:tr h="306561">
-                <a:tc>
-                  <a:txBody>
-                    <a:bodyPr wrap="square"/>
-                    <a:lstStyle/>
-                    <a:p>
-                      <a:r>
-                        <a:rPr sz="1350" b="0" i="0">
-                          <a:solidFill>
-                            <a:srgbClr val="16213A"/>
-                          </a:solidFill>
-                          <a:latin typeface="Arial"/>
-                          <a:ea typeface="Malgun Gothic"/>
-                          <a:cs typeface="Malgun Gothic"/>
-                        </a:rPr>
-                        <a:t>2</a:t>
-                      </a:r>
-                    </a:p>
-                  </a:txBody>
-                  <a:tcPr marL="76200" marR="76200" marT="25400" marB="25400">
-                    <a:solidFill>
-                      <a:srgbClr val="FFFDF8"/>
-                    </a:solidFill>
-                  </a:tcPr>
-                </a:tc>
-                <a:tc>
-                  <a:txBody>
-                    <a:bodyPr wrap="square"/>
-                    <a:lstStyle/>
-                    <a:p>
-                      <a:r>
-                        <a:rPr sz="1350" b="0" i="0">
-                          <a:solidFill>
-                            <a:srgbClr val="16213A"/>
-                          </a:solidFill>
-                          <a:latin typeface="Arial"/>
-                          <a:ea typeface="Malgun Gothic"/>
-                          <a:cs typeface="Malgun Gothic"/>
-                        </a:rPr>
-                        <a:t>내비 층이 넘기는 것</a:t>
-                      </a:r>
-                    </a:p>
-                  </a:txBody>
-                  <a:tcPr marL="76200" marR="76200" marT="25400" marB="25400">
-                    <a:solidFill>
-                      <a:srgbClr val="FFFDF8"/>
-                    </a:solidFill>
-                  </a:tcPr>
-                </a:tc>
-                <a:tc>
-                  <a:txBody>
-                    <a:bodyPr wrap="square"/>
-                    <a:lstStyle/>
-                    <a:p>
-                      <a:r>
-                        <a:rPr sz="1350" b="0" i="0">
-                          <a:solidFill>
-                            <a:srgbClr val="16213A"/>
-                          </a:solidFill>
-                          <a:latin typeface="Arial"/>
-                          <a:ea typeface="Malgun Gothic"/>
-                          <a:cs typeface="Malgun Gothic"/>
-                        </a:rPr>
-                        <a:t>CMU 스택, LP-NavOA, FocusNav, TAME-Nav</a:t>
-                      </a:r>
-                    </a:p>
-                  </a:txBody>
-                  <a:tcPr marL="76200" marR="76200" marT="25400" marB="25400">
-                    <a:solidFill>
-                      <a:srgbClr val="FFFDF8"/>
-                    </a:solidFill>
-                  </a:tcPr>
-                </a:tc>
-                <a:tc>
-                  <a:txBody>
-                    <a:bodyPr wrap="square"/>
-                    <a:lstStyle/>
-                    <a:p>
-                      <a:r>
-                        <a:rPr sz="1350" b="0" i="0">
-                          <a:solidFill>
-                            <a:srgbClr val="16213A"/>
-                          </a:solidFill>
-                          <a:latin typeface="Arial"/>
-                          <a:ea typeface="Malgun Gothic"/>
-                          <a:cs typeface="Malgun Gothic"/>
-                        </a:rPr>
-                        <a:t>B.16.8, B.4</a:t>
-                      </a:r>
-                    </a:p>
-                  </a:txBody>
-                  <a:tcPr marL="76200" marR="76200" marT="25400" marB="25400">
-                    <a:solidFill>
-                      <a:srgbClr val="FFFDF8"/>
-                    </a:solidFill>
-                  </a:tcPr>
-                </a:tc>
-              </a:tr>
-              <a:tr h="306561">
-                <a:tc>
-                  <a:txBody>
-                    <a:bodyPr wrap="square"/>
-                    <a:lstStyle/>
-                    <a:p>
-                      <a:r>
-                        <a:rPr sz="1350" b="0" i="0">
-                          <a:solidFill>
-                            <a:srgbClr val="16213A"/>
-                          </a:solidFill>
-                          <a:latin typeface="Arial"/>
-                          <a:ea typeface="Malgun Gothic"/>
-                          <a:cs typeface="Malgun Gothic"/>
-                        </a:rPr>
-                        <a:t>3</a:t>
-                      </a:r>
-                    </a:p>
-                  </a:txBody>
-                  <a:tcPr marL="76200" marR="76200" marT="25400" marB="25400">
-                    <a:solidFill>
-                      <a:srgbClr val="F1EDE4"/>
-                    </a:solidFill>
-                  </a:tcPr>
-                </a:tc>
-                <a:tc>
-                  <a:txBody>
-                    <a:bodyPr wrap="square"/>
-                    <a:lstStyle/>
-                    <a:p>
-                      <a:r>
-                        <a:rPr sz="1350" b="0" i="0">
-                          <a:solidFill>
-                            <a:srgbClr val="16213A"/>
-                          </a:solidFill>
-                          <a:latin typeface="Arial"/>
-                          <a:ea typeface="Malgun Gothic"/>
-                          <a:cs typeface="Malgun Gothic"/>
-                        </a:rPr>
-                        <a:t>지형을 보는 보행</a:t>
-                      </a:r>
-                    </a:p>
-                  </a:txBody>
-                  <a:tcPr marL="76200" marR="76200" marT="25400" marB="25400">
-                    <a:solidFill>
-                      <a:srgbClr val="F1EDE4"/>
-                    </a:solidFill>
-                  </a:tcPr>
-                </a:tc>
-                <a:tc>
-                  <a:txBody>
-                    <a:bodyPr wrap="square"/>
-                    <a:lstStyle/>
-                    <a:p>
-                      <a:r>
-                        <a:rPr sz="1350" b="0" i="0">
-                          <a:solidFill>
-                            <a:srgbClr val="16213A"/>
-                          </a:solidFill>
-                          <a:latin typeface="Arial"/>
-                          <a:ea typeface="Malgun Gothic"/>
-                          <a:cs typeface="Malgun Gothic"/>
-                        </a:rPr>
-                        <a:t>Watch Your Step, 성긴 LiDAR 지도, PHP, LocoFormer</a:t>
-                      </a:r>
-                    </a:p>
-                  </a:txBody>
-                  <a:tcPr marL="76200" marR="76200" marT="25400" marB="25400">
-                    <a:solidFill>
-                      <a:srgbClr val="F1EDE4"/>
-                    </a:solidFill>
-                  </a:tcPr>
-                </a:tc>
-                <a:tc>
-                  <a:txBody>
-                    <a:bodyPr wrap="square"/>
-                    <a:lstStyle/>
-                    <a:p>
-                      <a:r>
-                        <a:rPr sz="1350" b="0" i="0">
-                          <a:solidFill>
-                            <a:srgbClr val="16213A"/>
-                          </a:solidFill>
-                          <a:latin typeface="Arial"/>
-                          <a:ea typeface="Malgun Gothic"/>
-                          <a:cs typeface="Malgun Gothic"/>
-                        </a:rPr>
-                        <a:t>B.16.3, A.8.2, B.16.5–6</a:t>
-                      </a:r>
-                    </a:p>
-                  </a:txBody>
-                  <a:tcPr marL="76200" marR="76200" marT="25400" marB="25400">
-                    <a:solidFill>
-                      <a:srgbClr val="F1EDE4"/>
-                    </a:solidFill>
-                  </a:tcPr>
-                </a:tc>
-              </a:tr>
-              <a:tr h="306561">
-                <a:tc>
-                  <a:txBody>
-                    <a:bodyPr wrap="square"/>
-                    <a:lstStyle/>
-                    <a:p>
-                      <a:r>
-                        <a:rPr sz="1350" b="0" i="0">
-                          <a:solidFill>
-                            <a:srgbClr val="16213A"/>
-                          </a:solidFill>
-                          <a:latin typeface="Arial"/>
-                          <a:ea typeface="Malgun Gothic"/>
-                          <a:cs typeface="Malgun Gothic"/>
-                        </a:rPr>
-                        <a:t>4</a:t>
-                      </a:r>
-                    </a:p>
-                  </a:txBody>
-                  <a:tcPr marL="76200" marR="76200" marT="25400" marB="25400">
-                    <a:solidFill>
-                      <a:srgbClr val="FFFDF8"/>
-                    </a:solidFill>
-                  </a:tcPr>
-                </a:tc>
-                <a:tc>
-                  <a:txBody>
-                    <a:bodyPr wrap="square"/>
-                    <a:lstStyle/>
-                    <a:p>
-                      <a:r>
-                        <a:rPr sz="1350" b="0" i="0">
-                          <a:solidFill>
-                            <a:srgbClr val="16213A"/>
-                          </a:solidFill>
-                          <a:latin typeface="Arial"/>
-                          <a:ea typeface="Malgun Gothic"/>
-                          <a:cs typeface="Malgun Gothic"/>
-                        </a:rPr>
-                        <a:t>전신 제어와 원격조종</a:t>
-                      </a:r>
-                    </a:p>
-                  </a:txBody>
-                  <a:tcPr marL="76200" marR="76200" marT="25400" marB="25400">
-                    <a:solidFill>
-                      <a:srgbClr val="FFFDF8"/>
-                    </a:solidFill>
-                  </a:tcPr>
-                </a:tc>
-                <a:tc>
-                  <a:txBody>
-                    <a:bodyPr wrap="square"/>
-                    <a:lstStyle/>
-                    <a:p>
-                      <a:r>
-                        <a:rPr sz="1350" b="0" i="0">
-                          <a:solidFill>
-                            <a:srgbClr val="16213A"/>
-                          </a:solidFill>
-                          <a:latin typeface="Arial"/>
-                          <a:ea typeface="Malgun Gothic"/>
-                          <a:cs typeface="Malgun Gothic"/>
-                        </a:rPr>
-                        <a:t>PASSAGE, NEXUS, 출력의 투영</a:t>
-                      </a:r>
-                    </a:p>
-                  </a:txBody>
-                  <a:tcPr marL="76200" marR="76200" marT="25400" marB="25400">
-                    <a:solidFill>
-                      <a:srgbClr val="FFFDF8"/>
-                    </a:solidFill>
-                  </a:tcPr>
-                </a:tc>
-                <a:tc>
-                  <a:txBody>
-                    <a:bodyPr wrap="square"/>
-                    <a:lstStyle/>
-                    <a:p>
-                      <a:r>
-                        <a:rPr sz="1350" b="0" i="0">
-                          <a:solidFill>
-                            <a:srgbClr val="16213A"/>
-                          </a:solidFill>
-                          <a:latin typeface="Arial"/>
-                          <a:ea typeface="Malgun Gothic"/>
-                          <a:cs typeface="Malgun Gothic"/>
-                        </a:rPr>
-                        <a:t>B.16.6, §I, B.16.8</a:t>
-                      </a:r>
-                    </a:p>
-                  </a:txBody>
-                  <a:tcPr marL="76200" marR="76200" marT="25400" marB="25400">
-                    <a:solidFill>
-                      <a:srgbClr val="FFFDF8"/>
-                    </a:solidFill>
-                  </a:tcPr>
-                </a:tc>
-              </a:tr>
-              <a:tr h="306561">
-                <a:tc>
-                  <a:txBody>
-                    <a:bodyPr wrap="square"/>
-                    <a:lstStyle/>
-                    <a:p>
-                      <a:r>
-                        <a:rPr sz="1350" b="0" i="0">
-                          <a:solidFill>
-                            <a:srgbClr val="16213A"/>
-                          </a:solidFill>
-                          <a:latin typeface="Arial"/>
-                          <a:ea typeface="Malgun Gothic"/>
-                          <a:cs typeface="Malgun Gothic"/>
-                        </a:rPr>
-                        <a:t>5</a:t>
-                      </a:r>
-                    </a:p>
-                  </a:txBody>
-                  <a:tcPr marL="76200" marR="76200" marT="25400" marB="25400">
-                    <a:solidFill>
-                      <a:srgbClr val="F1EDE4"/>
-                    </a:solidFill>
-                  </a:tcPr>
-                </a:tc>
-                <a:tc>
-                  <a:txBody>
-                    <a:bodyPr wrap="square"/>
-                    <a:lstStyle/>
-                    <a:p>
-                      <a:r>
-                        <a:rPr sz="1350" b="0" i="0">
-                          <a:solidFill>
-                            <a:srgbClr val="16213A"/>
-                          </a:solidFill>
-                          <a:latin typeface="Arial"/>
-                          <a:ea typeface="Malgun Gothic"/>
-                          <a:cs typeface="Malgun Gothic"/>
-                        </a:rPr>
-                        <a:t>장시간 자율 작업</a:t>
-                      </a:r>
-                    </a:p>
-                  </a:txBody>
-                  <a:tcPr marL="76200" marR="76200" marT="25400" marB="25400">
-                    <a:solidFill>
-                      <a:srgbClr val="F1EDE4"/>
-                    </a:solidFill>
-                  </a:tcPr>
-                </a:tc>
-                <a:tc>
-                  <a:txBody>
-                    <a:bodyPr wrap="square"/>
-                    <a:lstStyle/>
-                    <a:p>
-                      <a:r>
-                        <a:rPr sz="1350" b="0" i="0">
-                          <a:solidFill>
-                            <a:srgbClr val="16213A"/>
-                          </a:solidFill>
-                          <a:latin typeface="Arial"/>
-                          <a:ea typeface="Malgun Gothic"/>
-                          <a:cs typeface="Malgun Gothic"/>
-                        </a:rPr>
-                        <a:t>Flexion Reflect v1.0, Dyna</a:t>
-                      </a:r>
-                    </a:p>
-                  </a:txBody>
-                  <a:tcPr marL="76200" marR="76200" marT="25400" marB="25400">
-                    <a:solidFill>
-                      <a:srgbClr val="F1EDE4"/>
-                    </a:solidFill>
-                  </a:tcPr>
-                </a:tc>
-                <a:tc>
-                  <a:txBody>
-                    <a:bodyPr wrap="square"/>
-                    <a:lstStyle/>
-                    <a:p>
-                      <a:r>
-                        <a:rPr sz="1350" b="0" i="0">
-                          <a:solidFill>
-                            <a:srgbClr val="16213A"/>
-                          </a:solidFill>
-                          <a:latin typeface="Arial"/>
-                          <a:ea typeface="Malgun Gothic"/>
-                          <a:cs typeface="Malgun Gothic"/>
-                        </a:rPr>
-                        <a:t>B.16.3, A.8.1</a:t>
-                      </a:r>
-                    </a:p>
-                  </a:txBody>
-                  <a:tcPr marL="76200" marR="76200" marT="25400" marB="25400">
-                    <a:solidFill>
-                      <a:srgbClr val="F1EDE4"/>
-                    </a:solidFill>
-                  </a:tcPr>
-                </a:tc>
-              </a:tr>
-              <a:tr h="306561">
-                <a:tc>
-                  <a:txBody>
-                    <a:bodyPr wrap="square"/>
-                    <a:lstStyle/>
-                    <a:p>
-                      <a:r>
-                        <a:rPr sz="1350" b="0" i="0">
-                          <a:solidFill>
-                            <a:srgbClr val="16213A"/>
-                          </a:solidFill>
-                          <a:latin typeface="Arial"/>
-                          <a:ea typeface="Malgun Gothic"/>
-                          <a:cs typeface="Malgun Gothic"/>
-                        </a:rPr>
-                        <a:t>6</a:t>
-                      </a:r>
-                    </a:p>
-                  </a:txBody>
-                  <a:tcPr marL="76200" marR="76200" marT="25400" marB="25400">
-                    <a:solidFill>
-                      <a:srgbClr val="FFFDF8"/>
-                    </a:solidFill>
-                  </a:tcPr>
-                </a:tc>
-                <a:tc>
-                  <a:txBody>
-                    <a:bodyPr wrap="square"/>
-                    <a:lstStyle/>
-                    <a:p>
-                      <a:r>
-                        <a:rPr sz="1350" b="0" i="0">
-                          <a:solidFill>
-                            <a:srgbClr val="16213A"/>
-                          </a:solidFill>
-                          <a:latin typeface="Arial"/>
-                          <a:ea typeface="Malgun Gothic"/>
-                          <a:cs typeface="Malgun Gothic"/>
-                        </a:rPr>
-                        <a:t>비교</a:t>
-                      </a:r>
-                    </a:p>
-                  </a:txBody>
-                  <a:tcPr marL="76200" marR="76200" marT="25400" marB="25400">
-                    <a:solidFill>
-                      <a:srgbClr val="FFFDF8"/>
-                    </a:solidFill>
-                  </a:tcPr>
-                </a:tc>
-                <a:tc>
-                  <a:txBody>
-                    <a:bodyPr wrap="square"/>
-                    <a:lstStyle/>
-                    <a:p>
-                      <a:r>
-                        <a:rPr sz="1350" b="0" i="0">
-                          <a:solidFill>
-                            <a:srgbClr val="16213A"/>
-                          </a:solidFill>
-                          <a:latin typeface="Arial"/>
-                          <a:ea typeface="Malgun Gothic"/>
-                          <a:cs typeface="Malgun Gothic"/>
-                        </a:rPr>
-                        <a:t>두 비교표, 공통점과 차이점</a:t>
-                      </a:r>
-                    </a:p>
-                  </a:txBody>
-                  <a:tcPr marL="76200" marR="76200" marT="25400" marB="25400">
-                    <a:solidFill>
-                      <a:srgbClr val="FFFDF8"/>
-                    </a:solidFill>
-                  </a:tcPr>
-                </a:tc>
-                <a:tc>
-                  <a:txBody>
-                    <a:bodyPr wrap="square"/>
-                    <a:lstStyle/>
-                    <a:p>
-                      <a:r>
-                        <a:rPr sz="1350" b="0" i="0">
-                          <a:solidFill>
-                            <a:srgbClr val="16213A"/>
-                          </a:solidFill>
-                          <a:latin typeface="Arial"/>
-                          <a:ea typeface="Malgun Gothic"/>
-                          <a:cs typeface="Malgun Gothic"/>
-                        </a:rPr>
-                        <a:t>위 절 전부</a:t>
-                      </a:r>
-                    </a:p>
-                  </a:txBody>
-                  <a:tcPr marL="76200" marR="76200" marT="25400" marB="25400">
-                    <a:solidFill>
-                      <a:srgbClr val="FFFDF8"/>
-                    </a:solidFill>
-                  </a:tcPr>
-                </a:tc>
-              </a:tr>
-              <a:tr h="303862">
-                <a:tc>
-                  <a:txBody>
-                    <a:bodyPr wrap="square"/>
-                    <a:lstStyle/>
-                    <a:p>
-                      <a:r>
-                        <a:rPr sz="1350" b="0" i="0">
-                          <a:solidFill>
-                            <a:srgbClr val="16213A"/>
-                          </a:solidFill>
-                          <a:latin typeface="Arial"/>
-                          <a:ea typeface="Malgun Gothic"/>
-                          <a:cs typeface="Malgun Gothic"/>
-                        </a:rPr>
-                        <a:t>7</a:t>
-                      </a:r>
-                    </a:p>
-                  </a:txBody>
-                  <a:tcPr marL="76200" marR="76200" marT="25400" marB="25400">
-                    <a:solidFill>
-                      <a:srgbClr val="F1EDE4"/>
-                    </a:solidFill>
-                  </a:tcPr>
-                </a:tc>
-                <a:tc>
-                  <a:txBody>
-                    <a:bodyPr wrap="square"/>
-                    <a:lstStyle/>
-                    <a:p>
-                      <a:r>
-                        <a:rPr sz="1350" b="0" i="0">
-                          <a:solidFill>
-                            <a:srgbClr val="16213A"/>
-                          </a:solidFill>
-                          <a:latin typeface="Arial"/>
-                          <a:ea typeface="Malgun Gothic"/>
-                          <a:cs typeface="Malgun Gothic"/>
-                        </a:rPr>
-                        <a:t>travplan에서</a:t>
-                      </a:r>
-                    </a:p>
-                  </a:txBody>
-                  <a:tcPr marL="76200" marR="76200" marT="25400" marB="25400">
-                    <a:solidFill>
-                      <a:srgbClr val="F1EDE4"/>
-                    </a:solidFill>
-                  </a:tcPr>
-                </a:tc>
-                <a:tc>
-                  <a:txBody>
-                    <a:bodyPr wrap="square"/>
-                    <a:lstStyle/>
-                    <a:p>
-                      <a:r>
-                        <a:rPr sz="1350" b="0" i="0">
-                          <a:solidFill>
-                            <a:srgbClr val="16213A"/>
-                          </a:solidFill>
-                          <a:latin typeface="Arial"/>
-                          <a:ea typeface="Malgun Gothic"/>
-                          <a:cs typeface="Malgun Gothic"/>
-                        </a:rPr>
-                        <a:t>경계의 대응, 가져올 순서, 다음 시험</a:t>
-                      </a:r>
-                    </a:p>
-                  </a:txBody>
-                  <a:tcPr marL="76200" marR="76200" marT="25400" marB="25400">
-                    <a:solidFill>
-                      <a:srgbClr val="F1EDE4"/>
-                    </a:solidFill>
-                  </a:tcPr>
-                </a:tc>
-                <a:tc>
-                  <a:txBody>
-                    <a:bodyPr wrap="square"/>
-                    <a:lstStyle/>
-                    <a:p>
-                      <a:r>
-                        <a:rPr sz="1350" b="0" i="0">
-                          <a:solidFill>
-                            <a:srgbClr val="16213A"/>
-                          </a:solidFill>
-                          <a:latin typeface="Arial"/>
-                          <a:ea typeface="Malgun Gothic"/>
-                          <a:cs typeface="Malgun Gothic"/>
-                        </a:rPr>
-                        <a:t>B.16.7, B.16.8</a:t>
-                      </a:r>
-                    </a:p>
-                  </a:txBody>
-                  <a:tcPr marL="76200" marR="76200" marT="25400" marB="25400">
-                    <a:solidFill>
-                      <a:srgbClr val="F1EDE4"/>
-                    </a:solidFill>
-                  </a:tcPr>
-                </a:tc>
-              </a:tr>
-            </a:tbl>
-          </a:graphicData>
-        </a:graphic>
-      </p:graphicFrame>
-    </p:spTree>
-  </p:cSld>
-  <p:clrMapOvr>
-    <a:masterClrMapping/>
-  </p:clrMapOvr>
-</p:sld>
-</file>
-
-<file path=ppt/slides/slide30.xml><?xml version="1.0" encoding="utf-8"?>
+<file path=ppt/slides/slide31.xml><?xml version="1.0" encoding="utf-8"?>
 <p:sld xmlns:a="http://schemas.openxmlformats.org/drawingml/2006/main" xmlns:p="http://schemas.openxmlformats.org/presentationml/2006/main" xmlns:r="http://schemas.openxmlformats.org/officeDocument/2006/relationships">
   <p:cSld>
     <p:bg>
@@ -26374,7 +27355,7 @@
 </p:sld>
 </file>
 
-<file path=ppt/slides/slide31.xml><?xml version="1.0" encoding="utf-8"?>
+<file path=ppt/slides/slide32.xml><?xml version="1.0" encoding="utf-8"?>
 <p:sld xmlns:a="http://schemas.openxmlformats.org/drawingml/2006/main" xmlns:p="http://schemas.openxmlformats.org/presentationml/2006/main" xmlns:r="http://schemas.openxmlformats.org/officeDocument/2006/relationships">
   <p:cSld>
     <p:bg>
@@ -27777,7 +28758,7 @@
 </p:sld>
 </file>
 
-<file path=ppt/slides/slide32.xml><?xml version="1.0" encoding="utf-8"?>
+<file path=ppt/slides/slide33.xml><?xml version="1.0" encoding="utf-8"?>
 <p:sld xmlns:a="http://schemas.openxmlformats.org/drawingml/2006/main" xmlns:p="http://schemas.openxmlformats.org/presentationml/2006/main" xmlns:r="http://schemas.openxmlformats.org/officeDocument/2006/relationships">
   <p:cSld>
     <p:bg>
@@ -27944,7 +28925,7 @@
 </p:sld>
 </file>
 
-<file path=ppt/slides/slide33.xml><?xml version="1.0" encoding="utf-8"?>
+<file path=ppt/slides/slide34.xml><?xml version="1.0" encoding="utf-8"?>
 <p:sld xmlns:a="http://schemas.openxmlformats.org/drawingml/2006/main" xmlns:p="http://schemas.openxmlformats.org/presentationml/2006/main" xmlns:r="http://schemas.openxmlformats.org/officeDocument/2006/relationships">
   <p:cSld>
     <p:bg>
@@ -29081,7 +30062,7 @@
 </p:sld>
 </file>
 
-<file path=ppt/slides/slide34.xml><?xml version="1.0" encoding="utf-8"?>
+<file path=ppt/slides/slide35.xml><?xml version="1.0" encoding="utf-8"?>
 <p:sld xmlns:a="http://schemas.openxmlformats.org/drawingml/2006/main" xmlns:p="http://schemas.openxmlformats.org/presentationml/2006/main" xmlns:r="http://schemas.openxmlformats.org/officeDocument/2006/relationships">
   <p:cSld>
     <p:bg>
@@ -29903,1431 +30884,6 @@
 </p:sld>
 </file>
 
-<file path=ppt/slides/slide35.xml><?xml version="1.0" encoding="utf-8"?>
-<p:sld xmlns:a="http://schemas.openxmlformats.org/drawingml/2006/main" xmlns:p="http://schemas.openxmlformats.org/presentationml/2006/main" xmlns:r="http://schemas.openxmlformats.org/officeDocument/2006/relationships">
-  <p:cSld>
-    <p:bg>
-      <p:bgPr>
-        <a:solidFill>
-          <a:srgbClr val="F7F5F0"/>
-        </a:solidFill>
-        <a:effectLst/>
-      </p:bgPr>
-    </p:bg>
-    <p:spTree>
-      <p:nvGrpSpPr>
-        <p:cNvPr id="1" name=""/>
-        <p:cNvGrpSpPr/>
-        <p:nvPr/>
-      </p:nvGrpSpPr>
-      <p:grpSpPr/>
-      <p:sp>
-        <p:nvSpPr>
-          <p:cNvPr id="2" name="TextBox 1"/>
-          <p:cNvSpPr txBox="1"/>
-          <p:nvPr/>
-        </p:nvSpPr>
-        <p:spPr>
-          <a:xfrm>
-            <a:off x="711200" y="508000"/>
-            <a:ext cx="11118088" cy="312738"/>
-          </a:xfrm>
-          <a:prstGeom prst="rect">
-            <a:avLst/>
-          </a:prstGeom>
-          <a:noFill/>
-        </p:spPr>
-        <p:txBody>
-          <a:bodyPr wrap="square" lIns="0" rIns="0" tIns="0" bIns="0" anchor="t">
-            <a:normAutofit/>
-          </a:bodyPr>
-          <a:lstStyle/>
-          <a:p>
-            <a:pPr>
-              <a:lnSpc>
-                <a:spcPct val="138000"/>
-              </a:lnSpc>
-            </a:pPr>
-            <a:r>
-              <a:rPr sz="1050" b="0" i="0">
-                <a:solidFill>
-                  <a:srgbClr val="C2410C"/>
-                </a:solidFill>
-                <a:latin typeface="Consolas"/>
-                <a:ea typeface="Malgun Gothic"/>
-                <a:cs typeface="Malgun Gothic"/>
-              </a:rPr>
-              <a:t>다음 시험</a:t>
-            </a:r>
-          </a:p>
-        </p:txBody>
-      </p:sp>
-      <p:sp>
-        <p:nvSpPr>
-          <p:cNvPr id="3" name="TextBox 2"/>
-          <p:cNvSpPr txBox="1"/>
-          <p:nvPr/>
-        </p:nvSpPr>
-        <p:spPr>
-          <a:xfrm>
-            <a:off x="711200" y="781050"/>
-            <a:ext cx="11118088" cy="554335"/>
-          </a:xfrm>
-          <a:prstGeom prst="rect">
-            <a:avLst/>
-          </a:prstGeom>
-          <a:noFill/>
-        </p:spPr>
-        <p:txBody>
-          <a:bodyPr wrap="square" lIns="0" rIns="0" tIns="0" bIns="0" anchor="t">
-            <a:normAutofit/>
-          </a:bodyPr>
-          <a:lstStyle/>
-          <a:p>
-            <a:pPr>
-              <a:lnSpc>
-                <a:spcPct val="112240"/>
-              </a:lnSpc>
-            </a:pPr>
-            <a:r>
-              <a:rPr sz="2500" b="1" i="0">
-                <a:solidFill>
-                  <a:srgbClr val="16213A"/>
-                </a:solidFill>
-                <a:latin typeface="Arial"/>
-                <a:ea typeface="Malgun Gothic"/>
-                <a:cs typeface="Malgun Gothic"/>
-              </a:rPr>
-              <a:t>네 가지를 작은 것부터, 모두 짝 비교로 판정한다</a:t>
-            </a:r>
-          </a:p>
-        </p:txBody>
-      </p:sp>
-      <p:sp>
-        <p:nvSpPr>
-          <p:cNvPr id="4" name="Rounded Rectangle 3"/>
-          <p:cNvSpPr/>
-          <p:nvPr/>
-        </p:nvSpPr>
-        <p:spPr>
-          <a:xfrm>
-            <a:off x="711200" y="1361678"/>
-            <a:ext cx="5308600" cy="1358801"/>
-          </a:xfrm>
-          <a:prstGeom prst="roundRect">
-            <a:avLst>
-              <a:gd name="adj" fmla="val 5607"/>
-            </a:avLst>
-          </a:prstGeom>
-          <a:solidFill>
-            <a:srgbClr val="FFFDF8"/>
-          </a:solidFill>
-          <a:ln>
-            <a:noFill/>
-          </a:ln>
-        </p:spPr>
-        <p:txBody>
-          <a:bodyPr rtlCol="0" anchor="ctr"/>
-          <a:lstStyle/>
-          <a:p>
-            <a:pPr algn="ctr"/>
-          </a:p>
-        </p:txBody>
-      </p:sp>
-      <p:sp>
-        <p:nvSpPr>
-          <p:cNvPr id="5" name="Rectangle 4"/>
-          <p:cNvSpPr/>
-          <p:nvPr/>
-        </p:nvSpPr>
-        <p:spPr>
-          <a:xfrm>
-            <a:off x="711200" y="1361678"/>
-            <a:ext cx="5308600" cy="6350"/>
-          </a:xfrm>
-          <a:prstGeom prst="rect">
-            <a:avLst/>
-          </a:prstGeom>
-          <a:solidFill>
-            <a:srgbClr val="D9D4C7"/>
-          </a:solidFill>
-          <a:ln>
-            <a:noFill/>
-          </a:ln>
-        </p:spPr>
-        <p:txBody>
-          <a:bodyPr rtlCol="0" anchor="ctr"/>
-          <a:lstStyle/>
-          <a:p>
-            <a:pPr algn="ctr"/>
-          </a:p>
-        </p:txBody>
-      </p:sp>
-      <p:sp>
-        <p:nvSpPr>
-          <p:cNvPr id="6" name="Rectangle 5"/>
-          <p:cNvSpPr/>
-          <p:nvPr/>
-        </p:nvSpPr>
-        <p:spPr>
-          <a:xfrm>
-            <a:off x="6013450" y="1361678"/>
-            <a:ext cx="6350" cy="1358801"/>
-          </a:xfrm>
-          <a:prstGeom prst="rect">
-            <a:avLst/>
-          </a:prstGeom>
-          <a:solidFill>
-            <a:srgbClr val="D9D4C7"/>
-          </a:solidFill>
-          <a:ln>
-            <a:noFill/>
-          </a:ln>
-        </p:spPr>
-        <p:txBody>
-          <a:bodyPr rtlCol="0" anchor="ctr"/>
-          <a:lstStyle/>
-          <a:p>
-            <a:pPr algn="ctr"/>
-          </a:p>
-        </p:txBody>
-      </p:sp>
-      <p:sp>
-        <p:nvSpPr>
-          <p:cNvPr id="7" name="Rectangle 6"/>
-          <p:cNvSpPr/>
-          <p:nvPr/>
-        </p:nvSpPr>
-        <p:spPr>
-          <a:xfrm>
-            <a:off x="711200" y="2714129"/>
-            <a:ext cx="5308600" cy="6350"/>
-          </a:xfrm>
-          <a:prstGeom prst="rect">
-            <a:avLst/>
-          </a:prstGeom>
-          <a:solidFill>
-            <a:srgbClr val="D9D4C7"/>
-          </a:solidFill>
-          <a:ln>
-            <a:noFill/>
-          </a:ln>
-        </p:spPr>
-        <p:txBody>
-          <a:bodyPr rtlCol="0" anchor="ctr"/>
-          <a:lstStyle/>
-          <a:p>
-            <a:pPr algn="ctr"/>
-          </a:p>
-        </p:txBody>
-      </p:sp>
-      <p:sp>
-        <p:nvSpPr>
-          <p:cNvPr id="8" name="Rounded Rectangle 7"/>
-          <p:cNvSpPr/>
-          <p:nvPr/>
-        </p:nvSpPr>
-        <p:spPr>
-          <a:xfrm>
-            <a:off x="711200" y="1361678"/>
-            <a:ext cx="50800" cy="1358801"/>
-          </a:xfrm>
-          <a:prstGeom prst="roundRect">
-            <a:avLst>
-              <a:gd name="adj" fmla="val 50000"/>
-            </a:avLst>
-          </a:prstGeom>
-          <a:solidFill>
-            <a:srgbClr val="15803D"/>
-          </a:solidFill>
-          <a:ln>
-            <a:noFill/>
-          </a:ln>
-        </p:spPr>
-        <p:txBody>
-          <a:bodyPr rtlCol="0" anchor="ctr"/>
-          <a:lstStyle/>
-          <a:p>
-            <a:pPr algn="ctr"/>
-          </a:p>
-        </p:txBody>
-      </p:sp>
-      <p:sp>
-        <p:nvSpPr>
-          <p:cNvPr id="9" name="Rounded Rectangle 8"/>
-          <p:cNvSpPr/>
-          <p:nvPr/>
-        </p:nvSpPr>
-        <p:spPr>
-          <a:xfrm>
-            <a:off x="927100" y="1507728"/>
-            <a:ext cx="728266" cy="241300"/>
-          </a:xfrm>
-          <a:prstGeom prst="roundRect">
-            <a:avLst>
-              <a:gd name="adj" fmla="val 50000"/>
-            </a:avLst>
-          </a:prstGeom>
-          <a:solidFill>
-            <a:srgbClr val="D7EFDD"/>
-          </a:solidFill>
-          <a:ln>
-            <a:noFill/>
-          </a:ln>
-        </p:spPr>
-        <p:txBody>
-          <a:bodyPr rtlCol="0" anchor="ctr"/>
-          <a:lstStyle/>
-          <a:p>
-            <a:pPr algn="ctr"/>
-          </a:p>
-        </p:txBody>
-      </p:sp>
-      <p:sp>
-        <p:nvSpPr>
-          <p:cNvPr id="10" name="TextBox 9"/>
-          <p:cNvSpPr txBox="1"/>
-          <p:nvPr/>
-        </p:nvSpPr>
-        <p:spPr>
-          <a:xfrm>
-            <a:off x="1016000" y="1533128"/>
-            <a:ext cx="592380" cy="288925"/>
-          </a:xfrm>
-          <a:prstGeom prst="rect">
-            <a:avLst/>
-          </a:prstGeom>
-          <a:noFill/>
-        </p:spPr>
-        <p:txBody>
-          <a:bodyPr wrap="square" lIns="0" rIns="0" tIns="0" bIns="0" anchor="t">
-            <a:normAutofit/>
-          </a:bodyPr>
-          <a:lstStyle/>
-          <a:p>
-            <a:pPr>
-              <a:lnSpc>
-                <a:spcPct val="119600"/>
-              </a:lnSpc>
-            </a:pPr>
-            <a:r>
-              <a:rPr sz="950" b="1" i="0">
-                <a:solidFill>
-                  <a:srgbClr val="14532D"/>
-                </a:solidFill>
-                <a:latin typeface="Arial"/>
-                <a:ea typeface="Malgun Gothic"/>
-                <a:cs typeface="Malgun Gothic"/>
-              </a:rPr>
-              <a:t>1 · 가장 쌈</a:t>
-            </a:r>
-          </a:p>
-        </p:txBody>
-      </p:sp>
-      <p:sp>
-        <p:nvSpPr>
-          <p:cNvPr id="11" name="TextBox 10"/>
-          <p:cNvSpPr txBox="1"/>
-          <p:nvPr/>
-        </p:nvSpPr>
-        <p:spPr>
-          <a:xfrm>
-            <a:off x="927100" y="1825228"/>
-            <a:ext cx="5094288" cy="339651"/>
-          </a:xfrm>
-          <a:prstGeom prst="rect">
-            <a:avLst/>
-          </a:prstGeom>
-          <a:noFill/>
-        </p:spPr>
-        <p:txBody>
-          <a:bodyPr wrap="square" lIns="0" rIns="0" tIns="0" bIns="0" anchor="t">
-            <a:normAutofit/>
-          </a:bodyPr>
-          <a:lstStyle/>
-          <a:p>
-            <a:pPr>
-              <a:lnSpc>
-                <a:spcPct val="119600"/>
-              </a:lnSpc>
-            </a:pPr>
-            <a:r>
-              <a:rPr sz="1350" b="1" i="0">
-                <a:solidFill>
-                  <a:srgbClr val="16213A"/>
-                </a:solidFill>
-                <a:latin typeface="Arial"/>
-                <a:ea typeface="Malgun Gothic"/>
-                <a:cs typeface="Malgun Gothic"/>
-              </a:rPr>
-              <a:t>TinyPolicy 관측을 경로 둘레 조각으로</a:t>
-            </a:r>
-          </a:p>
-        </p:txBody>
-      </p:sp>
-      <p:sp>
-        <p:nvSpPr>
-          <p:cNvPr id="12" name="TextBox 11"/>
-          <p:cNvSpPr txBox="1"/>
-          <p:nvPr/>
-        </p:nvSpPr>
-        <p:spPr>
-          <a:xfrm>
-            <a:off x="927100" y="2132509"/>
-            <a:ext cx="5094288" cy="603200"/>
-          </a:xfrm>
-          <a:prstGeom prst="rect">
-            <a:avLst/>
-          </a:prstGeom>
-          <a:noFill/>
-        </p:spPr>
-        <p:txBody>
-          <a:bodyPr wrap="square" lIns="0" rIns="0" tIns="0" bIns="0" anchor="t">
-            <a:normAutofit/>
-          </a:bodyPr>
-          <a:lstStyle/>
-          <a:p>
-            <a:pPr>
-              <a:lnSpc>
-                <a:spcPct val="133400"/>
-              </a:lnSpc>
-            </a:pPr>
-            <a:r>
-              <a:rPr sz="1150" b="0" i="0">
-                <a:solidFill>
-                  <a:srgbClr val="16213A"/>
-                </a:solidFill>
-                <a:latin typeface="Arial"/>
-                <a:ea typeface="Malgun Gothic"/>
-                <a:cs typeface="Malgun Gothic"/>
-              </a:rPr>
-              <a:t>고정 7 × 5 격자 대신 경로 앞 네 점 둘레를 읽는다. 관측 크기는 그대로다. 보행자는 넓은 시야로 따로 받는다. </a:t>
-            </a:r>
-            <a:r>
-              <a:rPr sz="1000" b="0" i="0">
-                <a:solidFill>
-                  <a:srgbClr val="7C2D12"/>
-                </a:solidFill>
-                <a:latin typeface="Consolas"/>
-                <a:ea typeface="Malgun Gothic"/>
-                <a:cs typeface="Malgun Gothic"/>
-              </a:rPr>
-              <a:t>js/policy.js</a:t>
-            </a:r>
-            <a:r>
-              <a:rPr sz="1150" b="0" i="0">
-                <a:solidFill>
-                  <a:srgbClr val="16213A"/>
-                </a:solidFill>
-                <a:latin typeface="Arial"/>
-                <a:ea typeface="Malgun Gothic"/>
-                <a:cs typeface="Malgun Gothic"/>
-              </a:rPr>
-              <a:t>도 함께 고친다.</a:t>
-            </a:r>
-          </a:p>
-        </p:txBody>
-      </p:sp>
-      <p:sp>
-        <p:nvSpPr>
-          <p:cNvPr id="13" name="Rounded Rectangle 12"/>
-          <p:cNvSpPr/>
-          <p:nvPr/>
-        </p:nvSpPr>
-        <p:spPr>
-          <a:xfrm>
-            <a:off x="6172200" y="1361678"/>
-            <a:ext cx="5308600" cy="1358801"/>
-          </a:xfrm>
-          <a:prstGeom prst="roundRect">
-            <a:avLst>
-              <a:gd name="adj" fmla="val 5607"/>
-            </a:avLst>
-          </a:prstGeom>
-          <a:solidFill>
-            <a:srgbClr val="FFFDF8"/>
-          </a:solidFill>
-          <a:ln>
-            <a:noFill/>
-          </a:ln>
-        </p:spPr>
-        <p:txBody>
-          <a:bodyPr rtlCol="0" anchor="ctr"/>
-          <a:lstStyle/>
-          <a:p>
-            <a:pPr algn="ctr"/>
-          </a:p>
-        </p:txBody>
-      </p:sp>
-      <p:sp>
-        <p:nvSpPr>
-          <p:cNvPr id="14" name="Rectangle 13"/>
-          <p:cNvSpPr/>
-          <p:nvPr/>
-        </p:nvSpPr>
-        <p:spPr>
-          <a:xfrm>
-            <a:off x="6172200" y="1361678"/>
-            <a:ext cx="5308600" cy="6350"/>
-          </a:xfrm>
-          <a:prstGeom prst="rect">
-            <a:avLst/>
-          </a:prstGeom>
-          <a:solidFill>
-            <a:srgbClr val="D9D4C7"/>
-          </a:solidFill>
-          <a:ln>
-            <a:noFill/>
-          </a:ln>
-        </p:spPr>
-        <p:txBody>
-          <a:bodyPr rtlCol="0" anchor="ctr"/>
-          <a:lstStyle/>
-          <a:p>
-            <a:pPr algn="ctr"/>
-          </a:p>
-        </p:txBody>
-      </p:sp>
-      <p:sp>
-        <p:nvSpPr>
-          <p:cNvPr id="15" name="Rectangle 14"/>
-          <p:cNvSpPr/>
-          <p:nvPr/>
-        </p:nvSpPr>
-        <p:spPr>
-          <a:xfrm>
-            <a:off x="11474450" y="1361678"/>
-            <a:ext cx="6350" cy="1358801"/>
-          </a:xfrm>
-          <a:prstGeom prst="rect">
-            <a:avLst/>
-          </a:prstGeom>
-          <a:solidFill>
-            <a:srgbClr val="D9D4C7"/>
-          </a:solidFill>
-          <a:ln>
-            <a:noFill/>
-          </a:ln>
-        </p:spPr>
-        <p:txBody>
-          <a:bodyPr rtlCol="0" anchor="ctr"/>
-          <a:lstStyle/>
-          <a:p>
-            <a:pPr algn="ctr"/>
-          </a:p>
-        </p:txBody>
-      </p:sp>
-      <p:sp>
-        <p:nvSpPr>
-          <p:cNvPr id="16" name="Rectangle 15"/>
-          <p:cNvSpPr/>
-          <p:nvPr/>
-        </p:nvSpPr>
-        <p:spPr>
-          <a:xfrm>
-            <a:off x="6172200" y="2714129"/>
-            <a:ext cx="5308600" cy="6350"/>
-          </a:xfrm>
-          <a:prstGeom prst="rect">
-            <a:avLst/>
-          </a:prstGeom>
-          <a:solidFill>
-            <a:srgbClr val="D9D4C7"/>
-          </a:solidFill>
-          <a:ln>
-            <a:noFill/>
-          </a:ln>
-        </p:spPr>
-        <p:txBody>
-          <a:bodyPr rtlCol="0" anchor="ctr"/>
-          <a:lstStyle/>
-          <a:p>
-            <a:pPr algn="ctr"/>
-          </a:p>
-        </p:txBody>
-      </p:sp>
-      <p:sp>
-        <p:nvSpPr>
-          <p:cNvPr id="17" name="Rounded Rectangle 16"/>
-          <p:cNvSpPr/>
-          <p:nvPr/>
-        </p:nvSpPr>
-        <p:spPr>
-          <a:xfrm>
-            <a:off x="6172200" y="1361678"/>
-            <a:ext cx="50800" cy="1358801"/>
-          </a:xfrm>
-          <a:prstGeom prst="roundRect">
-            <a:avLst>
-              <a:gd name="adj" fmla="val 50000"/>
-            </a:avLst>
-          </a:prstGeom>
-          <a:solidFill>
-            <a:srgbClr val="1D4ED8"/>
-          </a:solidFill>
-          <a:ln>
-            <a:noFill/>
-          </a:ln>
-        </p:spPr>
-        <p:txBody>
-          <a:bodyPr rtlCol="0" anchor="ctr"/>
-          <a:lstStyle/>
-          <a:p>
-            <a:pPr algn="ctr"/>
-          </a:p>
-        </p:txBody>
-      </p:sp>
-      <p:sp>
-        <p:nvSpPr>
-          <p:cNvPr id="18" name="Rounded Rectangle 17"/>
-          <p:cNvSpPr/>
-          <p:nvPr/>
-        </p:nvSpPr>
-        <p:spPr>
-          <a:xfrm>
-            <a:off x="6388100" y="1507728"/>
-            <a:ext cx="961529" cy="241300"/>
-          </a:xfrm>
-          <a:prstGeom prst="roundRect">
-            <a:avLst>
-              <a:gd name="adj" fmla="val 50000"/>
-            </a:avLst>
-          </a:prstGeom>
-          <a:solidFill>
-            <a:srgbClr val="DBE5FB"/>
-          </a:solidFill>
-          <a:ln>
-            <a:noFill/>
-          </a:ln>
-        </p:spPr>
-        <p:txBody>
-          <a:bodyPr rtlCol="0" anchor="ctr"/>
-          <a:lstStyle/>
-          <a:p>
-            <a:pPr algn="ctr"/>
-          </a:p>
-        </p:txBody>
-      </p:sp>
-      <p:sp>
-        <p:nvSpPr>
-          <p:cNvPr id="19" name="TextBox 18"/>
-          <p:cNvSpPr txBox="1"/>
-          <p:nvPr/>
-        </p:nvSpPr>
-        <p:spPr>
-          <a:xfrm>
-            <a:off x="6477000" y="1533128"/>
-            <a:ext cx="832641" cy="288925"/>
-          </a:xfrm>
-          <a:prstGeom prst="rect">
-            <a:avLst/>
-          </a:prstGeom>
-          <a:noFill/>
-        </p:spPr>
-        <p:txBody>
-          <a:bodyPr wrap="square" lIns="0" rIns="0" tIns="0" bIns="0" anchor="t">
-            <a:normAutofit/>
-          </a:bodyPr>
-          <a:lstStyle/>
-          <a:p>
-            <a:pPr>
-              <a:lnSpc>
-                <a:spcPct val="119600"/>
-              </a:lnSpc>
-            </a:pPr>
-            <a:r>
-              <a:rPr sz="950" b="1" i="0">
-                <a:solidFill>
-                  <a:srgbClr val="1E3A8A"/>
-                </a:solidFill>
-                <a:latin typeface="Arial"/>
-                <a:ea typeface="Malgun Gothic"/>
-                <a:cs typeface="Malgun Gothic"/>
-              </a:rPr>
-              <a:t>2 · Planner 쪽</a:t>
-            </a:r>
-          </a:p>
-        </p:txBody>
-      </p:sp>
-      <p:sp>
-        <p:nvSpPr>
-          <p:cNvPr id="20" name="TextBox 19"/>
-          <p:cNvSpPr txBox="1"/>
-          <p:nvPr/>
-        </p:nvSpPr>
-        <p:spPr>
-          <a:xfrm>
-            <a:off x="6388100" y="1825228"/>
-            <a:ext cx="5094288" cy="339651"/>
-          </a:xfrm>
-          <a:prstGeom prst="rect">
-            <a:avLst/>
-          </a:prstGeom>
-          <a:noFill/>
-        </p:spPr>
-        <p:txBody>
-          <a:bodyPr wrap="square" lIns="0" rIns="0" tIns="0" bIns="0" anchor="t">
-            <a:normAutofit/>
-          </a:bodyPr>
-          <a:lstStyle/>
-          <a:p>
-            <a:pPr>
-              <a:lnSpc>
-                <a:spcPct val="119600"/>
-              </a:lnSpc>
-            </a:pPr>
-            <a:r>
-              <a:rPr sz="1350" b="1" i="0">
-                <a:solidFill>
-                  <a:srgbClr val="16213A"/>
-                </a:solidFill>
-                <a:latin typeface="Arial"/>
-                <a:ea typeface="Malgun Gothic"/>
-                <a:cs typeface="Malgun Gothic"/>
-              </a:rPr>
-              <a:t>진행 방향만 Guidance로 돌리는 폴백</a:t>
-            </a:r>
-          </a:p>
-        </p:txBody>
-      </p:sp>
-      <p:sp>
-        <p:nvSpPr>
-          <p:cNvPr id="21" name="TextBox 20"/>
-          <p:cNvSpPr txBox="1"/>
-          <p:nvPr/>
-        </p:nvSpPr>
-        <p:spPr>
-          <a:xfrm>
-            <a:off x="6388100" y="2132509"/>
-            <a:ext cx="5094288" cy="603200"/>
-          </a:xfrm>
-          <a:prstGeom prst="rect">
-            <a:avLst/>
-          </a:prstGeom>
-          <a:noFill/>
-        </p:spPr>
-        <p:txBody>
-          <a:bodyPr wrap="square" lIns="0" rIns="0" tIns="0" bIns="0" anchor="t">
-            <a:normAutofit/>
-          </a:bodyPr>
-          <a:lstStyle/>
-          <a:p>
-            <a:pPr>
-              <a:lnSpc>
-                <a:spcPct val="133400"/>
-              </a:lnSpc>
-            </a:pPr>
-            <a:r>
-              <a:rPr sz="1150" b="0" i="0">
-                <a:solidFill>
-                  <a:srgbClr val="16213A"/>
-                </a:solidFill>
-                <a:latin typeface="Arial"/>
-                <a:ea typeface="Malgun Gothic"/>
-                <a:cs typeface="Malgun Gothic"/>
-              </a:rPr>
-              <a:t>LP-NavOA처럼 Planner D 궤적은 두고 진행 방향만 덮어쓴다. 지금 폴백은 Planner 전체를 바꾼다. 아직 시험하지 않았다.</a:t>
-            </a:r>
-          </a:p>
-        </p:txBody>
-      </p:sp>
-      <p:sp>
-        <p:nvSpPr>
-          <p:cNvPr id="22" name="Rounded Rectangle 21"/>
-          <p:cNvSpPr/>
-          <p:nvPr/>
-        </p:nvSpPr>
-        <p:spPr>
-          <a:xfrm>
-            <a:off x="711200" y="2872879"/>
-            <a:ext cx="5308600" cy="1358801"/>
-          </a:xfrm>
-          <a:prstGeom prst="roundRect">
-            <a:avLst>
-              <a:gd name="adj" fmla="val 5607"/>
-            </a:avLst>
-          </a:prstGeom>
-          <a:solidFill>
-            <a:srgbClr val="FFFDF8"/>
-          </a:solidFill>
-          <a:ln>
-            <a:noFill/>
-          </a:ln>
-        </p:spPr>
-        <p:txBody>
-          <a:bodyPr rtlCol="0" anchor="ctr"/>
-          <a:lstStyle/>
-          <a:p>
-            <a:pPr algn="ctr"/>
-          </a:p>
-        </p:txBody>
-      </p:sp>
-      <p:sp>
-        <p:nvSpPr>
-          <p:cNvPr id="23" name="Rectangle 22"/>
-          <p:cNvSpPr/>
-          <p:nvPr/>
-        </p:nvSpPr>
-        <p:spPr>
-          <a:xfrm>
-            <a:off x="711200" y="2872879"/>
-            <a:ext cx="5308600" cy="6350"/>
-          </a:xfrm>
-          <a:prstGeom prst="rect">
-            <a:avLst/>
-          </a:prstGeom>
-          <a:solidFill>
-            <a:srgbClr val="D9D4C7"/>
-          </a:solidFill>
-          <a:ln>
-            <a:noFill/>
-          </a:ln>
-        </p:spPr>
-        <p:txBody>
-          <a:bodyPr rtlCol="0" anchor="ctr"/>
-          <a:lstStyle/>
-          <a:p>
-            <a:pPr algn="ctr"/>
-          </a:p>
-        </p:txBody>
-      </p:sp>
-      <p:sp>
-        <p:nvSpPr>
-          <p:cNvPr id="24" name="Rectangle 23"/>
-          <p:cNvSpPr/>
-          <p:nvPr/>
-        </p:nvSpPr>
-        <p:spPr>
-          <a:xfrm>
-            <a:off x="6013450" y="2872879"/>
-            <a:ext cx="6350" cy="1358801"/>
-          </a:xfrm>
-          <a:prstGeom prst="rect">
-            <a:avLst/>
-          </a:prstGeom>
-          <a:solidFill>
-            <a:srgbClr val="D9D4C7"/>
-          </a:solidFill>
-          <a:ln>
-            <a:noFill/>
-          </a:ln>
-        </p:spPr>
-        <p:txBody>
-          <a:bodyPr rtlCol="0" anchor="ctr"/>
-          <a:lstStyle/>
-          <a:p>
-            <a:pPr algn="ctr"/>
-          </a:p>
-        </p:txBody>
-      </p:sp>
-      <p:sp>
-        <p:nvSpPr>
-          <p:cNvPr id="25" name="Rectangle 24"/>
-          <p:cNvSpPr/>
-          <p:nvPr/>
-        </p:nvSpPr>
-        <p:spPr>
-          <a:xfrm>
-            <a:off x="711200" y="4225330"/>
-            <a:ext cx="5308600" cy="6350"/>
-          </a:xfrm>
-          <a:prstGeom prst="rect">
-            <a:avLst/>
-          </a:prstGeom>
-          <a:solidFill>
-            <a:srgbClr val="D9D4C7"/>
-          </a:solidFill>
-          <a:ln>
-            <a:noFill/>
-          </a:ln>
-        </p:spPr>
-        <p:txBody>
-          <a:bodyPr rtlCol="0" anchor="ctr"/>
-          <a:lstStyle/>
-          <a:p>
-            <a:pPr algn="ctr"/>
-          </a:p>
-        </p:txBody>
-      </p:sp>
-      <p:sp>
-        <p:nvSpPr>
-          <p:cNvPr id="26" name="Rounded Rectangle 25"/>
-          <p:cNvSpPr/>
-          <p:nvPr/>
-        </p:nvSpPr>
-        <p:spPr>
-          <a:xfrm>
-            <a:off x="711200" y="2872879"/>
-            <a:ext cx="50800" cy="1358801"/>
-          </a:xfrm>
-          <a:prstGeom prst="roundRect">
-            <a:avLst>
-              <a:gd name="adj" fmla="val 50000"/>
-            </a:avLst>
-          </a:prstGeom>
-          <a:solidFill>
-            <a:srgbClr val="C2410C"/>
-          </a:solidFill>
-          <a:ln>
-            <a:noFill/>
-          </a:ln>
-        </p:spPr>
-        <p:txBody>
-          <a:bodyPr rtlCol="0" anchor="ctr"/>
-          <a:lstStyle/>
-          <a:p>
-            <a:pPr algn="ctr"/>
-          </a:p>
-        </p:txBody>
-      </p:sp>
-      <p:sp>
-        <p:nvSpPr>
-          <p:cNvPr id="27" name="Rounded Rectangle 26"/>
-          <p:cNvSpPr/>
-          <p:nvPr/>
-        </p:nvSpPr>
-        <p:spPr>
-          <a:xfrm>
-            <a:off x="927100" y="3018929"/>
-            <a:ext cx="1092200" cy="241300"/>
-          </a:xfrm>
-          <a:prstGeom prst="roundRect">
-            <a:avLst>
-              <a:gd name="adj" fmla="val 50000"/>
-            </a:avLst>
-          </a:prstGeom>
-          <a:solidFill>
-            <a:srgbClr val="FDE7C8"/>
-          </a:solidFill>
-          <a:ln>
-            <a:noFill/>
-          </a:ln>
-        </p:spPr>
-        <p:txBody>
-          <a:bodyPr rtlCol="0" anchor="ctr"/>
-          <a:lstStyle/>
-          <a:p>
-            <a:pPr algn="ctr"/>
-          </a:p>
-        </p:txBody>
-      </p:sp>
-      <p:sp>
-        <p:nvSpPr>
-          <p:cNvPr id="28" name="TextBox 27"/>
-          <p:cNvSpPr txBox="1"/>
-          <p:nvPr/>
-        </p:nvSpPr>
-        <p:spPr>
-          <a:xfrm>
-            <a:off x="1016000" y="3044329"/>
-            <a:ext cx="967232" cy="288925"/>
-          </a:xfrm>
-          <a:prstGeom prst="rect">
-            <a:avLst/>
-          </a:prstGeom>
-          <a:noFill/>
-        </p:spPr>
-        <p:txBody>
-          <a:bodyPr wrap="square" lIns="0" rIns="0" tIns="0" bIns="0" anchor="t">
-            <a:normAutofit/>
-          </a:bodyPr>
-          <a:lstStyle/>
-          <a:p>
-            <a:pPr>
-              <a:lnSpc>
-                <a:spcPct val="119600"/>
-              </a:lnSpc>
-            </a:pPr>
-            <a:r>
-              <a:rPr sz="950" b="1" i="0">
-                <a:solidFill>
-                  <a:srgbClr val="7C2D12"/>
-                </a:solidFill>
-                <a:latin typeface="Arial"/>
-                <a:ea typeface="Malgun Gothic"/>
-                <a:cs typeface="Malgun Gothic"/>
-              </a:rPr>
-              <a:t>3 · Controller 뒤</a:t>
-            </a:r>
-          </a:p>
-        </p:txBody>
-      </p:sp>
-      <p:sp>
-        <p:nvSpPr>
-          <p:cNvPr id="29" name="TextBox 28"/>
-          <p:cNvSpPr txBox="1"/>
-          <p:nvPr/>
-        </p:nvSpPr>
-        <p:spPr>
-          <a:xfrm>
-            <a:off x="927100" y="3336429"/>
-            <a:ext cx="5094288" cy="339651"/>
-          </a:xfrm>
-          <a:prstGeom prst="rect">
-            <a:avLst/>
-          </a:prstGeom>
-          <a:noFill/>
-        </p:spPr>
-        <p:txBody>
-          <a:bodyPr wrap="square" lIns="0" rIns="0" tIns="0" bIns="0" anchor="t">
-            <a:normAutofit/>
-          </a:bodyPr>
-          <a:lstStyle/>
-          <a:p>
-            <a:pPr>
-              <a:lnSpc>
-                <a:spcPct val="119600"/>
-              </a:lnSpc>
-            </a:pPr>
-            <a:r>
-              <a:rPr sz="1350" b="1" i="0">
-                <a:solidFill>
-                  <a:srgbClr val="16213A"/>
-                </a:solidFill>
-                <a:latin typeface="Arial"/>
-                <a:ea typeface="Malgun Gothic"/>
-                <a:cs typeface="Malgun Gothic"/>
-              </a:rPr>
-              <a:t>조향 한계로의 투영 QP</a:t>
-            </a:r>
-          </a:p>
-        </p:txBody>
-      </p:sp>
-      <p:sp>
-        <p:nvSpPr>
-          <p:cNvPr id="30" name="TextBox 29"/>
-          <p:cNvSpPr txBox="1"/>
-          <p:nvPr/>
-        </p:nvSpPr>
-        <p:spPr>
-          <a:xfrm>
-            <a:off x="927100" y="3643709"/>
-            <a:ext cx="5094288" cy="603200"/>
-          </a:xfrm>
-          <a:prstGeom prst="rect">
-            <a:avLst/>
-          </a:prstGeom>
-          <a:noFill/>
-        </p:spPr>
-        <p:txBody>
-          <a:bodyPr wrap="square" lIns="0" rIns="0" tIns="0" bIns="0" anchor="t">
-            <a:normAutofit/>
-          </a:bodyPr>
-          <a:lstStyle/>
-          <a:p>
-            <a:pPr>
-              <a:lnSpc>
-                <a:spcPct val="133400"/>
-              </a:lnSpc>
-            </a:pPr>
-            <a:r>
-              <a:rPr sz="1150" b="0" i="0">
-                <a:solidFill>
-                  <a:srgbClr val="16213A"/>
-                </a:solidFill>
-                <a:latin typeface="Arial"/>
-                <a:ea typeface="Malgun Gothic"/>
-                <a:cs typeface="Malgun Gothic"/>
-              </a:rPr>
-              <a:t>MPPI가 고른 twist를 모듈 수준의 실행 가능 집합으로 옮긴다. 볼록이 아니라 현재 조향각 둘레에서 선형화한다. 조향 한계(TP-0163)가 정해진 뒤에 한다.</a:t>
-            </a:r>
-          </a:p>
-        </p:txBody>
-      </p:sp>
-      <p:sp>
-        <p:nvSpPr>
-          <p:cNvPr id="31" name="Rounded Rectangle 30"/>
-          <p:cNvSpPr/>
-          <p:nvPr/>
-        </p:nvSpPr>
-        <p:spPr>
-          <a:xfrm>
-            <a:off x="6172200" y="2872879"/>
-            <a:ext cx="5308600" cy="1358801"/>
-          </a:xfrm>
-          <a:prstGeom prst="roundRect">
-            <a:avLst>
-              <a:gd name="adj" fmla="val 5607"/>
-            </a:avLst>
-          </a:prstGeom>
-          <a:solidFill>
-            <a:srgbClr val="FFFDF8"/>
-          </a:solidFill>
-          <a:ln>
-            <a:noFill/>
-          </a:ln>
-        </p:spPr>
-        <p:txBody>
-          <a:bodyPr rtlCol="0" anchor="ctr"/>
-          <a:lstStyle/>
-          <a:p>
-            <a:pPr algn="ctr"/>
-          </a:p>
-        </p:txBody>
-      </p:sp>
-      <p:sp>
-        <p:nvSpPr>
-          <p:cNvPr id="32" name="Rectangle 31"/>
-          <p:cNvSpPr/>
-          <p:nvPr/>
-        </p:nvSpPr>
-        <p:spPr>
-          <a:xfrm>
-            <a:off x="6172200" y="2872879"/>
-            <a:ext cx="5308600" cy="6350"/>
-          </a:xfrm>
-          <a:prstGeom prst="rect">
-            <a:avLst/>
-          </a:prstGeom>
-          <a:solidFill>
-            <a:srgbClr val="D9D4C7"/>
-          </a:solidFill>
-          <a:ln>
-            <a:noFill/>
-          </a:ln>
-        </p:spPr>
-        <p:txBody>
-          <a:bodyPr rtlCol="0" anchor="ctr"/>
-          <a:lstStyle/>
-          <a:p>
-            <a:pPr algn="ctr"/>
-          </a:p>
-        </p:txBody>
-      </p:sp>
-      <p:sp>
-        <p:nvSpPr>
-          <p:cNvPr id="33" name="Rectangle 32"/>
-          <p:cNvSpPr/>
-          <p:nvPr/>
-        </p:nvSpPr>
-        <p:spPr>
-          <a:xfrm>
-            <a:off x="11474450" y="2872879"/>
-            <a:ext cx="6350" cy="1358801"/>
-          </a:xfrm>
-          <a:prstGeom prst="rect">
-            <a:avLst/>
-          </a:prstGeom>
-          <a:solidFill>
-            <a:srgbClr val="D9D4C7"/>
-          </a:solidFill>
-          <a:ln>
-            <a:noFill/>
-          </a:ln>
-        </p:spPr>
-        <p:txBody>
-          <a:bodyPr rtlCol="0" anchor="ctr"/>
-          <a:lstStyle/>
-          <a:p>
-            <a:pPr algn="ctr"/>
-          </a:p>
-        </p:txBody>
-      </p:sp>
-      <p:sp>
-        <p:nvSpPr>
-          <p:cNvPr id="34" name="Rectangle 33"/>
-          <p:cNvSpPr/>
-          <p:nvPr/>
-        </p:nvSpPr>
-        <p:spPr>
-          <a:xfrm>
-            <a:off x="6172200" y="4225330"/>
-            <a:ext cx="5308600" cy="6350"/>
-          </a:xfrm>
-          <a:prstGeom prst="rect">
-            <a:avLst/>
-          </a:prstGeom>
-          <a:solidFill>
-            <a:srgbClr val="D9D4C7"/>
-          </a:solidFill>
-          <a:ln>
-            <a:noFill/>
-          </a:ln>
-        </p:spPr>
-        <p:txBody>
-          <a:bodyPr rtlCol="0" anchor="ctr"/>
-          <a:lstStyle/>
-          <a:p>
-            <a:pPr algn="ctr"/>
-          </a:p>
-        </p:txBody>
-      </p:sp>
-      <p:sp>
-        <p:nvSpPr>
-          <p:cNvPr id="35" name="Rounded Rectangle 34"/>
-          <p:cNvSpPr/>
-          <p:nvPr/>
-        </p:nvSpPr>
-        <p:spPr>
-          <a:xfrm>
-            <a:off x="6172200" y="2872879"/>
-            <a:ext cx="50800" cy="1358801"/>
-          </a:xfrm>
-          <a:prstGeom prst="roundRect">
-            <a:avLst>
-              <a:gd name="adj" fmla="val 50000"/>
-            </a:avLst>
-          </a:prstGeom>
-          <a:solidFill>
-            <a:srgbClr val="9AA6BC"/>
-          </a:solidFill>
-          <a:ln>
-            <a:noFill/>
-          </a:ln>
-        </p:spPr>
-        <p:txBody>
-          <a:bodyPr rtlCol="0" anchor="ctr"/>
-          <a:lstStyle/>
-          <a:p>
-            <a:pPr algn="ctr"/>
-          </a:p>
-        </p:txBody>
-      </p:sp>
-      <p:sp>
-        <p:nvSpPr>
-          <p:cNvPr id="36" name="Rounded Rectangle 35"/>
-          <p:cNvSpPr/>
-          <p:nvPr/>
-        </p:nvSpPr>
-        <p:spPr>
-          <a:xfrm>
-            <a:off x="6388100" y="3018929"/>
-            <a:ext cx="584994" cy="241300"/>
-          </a:xfrm>
-          <a:prstGeom prst="roundRect">
-            <a:avLst>
-              <a:gd name="adj" fmla="val 50000"/>
-            </a:avLst>
-          </a:prstGeom>
-          <a:solidFill>
-            <a:srgbClr val="ECE8DF"/>
-          </a:solidFill>
-          <a:ln>
-            <a:noFill/>
-          </a:ln>
-        </p:spPr>
-        <p:txBody>
-          <a:bodyPr rtlCol="0" anchor="ctr"/>
-          <a:lstStyle/>
-          <a:p>
-            <a:pPr algn="ctr"/>
-          </a:p>
-        </p:txBody>
-      </p:sp>
-      <p:sp>
-        <p:nvSpPr>
-          <p:cNvPr id="37" name="TextBox 36"/>
-          <p:cNvSpPr txBox="1"/>
-          <p:nvPr/>
-        </p:nvSpPr>
-        <p:spPr>
-          <a:xfrm>
-            <a:off x="6477000" y="3044329"/>
-            <a:ext cx="444810" cy="288925"/>
-          </a:xfrm>
-          <a:prstGeom prst="rect">
-            <a:avLst/>
-          </a:prstGeom>
-          <a:noFill/>
-        </p:spPr>
-        <p:txBody>
-          <a:bodyPr wrap="square" lIns="0" rIns="0" tIns="0" bIns="0" anchor="t">
-            <a:normAutofit/>
-          </a:bodyPr>
-          <a:lstStyle/>
-          <a:p>
-            <a:pPr>
-              <a:lnSpc>
-                <a:spcPct val="119600"/>
-              </a:lnSpc>
-            </a:pPr>
-            <a:r>
-              <a:rPr sz="950" b="1" i="0">
-                <a:solidFill>
-                  <a:srgbClr val="16213A"/>
-                </a:solidFill>
-                <a:latin typeface="Arial"/>
-                <a:ea typeface="Malgun Gothic"/>
-                <a:cs typeface="Malgun Gothic"/>
-              </a:rPr>
-              <a:t>4 · 평가</a:t>
-            </a:r>
-          </a:p>
-        </p:txBody>
-      </p:sp>
-      <p:sp>
-        <p:nvSpPr>
-          <p:cNvPr id="38" name="TextBox 37"/>
-          <p:cNvSpPr txBox="1"/>
-          <p:nvPr/>
-        </p:nvSpPr>
-        <p:spPr>
-          <a:xfrm>
-            <a:off x="6388100" y="3336429"/>
-            <a:ext cx="5094288" cy="339651"/>
-          </a:xfrm>
-          <a:prstGeom prst="rect">
-            <a:avLst/>
-          </a:prstGeom>
-          <a:noFill/>
-        </p:spPr>
-        <p:txBody>
-          <a:bodyPr wrap="square" lIns="0" rIns="0" tIns="0" bIns="0" anchor="t">
-            <a:normAutofit/>
-          </a:bodyPr>
-          <a:lstStyle/>
-          <a:p>
-            <a:pPr>
-              <a:lnSpc>
-                <a:spcPct val="119600"/>
-              </a:lnSpc>
-            </a:pPr>
-            <a:r>
-              <a:rPr sz="1350" b="1" i="0">
-                <a:solidFill>
-                  <a:srgbClr val="16213A"/>
-                </a:solidFill>
-                <a:latin typeface="Arial"/>
-                <a:ea typeface="Malgun Gothic"/>
-                <a:cs typeface="Malgun Gothic"/>
-              </a:rPr>
-              <a:t>구간별 "첫 실수 전 비율" 곡선</a:t>
-            </a:r>
-          </a:p>
-        </p:txBody>
-      </p:sp>
-      <p:sp>
-        <p:nvSpPr>
-          <p:cNvPr id="39" name="TextBox 38"/>
-          <p:cNvSpPr txBox="1"/>
-          <p:nvPr/>
-        </p:nvSpPr>
-        <p:spPr>
-          <a:xfrm>
-            <a:off x="6388100" y="3643709"/>
-            <a:ext cx="5094288" cy="603200"/>
-          </a:xfrm>
-          <a:prstGeom prst="rect">
-            <a:avLst/>
-          </a:prstGeom>
-          <a:noFill/>
-        </p:spPr>
-        <p:txBody>
-          <a:bodyPr wrap="square" lIns="0" rIns="0" tIns="0" bIns="0" anchor="t">
-            <a:normAutofit/>
-          </a:bodyPr>
-          <a:lstStyle/>
-          <a:p>
-            <a:pPr>
-              <a:lnSpc>
-                <a:spcPct val="133400"/>
-              </a:lnSpc>
-            </a:pPr>
-            <a:r>
-              <a:rPr sz="1150" b="0" i="0">
-                <a:solidFill>
-                  <a:srgbClr val="16213A"/>
-                </a:solidFill>
-                <a:latin typeface="Arial"/>
-                <a:ea typeface="Malgun Gothic"/>
-                <a:cs typeface="Malgun Gothic"/>
-              </a:rPr>
-              <a:t>Flexion의 곡선처럼 연석·경사로·보행자 구간마다 살아남은 비율을 그린다. 새 학습 없이 기존 기록으로 그린다.</a:t>
-            </a:r>
-          </a:p>
-        </p:txBody>
-      </p:sp>
-      <p:sp>
-        <p:nvSpPr>
-          <p:cNvPr id="40" name="Rounded Rectangle 39"/>
-          <p:cNvSpPr/>
-          <p:nvPr/>
-        </p:nvSpPr>
-        <p:spPr>
-          <a:xfrm>
-            <a:off x="711200" y="4409480"/>
-            <a:ext cx="10769600" cy="502543"/>
-          </a:xfrm>
-          <a:prstGeom prst="roundRect">
-            <a:avLst>
-              <a:gd name="adj" fmla="val 15162"/>
-            </a:avLst>
-          </a:prstGeom>
-          <a:solidFill>
-            <a:srgbClr val="16213A"/>
-          </a:solidFill>
-          <a:ln>
-            <a:noFill/>
-          </a:ln>
-        </p:spPr>
-        <p:txBody>
-          <a:bodyPr rtlCol="0" anchor="ctr"/>
-          <a:lstStyle/>
-          <a:p>
-            <a:pPr algn="ctr"/>
-          </a:p>
-        </p:txBody>
-      </p:sp>
-      <p:sp>
-        <p:nvSpPr>
-          <p:cNvPr id="41" name="TextBox 40"/>
-          <p:cNvSpPr txBox="1"/>
-          <p:nvPr/>
-        </p:nvSpPr>
-        <p:spPr>
-          <a:xfrm>
-            <a:off x="889000" y="4536480"/>
-            <a:ext cx="10751820" cy="361479"/>
-          </a:xfrm>
-          <a:prstGeom prst="rect">
-            <a:avLst/>
-          </a:prstGeom>
-          <a:noFill/>
-        </p:spPr>
-        <p:txBody>
-          <a:bodyPr wrap="square" lIns="0" rIns="0" tIns="0" bIns="0" anchor="t">
-            <a:normAutofit/>
-          </a:bodyPr>
-          <a:lstStyle/>
-          <a:p>
-            <a:pPr>
-              <a:lnSpc>
-                <a:spcPct val="133400"/>
-              </a:lnSpc>
-            </a:pPr>
-            <a:r>
-              <a:rPr sz="1300" b="1" i="0">
-                <a:solidFill>
-                  <a:srgbClr val="F59E5B"/>
-                </a:solidFill>
-                <a:latin typeface="Arial"/>
-                <a:ea typeface="Malgun Gothic"/>
-                <a:cs typeface="Malgun Gothic"/>
-              </a:rPr>
-              <a:t>판정:</a:t>
-            </a:r>
-            <a:r>
-              <a:rPr sz="1300" b="0" i="0">
-                <a:solidFill>
-                  <a:srgbClr val="F4F1EA"/>
-                </a:solidFill>
-                <a:latin typeface="Arial"/>
-                <a:ea typeface="Malgun Gothic"/>
-                <a:cs typeface="Malgun Gothic"/>
-              </a:rPr>
-              <a:t> 각 팔 seed 0–9 × rng-offset 3판을 paired_success.py로 짝 비교하고, 치명이 하나라도 늘면 채택하지 않는다.</a:t>
-            </a:r>
-          </a:p>
-        </p:txBody>
-      </p:sp>
-    </p:spTree>
-  </p:cSld>
-  <p:clrMapOvr>
-    <a:masterClrMapping/>
-  </p:clrMapOvr>
-</p:sld>
-</file>
-
 <file path=ppt/slides/slide36.xml><?xml version="1.0" encoding="utf-8"?>
 <p:sld xmlns:a="http://schemas.openxmlformats.org/drawingml/2006/main" xmlns:p="http://schemas.openxmlformats.org/presentationml/2006/main" xmlns:r="http://schemas.openxmlformats.org/officeDocument/2006/relationships">
   <p:cSld>
@@ -31382,6 +30938,1431 @@
                 <a:ea typeface="Malgun Gothic"/>
                 <a:cs typeface="Malgun Gothic"/>
               </a:rPr>
+              <a:t>다음 시험</a:t>
+            </a:r>
+          </a:p>
+        </p:txBody>
+      </p:sp>
+      <p:sp>
+        <p:nvSpPr>
+          <p:cNvPr id="3" name="TextBox 2"/>
+          <p:cNvSpPr txBox="1"/>
+          <p:nvPr/>
+        </p:nvSpPr>
+        <p:spPr>
+          <a:xfrm>
+            <a:off x="711200" y="781050"/>
+            <a:ext cx="11118088" cy="554335"/>
+          </a:xfrm>
+          <a:prstGeom prst="rect">
+            <a:avLst/>
+          </a:prstGeom>
+          <a:noFill/>
+        </p:spPr>
+        <p:txBody>
+          <a:bodyPr wrap="square" lIns="0" rIns="0" tIns="0" bIns="0" anchor="t">
+            <a:normAutofit/>
+          </a:bodyPr>
+          <a:lstStyle/>
+          <a:p>
+            <a:pPr>
+              <a:lnSpc>
+                <a:spcPct val="112240"/>
+              </a:lnSpc>
+            </a:pPr>
+            <a:r>
+              <a:rPr sz="2500" b="1" i="0">
+                <a:solidFill>
+                  <a:srgbClr val="16213A"/>
+                </a:solidFill>
+                <a:latin typeface="Arial"/>
+                <a:ea typeface="Malgun Gothic"/>
+                <a:cs typeface="Malgun Gothic"/>
+              </a:rPr>
+              <a:t>네 가지를 작은 것부터, 모두 짝 비교로 판정한다</a:t>
+            </a:r>
+          </a:p>
+        </p:txBody>
+      </p:sp>
+      <p:sp>
+        <p:nvSpPr>
+          <p:cNvPr id="4" name="Rounded Rectangle 3"/>
+          <p:cNvSpPr/>
+          <p:nvPr/>
+        </p:nvSpPr>
+        <p:spPr>
+          <a:xfrm>
+            <a:off x="711200" y="1361678"/>
+            <a:ext cx="5308600" cy="1358801"/>
+          </a:xfrm>
+          <a:prstGeom prst="roundRect">
+            <a:avLst>
+              <a:gd name="adj" fmla="val 5607"/>
+            </a:avLst>
+          </a:prstGeom>
+          <a:solidFill>
+            <a:srgbClr val="FFFDF8"/>
+          </a:solidFill>
+          <a:ln>
+            <a:noFill/>
+          </a:ln>
+        </p:spPr>
+        <p:txBody>
+          <a:bodyPr rtlCol="0" anchor="ctr"/>
+          <a:lstStyle/>
+          <a:p>
+            <a:pPr algn="ctr"/>
+          </a:p>
+        </p:txBody>
+      </p:sp>
+      <p:sp>
+        <p:nvSpPr>
+          <p:cNvPr id="5" name="Rectangle 4"/>
+          <p:cNvSpPr/>
+          <p:nvPr/>
+        </p:nvSpPr>
+        <p:spPr>
+          <a:xfrm>
+            <a:off x="711200" y="1361678"/>
+            <a:ext cx="5308600" cy="6350"/>
+          </a:xfrm>
+          <a:prstGeom prst="rect">
+            <a:avLst/>
+          </a:prstGeom>
+          <a:solidFill>
+            <a:srgbClr val="D9D4C7"/>
+          </a:solidFill>
+          <a:ln>
+            <a:noFill/>
+          </a:ln>
+        </p:spPr>
+        <p:txBody>
+          <a:bodyPr rtlCol="0" anchor="ctr"/>
+          <a:lstStyle/>
+          <a:p>
+            <a:pPr algn="ctr"/>
+          </a:p>
+        </p:txBody>
+      </p:sp>
+      <p:sp>
+        <p:nvSpPr>
+          <p:cNvPr id="6" name="Rectangle 5"/>
+          <p:cNvSpPr/>
+          <p:nvPr/>
+        </p:nvSpPr>
+        <p:spPr>
+          <a:xfrm>
+            <a:off x="6013450" y="1361678"/>
+            <a:ext cx="6350" cy="1358801"/>
+          </a:xfrm>
+          <a:prstGeom prst="rect">
+            <a:avLst/>
+          </a:prstGeom>
+          <a:solidFill>
+            <a:srgbClr val="D9D4C7"/>
+          </a:solidFill>
+          <a:ln>
+            <a:noFill/>
+          </a:ln>
+        </p:spPr>
+        <p:txBody>
+          <a:bodyPr rtlCol="0" anchor="ctr"/>
+          <a:lstStyle/>
+          <a:p>
+            <a:pPr algn="ctr"/>
+          </a:p>
+        </p:txBody>
+      </p:sp>
+      <p:sp>
+        <p:nvSpPr>
+          <p:cNvPr id="7" name="Rectangle 6"/>
+          <p:cNvSpPr/>
+          <p:nvPr/>
+        </p:nvSpPr>
+        <p:spPr>
+          <a:xfrm>
+            <a:off x="711200" y="2714129"/>
+            <a:ext cx="5308600" cy="6350"/>
+          </a:xfrm>
+          <a:prstGeom prst="rect">
+            <a:avLst/>
+          </a:prstGeom>
+          <a:solidFill>
+            <a:srgbClr val="D9D4C7"/>
+          </a:solidFill>
+          <a:ln>
+            <a:noFill/>
+          </a:ln>
+        </p:spPr>
+        <p:txBody>
+          <a:bodyPr rtlCol="0" anchor="ctr"/>
+          <a:lstStyle/>
+          <a:p>
+            <a:pPr algn="ctr"/>
+          </a:p>
+        </p:txBody>
+      </p:sp>
+      <p:sp>
+        <p:nvSpPr>
+          <p:cNvPr id="8" name="Rounded Rectangle 7"/>
+          <p:cNvSpPr/>
+          <p:nvPr/>
+        </p:nvSpPr>
+        <p:spPr>
+          <a:xfrm>
+            <a:off x="711200" y="1361678"/>
+            <a:ext cx="50800" cy="1358801"/>
+          </a:xfrm>
+          <a:prstGeom prst="roundRect">
+            <a:avLst>
+              <a:gd name="adj" fmla="val 50000"/>
+            </a:avLst>
+          </a:prstGeom>
+          <a:solidFill>
+            <a:srgbClr val="15803D"/>
+          </a:solidFill>
+          <a:ln>
+            <a:noFill/>
+          </a:ln>
+        </p:spPr>
+        <p:txBody>
+          <a:bodyPr rtlCol="0" anchor="ctr"/>
+          <a:lstStyle/>
+          <a:p>
+            <a:pPr algn="ctr"/>
+          </a:p>
+        </p:txBody>
+      </p:sp>
+      <p:sp>
+        <p:nvSpPr>
+          <p:cNvPr id="9" name="Rounded Rectangle 8"/>
+          <p:cNvSpPr/>
+          <p:nvPr/>
+        </p:nvSpPr>
+        <p:spPr>
+          <a:xfrm>
+            <a:off x="927100" y="1507728"/>
+            <a:ext cx="728266" cy="241300"/>
+          </a:xfrm>
+          <a:prstGeom prst="roundRect">
+            <a:avLst>
+              <a:gd name="adj" fmla="val 50000"/>
+            </a:avLst>
+          </a:prstGeom>
+          <a:solidFill>
+            <a:srgbClr val="D7EFDD"/>
+          </a:solidFill>
+          <a:ln>
+            <a:noFill/>
+          </a:ln>
+        </p:spPr>
+        <p:txBody>
+          <a:bodyPr rtlCol="0" anchor="ctr"/>
+          <a:lstStyle/>
+          <a:p>
+            <a:pPr algn="ctr"/>
+          </a:p>
+        </p:txBody>
+      </p:sp>
+      <p:sp>
+        <p:nvSpPr>
+          <p:cNvPr id="10" name="TextBox 9"/>
+          <p:cNvSpPr txBox="1"/>
+          <p:nvPr/>
+        </p:nvSpPr>
+        <p:spPr>
+          <a:xfrm>
+            <a:off x="1016000" y="1533128"/>
+            <a:ext cx="592380" cy="288925"/>
+          </a:xfrm>
+          <a:prstGeom prst="rect">
+            <a:avLst/>
+          </a:prstGeom>
+          <a:noFill/>
+        </p:spPr>
+        <p:txBody>
+          <a:bodyPr wrap="square" lIns="0" rIns="0" tIns="0" bIns="0" anchor="t">
+            <a:normAutofit/>
+          </a:bodyPr>
+          <a:lstStyle/>
+          <a:p>
+            <a:pPr>
+              <a:lnSpc>
+                <a:spcPct val="119600"/>
+              </a:lnSpc>
+            </a:pPr>
+            <a:r>
+              <a:rPr sz="950" b="1" i="0">
+                <a:solidFill>
+                  <a:srgbClr val="14532D"/>
+                </a:solidFill>
+                <a:latin typeface="Arial"/>
+                <a:ea typeface="Malgun Gothic"/>
+                <a:cs typeface="Malgun Gothic"/>
+              </a:rPr>
+              <a:t>1 · 가장 쌈</a:t>
+            </a:r>
+          </a:p>
+        </p:txBody>
+      </p:sp>
+      <p:sp>
+        <p:nvSpPr>
+          <p:cNvPr id="11" name="TextBox 10"/>
+          <p:cNvSpPr txBox="1"/>
+          <p:nvPr/>
+        </p:nvSpPr>
+        <p:spPr>
+          <a:xfrm>
+            <a:off x="927100" y="1825228"/>
+            <a:ext cx="5094288" cy="339651"/>
+          </a:xfrm>
+          <a:prstGeom prst="rect">
+            <a:avLst/>
+          </a:prstGeom>
+          <a:noFill/>
+        </p:spPr>
+        <p:txBody>
+          <a:bodyPr wrap="square" lIns="0" rIns="0" tIns="0" bIns="0" anchor="t">
+            <a:normAutofit/>
+          </a:bodyPr>
+          <a:lstStyle/>
+          <a:p>
+            <a:pPr>
+              <a:lnSpc>
+                <a:spcPct val="119600"/>
+              </a:lnSpc>
+            </a:pPr>
+            <a:r>
+              <a:rPr sz="1350" b="1" i="0">
+                <a:solidFill>
+                  <a:srgbClr val="16213A"/>
+                </a:solidFill>
+                <a:latin typeface="Arial"/>
+                <a:ea typeface="Malgun Gothic"/>
+                <a:cs typeface="Malgun Gothic"/>
+              </a:rPr>
+              <a:t>TinyPolicy 관측을 경로 둘레 조각으로</a:t>
+            </a:r>
+          </a:p>
+        </p:txBody>
+      </p:sp>
+      <p:sp>
+        <p:nvSpPr>
+          <p:cNvPr id="12" name="TextBox 11"/>
+          <p:cNvSpPr txBox="1"/>
+          <p:nvPr/>
+        </p:nvSpPr>
+        <p:spPr>
+          <a:xfrm>
+            <a:off x="927100" y="2132509"/>
+            <a:ext cx="5094288" cy="603200"/>
+          </a:xfrm>
+          <a:prstGeom prst="rect">
+            <a:avLst/>
+          </a:prstGeom>
+          <a:noFill/>
+        </p:spPr>
+        <p:txBody>
+          <a:bodyPr wrap="square" lIns="0" rIns="0" tIns="0" bIns="0" anchor="t">
+            <a:normAutofit/>
+          </a:bodyPr>
+          <a:lstStyle/>
+          <a:p>
+            <a:pPr>
+              <a:lnSpc>
+                <a:spcPct val="133400"/>
+              </a:lnSpc>
+            </a:pPr>
+            <a:r>
+              <a:rPr sz="1150" b="0" i="0">
+                <a:solidFill>
+                  <a:srgbClr val="16213A"/>
+                </a:solidFill>
+                <a:latin typeface="Arial"/>
+                <a:ea typeface="Malgun Gothic"/>
+                <a:cs typeface="Malgun Gothic"/>
+              </a:rPr>
+              <a:t>고정 7 × 5 격자 대신 경로 앞 네 점 둘레를 읽는다. 관측 크기는 그대로다. 보행자는 넓은 시야로 따로 받는다. </a:t>
+            </a:r>
+            <a:r>
+              <a:rPr sz="1000" b="0" i="0">
+                <a:solidFill>
+                  <a:srgbClr val="7C2D12"/>
+                </a:solidFill>
+                <a:latin typeface="Consolas"/>
+                <a:ea typeface="Malgun Gothic"/>
+                <a:cs typeface="Malgun Gothic"/>
+              </a:rPr>
+              <a:t>js/policy.js</a:t>
+            </a:r>
+            <a:r>
+              <a:rPr sz="1150" b="0" i="0">
+                <a:solidFill>
+                  <a:srgbClr val="16213A"/>
+                </a:solidFill>
+                <a:latin typeface="Arial"/>
+                <a:ea typeface="Malgun Gothic"/>
+                <a:cs typeface="Malgun Gothic"/>
+              </a:rPr>
+              <a:t>도 함께 고친다.</a:t>
+            </a:r>
+          </a:p>
+        </p:txBody>
+      </p:sp>
+      <p:sp>
+        <p:nvSpPr>
+          <p:cNvPr id="13" name="Rounded Rectangle 12"/>
+          <p:cNvSpPr/>
+          <p:nvPr/>
+        </p:nvSpPr>
+        <p:spPr>
+          <a:xfrm>
+            <a:off x="6172200" y="1361678"/>
+            <a:ext cx="5308600" cy="1358801"/>
+          </a:xfrm>
+          <a:prstGeom prst="roundRect">
+            <a:avLst>
+              <a:gd name="adj" fmla="val 5607"/>
+            </a:avLst>
+          </a:prstGeom>
+          <a:solidFill>
+            <a:srgbClr val="FFFDF8"/>
+          </a:solidFill>
+          <a:ln>
+            <a:noFill/>
+          </a:ln>
+        </p:spPr>
+        <p:txBody>
+          <a:bodyPr rtlCol="0" anchor="ctr"/>
+          <a:lstStyle/>
+          <a:p>
+            <a:pPr algn="ctr"/>
+          </a:p>
+        </p:txBody>
+      </p:sp>
+      <p:sp>
+        <p:nvSpPr>
+          <p:cNvPr id="14" name="Rectangle 13"/>
+          <p:cNvSpPr/>
+          <p:nvPr/>
+        </p:nvSpPr>
+        <p:spPr>
+          <a:xfrm>
+            <a:off x="6172200" y="1361678"/>
+            <a:ext cx="5308600" cy="6350"/>
+          </a:xfrm>
+          <a:prstGeom prst="rect">
+            <a:avLst/>
+          </a:prstGeom>
+          <a:solidFill>
+            <a:srgbClr val="D9D4C7"/>
+          </a:solidFill>
+          <a:ln>
+            <a:noFill/>
+          </a:ln>
+        </p:spPr>
+        <p:txBody>
+          <a:bodyPr rtlCol="0" anchor="ctr"/>
+          <a:lstStyle/>
+          <a:p>
+            <a:pPr algn="ctr"/>
+          </a:p>
+        </p:txBody>
+      </p:sp>
+      <p:sp>
+        <p:nvSpPr>
+          <p:cNvPr id="15" name="Rectangle 14"/>
+          <p:cNvSpPr/>
+          <p:nvPr/>
+        </p:nvSpPr>
+        <p:spPr>
+          <a:xfrm>
+            <a:off x="11474450" y="1361678"/>
+            <a:ext cx="6350" cy="1358801"/>
+          </a:xfrm>
+          <a:prstGeom prst="rect">
+            <a:avLst/>
+          </a:prstGeom>
+          <a:solidFill>
+            <a:srgbClr val="D9D4C7"/>
+          </a:solidFill>
+          <a:ln>
+            <a:noFill/>
+          </a:ln>
+        </p:spPr>
+        <p:txBody>
+          <a:bodyPr rtlCol="0" anchor="ctr"/>
+          <a:lstStyle/>
+          <a:p>
+            <a:pPr algn="ctr"/>
+          </a:p>
+        </p:txBody>
+      </p:sp>
+      <p:sp>
+        <p:nvSpPr>
+          <p:cNvPr id="16" name="Rectangle 15"/>
+          <p:cNvSpPr/>
+          <p:nvPr/>
+        </p:nvSpPr>
+        <p:spPr>
+          <a:xfrm>
+            <a:off x="6172200" y="2714129"/>
+            <a:ext cx="5308600" cy="6350"/>
+          </a:xfrm>
+          <a:prstGeom prst="rect">
+            <a:avLst/>
+          </a:prstGeom>
+          <a:solidFill>
+            <a:srgbClr val="D9D4C7"/>
+          </a:solidFill>
+          <a:ln>
+            <a:noFill/>
+          </a:ln>
+        </p:spPr>
+        <p:txBody>
+          <a:bodyPr rtlCol="0" anchor="ctr"/>
+          <a:lstStyle/>
+          <a:p>
+            <a:pPr algn="ctr"/>
+          </a:p>
+        </p:txBody>
+      </p:sp>
+      <p:sp>
+        <p:nvSpPr>
+          <p:cNvPr id="17" name="Rounded Rectangle 16"/>
+          <p:cNvSpPr/>
+          <p:nvPr/>
+        </p:nvSpPr>
+        <p:spPr>
+          <a:xfrm>
+            <a:off x="6172200" y="1361678"/>
+            <a:ext cx="50800" cy="1358801"/>
+          </a:xfrm>
+          <a:prstGeom prst="roundRect">
+            <a:avLst>
+              <a:gd name="adj" fmla="val 50000"/>
+            </a:avLst>
+          </a:prstGeom>
+          <a:solidFill>
+            <a:srgbClr val="1D4ED8"/>
+          </a:solidFill>
+          <a:ln>
+            <a:noFill/>
+          </a:ln>
+        </p:spPr>
+        <p:txBody>
+          <a:bodyPr rtlCol="0" anchor="ctr"/>
+          <a:lstStyle/>
+          <a:p>
+            <a:pPr algn="ctr"/>
+          </a:p>
+        </p:txBody>
+      </p:sp>
+      <p:sp>
+        <p:nvSpPr>
+          <p:cNvPr id="18" name="Rounded Rectangle 17"/>
+          <p:cNvSpPr/>
+          <p:nvPr/>
+        </p:nvSpPr>
+        <p:spPr>
+          <a:xfrm>
+            <a:off x="6388100" y="1507728"/>
+            <a:ext cx="961529" cy="241300"/>
+          </a:xfrm>
+          <a:prstGeom prst="roundRect">
+            <a:avLst>
+              <a:gd name="adj" fmla="val 50000"/>
+            </a:avLst>
+          </a:prstGeom>
+          <a:solidFill>
+            <a:srgbClr val="DBE5FB"/>
+          </a:solidFill>
+          <a:ln>
+            <a:noFill/>
+          </a:ln>
+        </p:spPr>
+        <p:txBody>
+          <a:bodyPr rtlCol="0" anchor="ctr"/>
+          <a:lstStyle/>
+          <a:p>
+            <a:pPr algn="ctr"/>
+          </a:p>
+        </p:txBody>
+      </p:sp>
+      <p:sp>
+        <p:nvSpPr>
+          <p:cNvPr id="19" name="TextBox 18"/>
+          <p:cNvSpPr txBox="1"/>
+          <p:nvPr/>
+        </p:nvSpPr>
+        <p:spPr>
+          <a:xfrm>
+            <a:off x="6477000" y="1533128"/>
+            <a:ext cx="832641" cy="288925"/>
+          </a:xfrm>
+          <a:prstGeom prst="rect">
+            <a:avLst/>
+          </a:prstGeom>
+          <a:noFill/>
+        </p:spPr>
+        <p:txBody>
+          <a:bodyPr wrap="square" lIns="0" rIns="0" tIns="0" bIns="0" anchor="t">
+            <a:normAutofit/>
+          </a:bodyPr>
+          <a:lstStyle/>
+          <a:p>
+            <a:pPr>
+              <a:lnSpc>
+                <a:spcPct val="119600"/>
+              </a:lnSpc>
+            </a:pPr>
+            <a:r>
+              <a:rPr sz="950" b="1" i="0">
+                <a:solidFill>
+                  <a:srgbClr val="1E3A8A"/>
+                </a:solidFill>
+                <a:latin typeface="Arial"/>
+                <a:ea typeface="Malgun Gothic"/>
+                <a:cs typeface="Malgun Gothic"/>
+              </a:rPr>
+              <a:t>2 · Planner 쪽</a:t>
+            </a:r>
+          </a:p>
+        </p:txBody>
+      </p:sp>
+      <p:sp>
+        <p:nvSpPr>
+          <p:cNvPr id="20" name="TextBox 19"/>
+          <p:cNvSpPr txBox="1"/>
+          <p:nvPr/>
+        </p:nvSpPr>
+        <p:spPr>
+          <a:xfrm>
+            <a:off x="6388100" y="1825228"/>
+            <a:ext cx="5094288" cy="339651"/>
+          </a:xfrm>
+          <a:prstGeom prst="rect">
+            <a:avLst/>
+          </a:prstGeom>
+          <a:noFill/>
+        </p:spPr>
+        <p:txBody>
+          <a:bodyPr wrap="square" lIns="0" rIns="0" tIns="0" bIns="0" anchor="t">
+            <a:normAutofit/>
+          </a:bodyPr>
+          <a:lstStyle/>
+          <a:p>
+            <a:pPr>
+              <a:lnSpc>
+                <a:spcPct val="119600"/>
+              </a:lnSpc>
+            </a:pPr>
+            <a:r>
+              <a:rPr sz="1350" b="1" i="0">
+                <a:solidFill>
+                  <a:srgbClr val="16213A"/>
+                </a:solidFill>
+                <a:latin typeface="Arial"/>
+                <a:ea typeface="Malgun Gothic"/>
+                <a:cs typeface="Malgun Gothic"/>
+              </a:rPr>
+              <a:t>진행 방향만 Guidance로 돌리는 폴백</a:t>
+            </a:r>
+          </a:p>
+        </p:txBody>
+      </p:sp>
+      <p:sp>
+        <p:nvSpPr>
+          <p:cNvPr id="21" name="TextBox 20"/>
+          <p:cNvSpPr txBox="1"/>
+          <p:nvPr/>
+        </p:nvSpPr>
+        <p:spPr>
+          <a:xfrm>
+            <a:off x="6388100" y="2132509"/>
+            <a:ext cx="5094288" cy="603200"/>
+          </a:xfrm>
+          <a:prstGeom prst="rect">
+            <a:avLst/>
+          </a:prstGeom>
+          <a:noFill/>
+        </p:spPr>
+        <p:txBody>
+          <a:bodyPr wrap="square" lIns="0" rIns="0" tIns="0" bIns="0" anchor="t">
+            <a:normAutofit/>
+          </a:bodyPr>
+          <a:lstStyle/>
+          <a:p>
+            <a:pPr>
+              <a:lnSpc>
+                <a:spcPct val="133400"/>
+              </a:lnSpc>
+            </a:pPr>
+            <a:r>
+              <a:rPr sz="1150" b="0" i="0">
+                <a:solidFill>
+                  <a:srgbClr val="16213A"/>
+                </a:solidFill>
+                <a:latin typeface="Arial"/>
+                <a:ea typeface="Malgun Gothic"/>
+                <a:cs typeface="Malgun Gothic"/>
+              </a:rPr>
+              <a:t>LP-NavOA처럼 Planner D 궤적은 두고 진행 방향만 덮어쓴다. 지금 폴백은 Planner 전체를 바꾼다. 아직 시험하지 않았다.</a:t>
+            </a:r>
+          </a:p>
+        </p:txBody>
+      </p:sp>
+      <p:sp>
+        <p:nvSpPr>
+          <p:cNvPr id="22" name="Rounded Rectangle 21"/>
+          <p:cNvSpPr/>
+          <p:nvPr/>
+        </p:nvSpPr>
+        <p:spPr>
+          <a:xfrm>
+            <a:off x="711200" y="2872879"/>
+            <a:ext cx="5308600" cy="1358801"/>
+          </a:xfrm>
+          <a:prstGeom prst="roundRect">
+            <a:avLst>
+              <a:gd name="adj" fmla="val 5607"/>
+            </a:avLst>
+          </a:prstGeom>
+          <a:solidFill>
+            <a:srgbClr val="FFFDF8"/>
+          </a:solidFill>
+          <a:ln>
+            <a:noFill/>
+          </a:ln>
+        </p:spPr>
+        <p:txBody>
+          <a:bodyPr rtlCol="0" anchor="ctr"/>
+          <a:lstStyle/>
+          <a:p>
+            <a:pPr algn="ctr"/>
+          </a:p>
+        </p:txBody>
+      </p:sp>
+      <p:sp>
+        <p:nvSpPr>
+          <p:cNvPr id="23" name="Rectangle 22"/>
+          <p:cNvSpPr/>
+          <p:nvPr/>
+        </p:nvSpPr>
+        <p:spPr>
+          <a:xfrm>
+            <a:off x="711200" y="2872879"/>
+            <a:ext cx="5308600" cy="6350"/>
+          </a:xfrm>
+          <a:prstGeom prst="rect">
+            <a:avLst/>
+          </a:prstGeom>
+          <a:solidFill>
+            <a:srgbClr val="D9D4C7"/>
+          </a:solidFill>
+          <a:ln>
+            <a:noFill/>
+          </a:ln>
+        </p:spPr>
+        <p:txBody>
+          <a:bodyPr rtlCol="0" anchor="ctr"/>
+          <a:lstStyle/>
+          <a:p>
+            <a:pPr algn="ctr"/>
+          </a:p>
+        </p:txBody>
+      </p:sp>
+      <p:sp>
+        <p:nvSpPr>
+          <p:cNvPr id="24" name="Rectangle 23"/>
+          <p:cNvSpPr/>
+          <p:nvPr/>
+        </p:nvSpPr>
+        <p:spPr>
+          <a:xfrm>
+            <a:off x="6013450" y="2872879"/>
+            <a:ext cx="6350" cy="1358801"/>
+          </a:xfrm>
+          <a:prstGeom prst="rect">
+            <a:avLst/>
+          </a:prstGeom>
+          <a:solidFill>
+            <a:srgbClr val="D9D4C7"/>
+          </a:solidFill>
+          <a:ln>
+            <a:noFill/>
+          </a:ln>
+        </p:spPr>
+        <p:txBody>
+          <a:bodyPr rtlCol="0" anchor="ctr"/>
+          <a:lstStyle/>
+          <a:p>
+            <a:pPr algn="ctr"/>
+          </a:p>
+        </p:txBody>
+      </p:sp>
+      <p:sp>
+        <p:nvSpPr>
+          <p:cNvPr id="25" name="Rectangle 24"/>
+          <p:cNvSpPr/>
+          <p:nvPr/>
+        </p:nvSpPr>
+        <p:spPr>
+          <a:xfrm>
+            <a:off x="711200" y="4225330"/>
+            <a:ext cx="5308600" cy="6350"/>
+          </a:xfrm>
+          <a:prstGeom prst="rect">
+            <a:avLst/>
+          </a:prstGeom>
+          <a:solidFill>
+            <a:srgbClr val="D9D4C7"/>
+          </a:solidFill>
+          <a:ln>
+            <a:noFill/>
+          </a:ln>
+        </p:spPr>
+        <p:txBody>
+          <a:bodyPr rtlCol="0" anchor="ctr"/>
+          <a:lstStyle/>
+          <a:p>
+            <a:pPr algn="ctr"/>
+          </a:p>
+        </p:txBody>
+      </p:sp>
+      <p:sp>
+        <p:nvSpPr>
+          <p:cNvPr id="26" name="Rounded Rectangle 25"/>
+          <p:cNvSpPr/>
+          <p:nvPr/>
+        </p:nvSpPr>
+        <p:spPr>
+          <a:xfrm>
+            <a:off x="711200" y="2872879"/>
+            <a:ext cx="50800" cy="1358801"/>
+          </a:xfrm>
+          <a:prstGeom prst="roundRect">
+            <a:avLst>
+              <a:gd name="adj" fmla="val 50000"/>
+            </a:avLst>
+          </a:prstGeom>
+          <a:solidFill>
+            <a:srgbClr val="C2410C"/>
+          </a:solidFill>
+          <a:ln>
+            <a:noFill/>
+          </a:ln>
+        </p:spPr>
+        <p:txBody>
+          <a:bodyPr rtlCol="0" anchor="ctr"/>
+          <a:lstStyle/>
+          <a:p>
+            <a:pPr algn="ctr"/>
+          </a:p>
+        </p:txBody>
+      </p:sp>
+      <p:sp>
+        <p:nvSpPr>
+          <p:cNvPr id="27" name="Rounded Rectangle 26"/>
+          <p:cNvSpPr/>
+          <p:nvPr/>
+        </p:nvSpPr>
+        <p:spPr>
+          <a:xfrm>
+            <a:off x="927100" y="3018929"/>
+            <a:ext cx="1092200" cy="241300"/>
+          </a:xfrm>
+          <a:prstGeom prst="roundRect">
+            <a:avLst>
+              <a:gd name="adj" fmla="val 50000"/>
+            </a:avLst>
+          </a:prstGeom>
+          <a:solidFill>
+            <a:srgbClr val="FDE7C8"/>
+          </a:solidFill>
+          <a:ln>
+            <a:noFill/>
+          </a:ln>
+        </p:spPr>
+        <p:txBody>
+          <a:bodyPr rtlCol="0" anchor="ctr"/>
+          <a:lstStyle/>
+          <a:p>
+            <a:pPr algn="ctr"/>
+          </a:p>
+        </p:txBody>
+      </p:sp>
+      <p:sp>
+        <p:nvSpPr>
+          <p:cNvPr id="28" name="TextBox 27"/>
+          <p:cNvSpPr txBox="1"/>
+          <p:nvPr/>
+        </p:nvSpPr>
+        <p:spPr>
+          <a:xfrm>
+            <a:off x="1016000" y="3044329"/>
+            <a:ext cx="967232" cy="288925"/>
+          </a:xfrm>
+          <a:prstGeom prst="rect">
+            <a:avLst/>
+          </a:prstGeom>
+          <a:noFill/>
+        </p:spPr>
+        <p:txBody>
+          <a:bodyPr wrap="square" lIns="0" rIns="0" tIns="0" bIns="0" anchor="t">
+            <a:normAutofit/>
+          </a:bodyPr>
+          <a:lstStyle/>
+          <a:p>
+            <a:pPr>
+              <a:lnSpc>
+                <a:spcPct val="119600"/>
+              </a:lnSpc>
+            </a:pPr>
+            <a:r>
+              <a:rPr sz="950" b="1" i="0">
+                <a:solidFill>
+                  <a:srgbClr val="7C2D12"/>
+                </a:solidFill>
+                <a:latin typeface="Arial"/>
+                <a:ea typeface="Malgun Gothic"/>
+                <a:cs typeface="Malgun Gothic"/>
+              </a:rPr>
+              <a:t>3 · Controller 뒤</a:t>
+            </a:r>
+          </a:p>
+        </p:txBody>
+      </p:sp>
+      <p:sp>
+        <p:nvSpPr>
+          <p:cNvPr id="29" name="TextBox 28"/>
+          <p:cNvSpPr txBox="1"/>
+          <p:nvPr/>
+        </p:nvSpPr>
+        <p:spPr>
+          <a:xfrm>
+            <a:off x="927100" y="3336429"/>
+            <a:ext cx="5094288" cy="339651"/>
+          </a:xfrm>
+          <a:prstGeom prst="rect">
+            <a:avLst/>
+          </a:prstGeom>
+          <a:noFill/>
+        </p:spPr>
+        <p:txBody>
+          <a:bodyPr wrap="square" lIns="0" rIns="0" tIns="0" bIns="0" anchor="t">
+            <a:normAutofit/>
+          </a:bodyPr>
+          <a:lstStyle/>
+          <a:p>
+            <a:pPr>
+              <a:lnSpc>
+                <a:spcPct val="119600"/>
+              </a:lnSpc>
+            </a:pPr>
+            <a:r>
+              <a:rPr sz="1350" b="1" i="0">
+                <a:solidFill>
+                  <a:srgbClr val="16213A"/>
+                </a:solidFill>
+                <a:latin typeface="Arial"/>
+                <a:ea typeface="Malgun Gothic"/>
+                <a:cs typeface="Malgun Gothic"/>
+              </a:rPr>
+              <a:t>조향 한계로의 투영 QP</a:t>
+            </a:r>
+          </a:p>
+        </p:txBody>
+      </p:sp>
+      <p:sp>
+        <p:nvSpPr>
+          <p:cNvPr id="30" name="TextBox 29"/>
+          <p:cNvSpPr txBox="1"/>
+          <p:nvPr/>
+        </p:nvSpPr>
+        <p:spPr>
+          <a:xfrm>
+            <a:off x="927100" y="3643709"/>
+            <a:ext cx="5094288" cy="603200"/>
+          </a:xfrm>
+          <a:prstGeom prst="rect">
+            <a:avLst/>
+          </a:prstGeom>
+          <a:noFill/>
+        </p:spPr>
+        <p:txBody>
+          <a:bodyPr wrap="square" lIns="0" rIns="0" tIns="0" bIns="0" anchor="t">
+            <a:normAutofit/>
+          </a:bodyPr>
+          <a:lstStyle/>
+          <a:p>
+            <a:pPr>
+              <a:lnSpc>
+                <a:spcPct val="133400"/>
+              </a:lnSpc>
+            </a:pPr>
+            <a:r>
+              <a:rPr sz="1150" b="0" i="0">
+                <a:solidFill>
+                  <a:srgbClr val="16213A"/>
+                </a:solidFill>
+                <a:latin typeface="Arial"/>
+                <a:ea typeface="Malgun Gothic"/>
+                <a:cs typeface="Malgun Gothic"/>
+              </a:rPr>
+              <a:t>MPPI가 고른 twist를 모듈 수준의 실행 가능 집합으로 옮긴다. 볼록이 아니라 현재 조향각 둘레에서 선형화한다. 조향 한계(TP-0163)가 정해진 뒤에 한다.</a:t>
+            </a:r>
+          </a:p>
+        </p:txBody>
+      </p:sp>
+      <p:sp>
+        <p:nvSpPr>
+          <p:cNvPr id="31" name="Rounded Rectangle 30"/>
+          <p:cNvSpPr/>
+          <p:nvPr/>
+        </p:nvSpPr>
+        <p:spPr>
+          <a:xfrm>
+            <a:off x="6172200" y="2872879"/>
+            <a:ext cx="5308600" cy="1358801"/>
+          </a:xfrm>
+          <a:prstGeom prst="roundRect">
+            <a:avLst>
+              <a:gd name="adj" fmla="val 5607"/>
+            </a:avLst>
+          </a:prstGeom>
+          <a:solidFill>
+            <a:srgbClr val="FFFDF8"/>
+          </a:solidFill>
+          <a:ln>
+            <a:noFill/>
+          </a:ln>
+        </p:spPr>
+        <p:txBody>
+          <a:bodyPr rtlCol="0" anchor="ctr"/>
+          <a:lstStyle/>
+          <a:p>
+            <a:pPr algn="ctr"/>
+          </a:p>
+        </p:txBody>
+      </p:sp>
+      <p:sp>
+        <p:nvSpPr>
+          <p:cNvPr id="32" name="Rectangle 31"/>
+          <p:cNvSpPr/>
+          <p:nvPr/>
+        </p:nvSpPr>
+        <p:spPr>
+          <a:xfrm>
+            <a:off x="6172200" y="2872879"/>
+            <a:ext cx="5308600" cy="6350"/>
+          </a:xfrm>
+          <a:prstGeom prst="rect">
+            <a:avLst/>
+          </a:prstGeom>
+          <a:solidFill>
+            <a:srgbClr val="D9D4C7"/>
+          </a:solidFill>
+          <a:ln>
+            <a:noFill/>
+          </a:ln>
+        </p:spPr>
+        <p:txBody>
+          <a:bodyPr rtlCol="0" anchor="ctr"/>
+          <a:lstStyle/>
+          <a:p>
+            <a:pPr algn="ctr"/>
+          </a:p>
+        </p:txBody>
+      </p:sp>
+      <p:sp>
+        <p:nvSpPr>
+          <p:cNvPr id="33" name="Rectangle 32"/>
+          <p:cNvSpPr/>
+          <p:nvPr/>
+        </p:nvSpPr>
+        <p:spPr>
+          <a:xfrm>
+            <a:off x="11474450" y="2872879"/>
+            <a:ext cx="6350" cy="1358801"/>
+          </a:xfrm>
+          <a:prstGeom prst="rect">
+            <a:avLst/>
+          </a:prstGeom>
+          <a:solidFill>
+            <a:srgbClr val="D9D4C7"/>
+          </a:solidFill>
+          <a:ln>
+            <a:noFill/>
+          </a:ln>
+        </p:spPr>
+        <p:txBody>
+          <a:bodyPr rtlCol="0" anchor="ctr"/>
+          <a:lstStyle/>
+          <a:p>
+            <a:pPr algn="ctr"/>
+          </a:p>
+        </p:txBody>
+      </p:sp>
+      <p:sp>
+        <p:nvSpPr>
+          <p:cNvPr id="34" name="Rectangle 33"/>
+          <p:cNvSpPr/>
+          <p:nvPr/>
+        </p:nvSpPr>
+        <p:spPr>
+          <a:xfrm>
+            <a:off x="6172200" y="4225330"/>
+            <a:ext cx="5308600" cy="6350"/>
+          </a:xfrm>
+          <a:prstGeom prst="rect">
+            <a:avLst/>
+          </a:prstGeom>
+          <a:solidFill>
+            <a:srgbClr val="D9D4C7"/>
+          </a:solidFill>
+          <a:ln>
+            <a:noFill/>
+          </a:ln>
+        </p:spPr>
+        <p:txBody>
+          <a:bodyPr rtlCol="0" anchor="ctr"/>
+          <a:lstStyle/>
+          <a:p>
+            <a:pPr algn="ctr"/>
+          </a:p>
+        </p:txBody>
+      </p:sp>
+      <p:sp>
+        <p:nvSpPr>
+          <p:cNvPr id="35" name="Rounded Rectangle 34"/>
+          <p:cNvSpPr/>
+          <p:nvPr/>
+        </p:nvSpPr>
+        <p:spPr>
+          <a:xfrm>
+            <a:off x="6172200" y="2872879"/>
+            <a:ext cx="50800" cy="1358801"/>
+          </a:xfrm>
+          <a:prstGeom prst="roundRect">
+            <a:avLst>
+              <a:gd name="adj" fmla="val 50000"/>
+            </a:avLst>
+          </a:prstGeom>
+          <a:solidFill>
+            <a:srgbClr val="9AA6BC"/>
+          </a:solidFill>
+          <a:ln>
+            <a:noFill/>
+          </a:ln>
+        </p:spPr>
+        <p:txBody>
+          <a:bodyPr rtlCol="0" anchor="ctr"/>
+          <a:lstStyle/>
+          <a:p>
+            <a:pPr algn="ctr"/>
+          </a:p>
+        </p:txBody>
+      </p:sp>
+      <p:sp>
+        <p:nvSpPr>
+          <p:cNvPr id="36" name="Rounded Rectangle 35"/>
+          <p:cNvSpPr/>
+          <p:nvPr/>
+        </p:nvSpPr>
+        <p:spPr>
+          <a:xfrm>
+            <a:off x="6388100" y="3018929"/>
+            <a:ext cx="584994" cy="241300"/>
+          </a:xfrm>
+          <a:prstGeom prst="roundRect">
+            <a:avLst>
+              <a:gd name="adj" fmla="val 50000"/>
+            </a:avLst>
+          </a:prstGeom>
+          <a:solidFill>
+            <a:srgbClr val="ECE8DF"/>
+          </a:solidFill>
+          <a:ln>
+            <a:noFill/>
+          </a:ln>
+        </p:spPr>
+        <p:txBody>
+          <a:bodyPr rtlCol="0" anchor="ctr"/>
+          <a:lstStyle/>
+          <a:p>
+            <a:pPr algn="ctr"/>
+          </a:p>
+        </p:txBody>
+      </p:sp>
+      <p:sp>
+        <p:nvSpPr>
+          <p:cNvPr id="37" name="TextBox 36"/>
+          <p:cNvSpPr txBox="1"/>
+          <p:nvPr/>
+        </p:nvSpPr>
+        <p:spPr>
+          <a:xfrm>
+            <a:off x="6477000" y="3044329"/>
+            <a:ext cx="444810" cy="288925"/>
+          </a:xfrm>
+          <a:prstGeom prst="rect">
+            <a:avLst/>
+          </a:prstGeom>
+          <a:noFill/>
+        </p:spPr>
+        <p:txBody>
+          <a:bodyPr wrap="square" lIns="0" rIns="0" tIns="0" bIns="0" anchor="t">
+            <a:normAutofit/>
+          </a:bodyPr>
+          <a:lstStyle/>
+          <a:p>
+            <a:pPr>
+              <a:lnSpc>
+                <a:spcPct val="119600"/>
+              </a:lnSpc>
+            </a:pPr>
+            <a:r>
+              <a:rPr sz="950" b="1" i="0">
+                <a:solidFill>
+                  <a:srgbClr val="16213A"/>
+                </a:solidFill>
+                <a:latin typeface="Arial"/>
+                <a:ea typeface="Malgun Gothic"/>
+                <a:cs typeface="Malgun Gothic"/>
+              </a:rPr>
+              <a:t>4 · 평가</a:t>
+            </a:r>
+          </a:p>
+        </p:txBody>
+      </p:sp>
+      <p:sp>
+        <p:nvSpPr>
+          <p:cNvPr id="38" name="TextBox 37"/>
+          <p:cNvSpPr txBox="1"/>
+          <p:nvPr/>
+        </p:nvSpPr>
+        <p:spPr>
+          <a:xfrm>
+            <a:off x="6388100" y="3336429"/>
+            <a:ext cx="5094288" cy="339651"/>
+          </a:xfrm>
+          <a:prstGeom prst="rect">
+            <a:avLst/>
+          </a:prstGeom>
+          <a:noFill/>
+        </p:spPr>
+        <p:txBody>
+          <a:bodyPr wrap="square" lIns="0" rIns="0" tIns="0" bIns="0" anchor="t">
+            <a:normAutofit/>
+          </a:bodyPr>
+          <a:lstStyle/>
+          <a:p>
+            <a:pPr>
+              <a:lnSpc>
+                <a:spcPct val="119600"/>
+              </a:lnSpc>
+            </a:pPr>
+            <a:r>
+              <a:rPr sz="1350" b="1" i="0">
+                <a:solidFill>
+                  <a:srgbClr val="16213A"/>
+                </a:solidFill>
+                <a:latin typeface="Arial"/>
+                <a:ea typeface="Malgun Gothic"/>
+                <a:cs typeface="Malgun Gothic"/>
+              </a:rPr>
+              <a:t>구간별 "첫 실수 전 비율" 곡선</a:t>
+            </a:r>
+          </a:p>
+        </p:txBody>
+      </p:sp>
+      <p:sp>
+        <p:nvSpPr>
+          <p:cNvPr id="39" name="TextBox 38"/>
+          <p:cNvSpPr txBox="1"/>
+          <p:nvPr/>
+        </p:nvSpPr>
+        <p:spPr>
+          <a:xfrm>
+            <a:off x="6388100" y="3643709"/>
+            <a:ext cx="5094288" cy="603200"/>
+          </a:xfrm>
+          <a:prstGeom prst="rect">
+            <a:avLst/>
+          </a:prstGeom>
+          <a:noFill/>
+        </p:spPr>
+        <p:txBody>
+          <a:bodyPr wrap="square" lIns="0" rIns="0" tIns="0" bIns="0" anchor="t">
+            <a:normAutofit/>
+          </a:bodyPr>
+          <a:lstStyle/>
+          <a:p>
+            <a:pPr>
+              <a:lnSpc>
+                <a:spcPct val="133400"/>
+              </a:lnSpc>
+            </a:pPr>
+            <a:r>
+              <a:rPr sz="1150" b="0" i="0">
+                <a:solidFill>
+                  <a:srgbClr val="16213A"/>
+                </a:solidFill>
+                <a:latin typeface="Arial"/>
+                <a:ea typeface="Malgun Gothic"/>
+                <a:cs typeface="Malgun Gothic"/>
+              </a:rPr>
+              <a:t>Flexion의 곡선처럼 연석·경사로·보행자 구간마다 살아남은 비율을 그린다. 새 학습 없이 기존 기록으로 그린다.</a:t>
+            </a:r>
+          </a:p>
+        </p:txBody>
+      </p:sp>
+      <p:sp>
+        <p:nvSpPr>
+          <p:cNvPr id="40" name="Rounded Rectangle 39"/>
+          <p:cNvSpPr/>
+          <p:nvPr/>
+        </p:nvSpPr>
+        <p:spPr>
+          <a:xfrm>
+            <a:off x="711200" y="4409480"/>
+            <a:ext cx="10769600" cy="502543"/>
+          </a:xfrm>
+          <a:prstGeom prst="roundRect">
+            <a:avLst>
+              <a:gd name="adj" fmla="val 15162"/>
+            </a:avLst>
+          </a:prstGeom>
+          <a:solidFill>
+            <a:srgbClr val="16213A"/>
+          </a:solidFill>
+          <a:ln>
+            <a:noFill/>
+          </a:ln>
+        </p:spPr>
+        <p:txBody>
+          <a:bodyPr rtlCol="0" anchor="ctr"/>
+          <a:lstStyle/>
+          <a:p>
+            <a:pPr algn="ctr"/>
+          </a:p>
+        </p:txBody>
+      </p:sp>
+      <p:sp>
+        <p:nvSpPr>
+          <p:cNvPr id="41" name="TextBox 40"/>
+          <p:cNvSpPr txBox="1"/>
+          <p:nvPr/>
+        </p:nvSpPr>
+        <p:spPr>
+          <a:xfrm>
+            <a:off x="889000" y="4536480"/>
+            <a:ext cx="10751820" cy="361479"/>
+          </a:xfrm>
+          <a:prstGeom prst="rect">
+            <a:avLst/>
+          </a:prstGeom>
+          <a:noFill/>
+        </p:spPr>
+        <p:txBody>
+          <a:bodyPr wrap="square" lIns="0" rIns="0" tIns="0" bIns="0" anchor="t">
+            <a:normAutofit/>
+          </a:bodyPr>
+          <a:lstStyle/>
+          <a:p>
+            <a:pPr>
+              <a:lnSpc>
+                <a:spcPct val="133400"/>
+              </a:lnSpc>
+            </a:pPr>
+            <a:r>
+              <a:rPr sz="1300" b="1" i="0">
+                <a:solidFill>
+                  <a:srgbClr val="F59E5B"/>
+                </a:solidFill>
+                <a:latin typeface="Arial"/>
+                <a:ea typeface="Malgun Gothic"/>
+                <a:cs typeface="Malgun Gothic"/>
+              </a:rPr>
+              <a:t>판정:</a:t>
+            </a:r>
+            <a:r>
+              <a:rPr sz="1300" b="0" i="0">
+                <a:solidFill>
+                  <a:srgbClr val="F4F1EA"/>
+                </a:solidFill>
+                <a:latin typeface="Arial"/>
+                <a:ea typeface="Malgun Gothic"/>
+                <a:cs typeface="Malgun Gothic"/>
+              </a:rPr>
+              <a:t> 각 팔 seed 0–9 × rng-offset 3판을 paired_success.py로 짝 비교하고, 치명이 하나라도 늘면 채택하지 않는다.</a:t>
+            </a:r>
+          </a:p>
+        </p:txBody>
+      </p:sp>
+    </p:spTree>
+  </p:cSld>
+  <p:clrMapOvr>
+    <a:masterClrMapping/>
+  </p:clrMapOvr>
+</p:sld>
+</file>
+
+<file path=ppt/slides/slide37.xml><?xml version="1.0" encoding="utf-8"?>
+<p:sld xmlns:a="http://schemas.openxmlformats.org/drawingml/2006/main" xmlns:p="http://schemas.openxmlformats.org/presentationml/2006/main" xmlns:r="http://schemas.openxmlformats.org/officeDocument/2006/relationships">
+  <p:cSld>
+    <p:bg>
+      <p:bgPr>
+        <a:solidFill>
+          <a:srgbClr val="F7F5F0"/>
+        </a:solidFill>
+        <a:effectLst/>
+      </p:bgPr>
+    </p:bg>
+    <p:spTree>
+      <p:nvGrpSpPr>
+        <p:cNvPr id="1" name=""/>
+        <p:cNvGrpSpPr/>
+        <p:nvPr/>
+      </p:nvGrpSpPr>
+      <p:grpSpPr/>
+      <p:sp>
+        <p:nvSpPr>
+          <p:cNvPr id="2" name="TextBox 1"/>
+          <p:cNvSpPr txBox="1"/>
+          <p:nvPr/>
+        </p:nvSpPr>
+        <p:spPr>
+          <a:xfrm>
+            <a:off x="711200" y="508000"/>
+            <a:ext cx="11118088" cy="312738"/>
+          </a:xfrm>
+          <a:prstGeom prst="rect">
+            <a:avLst/>
+          </a:prstGeom>
+          <a:noFill/>
+        </p:spPr>
+        <p:txBody>
+          <a:bodyPr wrap="square" lIns="0" rIns="0" tIns="0" bIns="0" anchor="t">
+            <a:normAutofit/>
+          </a:bodyPr>
+          <a:lstStyle/>
+          <a:p>
+            <a:pPr>
+              <a:lnSpc>
+                <a:spcPct val="138000"/>
+              </a:lnSpc>
+            </a:pPr>
+            <a:r>
+              <a:rPr sz="1050" b="0" i="0">
+                <a:solidFill>
+                  <a:srgbClr val="C2410C"/>
+                </a:solidFill>
+                <a:latin typeface="Consolas"/>
+                <a:ea typeface="Malgun Gothic"/>
+                <a:cs typeface="Malgun Gothic"/>
+              </a:rPr>
               <a:t>정리</a:t>
             </a:r>
           </a:p>
@@ -32643,7 +33624,7 @@
 </p:sld>
 </file>
 
-<file path=ppt/slides/slide37.xml><?xml version="1.0" encoding="utf-8"?>
+<file path=ppt/slides/slide38.xml><?xml version="1.0" encoding="utf-8"?>
 <p:sld xmlns:a="http://schemas.openxmlformats.org/drawingml/2006/main" xmlns:p="http://schemas.openxmlformats.org/presentationml/2006/main" xmlns:r="http://schemas.openxmlformats.org/officeDocument/2006/relationships">
   <p:cSld>
     <p:bg>
@@ -34768,7 +35749,7 @@
         </p:nvSpPr>
         <p:spPr>
           <a:xfrm>
-            <a:off x="812800" y="2319338"/>
+            <a:off x="812800" y="2162870"/>
             <a:ext cx="10908792" cy="312738"/>
           </a:xfrm>
           <a:prstGeom prst="rect">
@@ -34809,7 +35790,7 @@
         </p:nvSpPr>
         <p:spPr>
           <a:xfrm>
-            <a:off x="812800" y="2757488"/>
+            <a:off x="812800" y="2601020"/>
             <a:ext cx="10908792" cy="1600101"/>
           </a:xfrm>
           <a:prstGeom prst="rect">
@@ -34868,8 +35849,8 @@
         </p:nvSpPr>
         <p:spPr>
           <a:xfrm>
-            <a:off x="812800" y="4225528"/>
-            <a:ext cx="10908792" cy="442094"/>
+            <a:off x="812800" y="4069060"/>
+            <a:ext cx="10908792" cy="833388"/>
           </a:xfrm>
           <a:prstGeom prst="rect">
             <a:avLst/>
@@ -34896,7 +35877,7 @@
                 <a:ea typeface="Malgun Gothic"/>
                 <a:cs typeface="Malgun Gothic"/>
               </a:rPr>
-              <a:t>CMU 스택은 속도를, LP-NavOA는 방향을, FocusNav는 waypoint를 넘기고, GLAD는 경계를 없앴다.</a:t>
+              <a:t>CMU 스택은 속도를, LP-NavOA는 방향을, FocusNav는 waypoint를 넘기고, GLAD는 경계를 없앴다. NEXUS는 사람의 전신 동작을 넘긴다.</a:t>
             </a:r>
           </a:p>
         </p:txBody>
@@ -35019,7 +36000,7 @@
         </p:nvGraphicFramePr>
         <p:xfrm>
           <a:off x="711200" y="1361678"/>
-          <a:ext cx="10769600" cy="1800741"/>
+          <a:ext cx="10769599" cy="2099965"/>
         </p:xfrm>
         <a:graphic>
           <a:graphicData uri="http://schemas.openxmlformats.org/drawingml/2006/table">
@@ -35028,10 +36009,10 @@
                 <a:tableStyleId>{5C22544A-7EE6-4342-B048-85BDC9FD1C3A}</a:tableStyleId>
               </a:tblPr>
               <a:tblGrid>
-                <a:gridCol w="890488"/>
-                <a:gridCol w="2079030"/>
-                <a:gridCol w="3832920"/>
-                <a:gridCol w="3967162"/>
+                <a:gridCol w="801092"/>
+                <a:gridCol w="2117328"/>
+                <a:gridCol w="4282281"/>
+                <a:gridCol w="3568898"/>
               </a:tblGrid>
               <a:tr h="307320">
                 <a:tc>
@@ -35523,7 +36504,7 @@
                   </a:tcPr>
                 </a:tc>
               </a:tr>
-              <a:tr h="296525">
+              <a:tr h="299224">
                 <a:tc>
                   <a:txBody>
                     <a:bodyPr wrap="square"/>
@@ -35621,6 +36602,104 @@
                   </a:tcPr>
                 </a:tc>
               </a:tr>
+              <a:tr h="296525">
+                <a:tc>
+                  <a:txBody>
+                    <a:bodyPr wrap="square"/>
+                    <a:lstStyle/>
+                    <a:p>
+                      <a:r>
+                        <a:rPr sz="1300" b="0" i="0">
+                          <a:solidFill>
+                            <a:srgbClr val="16213A"/>
+                          </a:solidFill>
+                          <a:latin typeface="Arial"/>
+                          <a:ea typeface="Malgun Gothic"/>
+                          <a:cs typeface="Malgun Gothic"/>
+                        </a:rPr>
+                        <a:t>다른 축</a:t>
+                      </a:r>
+                    </a:p>
+                  </a:txBody>
+                  <a:tcPr marL="76200" marR="76200" marT="25400" marB="25400">
+                    <a:solidFill>
+                      <a:srgbClr val="FFFDF8"/>
+                    </a:solidFill>
+                  </a:tcPr>
+                </a:tc>
+                <a:tc>
+                  <a:txBody>
+                    <a:bodyPr wrap="square"/>
+                    <a:lstStyle/>
+                    <a:p>
+                      <a:r>
+                        <a:rPr sz="1300" b="0" i="0">
+                          <a:solidFill>
+                            <a:srgbClr val="16213A"/>
+                          </a:solidFill>
+                          <a:latin typeface="Arial"/>
+                          <a:ea typeface="Malgun Gothic"/>
+                          <a:cs typeface="Malgun Gothic"/>
+                        </a:rPr>
+                        <a:t>NEXUS(원격조종, 4장)</a:t>
+                      </a:r>
+                    </a:p>
+                  </a:txBody>
+                  <a:tcPr marL="76200" marR="76200" marT="25400" marB="25400">
+                    <a:solidFill>
+                      <a:srgbClr val="FFFDF8"/>
+                    </a:solidFill>
+                  </a:tcPr>
+                </a:tc>
+                <a:tc>
+                  <a:txBody>
+                    <a:bodyPr wrap="square"/>
+                    <a:lstStyle/>
+                    <a:p>
+                      <a:r>
+                        <a:rPr sz="1300" b="0" i="0">
+                          <a:solidFill>
+                            <a:srgbClr val="16213A"/>
+                          </a:solidFill>
+                          <a:latin typeface="Arial"/>
+                          <a:ea typeface="Malgun Gothic"/>
+                          <a:cs typeface="Malgun Gothic"/>
+                        </a:rPr>
+                        <a:t>사람의 평지 전신 동작 13프레임. 지형 정보는 없다</a:t>
+                      </a:r>
+                    </a:p>
+                  </a:txBody>
+                  <a:tcPr marL="76200" marR="76200" marT="25400" marB="25400">
+                    <a:solidFill>
+                      <a:srgbClr val="FFFDF8"/>
+                    </a:solidFill>
+                  </a:tcPr>
+                </a:tc>
+                <a:tc>
+                  <a:txBody>
+                    <a:bodyPr wrap="square"/>
+                    <a:lstStyle/>
+                    <a:p>
+                      <a:r>
+                        <a:rPr sz="1300" b="0" i="0">
+                          <a:solidFill>
+                            <a:srgbClr val="16213A"/>
+                          </a:solidFill>
+                          <a:latin typeface="Arial"/>
+                          <a:ea typeface="Malgun Gothic"/>
+                          <a:cs typeface="Malgun Gothic"/>
+                        </a:rPr>
+                        <a:t>깊이 영상을 보는 전신 추종 정책</a:t>
+                      </a:r>
+                    </a:p>
+                  </a:txBody>
+                  <a:tcPr marL="76200" marR="76200" marT="25400" marB="25400">
+                    <a:solidFill>
+                      <a:srgbClr val="FFFDF8"/>
+                    </a:solidFill>
+                  </a:tcPr>
+                </a:tc>
+              </a:tr>
             </a:tbl>
           </a:graphicData>
         </a:graphic>
@@ -35633,7 +36712,7 @@
         </p:nvSpPr>
         <p:spPr>
           <a:xfrm>
-            <a:off x="711200" y="3657997"/>
+            <a:off x="711200" y="4010025"/>
             <a:ext cx="10769600" cy="751086"/>
           </a:xfrm>
           <a:prstGeom prst="roundRect">
@@ -35664,7 +36743,7 @@
         </p:nvSpPr>
         <p:spPr>
           <a:xfrm>
-            <a:off x="889000" y="3784997"/>
+            <a:off x="889000" y="4137025"/>
             <a:ext cx="10751820" cy="672157"/>
           </a:xfrm>
           <a:prstGeom prst="rect">

--- a/slides/talk-legged/talk-legged.pptx
+++ b/slides/talk-legged/talk-legged.pptx
@@ -539,7 +539,7 @@
           <a:lstStyle/>
           <a:p>
             <a:r>
-              <a:t>이 발표는 Planner 문서의 B.16(사족·휴머노이드 연구실별 계보), B.16.8(휴머노이드 주행), B.18(분야별 지형)과 인식 문서 A.7·A.8, 모방 문서 §I를 한 시간 안쪽으로 줄인 것이다. travplan은 바퀴 달린 보도 배달로봇이지만 다리 로봇 연구를 보는 이유가 있다. 내비 층과 보행 층 사이에 무엇을 넘기느냐는 질문이 travplan의 Planner와 Controller 사이의 질문과 같기 때문이다. 마지막에 travplan이 가져올 것과 시험 순서를 정리한다.</a:t>
+              <a:t>이 발표는 Planner 문서의 B.16(사족·휴머노이드 연구실별 계보), B.16.8(휴머노이드 주행), B.18(분야별 지형)과 인식 문서 A.7·A.8, 모방 문서 §I를 한 시간 안쪽으로 줄인 것이다. travplan은 바퀴 달린 보도 배달로봇이지만 다리 로봇 연구를 살펴보는 이유가 있다. 내비 층과 보행 층 사이에 무엇을 넘기느냐는 질문이 travplan의 Planner와 Controller 사이의 질문과 같기 때문이다. 마지막에 travplan이 가져올 것과 시험 순서를 정리한다.</a:t>
             </a:r>
           </a:p>
         </p:txBody>
@@ -609,7 +609,7 @@
           <a:lstStyle/>
           <a:p>
             <a:r>
-              <a:t>두 연구는 경계를 CMU 스택보다 아래로 내렸다. LP-NavOA는 먼저 보행 정책을 원형 명령으로 학습하고 얼린 뒤, A*와 waypoint 교사의 rollout으로 GRU Planner를 행동 복제한다. Planner는 진행 방향만 덮어쓴다. FocusNav는 정책 안의 transformer가 목표에서 로봇 쪽으로 거꾸로 waypoint를 예측하고, 그 토큰으로 BEV 조각에 cross-attention을 건다. 같은 연구진의 GLAD는 명시적 Planner 없이 전진 명령만으로 좁은 길을 따라갔다고 보고한다.</a:t>
+              <a:t>두 연구는 경계를 CMU 스택보다 아래로 내렸다. LP-NavOA는 먼저 보행 정책을 원형 명령으로 학습해 고정한 뒤, A*와 waypoint 교사의 rollout으로 GRU Planner를 behavior cloning한다. Planner는 진행 방향만 덮어쓴다. FocusNav는 정책 안의 transformer가 목표에서 로봇 쪽으로 거꾸로 waypoint를 예측하고, 그 토큰으로 BEV 패치에 cross-attention을 건다. 같은 연구진의 GLAD는 명시적 Planner 없이 전진 명령만으로 좁은 길을 따라갔다고 보고한다.</a:t>
             </a:r>
           </a:p>
         </p:txBody>
@@ -749,7 +749,7 @@
           <a:lstStyle/>
           <a:p>
             <a:r>
-              <a:t>세 번째 장은 보행 정책이 지형을 어떻게 보는지다. 전체 높이 지도, 성긴 LiDAR 지도, 깊이 영상, 발 디딤 둘레의 작은 조각이 모두 쓰인다. 결론은 보는 위치가 보는 양보다 중요하다는 것이다.</a:t>
+              <a:t>세 번째 장은 보행 정책이 지형을 어떻게 보는지다. 전체 높이 지도, 성긴 LiDAR 지도, 깊이 영상, foothold 둘레의 작은 패치가 모두 쓰인다. 결론은 보는 위치가 보는 양보다 중요하다는 것이다.</a:t>
             </a:r>
           </a:p>
         </p:txBody>
@@ -819,7 +819,7 @@
           <a:lstStyle/>
           <a:p>
             <a:r>
-              <a:t>Watch Your Step은 Unitree G1의 인식 보행 정책이 볼 지형을 줄였다. 발 디딤 예측기 FPM은 몸의 속도, 각속도, 중력 방향, 속도 명령, 관절 상태만 보고 다음 두 발이 어디 닿을지 예측한다. 정책은 그 두 곳 둘레의 작은 조각만 본다. 예측기는 정책의 걸음이 바뀌면 틀려지므로, 정책의 최신 rollout으로 처음부터 다시 맞춘다. 미세 조정하지 않는 이유는 학습 초기의 불안한 걸음새를 물려받지 않게 하려는 것이다.</a:t>
+              <a:t>Watch Your Step은 Unitree G1의 인식 보행 정책이 볼 지형을 줄였다. foothold 예측기 FPM은 몸의 속도, 각속도, 중력 방향, 속도 명령, 관절 상태만 보고 다음 두 발이 어디 닿을지 예측한다. 정책은 그 두 곳 둘레의 작은 패치만 본다. 예측기는 정책의 gait가 바뀌면 틀리므로, 정책의 최신 rollout으로 처음부터 다시 학습한다. fine-tuning하지 않는 이유는 학습 초기의 불안정한 gait를 물려받지 않기 위해서다.</a:t>
             </a:r>
           </a:p>
         </p:txBody>
@@ -889,7 +889,7 @@
           <a:lstStyle/>
           <a:p>
             <a:r>
-              <a:t>학습 속도는 전체 지도 MLP보다 3.5배, 주의 인코더 기준선보다 2.7배 빨랐다. 성능을 가른 것은 보는 높이의 수가 아니라 위치였다. travplan의 TinyPolicy는 로봇 앞의 고정 격자에서 belief cost를 읽으므로 논문의 Naive와 같다. 바퀴 로봇에서 발 디딤에 해당하는 것은 곧 지날 바닥이다. TinyPolicy는 경로 앞 네 점을 이미 받으므로, 그 둘레의 작은 조각을 읽는 판을 바로 만들 수 있다. 다만 이 방식은 밟지 않을 지형을 버려서 옆에서 오는 장애물을 늦게 본다. travplan의 보행자는 옆에서 오므로 동적 장애물은 넓은 시야로 따로 받아야 한다.</a:t>
+              <a:t>학습 속도는 전체 지도 MLP보다 3.5배, attention 인코더 기준선보다 2.7배 빨랐다. 성능을 가른 것은 보는 높이의 수가 아니라 위치였다. travplan의 TinyPolicy는 로봇 앞의 고정 격자에서 belief cost를 읽으므로 논문의 Naive와 같다. 바퀴 로봇에서 foothold에 해당하는 것은 곧 지날 바닥이다. TinyPolicy는 경로 앞 네 점을 이미 받으므로, 그 둘레의 작은 패치를 읽는 변형을 바로 만들 수 있다. 다만 이 방식은 밟지 않을 지형을 버려서 옆에서 오는 장애물을 늦게 본다. travplan의 보행자는 옆에서 오므로 동적 장애물은 넓은 시야로 따로 받아야 한다.</a:t>
             </a:r>
           </a:p>
         </p:txBody>
@@ -959,7 +959,7 @@
           <a:lstStyle/>
           <a:p>
             <a:r>
-              <a:t>A.8 앞부분의 연구가 아래를 보는 깊이 카메라로 발밑을 복원했다면, 2025–2026에는 머리의 LiDAR 한 대로 걷는 연구가 늘었다. 공통 과제는 성긴 점에서 믿을 만한 발밑 지도를 만드는 것이다. 전방향 계단 보행은 빈 곳을 학습으로 채우고, world model 연구는 잡음을 학습으로 거르고, PolygMap은 학습 없이 다각형으로 만든다. travplan의 L1도 미관측 칸이 문제였고, 지금은 그림자 상한과 깊이 prior라는 비학습 규칙으로 채운다.</a:t>
+              <a:t>A.8 앞부분의 연구가 아래를 보는 깊이 카메라로 발밑을 복원했다면, 2025–2026에는 머리의 LiDAR 한 대로 걷는 연구가 늘었다. 공통 과제는 성긴 점에서 믿을 만한 발밑 지도를 만드는 것이다. 전방향 계단 보행은 빈 곳을 학습으로 채우고, world model 연구는 잡음을 학습으로 거르고, PolygMap은 학습 없이 다각형으로 만든다. travplan의 L1도 미관측 셀이 문제였고, 지금은 그림자 상한과 깊이 prior라는 비학습 규칙으로 채운다.</a:t>
             </a:r>
           </a:p>
         </p:txBody>
@@ -1029,7 +1029,7 @@
           <a:lstStyle/>
           <a:p>
             <a:r>
-              <a:t>PHP는 사람 파쿠르를 휴머노이드로 옮겼다. 핵심은 데이터다. 게임 애니메이션의 motion matching으로 기술 사이를 보행으로 이어 긴 학습 궤적을 만든다. 배포 정책은 고유감각, 깊이 영상, 이산 2D 속도 명령만 본다. 학습 데이터에는 장애물이 하나인 궤적만 있었는데도 실물은 여러 장애물을 이어 넘었다. travplan에서는 DAgger(TP-0143)만으로는 단독 성적이 오르지 않았고 RL 후학습(TP-0066)은 20/30을 26/30으로 올렸다. 그 해석이 curb_ramp에 맞는지는 확인하지 않았다.</a:t>
+              <a:t>PHP는 사람 파쿠르를 휴머노이드로 옮겼다. 핵심은 데이터다. 게임 애니메이션의 motion matching으로 기술 사이를 보행으로 이어 긴 학습 궤적을 만든다. 배포 정책은 proprioception, 깊이 영상, 이산 2D 속도 명령만 본다. 학습 데이터에는 장애물이 하나인 궤적만 있었는데도 실물은 여러 장애물을 이어 넘었다. travplan에서는 DAgger(TP-0143)만으로는 단독 성적이 오르지 않았고 RL 후학습(TP-0066)은 20/30을 26/30으로 올렸다. 그 해석이 curb_ramp에 맞는지는 확인하지 않았다.</a:t>
             </a:r>
           </a:p>
         </p:txBody>
@@ -1099,7 +1099,7 @@
           <a:lstStyle/>
           <a:p>
             <a:r>
-              <a:t>LocoFormer는 몸 정보를 입력으로 받지 않는다. 관절 수, 길이, 질량을 모르고, 몇 초의 경험으로 몸을 알아낸다. 한 에피소드 안에서 여러 번 시도하게 하고 기억을 시도 사이에 넘기므로, 넘어진 시도를 기억해 다음 시도에 고친다. travplan에는 실물이 아직 없어서 스워브 모듈 파라미터를 모른다. 지금은 plant를 측정으로 맞출 계획(B.16.7의 10번)이지만, 이력으로 추정하는 길도 있다는 것을 보여 준다.</a:t>
+              <a:t>LocoFormer는 몸체 정보를 입력으로 받지 않는다. 관절 수, 길이, 질량을 모르는 채 몇 초의 경험으로 몸체를 알아낸다. 한 에피소드 안에서 여러 번 시도하게 하고 기억을 시도 사이에 이어 주므로, 넘어진 시도를 기억해 다음 시도에서 고친다. travplan에는 실물이 아직 없어서 스워브 모듈 파라미터를 모른다. 지금은 plant를 측정으로 맞출 계획(B.16.7의 10번)이지만, 이력으로 추정하는 길도 있다는 것을 보여 준다.</a:t>
             </a:r>
           </a:p>
         </p:txBody>
@@ -1169,7 +1169,7 @@
           <a:lstStyle/>
           <a:p>
             <a:r>
-              <a:t>LocoFormer 앞뒤의 연구를 두 답으로 나눴다. 처음 보는 몸을 아는 방법은 몸 정보를 입력으로 주거나, 이력에서 읽는 것이다. LocoFormer는 GenLoco의 이력 15스텝을 수십 초로 늘리고 DeepMind AdA의 Transformer-XL과 여러 시도 구조를 보행으로 옮겼다. 반대로 URMA와 Embodiment Scaling Laws는 몸 설명을 주고 전문가를 증류한다. 인용은 36편인데 코드가 없어 LocoFormer와 수치로 겨룬 논문은 없다. Rapid Embodiment Adaptation만 LocoFormer식 정책을 기준선으로 다시 만들었고, 짧은 이력에서 몸 파라미터를 명시적으로 추정하는 쪽이 이겼다. travplan은 스워브 파라미터를 모르므로 이력 쪽이고, 추정값을 사람이 읽을 수 있는 명시 식별이 Planner와 Controller의 분리에도 맞다.</a:t>
+              <a:t>LocoFormer 앞뒤의 연구를 두 답으로 나눴다. 처음 보는 몸체를 아는 방법은 몸체 정보를 입력으로 주거나, 이력에서 읽는 것이다. LocoFormer는 GenLoco의 이력 15스텝을 수십 초로 늘리고 DeepMind AdA의 Transformer-XL과 여러 시도 구조를 보행으로 옮겼다. 반대로 URMA와 Embodiment Scaling Laws는 몸체 설명을 주고 전문가를 distillation한다. 인용은 36편인데 코드가 없어 LocoFormer와 수치로 겨룬 논문은 없다. Rapid Embodiment Adaptation만 LocoFormer식 정책을 기준선으로 다시 만들었고, 짧은 이력에서 몸체 파라미터를 명시적으로 추정하는 쪽이 이겼다. travplan은 스워브 파라미터를 모르므로 이력 쪽이고, 추정값을 사람이 읽을 수 있는 명시적 식별이 Planner와 Controller의 분리에도 맞다.</a:t>
             </a:r>
           </a:p>
         </p:txBody>
@@ -1239,7 +1239,7 @@
           <a:lstStyle/>
           <a:p>
             <a:r>
-              <a:t>네 번째 장은 전신 제어다. 사람 동작을 데이터로 쓰는 휴머노이드는 그 동작을 지형에 맞추는 일이 핵심이다. PASSAGE는 지형을 보는 계획기를, NEXUS는 지형을 보는 추종기를 학습했다. 마지막으로 학습 정책의 출력을 실행 가능한 집합으로 옮기는 세 연구를 본다.</a:t>
+              <a:t>네 번째 장은 전신 제어다. 사람 동작을 데이터로 쓰는 휴머노이드는 그 동작을 지형에 맞추는 일이 핵심이다. PASSAGE는 지형을 보는 계획기를, NEXUS는 지형을 보는 추종기를 학습했다. 마지막으로 학습 정책의 출력을 실행 가능한 집합으로 투영하는 세 연구를 살펴본다.</a:t>
             </a:r>
           </a:p>
         </p:txBody>
@@ -1309,7 +1309,7 @@
           <a:lstStyle/>
           <a:p>
             <a:r>
-              <a:t>두 질문을 먼저 세운다. 첫째는 경계의 위치다. CMU 자율 스택은 차체 속도만 넘기고, 어떤 연구는 진행 방향 하나만, 어떤 연구는 경계를 아예 없앤다. travplan은 시간 인덱스 궤적을 넘기므로 위 층이 많은 것을 정한다. 둘째는 실행 가능성이다. 학습한 위 층이 낸 명령을 아래 층이 못 해내면 실패한다. travplan의 정면 보행자 충돌 4건이 그 예이고, 차체 twist로는 옆걸음인데 모듈 조향 한계 때문에 실행하지 못했다.</a:t>
+              <a:t>두 질문을 먼저 세운다. 첫째는 경계의 위치다. CMU 자율 스택은 차체 속도만 넘기고, 어떤 연구는 진행 방향 하나만, 어떤 연구는 경계를 아예 없앤다. travplan은 시간 인덱스 궤적을 넘기므로 위 층이 많은 것을 정한다. 둘째는 실행 가능성이다. 학습한 위 층이 낸 명령을 아래 층이 실행하지 못하면 실패한다. travplan의 정면 보행자 충돌 4건이 그렇다. 차체 twist로는 옆걸음인데 모듈 조향 한계 때문에 실행하지 못했다.</a:t>
             </a:r>
           </a:p>
         </p:txBody>
@@ -1379,7 +1379,7 @@
           <a:lstStyle/>
           <a:p>
             <a:r>
-              <a:t>PASSAGE는 보상을 손으로 짜는 대신 사람이 VR 안에서 장애물을 지나간 동작을 모았다. 계획기는 목표 위치, 최근 동작 4프레임, 몸통 중심의 3층 높이 지도만 보고, 넘기·숙이기·옆으로 비집기 같은 기술 이름표가 없다. travplan의 Planner D도 지형을 보는 flow matching 계획기이고, 고정한 하위 층 아래에서 RL로 후학습한다. 빼기 실험의 세 항목은 Planner D에도 있는 부품이라, 무엇을 지켜야 하는지 알려 준다.</a:t>
+              <a:t>PASSAGE는 보상을 손으로 설계하는 대신 사람이 VR 안에서 장애물을 지나간 동작을 모았다. 계획기는 목표 위치, 최근 동작 4프레임, 몸통 중심의 3층 높이 지도만 보고, 넘기·숙이기·옆으로 비집기 같은 기술 레이블이 없다. travplan의 Planner D도 지형을 보는 flow matching 계획기이고, 고정한 하위 층 아래에서 RL로 후학습한다. ablation의 세 항목은 Planner D에도 있는 부품이라, 무엇을 지켜야 하는지 알려 준다.</a:t>
             </a:r>
           </a:p>
         </p:txBody>
@@ -1449,7 +1449,7 @@
           <a:lstStyle/>
           <a:p>
             <a:r>
-              <a:t>NEXUS는 원격조종용 전신 추종기다. 운영자가 평지에서 움직이면 로봇은 계단과 경사 위에서 같은 동작을 한다. 데이터를 만드는 방법이 핵심이다. 평지에서 잡은 동작에서 손발이 닿는 순간을 찾아, 그 자리의 지형 높이에 맞게 골반과 팔다리를 고친다. 이렇게 만든 짝 데이터로 높이 지도를 보는 교사를 배우고, 깊이 영상만 보는 학생에게 옮긴다. 실물 G1은 Jetson Orin NX에서 50 Hz로 돌고 미세 조정 없이 15 cm 계단, 60 cm 대, 약 30° 풀밭 경사를 지났다.</a:t>
+              <a:t>NEXUS는 원격조종용 전신 추종기다. 운영자가 평지에서 움직이면 로봇은 계단과 경사 위에서 같은 동작을 한다. 데이터를 만드는 방법이 핵심이다. 평지에서 잡은 동작에서 손발이 닿는 순간을 찾아, 그 자리의 지형 높이에 맞게 골반과 팔다리를 고친다. 이렇게 만든 짝 데이터로 높이 지도를 보는 교사를 배우고, 깊이 영상만 보는 학생에게 옮긴다. 실물 G1은 Jetson Orin NX에서 50 Hz로 돌고 fine-tuning 없이 15 cm 계단, 60 cm 단, 약 30° 풀밭 경사를 지났다.</a:t>
             </a:r>
           </a:p>
         </p:txBody>
@@ -1519,7 +1519,7 @@
           <a:lstStyle/>
           <a:p>
             <a:r>
-              <a:t>그림 4의 가운데가 지형 적응이다. 평지에서는 90.0 %와 88.33 %로 SONIC과 비슷하지만, 어려운 지형에서는 51.9 %와 31.76 %로 벌어진다. 오른쪽 아래의 몸체 위치 오차는 NEXUS가 가장 크다. 저자는 이 값이 실패 전까지만 평균한 것이라 일찍 넘어진 추종기가 유리해진다고 설명한다. 절제에서 교사–학생은 성공률보다 추종 정확도를 올렸다. 뿌리 위치 오차가 19.60 cm 대 31.95 cm였다. travplan으로 가져올 것은 정답 지도를 보는 교사와 belief 지도를 보는 학생의 구성, 그리고 실패율이 높은 구간을 더 뽑는 표집이다. 코드는 CC BY-NC라 상업 로봇에는 쓸 수 없다.</a:t>
+              <a:t>그림 4의 가운데가 지형 적응이다. 평지에서는 90.0 %와 88.33 %로 SONIC과 비슷하지만, 어려운 지형에서는 51.9 %와 31.76 %로 벌어진다. 오른쪽 아래의 몸체 위치 오차는 NEXUS가 가장 크다. 저자는 이 값이 실패 전까지만 평균한 것이라 일찍 넘어진 추종기가 유리해진다고 설명한다. ablation에서 teacher–student는 성공률보다 추종 정확도를 올렸다. root 위치 오차가 19.60 cm 대 31.95 cm였다. travplan으로 가져올 것은 정답 지도를 보는 교사와 belief 지도를 보는 학생의 구성, 그리고 실패율이 높은 구간을 더 많이 뽑는 샘플링이다. 코드는 CC BY-NC라 상업 로봇에는 쓸 수 없다.</a:t>
             </a:r>
           </a:p>
         </p:txBody>
@@ -1589,7 +1589,7 @@
           <a:lstStyle/>
           <a:p>
             <a:r>
-              <a:t>프로젝트 페이지의 실물 배포다. 사람은 늘 평지에 서 있고, 로봇만 계단과 대 위에 있다. 학습 지형은 10 cm 계단과 약 16.7도 경사뿐이었는데, 실물에서는 그보다 높은 15 cm 계단과 30도 가까운 풀밭 경사를 미세 조정 없이 지났다. 넘어진 것은 60 cm 대에서 내려오거나 옆돌기를 하는 일부 시도이고, 시도 횟수는 밝히지 않았다. 주행 관점에서 중요한 점은 위 층이 사람이라는 것이다. 어디로 갈지는 사람이 정하고, 정책은 그 동작을 지형에 맞출 뿐이다. 저자는 이 추종기를 과제 수준 Planner에 잇는 것을 다음 과제로 꼽고, 지형에 맞춘 원격조종 기록을 자율 행동의 시연으로 쓸 수 있다고 적었다. travplan에서는 실물 시험에서 사람이 원격으로 몬 구간을 Planner D의 DAgger 시연에 더하는 판이 같은 자리다. 실물 시험 전이라 아직 기록은 없다.</a:t>
+              <a:t>프로젝트 페이지의 실물 배포다. 사람은 늘 평지에 서 있고, 로봇만 계단과 단 위에 있다. 학습 지형은 10 cm 계단과 약 16.7도 경사뿐이었는데, 실물에서는 그보다 높은 15 cm 계단과 30도 가까운 풀밭 경사를 fine-tuning 없이 지났다. 넘어진 것은 60 cm 단에서 내려오거나 옆돌기를 하는 일부 시도이고, 시도 횟수는 밝히지 않았다. 주행 관점에서 중요한 점은 위 층이 사람이라는 것이다. 어디로 갈지는 사람이 정하고, 정책은 그 동작을 지형에 맞출 뿐이다. 저자는 이 추종기를 과제 수준 Planner에 잇는 것을 다음 과제로 꼽고, 지형에 맞춘 원격조종 기록을 자율 행동의 시연으로 쓸 수 있다고 적었다. travplan에서는 실물 시험 중 사람이 원격조종한 구간을 Planner D의 DAgger 시연에 더하는 것이 같은 자리다. 실물 시험 전이라 아직 기록은 없다.</a:t>
             </a:r>
           </a:p>
         </p:txBody>
@@ -1659,7 +1659,7 @@
           <a:lstStyle/>
           <a:p>
             <a:r>
-              <a:t>세 연구는 투영하는 곳이 다르다. PADP는 관절 행동을 동역학이 맞는 변수로, CMP는 위험한 잠재 명령을 정책이 해낼 수 있는 구 안으로, FIBER는 따로 배운 기술을 공통 잠재로 옮긴다. travplan에 대면 PADP의 자리가 가장 급하다. 다만 스워브의 실행 가능 집합은 볼록이 아니어서, 현재 조향각 둘레에서 선형화한 QP를 매 주기 풀어야 한다. 투영은 바로 다음 명령만 고치므로, 조향 한계를 rollout에 넣는 mppi_plant_steer와 함께 비교해야 한다. 실제 조향 한계(TP-0163)가 정해지기 전에는 시험할 수 없다.</a:t>
+              <a:t>세 연구는 투영하는 곳이 다르다. PADP는 관절 행동을 동역학이 맞는 변수로, CMP는 위험한 latent 명령을 정책이 해낼 수 있는 구 안으로, FIBER는 따로 배운 기술을 공통 latent로 옮긴다. travplan에 비추면 PADP의 자리가 가장 급하다. 다만 스워브의 실행 가능 집합은 볼록이 아니어서, 현재 조향각 둘레에서 선형화한 QP를 매 주기 풀어야 한다. 투영은 바로 다음 명령만 고치므로, 조향 한계를 rollout에 넣는 mppi_plant_steer와 함께 비교해야 한다. 실제 조향 한계(TP-0163)가 정해지기 전에는 시험할 수 없다.</a:t>
             </a:r>
           </a:p>
         </p:txBody>
@@ -1799,7 +1799,7 @@
           <a:lstStyle/>
           <a:p>
             <a:r>
-              <a:t>Flexion은 legged_gym과 Isaac Lab을 만든 사람들이 취리히에 세운 휴머노이드 소프트웨어 회사다. Reflect v1.0의 새로운 점은 RL을 운동 기술에만 쓰지 않고 맨 위 임무 VLM까지 넓힌 것이다. 기성 VLM은 앞 도구 호출이 끝났는지 눈으로 확인하지 않고 그럴듯한 다음 호출을 내는 버릇이 있어서, 이를 RL로 고쳤다고 적었다. 실패는 두 단에서 받는다. 운동 층이 배운 복구 동작으로 먼저 다시 하고, 안 되면 VLM이 다시 계획한다.</a:t>
+              <a:t>Flexion은 legged_gym과 Isaac Lab을 만든 사람들이 취리히에 세운 휴머노이드 소프트웨어 회사다. Reflect v1.0의 새로운 점은 RL을 운동 기술에만 쓰지 않고 맨 위 임무 VLM까지 넓힌 것이다. 기성 VLM은 앞 도구 호출이 끝났는지 눈으로 확인하지 않고 그럴듯한 다음 호출을 내는 버릇이 있어서, 이를 RL로 고쳤다고 적었다. 실패는 두 단계에서 복구한다. 운동 층이 배운 복구 동작으로 먼저 다시 하고, 안 되면 VLM이 다시 계획한다.</a:t>
             </a:r>
           </a:p>
         </p:txBody>
@@ -1869,7 +1869,7 @@
           <a:lstStyle/>
           <a:p>
             <a:r>
-              <a:t>곡선이 흥미롭다. 에피소드 성공률 하나 대신 단계마다 살아남은 비율을 그렸다. 기본 VLM은 거의 바로 실패하고, SFT는 앞 몇 단계에서 크게 떨어진다. RL을 더하면 끝까지 90 %가 남는다. 다만 회사 발표라 시도 수도, 평가 환경도 모른다. travplan에서 같은 곡선은 배달 경로의 구간별로 그릴 수 있다. 두 단 복구는 Guidance 폴백과 같은 구조다. 매 스텝 재계획이 운동 층의 재시도에, 치명 표본이 이어질 때 Guidance로 바꾸는 것이 VLM의 재계획에 해당한다.</a:t>
+              <a:t>곡선이 흥미롭다. 에피소드 성공률 하나 대신 단계마다 살아남은 비율을 그렸다. 기본 VLM은 거의 바로 실패하고, SFT는 앞 몇 단계에서 크게 떨어진다. RL을 더하면 끝까지 90 %가 남는다. 다만 회사 발표라 시도 수도, 평가 환경도 모른다. travplan에서 같은 곡선은 배달 경로의 구간별로 그릴 수 있다. 두 단계 복구는 Guidance 폴백과 같은 구조다. 매 스텝 재계획이 운동 층의 재시도에, 치명 샘플이 이어질 때 Guidance로 바꾸는 것이 VLM의 재계획에 해당한다.</a:t>
             </a:r>
           </a:p>
         </p:txBody>
@@ -1939,7 +1939,7 @@
           <a:lstStyle/>
           <a:p>
             <a:r>
-              <a:t>Dyna Robotics의 Taku는 휴머노이드는 아니지만, 조향 바퀴 네 개로 된 바닥이 travplan 로봇과 같아서 넣었다. 층 나누기는 Flexion과 비슷하다. 맨 위가 작업 흐름을 정하고, 가운데 행동 모델이 궤적을 내고, 맨 아래 전신 제어기가 따른다. 이 발표의 논지는 단계 신뢰도다. 79단계 작업에서 단계마다 95 %면 0.95의 79제곱이 약 1.7 %라, 긴 작업에는 단계 신뢰도가 거의 1이어야 한다. 배달 경로의 연석과 횡단보도도 단계로 볼 수 있다.</a:t>
+              <a:t>Dyna Robotics의 Taku는 휴머노이드는 아니지만, 조향 바퀴 네 개 베이스가 travplan 로봇과 같아서 넣었다. 층 나누기는 Flexion과 비슷하다. 맨 위가 작업 흐름을 정하고, 가운데 행동 모델이 궤적을 내고, 맨 아래 전신 제어기가 따른다. 이 발표의 논지는 단계 신뢰도다. 79단계 작업에서 단계마다 95 %면 0.95의 79제곱이 약 1.7 %라, 긴 작업에는 단계 신뢰도가 거의 1이어야 한다. 배달 경로의 연석과 횡단보도도 단계로 볼 수 있다.</a:t>
             </a:r>
           </a:p>
         </p:txBody>
@@ -2079,7 +2079,7 @@
           <a:lstStyle/>
           <a:p>
             <a:r>
-              <a:t>1장은 다리 로봇 분야에서 어떤 방식이 대세인지와 연구실 계보를 본다. 2장부터 5장까지는 위에서 아래로 내려간다. 내비 층이 무엇을 넘기는지, 보행 정책이 지형을 어떻게 보는지, 전신 제어가 사람 동작을 어떻게 지형에 맞추는지, 여러 층을 엮어 긴 작업을 어떻게 끝까지 하는지다. 6장은 두 표로 비교하고, 7장은 travplan으로 돌아온다.</a:t>
+              <a:t>1장은 다리 로봇 분야에서 어떤 방식이 대세인지와 연구실 계보를 살펴본다. 2장부터 5장까지는 위에서 아래로 내려간다. 내비 층이 무엇을 넘기는지, 보행 정책이 지형을 어떻게 보는지, 전신 제어가 사람 동작을 어떻게 지형에 맞추는지, 여러 층을 엮어 긴 작업을 어떻게 끝까지 하는지다. 6장은 두 표로 비교하고, 7장은 travplan으로 돌아온다.</a:t>
             </a:r>
           </a:p>
         </p:txBody>
@@ -2289,7 +2289,7 @@
           <a:lstStyle/>
           <a:p>
             <a:r>
-              <a:t>공통점은 둘이다. 정답을 보는 교사를 배포 관측만 보는 학생으로 옮기는 증류, 그리고 층을 나눈 뒤 그 사이를 맞추는 일이다. 차이도 둘이다. 경계를 어디에 두느냐와 결과를 얼마나 깊이 검증했느냐다. 회사 발표와 반복 실물 시험은 같은 무게로 읽지 않는다.</a:t>
+              <a:t>공통점은 둘이다. 정답을 보는 교사를 배포 관측만 보는 학생으로 옮기는 distillation, 그리고 층을 나눈 뒤 그 사이를 맞추는 일이다. 차이도 둘이다. 경계를 어디에 두느냐와 결과를 얼마나 깊이 검증했느냐다. 회사 발표와 반복 실물 시험은 같은 무게로 읽지 않는다.</a:t>
             </a:r>
           </a:p>
         </p:txBody>
@@ -2359,7 +2359,7 @@
           <a:lstStyle/>
           <a:p>
             <a:r>
-              <a:t>마지막 장은 travplan으로 돌아온다. 앞의 두 질문에 travplan의 지금 상태를 대 보고, 가져올 순서와 다음 시험을 정한다.</a:t>
+              <a:t>마지막 장은 travplan으로 돌아온다. 앞의 두 질문에 travplan의 지금 상태를 비추어 보고, 가져올 순서와 다음 시험을 정한다.</a:t>
             </a:r>
           </a:p>
         </p:txBody>
@@ -2429,7 +2429,7 @@
           <a:lstStyle/>
           <a:p>
             <a:r>
-              <a:t>travplan을 세 질문에 대 본다. 넘기는 것은 4초 궤적이고, 아래 층의 지연을 MPPI rollout에 넣은 것이 이미 큰 효과를 냈다. 해낼 수 있느냐는 조향 한계가 모자란 자리다. 보는 것은 학습 Controller의 관측 모양이 논문의 가장 나쁜 기준선과 같다는 점이다. 그림은 Playground의 휴머노이드다. GR00T식 분리형 전신 제어 위에 MPPI를 앉히면, MPPI가 하체의 지연을 알아야 한다는 것을 TP-0135에서 확인했다.</a:t>
+              <a:t>travplan을 세 질문에 비추어 본다. 넘기는 것은 4초 궤적이고, 아래 층의 지연을 MPPI rollout에 넣은 것이 이미 큰 효과를 냈다. 해낼 수 있느냐는 조향 한계가 모자란 자리다. 어디를 보느냐에서는 학습 Controller의 관측 모양이 논문의 가장 나쁜 기준선과 같다. 그림은 Playground의 휴머노이드다. GR00T식 분리형 전신 제어 위에 MPPI를 앉히면, MPPI가 하체의 지연을 알아야 한다는 것을 TP-0135에서 확인했다.</a:t>
             </a:r>
           </a:p>
         </p:txBody>
@@ -2499,7 +2499,7 @@
           <a:lstStyle/>
           <a:p>
             <a:r>
-              <a:t>B.16.7은 B.16 전체에서 travplan이 가져올 것을 열 개로 놓았다. 이 발표에서 본 연구와 닿는 여섯을 뽑았다. 번호는 문서의 번호 그대로다. 1번과 4번은 이 발표의 교사–학생과 실패 구간 표집이 바로 쓰이는 자리이고, 7번은 CMU 스택에서 본 "아래 층의 응답을 재서 위 층에 넣는다"는 일이다.</a:t>
+              <a:t>B.16.7은 B.16 전체에서 travplan이 가져올 것을 열 개로 놓았다. 이 발표에서 본 연구와 닿는 여섯을 뽑았다. 번호는 문서의 번호 그대로다. 1번과 4번은 이 발표의 teacher–student와 실패 구간 샘플링이 바로 쓰이는 자리이고, 7번은 CMU 스택에서 본 "아래 층의 응답을 재서 위 층에 넣는다"는 일이다.</a:t>
             </a:r>
           </a:p>
         </p:txBody>
@@ -2849,7 +2849,7 @@
           <a:lstStyle/>
           <a:p>
             <a:r>
-              <a:t>표는 B.18.1에서 세 열만 뽑았다. 대세는 배치와 기본값에서 주류로 확인된 것, 정착은 널리 쓰이지만 중심이 아닌 것, 부상은 증거가 빠르게 느는 것이다. 다리 로봇의 저수준은 RL과 모션 트래킹이 대세이고, 고전 발자국 계획은 휴머노이드에서 줄고 있다. 위 층의 학습 플래너와 VLA는 세 분야 모두 부상 단계다. travplan은 모바일 로봇 열에 있지만, Planner D는 다리 로봇 쪽 연구와 같은 학습 플래너다.</a:t>
+              <a:t>표는 B.18.1에서 세 열만 뽑았다. 대세는 실제 배포와 기본값에서 주류로 확인된 것, 정착은 널리 쓰이지만 중심이 아닌 것, 부상은 증거가 빠르게 느는 것이다. 다리 로봇의 저수준은 RL과 모션 트래킹이 대세이고, 고전 발자국 계획은 휴머노이드에서 줄고 있다. 위 층의 학습 플래너와 VLA는 세 분야 모두 부상 단계다. travplan은 모바일 로봇 열에 있지만, Planner D는 다리 로봇 쪽 연구와 같은 학습 플래너다.</a:t>
             </a:r>
           </a:p>
         </p:txBody>
@@ -2989,7 +2989,7 @@
           <a:lstStyle/>
           <a:p>
             <a:r>
-              <a:t>두 번째 장은 위 층과 아래 층의 경계다. 같은 G1 로봇을 써도 연구마다 넘기는 것이 다르다. travplan과 가장 가까운 것은 CMU 스택이고, 가장 먼 것은 경계를 없앤 종단간 정책이다.</a:t>
+              <a:t>두 번째 장은 위 층과 아래 층의 경계다. 같은 G1 로봇을 써도 연구마다 넘기는 것이 다르다. travplan과 가장 가까운 것은 CMU 스택이고, 가장 먼 것은 경계를 없앤 end-to-end 정책이다.</a:t>
             </a:r>
           </a:p>
         </p:txBody>
@@ -3059,7 +3059,7 @@
           <a:lstStyle/>
           <a:p>
             <a:r>
-              <a:t>표는 B.16.8의 연구를 경계가 높은 순서로 놓았다. CMU 스택은 몸체가 달라도 차체 속도와 yaw rate만 넘긴다. LP-NavOA는 얼린 보행 정책의 진행 방향 명령 하나만 덮어쓴다. FocusNav는 waypoint를 정책 안에서 예측하고 그 둘레만 본다. GLAD와 End-to-End는 경계를 없앴다. 맨 아래 NEXUS는 축이 다르다. 위 층인 사람이 전신 동작을 통째로 넘기지만 지형 정보는 없고, 지형은 아래 층의 깊이 영상만 본다. travplan은 4초 궤적을 넘기므로 표의 맨 위다. LP-NavOA식으로 하면 Planner D의 궤적은 두고 진행 방향만 Guidance 쪽으로 돌리는 판이 가능하다. 아직 시험하지 않았다.</a:t>
+              <a:t>표는 B.16.8의 연구를 경계가 높은 순서로 놓았다. CMU 스택은 몸체가 달라도 차체 속도와 yaw rate만 넘긴다. LP-NavOA는 고정한 보행 정책의 진행 방향 명령 하나만 덮어쓴다. FocusNav는 waypoint를 정책 안에서 예측하고 그 둘레만 본다. GLAD와 End-to-End는 경계를 없앴다. 맨 아래 NEXUS는 축이 다르다. 위 층인 사람이 전신 동작을 통째로 넘기지만 지형 정보는 없고, 지형은 아래 층의 깊이 영상만 본다. travplan은 4초 궤적을 넘기므로 표의 맨 위다. LP-NavOA식으로 하면 Planner D의 궤적은 두고 진행 방향만 Guidance 쪽으로 돌리는 변형이 가능하다. 아직 시험하지 않았다.</a:t>
             </a:r>
           </a:p>
         </p:txBody>
@@ -3129,7 +3129,7 @@
           <a:lstStyle/>
           <a:p>
             <a:r>
-              <a:t>CMU의 Ji Zhang이 공개한 자율 스택은 "내비 층은 몸체를 몰라도 된다"는 설계의 공개 기준이다. 기본 운전은 똑똑한 조이스틱이라, 사람이 준 속도와 yaw rate를 따르되 충돌은 스택이 피한다. 휴머노이드판은 공개되지 않았다. 휴머노이드에 옮긴다면 G1의 보행 정책이 Go2 보행 제어의 자리를 받는다. 그러려면 보행 정책의 명령 추종 응답을 재서 내비 층의 예측 모델에 넣는 단계가 필요하다. travplan이 plant 지연에서 배운 것과 같다.</a:t>
+              <a:t>CMU의 Ji Zhang이 공개한 자율 스택은 "내비 층은 몸체를 몰라도 된다"는 설계의 공개 기준이다. 기본 운전 모드는 '똑똑한 조이스틱'이다. 사람이 준 속도와 yaw rate를 따르되 충돌은 스택이 피한다. 휴머노이드판은 공개되지 않았다. 휴머노이드에 옮긴다면 G1의 보행 정책이 Go2 보행 제어의 자리를 받는다. 그러려면 보행 정책의 명령 추종 응답을 재서 내비 층의 예측 모델에 넣는 단계가 필요하다. travplan이 plant 지연에서 배운 것과 같다.</a:t>
             </a:r>
           </a:p>
         </p:txBody>
@@ -6279,7 +6279,7 @@
                 <a:ea typeface="Malgun Gothic"/>
                 <a:cs typeface="Malgun Gothic"/>
               </a:rPr>
-              <a:t>2025–2026 휴머노이드·4족 보행 연구를 내비, 지형 인식, 전신 제어, 장시간 자율의 네 층으로 읽고 travplan의 Planner→Controller 경계에 대 본다</a:t>
+              <a:t>2025–2026 휴머노이드·4족 보행 연구를 내비, 지형 인식, 전신 제어, 장시간 자율의 네 층으로 읽고 travplan의 Planner→Controller 경계와 견준다</a:t>
             </a:r>
           </a:p>
         </p:txBody>
@@ -7081,7 +7081,7 @@
                 <a:ea typeface="Malgun Gothic"/>
                 <a:cs typeface="Malgun Gothic"/>
               </a:rPr>
-              <a:t>얼린 보행 정책 위의 순환 Planner</a:t>
+              <a:t>고정한 보행 정책 위의 순환 Planner</a:t>
             </a:r>
           </a:p>
         </p:txBody>
@@ -7608,7 +7608,7 @@
                 <a:ea typeface="Malgun Gothic"/>
                 <a:cs typeface="Malgun Gothic"/>
               </a:rPr>
-              <a:t>LP-NavOA (Fig. 1): 순환 Planner가 얼린 보행 정책의 진행 방향 명령만 덮어쓴다 — arXiv:2606.23249</a:t>
+              <a:t>LP-NavOA (Fig. 1): 순환 Planner가 고정한 보행 정책의 진행 방향 명령만 덮어쓴다 — arXiv:2606.23249</a:t>
             </a:r>
           </a:p>
         </p:txBody>
@@ -7691,7 +7691,7 @@
                 <a:ea typeface="Malgun Gothic"/>
                 <a:cs typeface="Malgun Gothic"/>
               </a:rPr>
-              <a:t> LP-NavOA의 G1 실물은 반복 시험이 아니라 실행 가능성 확인이다. 수치는 시뮬레이션 것이고, 경계를 내린 값의 근거로는 아직 약하다.</a:t>
+              <a:t> LP-NavOA의 G1 실물은 반복 시험이 아니라 실행 가능성 확인이다. 수치는 시뮬레이션 값이고, 경계를 내린 효과의 근거로는 아직 약하다.</a:t>
             </a:r>
           </a:p>
         </p:txBody>
@@ -8158,7 +8158,7 @@
                 <a:ea typeface="Malgun Gothic"/>
                 <a:cs typeface="Malgun Gothic"/>
               </a:rPr>
-              <a:t>특권 교사를 Soft-MoE 학생으로 증류</a:t>
+              <a:t>privileged 교사를 Soft-MoE 학생으로 distillation</a:t>
             </a:r>
           </a:p>
         </p:txBody>
@@ -8988,7 +8988,7 @@
                 <a:ea typeface="Malgun Gothic"/>
                 <a:cs typeface="Malgun Gothic"/>
               </a:rPr>
-              <a:t>Watch Your Step은 높이 693칸을 102개 값으로 줄이고도 더 잘 걸었다.</a:t>
+              <a:t>Watch Your Step은 높이 지도 693 셀을 102개 값으로 줄이고도 더 잘 걸었다.</a:t>
             </a:r>
           </a:p>
         </p:txBody>
@@ -9096,7 +9096,7 @@
                 <a:ea typeface="Malgun Gothic"/>
                 <a:cs typeface="Malgun Gothic"/>
               </a:rPr>
-              <a:t>지도를 보지 않는 작은 망이 다음 발 디딤 둘을 예측하고, 정책은 그 두 곳만 본다</a:t>
+              <a:t>지도를 보지 않는 작은 네트워크가 다음 foothold 둘을 예측하고, 정책은 그 두 곳만 본다</a:t>
             </a:r>
           </a:p>
         </p:txBody>
@@ -9358,7 +9358,7 @@
                 <a:ea typeface="Malgun Gothic"/>
                 <a:cs typeface="Malgun Gothic"/>
               </a:rPr>
-              <a:t>고유감각 70차원 → 다음 발 디딤 둘</a:t>
+              <a:t>proprioception 70차원 → 다음 foothold 둘</a:t>
             </a:r>
           </a:p>
         </p:txBody>
@@ -9661,7 +9661,7 @@
                 <a:ea typeface="Malgun Gothic"/>
                 <a:cs typeface="Malgun Gothic"/>
               </a:rPr>
-              <a:t>두 곳의 7 × 7 조각만 본다</a:t>
+              <a:t>두 곳의 7 × 7 패치만 본다</a:t>
             </a:r>
           </a:p>
         </p:txBody>
@@ -9702,7 +9702,7 @@
                 <a:ea typeface="Malgun Gothic"/>
                 <a:cs typeface="Malgun Gothic"/>
               </a:rPr>
-              <a:t>조각 하나는 0.35 m 정사각이다(G1 발 길이 0.208 m). 전체 지도 33 × 21칸(693)이 102개 값으로 준다. 전체 지도는 학습 때 critic만 본다.</a:t>
+              <a:t>패치 하나는 0.35 m 정사각형이다(G1 발 길이 0.208 m). 전체 지도 33 × 21 셀(693개)이 102개 값으로 준다. 전체 지도는 학습 때 critic만 본다.</a:t>
             </a:r>
           </a:p>
         </p:txBody>
@@ -9716,11 +9716,11 @@
         <p:spPr>
           <a:xfrm>
             <a:off x="711200" y="4489748"/>
-            <a:ext cx="5257800" cy="1137841"/>
+            <a:ext cx="5257800" cy="1358801"/>
           </a:xfrm>
           <a:prstGeom prst="roundRect">
             <a:avLst>
-              <a:gd name="adj" fmla="val 6696"/>
+              <a:gd name="adj" fmla="val 5607"/>
             </a:avLst>
           </a:prstGeom>
           <a:solidFill>
@@ -9776,7 +9776,7 @@
         <p:spPr>
           <a:xfrm>
             <a:off x="5962650" y="4489748"/>
-            <a:ext cx="6350" cy="1137841"/>
+            <a:ext cx="6350" cy="1358801"/>
           </a:xfrm>
           <a:prstGeom prst="rect">
             <a:avLst/>
@@ -9804,7 +9804,7 @@
         </p:nvSpPr>
         <p:spPr>
           <a:xfrm>
-            <a:off x="711200" y="5621238"/>
+            <a:off x="711200" y="5842198"/>
             <a:ext cx="5257800" cy="6350"/>
           </a:xfrm>
           <a:prstGeom prst="rect">
@@ -9834,7 +9834,7 @@
         <p:spPr>
           <a:xfrm>
             <a:off x="711200" y="4489748"/>
-            <a:ext cx="50800" cy="1137841"/>
+            <a:ext cx="50800" cy="1358801"/>
           </a:xfrm>
           <a:prstGeom prst="roundRect">
             <a:avLst>
@@ -9978,7 +9978,7 @@
         <p:spPr>
           <a:xfrm>
             <a:off x="927100" y="5260578"/>
-            <a:ext cx="5041964" cy="327000"/>
+            <a:ext cx="5041964" cy="603200"/>
           </a:xfrm>
           <a:prstGeom prst="rect">
             <a:avLst/>
@@ -10005,7 +10005,7 @@
                 <a:ea typeface="Malgun Gothic"/>
                 <a:cs typeface="Malgun Gothic"/>
               </a:rPr>
-              <a:t>현재 정책을 굴려 전이 50만 개를 모으고, 실제 착지 위치를 라벨로 다시 맞춘다.</a:t>
+              <a:t>현재 정책을 rollout해 전이 50만 개를 모으고, 실제 착지 위치를 라벨로 다시 학습한다.</a:t>
             </a:r>
           </a:p>
         </p:txBody>
@@ -10103,7 +10103,7 @@
                 <a:ea typeface="Malgun Gothic"/>
                 <a:cs typeface="Malgun Gothic"/>
               </a:rPr>
-              <a:t>Watch Your Step (Fig. 2): FPM이 예측한 발 디딤 둘레로 거른 높이 지도를 정책이 본다. (A) rollout에서 착지 위치를 얻고 (B) FPM을 다시 학습한다 — arXiv:2610.29612</a:t>
+              <a:t>Watch Your Step (Fig. 2): FPM이 예측한 foothold 둘레만 남긴 높이 지도를 정책이 본다. (A) rollout에서 착지 위치를 얻고 (B) FPM을 다시 학습한다 — arXiv:2610.29612</a:t>
             </a:r>
           </a:p>
         </p:txBody>
@@ -10323,7 +10323,7 @@
         </p:nvGraphicFramePr>
         <p:xfrm>
           <a:off x="711200" y="1361678"/>
-          <a:ext cx="10769599" cy="925080"/>
+          <a:ext cx="10769600" cy="925080"/>
         </p:xfrm>
         <a:graphic>
           <a:graphicData uri="http://schemas.openxmlformats.org/drawingml/2006/table">
@@ -10332,10 +10332,10 @@
                 <a:tableStyleId>{5C22544A-7EE6-4342-B048-85BDC9FD1C3A}</a:tableStyleId>
               </a:tblPr>
               <a:tblGrid>
-                <a:gridCol w="3560762"/>
-                <a:gridCol w="2320032"/>
-                <a:gridCol w="2421731"/>
-                <a:gridCol w="2467074"/>
+                <a:gridCol w="3823990"/>
+                <a:gridCol w="2048570"/>
+                <a:gridCol w="2718395"/>
+                <a:gridCol w="2178645"/>
               </a:tblGrid>
               <a:tr h="314657">
                 <a:tc>
@@ -10400,7 +10400,7 @@
                           <a:ea typeface="Malgun Gothic"/>
                           <a:cs typeface="Malgun Gothic"/>
                         </a:rPr>
-                        <a:t>AME2(주의 인코더)</a:t>
+                        <a:t>AME2(attention 인코더)</a:t>
                       </a:r>
                     </a:p>
                   </a:txBody>
@@ -10559,7 +10559,7 @@
                           <a:ea typeface="Malgun Gothic"/>
                           <a:cs typeface="Malgun Gothic"/>
                         </a:rPr>
-                        <a:t>드문 디딤 지형(징검돌 등) 성공</a:t>
+                        <a:t>foothold가 드문 지형(징검돌 등) 성공</a:t>
                       </a:r>
                     </a:p>
                   </a:txBody>
@@ -10903,7 +10903,7 @@
                 <a:ea typeface="Malgun Gothic"/>
                 <a:cs typeface="Malgun Gothic"/>
               </a:rPr>
-              <a:t>학습에 없던 0.55 m 틈과 0.6 m 낙차를 넘었고, 야외 18단 계단을 올랐다. 틈 앞에서는 보상하지 않은 감속과 몸 낮추기가 나타났다.</a:t>
+              <a:t>학습에 없던 0.55 m 틈과 0.6 m 낙차를 넘었고, 야외 18단 계단을 올랐다. 틈 앞에서는 보상에 넣지 않은 감속과 몸 낮추기가 나타났다.</a:t>
             </a:r>
           </a:p>
         </p:txBody>
@@ -11165,7 +11165,7 @@
                 <a:ea typeface="Malgun Gothic"/>
                 <a:cs typeface="Malgun Gothic"/>
               </a:rPr>
-              <a:t>같은 수 이상의 높이를 발 둘레(원형 스캔)나 명령 방향 앞(Naive, 200칸)에서 뽑은 기준선은 전체 지도보다도 나빴다. Naive는 거의 모든 열에서 꼴찌였다.</a:t>
+              <a:t>같거나 더 많은 높이 값을 발 둘레(원형 스캔)나 명령 방향 앞(Naive, 200 셀)에서 뽑은 기준선은 전체 지도보다도 나빴다. Naive는 거의 모든 항목에서 가장 나빴다.</a:t>
             </a:r>
           </a:p>
         </p:txBody>
@@ -11270,7 +11270,7 @@
                 <a:ea typeface="Malgun Gothic"/>
                 <a:cs typeface="Malgun Gothic"/>
               </a:rPr>
-              <a:t>(TP-0128)의 지형 관측은 Naive와 같은 모양이다(앞 0–2.4 m, ±0.6 m 고정 7 × 5 격자). 경로 앞 네 점 둘레의 조각을 읽는 변형은 관측 크기를 늘리지 않고 시험할 수 있다.</a:t>
+              <a:t>(TP-0128)의 지형 관측은 Naive와 같은 모양이다(앞 0–2.4 m, ±0.6 m 고정 7 × 5 격자). 경로 앞 네 점 둘레의 패치를 읽는 변형은 관측 크기를 늘리지 않고 시험할 수 있다.</a:t>
             </a:r>
           </a:p>
         </p:txBody>
@@ -11393,7 +11393,7 @@
         </p:nvGraphicFramePr>
         <p:xfrm>
           <a:off x="711200" y="1361678"/>
-          <a:ext cx="10769602" cy="1741538"/>
+          <a:ext cx="10769600" cy="1741538"/>
         </p:xfrm>
         <a:graphic>
           <a:graphicData uri="http://schemas.openxmlformats.org/drawingml/2006/table">
@@ -11402,11 +11402,11 @@
                 <a:tableStyleId>{5C22544A-7EE6-4342-B048-85BDC9FD1C3A}</a:tableStyleId>
               </a:tblPr>
               <a:tblGrid>
-                <a:gridCol w="1534716"/>
-                <a:gridCol w="1608634"/>
-                <a:gridCol w="3280073"/>
-                <a:gridCol w="2154238"/>
-                <a:gridCol w="2191941"/>
+                <a:gridCol w="1453356"/>
+                <a:gridCol w="1483519"/>
+                <a:gridCol w="3334643"/>
+                <a:gridCol w="2197100"/>
+                <a:gridCol w="2300982"/>
               </a:tblGrid>
               <a:tr h="300067">
                 <a:tc>
@@ -11593,7 +11593,7 @@
                           <a:ea typeface="Malgun Gothic"/>
                           <a:cs typeface="Malgun Gothic"/>
                         </a:rPr>
-                        <a:t>신뢰도가 시간·거리로 주는 누적 점군 지도, U-Net(EGAU)으로 정제</a:t>
+                        <a:t>시간·거리에 따라 신뢰도가 줄어드는 누적 점군 지도, U-Net(EGAU)으로 정제</a:t>
                       </a:r>
                     </a:p>
                   </a:txBody>
@@ -11617,7 +11617,7 @@
                           <a:ea typeface="Malgun Gothic"/>
                           <a:cs typeface="Malgun Gothic"/>
                         </a:rPr>
-                        <a:t>단일 단계 RL, 조밀한 "위험 디딤" 벌점</a:t>
+                        <a:t>단일 단계 RL, 조밀한 "위험 foothold" 페널티</a:t>
                       </a:r>
                     </a:p>
                   </a:txBody>
@@ -11641,7 +11641,7 @@
                           <a:ea typeface="Malgun Gothic"/>
                           <a:cs typeface="Malgun Gothic"/>
                         </a:rPr>
-                        <a:t>시뮬 안전 디딤 거의 100 %, 실외 장거리 보행</a:t>
+                        <a:t>시뮬 안전 foothold 거의 100 %, 실외 장거리 보행</a:t>
                       </a:r>
                     </a:p>
                   </a:txBody>
@@ -11739,7 +11739,7 @@
                           <a:ea typeface="Malgun Gothic"/>
                           <a:cs typeface="Malgun Gothic"/>
                         </a:rPr>
-                        <a:t>다각형 위 발 디딤 계획, 전신 계획 20–30 Hz</a:t>
+                        <a:t>다각형 위 foothold 계획, 전신 계획 20–30 Hz</a:t>
                       </a:r>
                     </a:p>
                   </a:txBody>
@@ -11789,7 +11789,7 @@
                           <a:ea typeface="Malgun Gothic"/>
                           <a:cs typeface="Malgun Gothic"/>
                         </a:rPr>
-                        <a:t>지각 보행 + world model</a:t>
+                        <a:t>인식 보행 + world model</a:t>
                       </a:r>
                     </a:p>
                   </a:txBody>
@@ -11861,7 +11861,7 @@
                           <a:ea typeface="Malgun Gothic"/>
                           <a:cs typeface="Malgun Gothic"/>
                         </a:rPr>
-                        <a:t>교사–학생 행동 모방</a:t>
+                        <a:t>teacher–student 행동 모방</a:t>
                       </a:r>
                     </a:p>
                   </a:txBody>
@@ -11978,7 +11978,7 @@
                 <a:ea typeface="Malgun Gothic"/>
                 <a:cs typeface="Malgun Gothic"/>
               </a:rPr>
-              <a:t> L1(합성 LiDAR + elevation_mapping_cupy, TP-0053)도 성긴 점에서 높이 지도를 만든다. 못 본 칸을 어떻게 채우느냐(그림자 상한·깊이 prior, TP-0044·0047)가 같은 질문이다.</a:t>
+              <a:t> L1(합성 LiDAR + elevation_mapping_cupy, TP-0053)도 성긴 점에서 높이 지도를 만든다. 관측하지 못한 셀을 어떻게 채우느냐(그림자 상한·깊이 prior, TP-0044·0047)가 같은 질문이다.</a:t>
             </a:r>
           </a:p>
         </p:txBody>
@@ -12389,7 +12389,7 @@
                 <a:ea typeface="Malgun Gothic"/>
                 <a:cs typeface="Malgun Gothic"/>
               </a:rPr>
-              <a:t>사람 파쿠르 동작을 G1에 옮기고 motion matching으로 "보행, 기술, 보행"을 잇는다. 기술마다 높이 스캔을 보는 교사를 배우고, 깊이 영상만 보는 학생 하나로 DAgger + PPO 증류한다.</a:t>
+              <a:t>사람 파쿠르 동작을 G1에 옮기고 motion matching으로 "보행, 기술, 보행"을 잇는다. 기술마다 높이 스캔을 보는 교사를 배우고, 깊이 영상만 보는 학생 하나로 DAgger + PPO distillation한다.</a:t>
             </a:r>
           </a:p>
         </p:txBody>
@@ -12790,7 +12790,7 @@
                 <a:ea typeface="Malgun Gothic"/>
                 <a:cs typeface="Malgun Gothic"/>
               </a:rPr>
-              <a:t>PHP (Fig. 2): 사람 동작 리타기팅과 motion matching, 기술별 교사, 깊이 학생 증류 — arXiv:2602.15827</a:t>
+              <a:t>PHP (Fig. 2): 사람 동작 리타기팅과 motion matching, 기술별 교사, 깊이 학생 distillation — arXiv:2602.15827</a:t>
             </a:r>
           </a:p>
         </p:txBody>
@@ -12804,11 +12804,11 @@
         <p:spPr>
           <a:xfrm>
             <a:off x="711200" y="5028406"/>
-            <a:ext cx="10769600" cy="502543"/>
+            <a:ext cx="10769600" cy="751086"/>
           </a:xfrm>
           <a:prstGeom prst="roundRect">
             <a:avLst>
-              <a:gd name="adj" fmla="val 15162"/>
+              <a:gd name="adj" fmla="val 10145"/>
             </a:avLst>
           </a:prstGeom>
           <a:solidFill>
@@ -12835,7 +12835,7 @@
         <p:spPr>
           <a:xfrm>
             <a:off x="889000" y="5155406"/>
-            <a:ext cx="10751820" cy="361479"/>
+            <a:ext cx="10751820" cy="672157"/>
           </a:xfrm>
           <a:prstGeom prst="rect">
             <a:avLst/>
@@ -12873,7 +12873,7 @@
                 <a:ea typeface="Malgun Gothic"/>
                 <a:cs typeface="Malgun Gothic"/>
               </a:rPr>
-              <a:t> 옮길 것은 증류 손실의 일정이다. DAgger 가중을 앞 절반에 1에서 0.1로 내리고 끝까지 남긴다. 빼면 떨리는 행동이 생겼다.</a:t>
+              <a:t> 옮길 것은 distillation 손실의 스케줄이다. DAgger 가중치를 학습 앞 절반 동안 1에서 0.1로 내리되 끝까지 없애지 않는다. 없애면 떨리는 행동이 나왔다.</a:t>
             </a:r>
           </a:p>
         </p:txBody>
@@ -13078,7 +13078,7 @@
                 <a:ea typeface="Malgun Gothic"/>
                 <a:cs typeface="Malgun Gothic"/>
               </a:rPr>
-              <a:t>무작위로 만든 로봇 10만 대에서 배운 transformer 하나가 처음 보는 몸을 몇 초 안에 몬다</a:t>
+              <a:t>랜덤 생성한 로봇 10만 대로 학습한 transformer 하나가 처음 보는 몸체를 몇 초 안에 제어한다</a:t>
             </a:r>
           </a:p>
         </p:txBody>
@@ -13438,7 +13438,7 @@
                 <a:ea typeface="Malgun Gothic"/>
                 <a:cs typeface="Malgun Gothic"/>
               </a:rPr>
-              <a:t>과제 공간과 맥락을 넓힌다</a:t>
+              <a:t>과제 공간과 context를 넓힌다</a:t>
             </a:r>
           </a:p>
         </p:txBody>
@@ -13479,7 +13479,7 @@
                 <a:ea typeface="Malgun Gothic"/>
                 <a:cs typeface="Malgun Gothic"/>
               </a:rPr>
-              <a:t>이족·사족과 그 바퀴형을 절차 생성하고 관성·이득·관절 한계를 크게 무작위화한다. 맥락을 수십 초로 늘리고 시도 사이에 기억을 넘긴다(메타 RL).</a:t>
+              <a:t>이족·사족과 그 바퀴형을 절차 생성하고 관성·이득·관절 한계를 크게 랜덤화한다. context를 수십 초로 늘리고 시도 사이에 기억을 이어 준다(메타 RL).</a:t>
             </a:r>
           </a:p>
         </p:txBody>
@@ -13865,7 +13865,7 @@
                 <a:ea typeface="Malgun Gothic"/>
                 <a:cs typeface="Malgun Gothic"/>
               </a:rPr>
-              <a:t> RMA가 0.5 s 이력으로 환경을 추정했다면 LocoFormer는 맥락으로 몸 자체를 추정한다. 실물 스워브 파라미터(TP-0035)를 모르는 지금, plant를 이력으로 추정하는 길의 상한을 보여 준다.</a:t>
+              <a:t> RMA가 0.5 s 이력으로 환경을 추정했다면 LocoFormer는 context로 몸체 자체를 추정한다. 실물 스워브 파라미터(TP-0035)를 모르는 지금, plant를 이력으로 추정하는 길의 상한을 보여 준다.</a:t>
             </a:r>
           </a:p>
         </p:txBody>
@@ -14070,7 +14070,7 @@
                 <a:ea typeface="Malgun Gothic"/>
                 <a:cs typeface="Malgun Gothic"/>
               </a:rPr>
-              <a:t>처음 보는 몸을 설명으로 줄 것인가, 이력에서 읽을 것인가</a:t>
+              <a:t>처음 보는 몸체를 설명으로 줄 것인가, 이력에서 읽을 것인가</a:t>
             </a:r>
           </a:p>
         </p:txBody>
@@ -14085,7 +14085,7 @@
         </p:nvGraphicFramePr>
         <p:xfrm>
           <a:off x="711200" y="1361678"/>
-          <a:ext cx="10769601" cy="2851482"/>
+          <a:ext cx="10769600" cy="3201138"/>
         </p:xfrm>
         <a:graphic>
           <a:graphicData uri="http://schemas.openxmlformats.org/drawingml/2006/table">
@@ -14094,10 +14094,10 @@
                 <a:tableStyleId>{5C22544A-7EE6-4342-B048-85BDC9FD1C3A}</a:tableStyleId>
               </a:tblPr>
               <a:tblGrid>
-                <a:gridCol w="1086644"/>
-                <a:gridCol w="2601218"/>
-                <a:gridCol w="5056287"/>
-                <a:gridCol w="2025452"/>
+                <a:gridCol w="1066304"/>
+                <a:gridCol w="2540595"/>
+                <a:gridCol w="4953992"/>
+                <a:gridCol w="2208709"/>
               </a:tblGrid>
               <a:tr h="285477">
                 <a:tc>
@@ -14260,7 +14260,7 @@
                           <a:ea typeface="Malgun Gothic"/>
                           <a:cs typeface="Malgun Gothic"/>
                         </a:rPr>
-                        <a:t>이력 15스텝 + 형태 무작위화, 실물 Mini Cheetah 정규화 보상 0.743</a:t>
+                        <a:t>이력 15스텝 + 형태 랜덤화, 실물 Mini Cheetah 정규화 보상 0.743</a:t>
                       </a:r>
                     </a:p>
                   </a:txBody>
@@ -14295,7 +14295,7 @@
                   </a:tcPr>
                 </a:tc>
               </a:tr>
-              <a:tr h="277381">
+              <a:tr h="452209">
                 <a:tc>
                   <a:txBody>
                     <a:bodyPr wrap="square"/>
@@ -14334,7 +14334,7 @@
                           <a:ea typeface="Malgun Gothic"/>
                           <a:cs typeface="Malgun Gothic"/>
                         </a:rPr>
-                        <a:t>Transformer-XL + 여러 시도, 0.8 넘는 과제가 영점 40 %에서 13번 뒤 72 %</a:t>
+                        <a:t>Transformer-XL + 여러 시도, 0.8 넘는 과제가 zero-shot 40 %에서 13번 시도 뒤 72 %</a:t>
                       </a:r>
                     </a:p>
                   </a:txBody>
@@ -14440,7 +14440,7 @@
                           <a:ea typeface="Malgun Gothic"/>
                           <a:cs typeface="Malgun Gothic"/>
                         </a:rPr>
-                        <a:t>바퀴판, 정책 대신 모델에 답한다</a:t>
+                        <a:t>바퀴 로봇판, 정책 대신 모델로 답한다</a:t>
                       </a:r>
                     </a:p>
                   </a:txBody>
@@ -14474,7 +14474,7 @@
                           <a:ea typeface="Malgun Gothic"/>
                           <a:cs typeface="Malgun Gothic"/>
                         </a:rPr>
-                        <a:t>몸 설명을 준다</a:t>
+                        <a:t>몸체 설명을 준다</a:t>
                       </a:r>
                     </a:p>
                   </a:txBody>
@@ -14522,7 +14522,7 @@
                           <a:ea typeface="Malgun Gothic"/>
                           <a:cs typeface="Malgun Gothic"/>
                         </a:rPr>
-                        <a:t>관절 설명 attention, 1,012대 전문가 증류(GPU 160장 약 5일)</a:t>
+                        <a:t>관절 설명 attention, 전문가 1,012개 distillation(GPU 160장 약 5일)</a:t>
                       </a:r>
                     </a:p>
                   </a:txBody>
@@ -14557,7 +14557,7 @@
                   </a:tcPr>
                 </a:tc>
               </a:tr>
-              <a:tr h="277381">
+              <a:tr h="452209">
                 <a:tc>
                   <a:txBody>
                     <a:bodyPr wrap="square"/>
@@ -14702,7 +14702,7 @@
                           <a:ea typeface="Malgun Gothic"/>
                           <a:cs typeface="Malgun Gothic"/>
                         </a:rPr>
-                        <a:t>짧은 이력의 명시 식별, 실물 관절 잠금 성공 80 %(무적응 20 %)</a:t>
+                        <a:t>짧은 이력에서 명시적 식별, 실물 관절 잠금 성공 80 %(무적응 20 %)</a:t>
                       </a:r>
                     </a:p>
                   </a:txBody>
@@ -14776,7 +14776,7 @@
                           <a:ea typeface="Malgun Gothic"/>
                           <a:cs typeface="Malgun Gothic"/>
                         </a:rPr>
-                        <a:t>LocoFormer의 TXL 구성 그대로, 명령 지연 무작위화, 도달 시간 −30.9 %</a:t>
+                        <a:t>LocoFormer의 TXL 구성 그대로, 명령 지연 랜덤화, 도달 시간 −30.9 %</a:t>
                       </a:r>
                     </a:p>
                   </a:txBody>
@@ -14913,7 +14913,7 @@
         </p:nvSpPr>
         <p:spPr>
           <a:xfrm>
-            <a:off x="711200" y="4894163"/>
+            <a:off x="711200" y="5305524"/>
             <a:ext cx="10769600" cy="751086"/>
           </a:xfrm>
           <a:prstGeom prst="roundRect">
@@ -14944,7 +14944,7 @@
         </p:nvSpPr>
         <p:spPr>
           <a:xfrm>
-            <a:off x="889000" y="5021163"/>
+            <a:off x="889000" y="5432524"/>
             <a:ext cx="10751820" cy="672157"/>
           </a:xfrm>
           <a:prstGeom prst="rect">
@@ -15005,7 +15005,7 @@
                 <a:ea typeface="Malgun Gothic"/>
                 <a:cs typeface="Malgun Gothic"/>
               </a:rPr>
-              <a:t> 자리에 학습 순동역학), 구조에 맞는 것은 Rapid Embodiment Adaptation의 명시 식별이다.</a:t>
+              <a:t> 자리에 학습 순동역학), 구조에 맞는 것은 Rapid Embodiment Adaptation의 명시적 식별이다.</a:t>
             </a:r>
           </a:p>
         </p:txBody>
@@ -15228,7 +15228,7 @@
                 <a:ea typeface="Malgun Gothic"/>
                 <a:cs typeface="Malgun Gothic"/>
               </a:rPr>
-              <a:t>출력은 해낼 수 있는 집합으로 옮긴다</a:t>
+              <a:t>출력은 실행 가능한 집합으로 투영한다</a:t>
             </a:r>
           </a:p>
         </p:txBody>
@@ -16024,7 +16024,7 @@
                 <a:ea typeface="Malgun Gothic"/>
                 <a:cs typeface="Malgun Gothic"/>
               </a:rPr>
-              <a:t>학습 정책의 출력은 그대로 실행하면 동역학, 접촉, 학습 분포 가운데 하나를 어긴다. 최근 연구는 실행 전에 맞는 집합으로 투영한다.</a:t>
+              <a:t>학습 정책의 출력은 그대로 실행하면 동역학, 접촉, 학습 분포 가운데 하나를 어긴다. 최근 연구는 실행 전에 실행 가능한 집합으로 투영한다.</a:t>
             </a:r>
           </a:p>
         </p:txBody>
@@ -16256,7 +16256,7 @@
                 <a:ea typeface="Malgun Gothic"/>
                 <a:cs typeface="Malgun Gothic"/>
               </a:rPr>
-              <a:t>장면과 맞춘 사람 동작으로 flow 계획기를 배우고, 범용 추종기가 50 Hz로 실행한다</a:t>
+              <a:t>장면에 맞춘 사람 동작으로 flow 계획기를 학습하고, 범용 추종기가 50 Hz로 실행한다</a:t>
             </a:r>
           </a:p>
         </p:txBody>
@@ -17043,7 +17043,7 @@
                 <a:ea typeface="Malgun Gothic"/>
                 <a:cs typeface="Malgun Gothic"/>
               </a:rPr>
-              <a:t> Planner D와 같은 구조를 휴머노이드 규모로 키웠다. 빼기 실험에서 RTC(24.5 %), RL 후학습(26.4 %), 퍼텐셜장 손실(20.1 %)을 빼면 무접촉 성공이 무너졌다(전체 70.3 %).</a:t>
+              <a:t> Planner D와 같은 구조를 휴머노이드 규모로 키웠다. ablation에서 RTC(24.5 %), RL 후학습(26.4 %), 퍼텐셜장 손실(20.1 %)을 빼면 무접촉 성공이 무너졌다(전체 70.3 %).</a:t>
             </a:r>
           </a:p>
         </p:txBody>
@@ -17714,7 +17714,7 @@
         <p:spPr>
           <a:xfrm>
             <a:off x="927100" y="3604617"/>
-            <a:ext cx="705644" cy="241300"/>
+            <a:ext cx="1155502" cy="241300"/>
           </a:xfrm>
           <a:prstGeom prst="roundRect">
             <a:avLst>
@@ -17745,7 +17745,7 @@
         <p:spPr>
           <a:xfrm>
             <a:off x="1016000" y="3630017"/>
-            <a:ext cx="569079" cy="288925"/>
+            <a:ext cx="1032433" cy="288925"/>
           </a:xfrm>
           <a:prstGeom prst="rect">
             <a:avLst/>
@@ -17772,7 +17772,7 @@
                 <a:ea typeface="Malgun Gothic"/>
                 <a:cs typeface="Malgun Gothic"/>
               </a:rPr>
-              <a:t>교사–학생</a:t>
+              <a:t>teacher–student</a:t>
             </a:r>
           </a:p>
         </p:txBody>
@@ -17854,7 +17854,7 @@
                 <a:ea typeface="Malgun Gothic"/>
                 <a:cs typeface="Malgun Gothic"/>
               </a:rPr>
-              <a:t>교사는 11 × 17 높이 지도를 보고 PPO로 배운다. 학생은 평지 기준 동작 창(120 ms 앞), 고유감각, 깊이 한 장만 보고 DAgger로 따라 한다.</a:t>
+              <a:t>교사는 11 × 17 높이 지도를 보고 PPO로 배운다. 학생은 평지 기준 동작 창(120 ms 앞), proprioception, 깊이 한 장만 보고 DAgger로 모방한다.</a:t>
             </a:r>
           </a:p>
         </p:txBody>
@@ -17952,7 +17952,7 @@
                 <a:ea typeface="Malgun Gothic"/>
                 <a:cs typeface="Malgun Gothic"/>
               </a:rPr>
-              <a:t>NEXUS (Fig. 2): (a) 접촉 기반 동작 적응 (b) 특권 PPO 교사와 DAgger 학생 (c) 깊이 영상 원격조종 배포 — arXiv:2609.39000</a:t>
+              <a:t>NEXUS (Fig. 2): (a) 접촉 기반 동작 적응 (b) privileged PPO 교사와 DAgger 학생 (c) 깊이 영상 원격조종 배포 — arXiv:2609.39000</a:t>
             </a:r>
           </a:p>
         </p:txBody>
@@ -18501,7 +18501,7 @@
         <p:spPr>
           <a:xfrm>
             <a:off x="927100" y="4644628"/>
-            <a:ext cx="964902" cy="241300"/>
+            <a:ext cx="1222077" cy="241300"/>
           </a:xfrm>
           <a:prstGeom prst="roundRect">
             <a:avLst>
@@ -18532,7 +18532,7 @@
         <p:spPr>
           <a:xfrm>
             <a:off x="1016000" y="4670028"/>
-            <a:ext cx="836115" cy="288925"/>
+            <a:ext cx="1101006" cy="288925"/>
           </a:xfrm>
           <a:prstGeom prst="rect">
             <a:avLst/>
@@ -18559,7 +18559,7 @@
                 <a:ea typeface="Malgun Gothic"/>
                 <a:cs typeface="Malgun Gothic"/>
               </a:rPr>
-              <a:t>절제 · 8,300회</a:t>
+              <a:t>ablation · 8,300회</a:t>
             </a:r>
           </a:p>
         </p:txBody>
@@ -18600,7 +18600,7 @@
                 <a:ea typeface="Malgun Gothic"/>
                 <a:cs typeface="Malgun Gothic"/>
               </a:rPr>
-              <a:t>보지 않은 이동 클립 415개에서 91.07 %다. 시각을 빼면 87.77 %, 교사–학생을 빼면 90.96 %다. 시각의 값은 어려운 두 레벨에서 커진다(78.10 대 70.51 %).</a:t>
+              <a:t>학습에 없던 이동 클립 415개에서 91.07 %다. 시각 입력을 빼면 87.77 %, teacher–student를 빼면 90.96 %다. 시각 입력의 효과는 어려운 두 레벨에서 커진다(78.10 대 70.51 %).</a:t>
             </a:r>
           </a:p>
         </p:txBody>
@@ -18970,7 +18970,7 @@
                 <a:ea typeface="Malgun Gothic"/>
                 <a:cs typeface="Malgun Gothic"/>
               </a:rPr>
-              <a:t>학습 지형보다 높은 계단과 가파른 경사를 미세 조정 없이 지났다</a:t>
+              <a:t>학습 지형보다 높은 계단과 가파른 경사를 fine-tuning 없이 지났다</a:t>
             </a:r>
           </a:p>
         </p:txBody>
@@ -19068,7 +19068,7 @@
                 <a:ea typeface="Malgun Gothic"/>
                 <a:cs typeface="Malgun Gothic"/>
               </a:rPr>
-              <a:t>NEXUS 실물 배포(논문 Fig. 1): 운영자는 평지에서 움직이고, G1은 계단·60 cm 대·풀밭 경사 위에서 같은 동작을 한다 — nexus-humanoid.github.io</a:t>
+              <a:t>NEXUS 실물 배포(논문 Fig. 1): 운영자는 평지에서 움직이고, G1은 계단·60 cm 단·풀밭 경사 위에서 같은 동작을 한다 — nexus-humanoid.github.io</a:t>
             </a:r>
           </a:p>
         </p:txBody>
@@ -19330,7 +19330,7 @@
                 <a:ea typeface="Malgun Gothic"/>
                 <a:cs typeface="Malgun Gothic"/>
               </a:rPr>
-              <a:t>학습 지형은 10 cm 계단과 약 16.7° 경사뿐이었다. 실물에서는 15 cm 계단을 이어 오르고, 약 30° 풀밭 경사를 지나고, 60 cm 대에서 내려왔다. 60 cm 대와 옆돌기의 일부 시도에서 넘어졌다.</a:t>
+              <a:t>학습 지형은 10 cm 계단과 약 16.7° 경사뿐이었다. 실물에서는 15 cm 계단을 이어 오르고, 약 30° 풀밭 경사를 지나고, 60 cm 단에서 내려왔다. 60 cm 단과 옆돌기의 일부 시도에서 넘어졌다.</a:t>
             </a:r>
           </a:p>
         </p:txBody>
@@ -19895,7 +19895,7 @@
         </p:nvGraphicFramePr>
         <p:xfrm>
           <a:off x="711200" y="1361678"/>
-          <a:ext cx="10769601" cy="1872933"/>
+          <a:ext cx="10769600" cy="1872933"/>
         </p:xfrm>
         <a:graphic>
           <a:graphicData uri="http://schemas.openxmlformats.org/drawingml/2006/table">
@@ -19904,11 +19904,11 @@
                 <a:tableStyleId>{5C22544A-7EE6-4342-B048-85BDC9FD1C3A}</a:tableStyleId>
               </a:tblPr>
               <a:tblGrid>
-                <a:gridCol w="721122"/>
-                <a:gridCol w="1321991"/>
-                <a:gridCol w="3610273"/>
-                <a:gridCol w="2335113"/>
-                <a:gridCol w="2781102"/>
+                <a:gridCol w="808038"/>
+                <a:gridCol w="1316831"/>
+                <a:gridCol w="3607296"/>
+                <a:gridCol w="2298700"/>
+                <a:gridCol w="2738735"/>
               </a:tblGrid>
               <a:tr h="474980">
                 <a:tc>
@@ -20217,7 +20217,7 @@
                           <a:ea typeface="Malgun Gothic"/>
                           <a:cs typeface="Malgun Gothic"/>
                         </a:rPr>
-                        <a:t>잠재 명령의 크기만 안전 구 반지름 안으로 줄인다</a:t>
+                        <a:t>latent 명령의 크기만 안전 구 반지름 안으로 줄인다</a:t>
                       </a:r>
                     </a:p>
                   </a:txBody>
@@ -20291,7 +20291,7 @@
                           <a:ea typeface="Malgun Gothic"/>
                           <a:cs typeface="Malgun Gothic"/>
                         </a:rPr>
-                        <a:t>공통 잠재</a:t>
+                        <a:t>공통 latent</a:t>
                       </a:r>
                     </a:p>
                   </a:txBody>
@@ -20339,7 +20339,7 @@
                           <a:ea typeface="Malgun Gothic"/>
                           <a:cs typeface="Malgun Gothic"/>
                         </a:rPr>
-                        <a:t>따로 배운 기술 정책을 BFM 잠재 명령으로 옮기고 flow Planner 하나를 둔다</a:t>
+                        <a:t>따로 배운 기술 정책을 BFM latent 명령으로 옮기고 flow Planner 하나를 둔다</a:t>
                       </a:r>
                     </a:p>
                   </a:txBody>
@@ -20524,7 +20524,7 @@
                 <a:ea typeface="Malgun Gothic"/>
                 <a:cs typeface="Malgun Gothic"/>
               </a:rPr>
-              <a:t>CMP의 투영은 잠재 명령의 방향은 두고 크기만 안전 구 반지름 안으로 줄인다. 목표를 버리지 않고 할 수 있는 만큼 다가간다.</a:t>
+              <a:t>CMP의 투영은 latent 명령의 방향은 두고 크기만 안전 구 반지름 안으로 줄인다. 목표를 버리지 않고 할 수 있는 만큼 다가간다.</a:t>
             </a:r>
           </a:p>
         </p:txBody>
@@ -20882,7 +20882,7 @@
                 <a:ea typeface="Malgun Gothic"/>
                 <a:cs typeface="Malgun Gothic"/>
               </a:rPr>
-              <a:t>임무 VLM, 운동 층, 전신 제어기 Reflex의 세 층을 RL로 다듬는다</a:t>
+              <a:t>임무 VLM, 운동 층, 전신 제어기 Reflex의 세 층 모두에 RL을 쓴다</a:t>
             </a:r>
           </a:p>
         </p:txBody>
@@ -21521,7 +21521,7 @@
                 <a:ea typeface="Malgun Gothic"/>
                 <a:cs typeface="Malgun Gothic"/>
               </a:rPr>
-              <a:t>RL 기술은 대부분 Isaac Lab에서 표적 도메인 무작위화로 배웠다. 상자를 도구로 여는 동작은 원격조종 데이터의 VLA다.</a:t>
+              <a:t>RL 기술은 대부분 Isaac Lab에서 표적(targeted) 도메인 랜덤화로 학습했다. 상자를 도구로 여는 동작은 원격조종 데이터의 VLA다.</a:t>
             </a:r>
           </a:p>
         </p:txBody>
@@ -21824,7 +21824,7 @@
                 <a:ea typeface="Malgun Gothic"/>
                 <a:cs typeface="Malgun Gothic"/>
               </a:rPr>
-              <a:t>힘을 아는 전신 제어기다. 로봇마다 적은 수고로 학습해 배포한다고 적었고 구조는 밝히지 않았다.</a:t>
+              <a:t>힘을 고려하는 전신 제어기다. 로봇마다 적은 수고로 학습해 배포한다고 적었고 구조는 밝히지 않았다.</a:t>
             </a:r>
           </a:p>
         </p:txBody>
@@ -22940,7 +22940,7 @@
                 <a:ea typeface="Malgun Gothic"/>
                 <a:cs typeface="Malgun Gothic"/>
               </a:rPr>
-              <a:t>조향 바퀴 네 개 바닥의 반휴머노이드가 한 시간짜리 작업을 끊지 않는다</a:t>
+              <a:t>조향 바퀴 네 개 베이스의 반휴머노이드가 한 시간짜리 작업을 끊지 않는다</a:t>
             </a:r>
           </a:p>
         </p:txBody>
@@ -23202,7 +23202,7 @@
                 <a:ea typeface="Malgun Gothic"/>
                 <a:cs typeface="Malgun Gothic"/>
               </a:rPr>
-              <a:t>travplan과 바닥이 같다</a:t>
+              <a:t>travplan과 베이스가 같다</a:t>
             </a:r>
           </a:p>
         </p:txBody>
@@ -23243,7 +23243,7 @@
                 <a:ea typeface="Malgun Gothic"/>
                 <a:cs typeface="Malgun Gothic"/>
               </a:rPr>
-              <a:t>허리 위는 사람 모양이고, 접히는 하체 아래에 조향 바퀴 네 개 바닥과 7자유도 팔 둘을 얹었다.</a:t>
+              <a:t>허리 위는 사람 모양이고, 접히는 하체 아래에 조향 바퀴 네 개 베이스를 두고 7자유도 팔 둘을 얹었다.</a:t>
             </a:r>
           </a:p>
         </p:txBody>
@@ -23932,7 +23932,7 @@
                 <a:ea typeface="Malgun Gothic"/>
                 <a:cs typeface="Malgun Gothic"/>
               </a:rPr>
-              <a:t> 스워브 바닥 위의 학습 정책이 실제 작업까지 간 예다. 세탁 한 바퀴 79단계에서 단계 신뢰도 95 %면 완주 1.7 %라는 계산이, 긴 배달 경로에도 그대로 적용된다.</a:t>
+              <a:t> 스워브 베이스 위의 학습 정책이 실제 작업까지 간 예다. 세탁 한 사이클 79단계에서 단계 신뢰도 95 %면 완주 1.7 %라는 계산이, 긴 배달 경로에도 그대로 적용된다.</a:t>
             </a:r>
           </a:p>
         </p:txBody>
@@ -24068,7 +24068,7 @@
         </p:nvSpPr>
         <p:spPr>
           <a:xfrm>
-            <a:off x="812800" y="2319338"/>
+            <a:off x="812800" y="2009477"/>
             <a:ext cx="10908792" cy="312738"/>
           </a:xfrm>
           <a:prstGeom prst="rect">
@@ -24109,8 +24109,8 @@
         </p:nvSpPr>
         <p:spPr>
           <a:xfrm>
-            <a:off x="812800" y="2757488"/>
-            <a:ext cx="10908792" cy="1600101"/>
+            <a:off x="812800" y="2447627"/>
+            <a:ext cx="10908792" cy="2374751"/>
           </a:xfrm>
           <a:prstGeom prst="rect">
             <a:avLst/>
@@ -24137,7 +24137,7 @@
                 <a:ea typeface="Malgun Gothic"/>
                 <a:cs typeface="Malgun Gothic"/>
               </a:rPr>
-              <a:t>공통점은 교사–학생 증류와 층 나누기,</a:t>
+              <a:t>공통점은 teacher–student distillation과 층 나누기,</a:t>
             </a:r>
           </a:p>
           <a:p>
@@ -24168,7 +24168,7 @@
         </p:nvSpPr>
         <p:spPr>
           <a:xfrm>
-            <a:off x="812800" y="4225528"/>
+            <a:off x="812800" y="4535388"/>
             <a:ext cx="10908792" cy="442094"/>
           </a:xfrm>
           <a:prstGeom prst="rect">
@@ -24196,7 +24196,7 @@
                 <a:ea typeface="Malgun Gothic"/>
                 <a:cs typeface="Malgun Gothic"/>
               </a:rPr>
-              <a:t>두 표에 열네 연구를 놓고, 무엇이 같고 무엇이 다른지 본다.</a:t>
+              <a:t>두 표에 열네 연구를 놓고, 무엇이 같고 무엇이 다른지 살펴본다.</a:t>
             </a:r>
           </a:p>
         </p:txBody>
@@ -25239,7 +25239,7 @@
         </p:nvGraphicFramePr>
         <p:xfrm>
           <a:off x="711200" y="1361678"/>
-          <a:ext cx="10769599" cy="2283141"/>
+          <a:ext cx="10769600" cy="2283141"/>
         </p:xfrm>
         <a:graphic>
           <a:graphicData uri="http://schemas.openxmlformats.org/drawingml/2006/table">
@@ -25248,11 +25248,11 @@
                 <a:tableStyleId>{5C22544A-7EE6-4342-B048-85BDC9FD1C3A}</a:tableStyleId>
               </a:tblPr>
               <a:tblGrid>
-                <a:gridCol w="1632148"/>
-                <a:gridCol w="1403747"/>
-                <a:gridCol w="2577306"/>
-                <a:gridCol w="1618853"/>
-                <a:gridCol w="3537545"/>
+                <a:gridCol w="1607641"/>
+                <a:gridCol w="1382613"/>
+                <a:gridCol w="2700536"/>
+                <a:gridCol w="1594545"/>
+                <a:gridCol w="3484265"/>
               </a:tblGrid>
               <a:tr h="292814">
                 <a:tc>
@@ -25927,7 +25927,7 @@
                           <a:ea typeface="Malgun Gothic"/>
                           <a:cs typeface="Malgun Gothic"/>
                         </a:rPr>
-                        <a:t>높이 지도 102값(발 디딤 둘레)</a:t>
+                        <a:t>높이 지도 102값(foothold 둘레)</a:t>
                       </a:r>
                     </a:p>
                   </a:txBody>
@@ -25975,7 +25975,7 @@
                           <a:ea typeface="Malgun Gothic"/>
                           <a:cs typeface="Malgun Gothic"/>
                         </a:rPr>
-                        <a:t>드문 디딤 74.2 %(AME2 71.7 %)</a:t>
+                        <a:t>드문 foothold 74.2 %(AME2 71.7 %)</a:t>
                       </a:r>
                     </a:p>
                   </a:txBody>
@@ -26097,7 +26097,7 @@
                           <a:ea typeface="Malgun Gothic"/>
                           <a:cs typeface="Malgun Gothic"/>
                         </a:rPr>
-                        <a:t>시뮬 안전 디딤 거의 100 %</a:t>
+                        <a:t>시뮬 안전 foothold 거의 100 %</a:t>
                       </a:r>
                     </a:p>
                   </a:txBody>
@@ -26942,7 +26942,7 @@
                           <a:ea typeface="Malgun Gothic"/>
                           <a:cs typeface="Malgun Gothic"/>
                         </a:rPr>
-                        <a:t>잠재 명령 투영</a:t>
+                        <a:t>latent 명령 투영</a:t>
                       </a:r>
                     </a:p>
                   </a:txBody>
@@ -27064,7 +27064,7 @@
                           <a:ea typeface="Malgun Gothic"/>
                           <a:cs typeface="Malgun Gothic"/>
                         </a:rPr>
-                        <a:t>BFM 잠재 + flow Planner</a:t>
+                        <a:t>BFM latent + flow Planner</a:t>
                       </a:r>
                     </a:p>
                   </a:txBody>
@@ -27260,7 +27260,7 @@
                           <a:ea typeface="Malgun Gothic"/>
                           <a:cs typeface="Malgun Gothic"/>
                         </a:rPr>
-                        <a:t>스워브 바닥 반휴머노이드</a:t>
+                        <a:t>스워브 베이스 반휴머노이드</a:t>
                       </a:r>
                     </a:p>
                   </a:txBody>
@@ -27712,7 +27712,7 @@
                 <a:ea typeface="Malgun Gothic"/>
                 <a:cs typeface="Malgun Gothic"/>
               </a:rPr>
-              <a:t>특권 교사 → 배포 관측 학생</a:t>
+              <a:t>privileged 교사 → 배포 관측 학생</a:t>
             </a:r>
           </a:p>
         </p:txBody>
@@ -27753,7 +27753,7 @@
                 <a:ea typeface="Malgun Gothic"/>
                 <a:cs typeface="Malgun Gothic"/>
               </a:rPr>
-              <a:t>TAME-Nav, PHP, NEXUS, 지각 보행 world model이 모두 정답 상태를 보는 교사를 배포 관측만 보는 학생으로 증류한다.</a:t>
+              <a:t>TAME-Nav, PHP, NEXUS, 인식 보행 world model이 모두 정답 상태를 보는 교사를 배포 관측만 보는 학생으로 distillation한다.</a:t>
             </a:r>
           </a:p>
         </p:txBody>
@@ -28745,7 +28745,7 @@
                 <a:ea typeface="Malgun Gothic"/>
                 <a:cs typeface="Malgun Gothic"/>
               </a:rPr>
-              <a:t> 교사–학생은 L0 참값 TravMap 교사와 L1 belief 학생으로 바로 옮긴다(B.16.7의 1번). 검증의 깊이를 구분해 읽는 것은 travplan의 짝 비교 원칙과 같다.</a:t>
+              <a:t> teacher–student는 L0 참값 TravMap 교사와 L1 belief 학생으로 바로 옮긴다(B.16.7의 1번). 검증의 깊이를 구분해 읽는 것은 travplan의 짝 비교 원칙과 같다.</a:t>
             </a:r>
           </a:p>
         </p:txBody>
@@ -28912,7 +28912,7 @@
                 <a:ea typeface="Malgun Gothic"/>
                 <a:cs typeface="Malgun Gothic"/>
               </a:rPr>
-              <a:t>무엇을 넘기는지, 해낼 수 있는지, 어디를 보는지를 travplan의 코드와 실험에 대 본다.</a:t>
+              <a:t>무엇을 넘기는지, 해낼 수 있는지, 어디를 보는지를 travplan의 코드와 실험에 비추어 본다.</a:t>
             </a:r>
           </a:p>
         </p:txBody>
@@ -29020,7 +29020,7 @@
                 <a:ea typeface="Malgun Gothic"/>
                 <a:cs typeface="Malgun Gothic"/>
               </a:rPr>
-              <a:t>세 질문을 travplan의 코드와 실험에 대면</a:t>
+              <a:t>세 질문을 travplan의 코드와 실험에 비추면</a:t>
             </a:r>
           </a:p>
         </p:txBody>
@@ -29951,7 +29951,7 @@
                 <a:ea typeface="Malgun Gothic"/>
                 <a:cs typeface="Malgun Gothic"/>
               </a:rPr>
-              <a:t>Watch Your Step의 Naive와 같은 모양이다. 경로 앞 네 점 둘레 조각으로 바꿀 수 있다.</a:t>
+              <a:t>Watch Your Step의 Naive와 같은 모양이다. 경로 앞 네 점 둘레 패치로 바꿀 수 있다.</a:t>
             </a:r>
           </a:p>
         </p:txBody>
@@ -30181,10 +30181,10 @@
                 <a:tableStyleId>{5C22544A-7EE6-4342-B048-85BDC9FD1C3A}</a:tableStyleId>
               </a:tblPr>
               <a:tblGrid>
-                <a:gridCol w="434578"/>
-                <a:gridCol w="2936677"/>
-                <a:gridCol w="4063504"/>
-                <a:gridCol w="3334841"/>
+                <a:gridCol w="428625"/>
+                <a:gridCol w="2829917"/>
+                <a:gridCol w="4305102"/>
+                <a:gridCol w="3205956"/>
               </a:tblGrid>
               <a:tr h="474980">
                 <a:tc>
@@ -30347,7 +30347,7 @@
                           <a:ea typeface="Malgun Gothic"/>
                           <a:cs typeface="Malgun Gothic"/>
                         </a:rPr>
-                        <a:t>TAME-Nav·NEXUS의 교사–학생, Resilient Legged Local Navigation</a:t>
+                        <a:t>TAME-Nav·NEXUS의 teacher–student, Resilient Legged Local Navigation</a:t>
                       </a:r>
                     </a:p>
                   </a:txBody>
@@ -30519,7 +30519,7 @@
                           <a:ea typeface="Malgun Gothic"/>
                           <a:cs typeface="Malgun Gothic"/>
                         </a:rPr>
-                        <a:t>Controller가 실행해 낸 표본을 시연에 더한다</a:t>
+                        <a:t>Controller가 실행해 낸 샘플을 시연에 더한다</a:t>
                       </a:r>
                     </a:p>
                   </a:txBody>
@@ -30617,7 +30617,7 @@
                           <a:ea typeface="Malgun Gothic"/>
                           <a:cs typeface="Malgun Gothic"/>
                         </a:rPr>
-                        <a:t>지형 표집을 실패율로 정한다</a:t>
+                        <a:t>지형 샘플링을 실패율로 정한다</a:t>
                       </a:r>
                     </a:p>
                   </a:txBody>
@@ -30641,7 +30641,7 @@
                           <a:ea typeface="Malgun Gothic"/>
                           <a:cs typeface="Malgun Gothic"/>
                         </a:rPr>
-                        <a:t>NEXUS의 실패 구간 표집, PHP</a:t>
+                        <a:t>NEXUS의 실패 구간 샘플링, PHP</a:t>
                       </a:r>
                     </a:p>
                   </a:txBody>
@@ -31142,7 +31142,7 @@
         <p:spPr>
           <a:xfrm>
             <a:off x="927100" y="1507728"/>
-            <a:ext cx="728266" cy="241300"/>
+            <a:ext cx="841573" cy="241300"/>
           </a:xfrm>
           <a:prstGeom prst="roundRect">
             <a:avLst>
@@ -31173,7 +31173,7 @@
         <p:spPr>
           <a:xfrm>
             <a:off x="1016000" y="1533128"/>
-            <a:ext cx="592380" cy="288925"/>
+            <a:ext cx="709087" cy="288925"/>
           </a:xfrm>
           <a:prstGeom prst="rect">
             <a:avLst/>
@@ -31200,7 +31200,7 @@
                 <a:ea typeface="Malgun Gothic"/>
                 <a:cs typeface="Malgun Gothic"/>
               </a:rPr>
-              <a:t>1 · 가장 쌈</a:t>
+              <a:t>1 · 가장 싸다</a:t>
             </a:r>
           </a:p>
         </p:txBody>
@@ -31241,7 +31241,7 @@
                 <a:ea typeface="Malgun Gothic"/>
                 <a:cs typeface="Malgun Gothic"/>
               </a:rPr>
-              <a:t>TinyPolicy 관측을 경로 둘레 조각으로</a:t>
+              <a:t>TinyPolicy 관측을 경로 둘레 패치로</a:t>
             </a:r>
           </a:p>
         </p:txBody>
@@ -31621,11 +31621,11 @@
         <p:spPr>
           <a:xfrm>
             <a:off x="711200" y="2872879"/>
-            <a:ext cx="5308600" cy="1358801"/>
+            <a:ext cx="5308600" cy="1579761"/>
           </a:xfrm>
           <a:prstGeom prst="roundRect">
             <a:avLst>
-              <a:gd name="adj" fmla="val 5607"/>
+              <a:gd name="adj" fmla="val 4823"/>
             </a:avLst>
           </a:prstGeom>
           <a:solidFill>
@@ -31681,7 +31681,7 @@
         <p:spPr>
           <a:xfrm>
             <a:off x="6013450" y="2872879"/>
-            <a:ext cx="6350" cy="1358801"/>
+            <a:ext cx="6350" cy="1579761"/>
           </a:xfrm>
           <a:prstGeom prst="rect">
             <a:avLst/>
@@ -31709,7 +31709,7 @@
         </p:nvSpPr>
         <p:spPr>
           <a:xfrm>
-            <a:off x="711200" y="4225330"/>
+            <a:off x="711200" y="4446290"/>
             <a:ext cx="5308600" cy="6350"/>
           </a:xfrm>
           <a:prstGeom prst="rect">
@@ -31739,7 +31739,7 @@
         <p:spPr>
           <a:xfrm>
             <a:off x="711200" y="2872879"/>
-            <a:ext cx="50800" cy="1358801"/>
+            <a:ext cx="50800" cy="1579761"/>
           </a:xfrm>
           <a:prstGeom prst="roundRect">
             <a:avLst>
@@ -31883,7 +31883,7 @@
         <p:spPr>
           <a:xfrm>
             <a:off x="927100" y="3643709"/>
-            <a:ext cx="5094288" cy="603200"/>
+            <a:ext cx="5094288" cy="879401"/>
           </a:xfrm>
           <a:prstGeom prst="rect">
             <a:avLst/>
@@ -31910,7 +31910,7 @@
                 <a:ea typeface="Malgun Gothic"/>
                 <a:cs typeface="Malgun Gothic"/>
               </a:rPr>
-              <a:t>MPPI가 고른 twist를 모듈 수준의 실행 가능 집합으로 옮긴다. 볼록이 아니라 현재 조향각 둘레에서 선형화한다. 조향 한계(TP-0163)가 정해진 뒤에 한다.</a:t>
+              <a:t>MPPI가 고른 twist를 모듈 수준의 실행 가능 집합으로 옮긴다. 실행 가능 집합이 볼록이 아니라 현재 조향각 둘레에서 선형화한다. 조향 한계(TP-0163)가 정해진 뒤에 한다.</a:t>
             </a:r>
           </a:p>
         </p:txBody>
@@ -31924,11 +31924,11 @@
         <p:spPr>
           <a:xfrm>
             <a:off x="6172200" y="2872879"/>
-            <a:ext cx="5308600" cy="1358801"/>
+            <a:ext cx="5308600" cy="1579761"/>
           </a:xfrm>
           <a:prstGeom prst="roundRect">
             <a:avLst>
-              <a:gd name="adj" fmla="val 5607"/>
+              <a:gd name="adj" fmla="val 4823"/>
             </a:avLst>
           </a:prstGeom>
           <a:solidFill>
@@ -31984,7 +31984,7 @@
         <p:spPr>
           <a:xfrm>
             <a:off x="11474450" y="2872879"/>
-            <a:ext cx="6350" cy="1358801"/>
+            <a:ext cx="6350" cy="1579761"/>
           </a:xfrm>
           <a:prstGeom prst="rect">
             <a:avLst/>
@@ -32012,7 +32012,7 @@
         </p:nvSpPr>
         <p:spPr>
           <a:xfrm>
-            <a:off x="6172200" y="4225330"/>
+            <a:off x="6172200" y="4446290"/>
             <a:ext cx="5308600" cy="6350"/>
           </a:xfrm>
           <a:prstGeom prst="rect">
@@ -32042,7 +32042,7 @@
         <p:spPr>
           <a:xfrm>
             <a:off x="6172200" y="2872879"/>
-            <a:ext cx="50800" cy="1358801"/>
+            <a:ext cx="50800" cy="1579761"/>
           </a:xfrm>
           <a:prstGeom prst="roundRect">
             <a:avLst>
@@ -32226,7 +32226,7 @@
         </p:nvSpPr>
         <p:spPr>
           <a:xfrm>
-            <a:off x="711200" y="4409480"/>
+            <a:off x="711200" y="4630440"/>
             <a:ext cx="10769600" cy="502543"/>
           </a:xfrm>
           <a:prstGeom prst="roundRect">
@@ -32257,7 +32257,7 @@
         </p:nvSpPr>
         <p:spPr>
           <a:xfrm>
-            <a:off x="889000" y="4536480"/>
+            <a:off x="889000" y="4757440"/>
             <a:ext cx="10751820" cy="361479"/>
           </a:xfrm>
           <a:prstGeom prst="rect">
@@ -32296,7 +32296,7 @@
                 <a:ea typeface="Malgun Gothic"/>
                 <a:cs typeface="Malgun Gothic"/>
               </a:rPr>
-              <a:t> 각 팔 seed 0–9 × rng-offset 3판을 paired_success.py로 짝 비교하고, 치명이 하나라도 늘면 채택하지 않는다.</a:t>
+              <a:t> 기준과 변경 각각을 seed 0–9 × rng-offset 3판으로 돌려 paired_success.py로 짝 비교하고, 치명이 하나라도 늘면 채택하지 않는다.</a:t>
             </a:r>
           </a:p>
         </p:txBody>
@@ -34330,10 +34330,10 @@
                 <a:tableStyleId>{5C22544A-7EE6-4342-B048-85BDC9FD1C3A}</a:tableStyleId>
               </a:tblPr>
               <a:tblGrid>
-                <a:gridCol w="2170609"/>
-                <a:gridCol w="2464792"/>
-                <a:gridCol w="2925762"/>
-                <a:gridCol w="3208437"/>
+                <a:gridCol w="2425303"/>
+                <a:gridCol w="2391767"/>
+                <a:gridCol w="2839145"/>
+                <a:gridCol w="3113385"/>
               </a:tblGrid>
               <a:tr h="285477">
                 <a:tc>
@@ -34649,7 +34649,7 @@
                           <a:ea typeface="Malgun Gothic"/>
                           <a:cs typeface="Malgun Gothic"/>
                         </a:rPr>
-                        <a:t> 전역 내비, 발 디딤</a:t>
+                        <a:t> 전역 내비, foothold</a:t>
                       </a:r>
                     </a:p>
                   </a:txBody>
@@ -35092,7 +35092,7 @@
                           <a:ea typeface="Malgun Gothic"/>
                           <a:cs typeface="Malgun Gothic"/>
                         </a:rPr>
-                        <a:t>종단간 학습 플래너</a:t>
+                        <a:t>end-to-end 학습 플래너</a:t>
                       </a:r>
                     </a:p>
                   </a:txBody>
@@ -35421,7 +35421,7 @@
                 <a:ea typeface="Malgun Gothic"/>
                 <a:cs typeface="Malgun Gothic"/>
               </a:rPr>
-              <a:t> 학습 Planner D는 '종단간 학습 플래너'(부상), MPPI는 '샘플링 MPC'(정착) 칸이다. 다리 로봇에서 대세인 RL은 travplan에서는 Planner D 후학습(TP-0066)에만 쓴다.</a:t>
+              <a:t> 학습 Planner D는 'end-to-end 학습 플래너'(부상), MPPI는 '샘플링 MPC'(정착)에 해당한다. 다리 로봇에서 대세인 RL은 travplan에서는 Planner D 후학습(TP-0066)에만 쓴다.</a:t>
             </a:r>
           </a:p>
         </p:txBody>
@@ -36395,7 +36395,7 @@
                           <a:ea typeface="Malgun Gothic"/>
                           <a:cs typeface="Malgun Gothic"/>
                         </a:rPr>
-                        <a:t>얼린 보행 정책과 안전 필터</a:t>
+                        <a:t>고정한(frozen) 보행 정책과 안전 필터</a:t>
                       </a:r>
                     </a:p>
                   </a:txBody>
@@ -37496,7 +37496,7 @@
                 <a:ea typeface="Malgun Gothic"/>
                 <a:cs typeface="Malgun Gothic"/>
               </a:rPr>
-              <a:t>장애물 높이 문턱 기본 0.05 m(실내 0.015–0.02, 실외 0.1–0.15 m), 로봇 치수, 바퀴 종류다. 걸음새 제어는 스택에 없다.</a:t>
+              <a:t>장애물 높이 임계값 기본 0.05 m(실내 0.015–0.02, 실외 0.1–0.15 m), 로봇 치수, 바퀴 종류다. gait 제어는 스택에 없다.</a:t>
             </a:r>
           </a:p>
         </p:txBody>
